--- a/talks/devops-hackathon-final/pitch/TheAgentOrg-Final.pptx
+++ b/talks/devops-hackathon-final/pitch/TheAgentOrg-Final.pptx
@@ -21233,7 +21233,7 @@
                 </a:solidFill>
                 <a:latin typeface="Helvetica Neue"/>
               </a:rPr>
-              <a:t>2171</a:t>
+              <a:t>2172</a:t>
             </a:r>
           </a:p>
         </p:txBody>
@@ -21421,7 +21421,7 @@
                 </a:solidFill>
                 <a:latin typeface="Helvetica Neue"/>
               </a:rPr>
-              <a:t>v52</a:t>
+              <a:t>v54</a:t>
             </a:r>
           </a:p>
         </p:txBody>

--- a/talks/devops-hackathon-final/pitch/TheAgentOrg-Final.pptx
+++ b/talks/devops-hackathon-final/pitch/TheAgentOrg-Final.pptx
@@ -121,6 +121,1624 @@
     </a:lvl9pPr>
   </p:defaultTextStyle>
 </p:presentation>
+</file>
+
+<file path=ppt/notesMasters/notesMaster1.xml><?xml version="1.0" encoding="utf-8"?>
+<p:notesMaster xmlns:a="http://schemas.openxmlformats.org/drawingml/2006/main" xmlns:p="http://schemas.openxmlformats.org/presentationml/2006/main" xmlns:r="http://schemas.openxmlformats.org/officeDocument/2006/relationships">
+  <p:cSld>
+    <p:bg>
+      <p:bgRef idx="1001">
+        <a:schemeClr val="bg1"/>
+      </p:bgRef>
+    </p:bg>
+    <p:spTree>
+      <p:nvGrpSpPr>
+        <p:cNvPr id="1" name=""/>
+        <p:cNvGrpSpPr/>
+        <p:nvPr/>
+      </p:nvGrpSpPr>
+      <p:grpSpPr>
+        <a:xfrm>
+          <a:off x="0" y="0"/>
+          <a:ext cx="0" cy="0"/>
+          <a:chOff x="0" y="0"/>
+          <a:chExt cx="0" cy="0"/>
+        </a:xfrm>
+      </p:grpSpPr>
+      <p:sp>
+        <p:nvSpPr>
+          <p:cNvPr id="2" name="Header Placeholder 1"/>
+          <p:cNvSpPr>
+            <a:spLocks noGrp="1"/>
+          </p:cNvSpPr>
+          <p:nvPr>
+            <p:ph type="hdr" sz="quarter"/>
+          </p:nvPr>
+        </p:nvSpPr>
+        <p:spPr>
+          <a:xfrm>
+            <a:off x="0" y="0"/>
+            <a:ext cx="2971800" cy="457200"/>
+          </a:xfrm>
+          <a:prstGeom prst="rect">
+            <a:avLst/>
+          </a:prstGeom>
+        </p:spPr>
+        <p:txBody>
+          <a:bodyPr vert="horz" lIns="91440" tIns="45720" rIns="91440" bIns="45720" rtlCol="0"/>
+          <a:lstStyle>
+            <a:lvl1pPr algn="l">
+              <a:defRPr sz="1200"/>
+            </a:lvl1pPr>
+          </a:lstStyle>
+          <a:p>
+            <a:endParaRPr lang="en-US"/>
+          </a:p>
+        </p:txBody>
+      </p:sp>
+      <p:sp>
+        <p:nvSpPr>
+          <p:cNvPr id="3" name="Date Placeholder 2"/>
+          <p:cNvSpPr>
+            <a:spLocks noGrp="1"/>
+          </p:cNvSpPr>
+          <p:nvPr>
+            <p:ph type="dt" idx="1"/>
+          </p:nvPr>
+        </p:nvSpPr>
+        <p:spPr>
+          <a:xfrm>
+            <a:off x="3884613" y="0"/>
+            <a:ext cx="2971800" cy="457200"/>
+          </a:xfrm>
+          <a:prstGeom prst="rect">
+            <a:avLst/>
+          </a:prstGeom>
+        </p:spPr>
+        <p:txBody>
+          <a:bodyPr vert="horz" lIns="91440" tIns="45720" rIns="91440" bIns="45720" rtlCol="0"/>
+          <a:lstStyle>
+            <a:lvl1pPr algn="r">
+              <a:defRPr sz="1200"/>
+            </a:lvl1pPr>
+          </a:lstStyle>
+          <a:p>
+            <a:fld id="{0F89C1C7-3DCD-1040-A9CF-14679D8B5DDD}" type="datetimeFigureOut">
+              <a:rPr lang="en-US" smtClean="0"/>
+              <a:t>10/17/16</a:t>
+            </a:fld>
+            <a:endParaRPr lang="en-US"/>
+          </a:p>
+        </p:txBody>
+      </p:sp>
+      <p:sp>
+        <p:nvSpPr>
+          <p:cNvPr id="4" name="Slide Image Placeholder 3"/>
+          <p:cNvSpPr>
+            <a:spLocks noGrp="1" noRot="1" noChangeAspect="1"/>
+          </p:cNvSpPr>
+          <p:nvPr>
+            <p:ph type="sldImg" idx="2"/>
+          </p:nvPr>
+        </p:nvSpPr>
+        <p:spPr>
+          <a:xfrm>
+            <a:off x="1143000" y="685800"/>
+            <a:ext cx="4572000" cy="3429000"/>
+          </a:xfrm>
+          <a:prstGeom prst="rect">
+            <a:avLst/>
+          </a:prstGeom>
+          <a:noFill/>
+          <a:ln w="12700">
+            <a:solidFill>
+              <a:prstClr val="black"/>
+            </a:solidFill>
+          </a:ln>
+        </p:spPr>
+        <p:txBody>
+          <a:bodyPr vert="horz" lIns="91440" tIns="45720" rIns="91440" bIns="45720" rtlCol="0" anchor="ctr"/>
+          <a:lstStyle/>
+          <a:p>
+            <a:endParaRPr lang="en-US"/>
+          </a:p>
+        </p:txBody>
+      </p:sp>
+      <p:sp>
+        <p:nvSpPr>
+          <p:cNvPr id="5" name="Notes Placeholder 4"/>
+          <p:cNvSpPr>
+            <a:spLocks noGrp="1"/>
+          </p:cNvSpPr>
+          <p:nvPr>
+            <p:ph type="body" sz="quarter" idx="3"/>
+          </p:nvPr>
+        </p:nvSpPr>
+        <p:spPr>
+          <a:xfrm>
+            <a:off x="685800" y="4343400"/>
+            <a:ext cx="5486400" cy="4114800"/>
+          </a:xfrm>
+          <a:prstGeom prst="rect">
+            <a:avLst/>
+          </a:prstGeom>
+        </p:spPr>
+        <p:txBody>
+          <a:bodyPr vert="horz" lIns="91440" tIns="45720" rIns="91440" bIns="45720" rtlCol="0"/>
+          <a:lstStyle/>
+          <a:p>
+            <a:pPr lvl="0"/>
+            <a:r>
+              <a:rPr lang="en-US" smtClean="0"/>
+              <a:t>Click to edit Master text styles</a:t>
+            </a:r>
+          </a:p>
+          <a:p>
+            <a:pPr lvl="1"/>
+            <a:r>
+              <a:rPr lang="en-US" smtClean="0"/>
+              <a:t>Second level</a:t>
+            </a:r>
+          </a:p>
+          <a:p>
+            <a:pPr lvl="2"/>
+            <a:r>
+              <a:rPr lang="en-US" smtClean="0"/>
+              <a:t>Third level</a:t>
+            </a:r>
+          </a:p>
+          <a:p>
+            <a:pPr lvl="3"/>
+            <a:r>
+              <a:rPr lang="en-US" smtClean="0"/>
+              <a:t>Fourth level</a:t>
+            </a:r>
+          </a:p>
+          <a:p>
+            <a:pPr lvl="4"/>
+            <a:r>
+              <a:rPr lang="en-US" smtClean="0"/>
+              <a:t>Fifth level</a:t>
+            </a:r>
+            <a:endParaRPr lang="en-US"/>
+          </a:p>
+        </p:txBody>
+      </p:sp>
+      <p:sp>
+        <p:nvSpPr>
+          <p:cNvPr id="6" name="Footer Placeholder 5"/>
+          <p:cNvSpPr>
+            <a:spLocks noGrp="1"/>
+          </p:cNvSpPr>
+          <p:nvPr>
+            <p:ph type="ftr" sz="quarter" idx="4"/>
+          </p:nvPr>
+        </p:nvSpPr>
+        <p:spPr>
+          <a:xfrm>
+            <a:off x="0" y="8685213"/>
+            <a:ext cx="2971800" cy="457200"/>
+          </a:xfrm>
+          <a:prstGeom prst="rect">
+            <a:avLst/>
+          </a:prstGeom>
+        </p:spPr>
+        <p:txBody>
+          <a:bodyPr vert="horz" lIns="91440" tIns="45720" rIns="91440" bIns="45720" rtlCol="0" anchor="b"/>
+          <a:lstStyle>
+            <a:lvl1pPr algn="l">
+              <a:defRPr sz="1200"/>
+            </a:lvl1pPr>
+          </a:lstStyle>
+          <a:p>
+            <a:endParaRPr lang="en-US"/>
+          </a:p>
+        </p:txBody>
+      </p:sp>
+      <p:sp>
+        <p:nvSpPr>
+          <p:cNvPr id="7" name="Slide Number Placeholder 6"/>
+          <p:cNvSpPr>
+            <a:spLocks noGrp="1"/>
+          </p:cNvSpPr>
+          <p:nvPr>
+            <p:ph type="sldNum" sz="quarter" idx="5"/>
+          </p:nvPr>
+        </p:nvSpPr>
+        <p:spPr>
+          <a:xfrm>
+            <a:off x="3884613" y="8685213"/>
+            <a:ext cx="2971800" cy="457200"/>
+          </a:xfrm>
+          <a:prstGeom prst="rect">
+            <a:avLst/>
+          </a:prstGeom>
+        </p:spPr>
+        <p:txBody>
+          <a:bodyPr vert="horz" lIns="91440" tIns="45720" rIns="91440" bIns="45720" rtlCol="0" anchor="b"/>
+          <a:lstStyle>
+            <a:lvl1pPr algn="r">
+              <a:defRPr sz="1200"/>
+            </a:lvl1pPr>
+          </a:lstStyle>
+          <a:p>
+            <a:fld id="{BB5E49A5-4136-284D-997B-48E1D791AD67}" type="slidenum">
+              <a:rPr lang="en-US" smtClean="0"/>
+              <a:t>‹#›</a:t>
+            </a:fld>
+            <a:endParaRPr lang="en-US"/>
+          </a:p>
+        </p:txBody>
+      </p:sp>
+    </p:spTree>
+    <p:extLst>
+      <p:ext uri="{BB962C8B-B14F-4D97-AF65-F5344CB8AC3E}">
+        <p14:creationId xmlns:p14="http://schemas.microsoft.com/office/powerpoint/2010/main" val="2623252185"/>
+      </p:ext>
+    </p:extLst>
+  </p:cSld>
+  <p:clrMap bg1="lt1" tx1="dk1" bg2="lt2" tx2="dk2" accent1="accent1" accent2="accent2" accent3="accent3" accent4="accent4" accent5="accent5" accent6="accent6" hlink="hlink" folHlink="folHlink"/>
+  <p:notesStyle>
+    <a:lvl1pPr marL="0" algn="l" defTabSz="457200" rtl="0" eaLnBrk="1" latinLnBrk="0" hangingPunct="1">
+      <a:defRPr sz="1200" kern="1200">
+        <a:solidFill>
+          <a:schemeClr val="tx1"/>
+        </a:solidFill>
+        <a:latin typeface="+mn-lt"/>
+        <a:ea typeface="+mn-ea"/>
+        <a:cs typeface="+mn-cs"/>
+      </a:defRPr>
+    </a:lvl1pPr>
+    <a:lvl2pPr marL="457200" algn="l" defTabSz="457200" rtl="0" eaLnBrk="1" latinLnBrk="0" hangingPunct="1">
+      <a:defRPr sz="1200" kern="1200">
+        <a:solidFill>
+          <a:schemeClr val="tx1"/>
+        </a:solidFill>
+        <a:latin typeface="+mn-lt"/>
+        <a:ea typeface="+mn-ea"/>
+        <a:cs typeface="+mn-cs"/>
+      </a:defRPr>
+    </a:lvl2pPr>
+    <a:lvl3pPr marL="914400" algn="l" defTabSz="457200" rtl="0" eaLnBrk="1" latinLnBrk="0" hangingPunct="1">
+      <a:defRPr sz="1200" kern="1200">
+        <a:solidFill>
+          <a:schemeClr val="tx1"/>
+        </a:solidFill>
+        <a:latin typeface="+mn-lt"/>
+        <a:ea typeface="+mn-ea"/>
+        <a:cs typeface="+mn-cs"/>
+      </a:defRPr>
+    </a:lvl3pPr>
+    <a:lvl4pPr marL="1371600" algn="l" defTabSz="457200" rtl="0" eaLnBrk="1" latinLnBrk="0" hangingPunct="1">
+      <a:defRPr sz="1200" kern="1200">
+        <a:solidFill>
+          <a:schemeClr val="tx1"/>
+        </a:solidFill>
+        <a:latin typeface="+mn-lt"/>
+        <a:ea typeface="+mn-ea"/>
+        <a:cs typeface="+mn-cs"/>
+      </a:defRPr>
+    </a:lvl4pPr>
+    <a:lvl5pPr marL="1828800" algn="l" defTabSz="457200" rtl="0" eaLnBrk="1" latinLnBrk="0" hangingPunct="1">
+      <a:defRPr sz="1200" kern="1200">
+        <a:solidFill>
+          <a:schemeClr val="tx1"/>
+        </a:solidFill>
+        <a:latin typeface="+mn-lt"/>
+        <a:ea typeface="+mn-ea"/>
+        <a:cs typeface="+mn-cs"/>
+      </a:defRPr>
+    </a:lvl5pPr>
+    <a:lvl6pPr marL="2286000" algn="l" defTabSz="457200" rtl="0" eaLnBrk="1" latinLnBrk="0" hangingPunct="1">
+      <a:defRPr sz="1200" kern="1200">
+        <a:solidFill>
+          <a:schemeClr val="tx1"/>
+        </a:solidFill>
+        <a:latin typeface="+mn-lt"/>
+        <a:ea typeface="+mn-ea"/>
+        <a:cs typeface="+mn-cs"/>
+      </a:defRPr>
+    </a:lvl6pPr>
+    <a:lvl7pPr marL="2743200" algn="l" defTabSz="457200" rtl="0" eaLnBrk="1" latinLnBrk="0" hangingPunct="1">
+      <a:defRPr sz="1200" kern="1200">
+        <a:solidFill>
+          <a:schemeClr val="tx1"/>
+        </a:solidFill>
+        <a:latin typeface="+mn-lt"/>
+        <a:ea typeface="+mn-ea"/>
+        <a:cs typeface="+mn-cs"/>
+      </a:defRPr>
+    </a:lvl7pPr>
+    <a:lvl8pPr marL="3200400" algn="l" defTabSz="457200" rtl="0" eaLnBrk="1" latinLnBrk="0" hangingPunct="1">
+      <a:defRPr sz="1200" kern="1200">
+        <a:solidFill>
+          <a:schemeClr val="tx1"/>
+        </a:solidFill>
+        <a:latin typeface="+mn-lt"/>
+        <a:ea typeface="+mn-ea"/>
+        <a:cs typeface="+mn-cs"/>
+      </a:defRPr>
+    </a:lvl8pPr>
+    <a:lvl9pPr marL="3657600" algn="l" defTabSz="457200" rtl="0" eaLnBrk="1" latinLnBrk="0" hangingPunct="1">
+      <a:defRPr sz="1200" kern="1200">
+        <a:solidFill>
+          <a:schemeClr val="tx1"/>
+        </a:solidFill>
+        <a:latin typeface="+mn-lt"/>
+        <a:ea typeface="+mn-ea"/>
+        <a:cs typeface="+mn-cs"/>
+      </a:defRPr>
+    </a:lvl9pPr>
+  </p:notesStyle>
+</p:notesMaster>
+</file>
+
+<file path=ppt/notesSlides/notesSlide1.xml><?xml version="1.0" encoding="utf-8"?>
+<p:notes xmlns:a="http://schemas.openxmlformats.org/drawingml/2006/main" xmlns:p="http://schemas.openxmlformats.org/presentationml/2006/main" xmlns:r="http://schemas.openxmlformats.org/officeDocument/2006/relationships">
+  <p:cSld>
+    <p:spTree>
+      <p:nvGrpSpPr>
+        <p:cNvPr id="1" name=""/>
+        <p:cNvGrpSpPr/>
+        <p:nvPr/>
+      </p:nvGrpSpPr>
+      <p:grpSpPr>
+        <a:xfrm>
+          <a:off x="0" y="0"/>
+          <a:ext cx="0" cy="0"/>
+          <a:chOff x="0" y="0"/>
+          <a:chExt cx="0" cy="0"/>
+        </a:xfrm>
+      </p:grpSpPr>
+      <p:sp>
+        <p:nvSpPr>
+          <p:cNvPr id="2" name="Slide Image Placeholder 1"/>
+          <p:cNvSpPr>
+            <a:spLocks noGrp="1"/>
+          </p:cNvSpPr>
+          <p:nvPr>
+            <p:ph type="sldImg" idx="2"/>
+          </p:nvPr>
+        </p:nvSpPr>
+        <p:spPr/>
+      </p:sp>
+      <p:sp>
+        <p:nvSpPr>
+          <p:cNvPr id="3" name="Notes Placeholder 2"/>
+          <p:cNvSpPr>
+            <a:spLocks noGrp="1"/>
+          </p:cNvSpPr>
+          <p:nvPr>
+            <p:ph type="body" idx="3" sz="quarter"/>
+          </p:nvPr>
+        </p:nvSpPr>
+        <p:spPr/>
+        <p:txBody>
+          <a:bodyPr/>
+          <a:lstStyle/>
+          <a:p>
+            <a:r>
+              <a:t>SAY Good afternoon. This is The Agent Org: security gates for agent-written code. Five AI agents take a ticket all the way to a pull request, and three human gates and one deterministic rule decide whether it ships. I have twenty minutes including your questions, so the slides are short and five of those minutes are the system running.</a:t>
+            </a:r>
+          </a:p>
+        </p:txBody>
+      </p:sp>
+      <p:sp>
+        <p:nvSpPr>
+          <p:cNvPr id="4" name="Slide Number Placeholder 3"/>
+          <p:cNvSpPr>
+            <a:spLocks noGrp="1"/>
+          </p:cNvSpPr>
+          <p:nvPr>
+            <p:ph type="sldNum" idx="5" sz="quarter"/>
+          </p:nvPr>
+        </p:nvSpPr>
+        <p:spPr/>
+      </p:sp>
+    </p:spTree>
+  </p:cSld>
+  <p:clrMapOvr>
+    <a:masterClrMapping/>
+  </p:clrMapOvr>
+</p:notes>
+</file>
+
+<file path=ppt/notesSlides/notesSlide10.xml><?xml version="1.0" encoding="utf-8"?>
+<p:notes xmlns:a="http://schemas.openxmlformats.org/drawingml/2006/main" xmlns:p="http://schemas.openxmlformats.org/presentationml/2006/main" xmlns:r="http://schemas.openxmlformats.org/officeDocument/2006/relationships">
+  <p:cSld>
+    <p:spTree>
+      <p:nvGrpSpPr>
+        <p:cNvPr id="1" name=""/>
+        <p:cNvGrpSpPr/>
+        <p:nvPr/>
+      </p:nvGrpSpPr>
+      <p:grpSpPr>
+        <a:xfrm>
+          <a:off x="0" y="0"/>
+          <a:ext cx="0" cy="0"/>
+          <a:chOff x="0" y="0"/>
+          <a:chExt cx="0" cy="0"/>
+        </a:xfrm>
+      </p:grpSpPr>
+      <p:sp>
+        <p:nvSpPr>
+          <p:cNvPr id="2" name="Slide Image Placeholder 1"/>
+          <p:cNvSpPr>
+            <a:spLocks noGrp="1"/>
+          </p:cNvSpPr>
+          <p:nvPr>
+            <p:ph type="sldImg" idx="2"/>
+          </p:nvPr>
+        </p:nvSpPr>
+        <p:spPr/>
+      </p:sp>
+      <p:sp>
+        <p:nvSpPr>
+          <p:cNvPr id="3" name="Notes Placeholder 2"/>
+          <p:cNvSpPr>
+            <a:spLocks noGrp="1"/>
+          </p:cNvSpPr>
+          <p:nvPr>
+            <p:ph type="body" idx="3" sz="quarter"/>
+          </p:nvPr>
+        </p:nvSpPr>
+        <p:spPr/>
+        <p:txBody>
+          <a:bodyPr/>
+          <a:lstStyle/>
+          <a:p>
+            <a:r>
+              <a:t>SAY None of this is our wording. GitHub Copilot's review "will not block merging changes". Anthropic's code review "always completes with a neutral conclusion so it never blocks". OpenAI's Codex guidance says it doesn't "replace tests, branch protections, or required approvals". Cursor's findings default to neutral. And Snyk's own page puts our thesis in six words: the generator cannot be the validator.</a:t>
+            </a:r>
+          </a:p>
+          <a:p/>
+          <a:p>
+            <a:r>
+              <a:t>SAY — and concede, because it is stronger We are not the only ones with rules outside the model. Claude Code's permission rules and Factory's commit blocks are enforced outside the model too. The difference is where the check sits: theirs guard one agent's actions; ours guards the hand-off between agents, with a named person approving each stage.</a:t>
+            </a:r>
+          </a:p>
+          <a:p/>
+          <a:p>
+            <a:r>
+              <a:t>IF ASKED — "so what is genuinely new?" No product we found combines all three: several agents, a check with no model in it on each agent's output, and human approval between stages, as one pipeline. Each of the three exists somewhere on its own.</a:t>
+            </a:r>
+          </a:p>
+        </p:txBody>
+      </p:sp>
+      <p:sp>
+        <p:nvSpPr>
+          <p:cNvPr id="4" name="Slide Number Placeholder 3"/>
+          <p:cNvSpPr>
+            <a:spLocks noGrp="1"/>
+          </p:cNvSpPr>
+          <p:nvPr>
+            <p:ph type="sldNum" idx="5" sz="quarter"/>
+          </p:nvPr>
+        </p:nvSpPr>
+        <p:spPr/>
+      </p:sp>
+    </p:spTree>
+  </p:cSld>
+  <p:clrMapOvr>
+    <a:masterClrMapping/>
+  </p:clrMapOvr>
+</p:notes>
+</file>
+
+<file path=ppt/notesSlides/notesSlide11.xml><?xml version="1.0" encoding="utf-8"?>
+<p:notes xmlns:a="http://schemas.openxmlformats.org/drawingml/2006/main" xmlns:p="http://schemas.openxmlformats.org/presentationml/2006/main" xmlns:r="http://schemas.openxmlformats.org/officeDocument/2006/relationships">
+  <p:cSld>
+    <p:spTree>
+      <p:nvGrpSpPr>
+        <p:cNvPr id="1" name=""/>
+        <p:cNvGrpSpPr/>
+        <p:nvPr/>
+      </p:nvGrpSpPr>
+      <p:grpSpPr>
+        <a:xfrm>
+          <a:off x="0" y="0"/>
+          <a:ext cx="0" cy="0"/>
+          <a:chOff x="0" y="0"/>
+          <a:chExt cx="0" cy="0"/>
+        </a:xfrm>
+      </p:grpSpPr>
+      <p:sp>
+        <p:nvSpPr>
+          <p:cNvPr id="2" name="Slide Image Placeholder 1"/>
+          <p:cNvSpPr>
+            <a:spLocks noGrp="1"/>
+          </p:cNvSpPr>
+          <p:nvPr>
+            <p:ph type="sldImg" idx="2"/>
+          </p:nvPr>
+        </p:nvSpPr>
+        <p:spPr/>
+      </p:sp>
+      <p:sp>
+        <p:nvSpPr>
+          <p:cNvPr id="3" name="Notes Placeholder 2"/>
+          <p:cNvSpPr>
+            <a:spLocks noGrp="1"/>
+          </p:cNvSpPr>
+          <p:nvPr>
+            <p:ph type="body" idx="3" sz="quarter"/>
+          </p:nvPr>
+        </p:nvSpPr>
+        <p:spPr/>
+        <p:txBody>
+          <a:bodyPr/>
+          <a:lstStyle/>
+          <a:p>
+            <a:r>
+              <a:t>SAY This is the argument for the whole design. With Cursor's hooks, if the hook itself fails, the action goes ahead; their documentation calls it fail-open by default. With Claude Code's hooks, only one specific failure blocks; any other lets the action through, and a mistyped path silently disables the gate. And if Semgrep crashes, it reports success. A check that did not run, reading as a check that passed. That is exactly what we refuse: in our pipeline, a missing or crashed scanner blocks the change.</a:t>
+            </a:r>
+          </a:p>
+        </p:txBody>
+      </p:sp>
+      <p:sp>
+        <p:nvSpPr>
+          <p:cNvPr id="4" name="Slide Number Placeholder 3"/>
+          <p:cNvSpPr>
+            <a:spLocks noGrp="1"/>
+          </p:cNvSpPr>
+          <p:nvPr>
+            <p:ph type="sldNum" idx="5" sz="quarter"/>
+          </p:nvPr>
+        </p:nvSpPr>
+        <p:spPr/>
+      </p:sp>
+    </p:spTree>
+  </p:cSld>
+  <p:clrMapOvr>
+    <a:masterClrMapping/>
+  </p:clrMapOvr>
+</p:notes>
+</file>
+
+<file path=ppt/notesSlides/notesSlide12.xml><?xml version="1.0" encoding="utf-8"?>
+<p:notes xmlns:a="http://schemas.openxmlformats.org/drawingml/2006/main" xmlns:p="http://schemas.openxmlformats.org/presentationml/2006/main" xmlns:r="http://schemas.openxmlformats.org/officeDocument/2006/relationships">
+  <p:cSld>
+    <p:spTree>
+      <p:nvGrpSpPr>
+        <p:cNvPr id="1" name=""/>
+        <p:cNvGrpSpPr/>
+        <p:nvPr/>
+      </p:nvGrpSpPr>
+      <p:grpSpPr>
+        <a:xfrm>
+          <a:off x="0" y="0"/>
+          <a:ext cx="0" cy="0"/>
+          <a:chOff x="0" y="0"/>
+          <a:chExt cx="0" cy="0"/>
+        </a:xfrm>
+      </p:grpSpPr>
+      <p:sp>
+        <p:nvSpPr>
+          <p:cNvPr id="2" name="Slide Image Placeholder 1"/>
+          <p:cNvSpPr>
+            <a:spLocks noGrp="1"/>
+          </p:cNvSpPr>
+          <p:nvPr>
+            <p:ph type="sldImg" idx="2"/>
+          </p:nvPr>
+        </p:nvSpPr>
+        <p:spPr/>
+      </p:sp>
+      <p:sp>
+        <p:nvSpPr>
+          <p:cNvPr id="3" name="Notes Placeholder 2"/>
+          <p:cNvSpPr>
+            <a:spLocks noGrp="1"/>
+          </p:cNvSpPr>
+          <p:nvPr>
+            <p:ph type="body" idx="3" sz="quarter"/>
+          </p:nvPr>
+        </p:nvSpPr>
+        <p:spPr/>
+        <p:txBody>
+          <a:bodyPr/>
+          <a:lstStyle/>
+          <a:p>
+            <a:r>
+              <a:t>SAY Two thousand one hundred and seventy-two automated tests across ninety-three files, plus three hundred and eleven for the web app. Five agent runtimes, all ready on the same version; a split would mean a half-finished deploy, and we check for it before every demo. It runs in the cloud from a real issue. It is a product, not a script: you sign in, pick a repository, start a run, watch each stage, approve a gate and read what it cost. And it is multi-tenant: each customer's data sits in its own partition, and AWS itself refuses a read of anyone else's, so our code does not have to remember to.</a:t>
+            </a:r>
+          </a:p>
+        </p:txBody>
+      </p:sp>
+      <p:sp>
+        <p:nvSpPr>
+          <p:cNvPr id="4" name="Slide Number Placeholder 3"/>
+          <p:cNvSpPr>
+            <a:spLocks noGrp="1"/>
+          </p:cNvSpPr>
+          <p:nvPr>
+            <p:ph type="sldNum" idx="5" sz="quarter"/>
+          </p:nvPr>
+        </p:nvSpPr>
+        <p:spPr/>
+      </p:sp>
+    </p:spTree>
+  </p:cSld>
+  <p:clrMapOvr>
+    <a:masterClrMapping/>
+  </p:clrMapOvr>
+</p:notes>
+</file>
+
+<file path=ppt/notesSlides/notesSlide13.xml><?xml version="1.0" encoding="utf-8"?>
+<p:notes xmlns:a="http://schemas.openxmlformats.org/drawingml/2006/main" xmlns:p="http://schemas.openxmlformats.org/presentationml/2006/main" xmlns:r="http://schemas.openxmlformats.org/officeDocument/2006/relationships">
+  <p:cSld>
+    <p:spTree>
+      <p:nvGrpSpPr>
+        <p:cNvPr id="1" name=""/>
+        <p:cNvGrpSpPr/>
+        <p:nvPr/>
+      </p:nvGrpSpPr>
+      <p:grpSpPr>
+        <a:xfrm>
+          <a:off x="0" y="0"/>
+          <a:ext cx="0" cy="0"/>
+          <a:chOff x="0" y="0"/>
+          <a:chExt cx="0" cy="0"/>
+        </a:xfrm>
+      </p:grpSpPr>
+      <p:sp>
+        <p:nvSpPr>
+          <p:cNvPr id="2" name="Slide Image Placeholder 1"/>
+          <p:cNvSpPr>
+            <a:spLocks noGrp="1"/>
+          </p:cNvSpPr>
+          <p:nvPr>
+            <p:ph type="sldImg" idx="2"/>
+          </p:nvPr>
+        </p:nvSpPr>
+        <p:spPr/>
+      </p:sp>
+      <p:sp>
+        <p:nvSpPr>
+          <p:cNvPr id="3" name="Notes Placeholder 2"/>
+          <p:cNvSpPr>
+            <a:spLocks noGrp="1"/>
+          </p:cNvSpPr>
+          <p:nvPr>
+            <p:ph type="body" idx="3" sz="quarter"/>
+          </p:nvPr>
+        </p:nvSpPr>
+        <p:spPr/>
+        <p:txBody>
+          <a:bodyPr/>
+          <a:lstStyle/>
+          <a:p>
+            <a:r>
+              <a:t>SAY You gave us ten notes in the pre-final, and every row here is an answer that now exists. One in particular. You asked how the scanners' scores turn into a go or no-go, because you doubted the determinism claim, and you were right to. It held for Trivy and Semgrep, which report their own severities. For gitleaks the word "critical" was simply typed where each finding was created: no table, no policy. There is now one scoring table for all three scanners, and the rule for secrets is written down as a policy. Your note produced a real correction, and I would rather say so than claim we were right all along.</a:t>
+            </a:r>
+          </a:p>
+          <a:p/>
+          <a:p>
+            <a:r>
+              <a:t>IF ASKED about any single row — scoring is slide 7 and the limits are slide 14; ask and I will go back to either.</a:t>
+            </a:r>
+          </a:p>
+        </p:txBody>
+      </p:sp>
+      <p:sp>
+        <p:nvSpPr>
+          <p:cNvPr id="4" name="Slide Number Placeholder 3"/>
+          <p:cNvSpPr>
+            <a:spLocks noGrp="1"/>
+          </p:cNvSpPr>
+          <p:nvPr>
+            <p:ph type="sldNum" idx="5" sz="quarter"/>
+          </p:nvPr>
+        </p:nvSpPr>
+        <p:spPr/>
+      </p:sp>
+    </p:spTree>
+  </p:cSld>
+  <p:clrMapOvr>
+    <a:masterClrMapping/>
+  </p:clrMapOvr>
+</p:notes>
+</file>
+
+<file path=ppt/notesSlides/notesSlide14.xml><?xml version="1.0" encoding="utf-8"?>
+<p:notes xmlns:a="http://schemas.openxmlformats.org/drawingml/2006/main" xmlns:p="http://schemas.openxmlformats.org/presentationml/2006/main" xmlns:r="http://schemas.openxmlformats.org/officeDocument/2006/relationships">
+  <p:cSld>
+    <p:spTree>
+      <p:nvGrpSpPr>
+        <p:cNvPr id="1" name=""/>
+        <p:cNvGrpSpPr/>
+        <p:nvPr/>
+      </p:nvGrpSpPr>
+      <p:grpSpPr>
+        <a:xfrm>
+          <a:off x="0" y="0"/>
+          <a:ext cx="0" cy="0"/>
+          <a:chOff x="0" y="0"/>
+          <a:chExt cx="0" cy="0"/>
+        </a:xfrm>
+      </p:grpSpPr>
+      <p:sp>
+        <p:nvSpPr>
+          <p:cNvPr id="2" name="Slide Image Placeholder 1"/>
+          <p:cNvSpPr>
+            <a:spLocks noGrp="1"/>
+          </p:cNvSpPr>
+          <p:nvPr>
+            <p:ph type="sldImg" idx="2"/>
+          </p:nvPr>
+        </p:nvSpPr>
+        <p:spPr/>
+      </p:sp>
+      <p:sp>
+        <p:nvSpPr>
+          <p:cNvPr id="3" name="Notes Placeholder 2"/>
+          <p:cNvSpPr>
+            <a:spLocks noGrp="1"/>
+          </p:cNvSpPr>
+          <p:nvPr>
+            <p:ph type="body" idx="3" sz="quarter"/>
+          </p:nvPr>
+        </p:nvSpPr>
+        <p:spPr/>
+        <p:txBody>
+          <a:bodyPr/>
+          <a:lstStyle/>
+          <a:p>
+            <a:r>
+              <a:t>SAY And what it does not do. A repository admin can bypass a gate; it is a setting, and our pre-flight check reports it on every run. If the scanners miss something, only the reviewer saw it, and the reviewer cannot stop the run, so the human gates are the last line. It covers one language and three scanners today, and breadth is where every competitor is ahead. And a merged pull request carries the reviewed change as a file; applying it to the source is next.</a:t>
+            </a:r>
+          </a:p>
+        </p:txBody>
+      </p:sp>
+      <p:sp>
+        <p:nvSpPr>
+          <p:cNvPr id="4" name="Slide Number Placeholder 3"/>
+          <p:cNvSpPr>
+            <a:spLocks noGrp="1"/>
+          </p:cNvSpPr>
+          <p:nvPr>
+            <p:ph type="sldNum" idx="5" sz="quarter"/>
+          </p:nvPr>
+        </p:nvSpPr>
+        <p:spPr/>
+      </p:sp>
+    </p:spTree>
+  </p:cSld>
+  <p:clrMapOvr>
+    <a:masterClrMapping/>
+  </p:clrMapOvr>
+</p:notes>
+</file>
+
+<file path=ppt/notesSlides/notesSlide15.xml><?xml version="1.0" encoding="utf-8"?>
+<p:notes xmlns:a="http://schemas.openxmlformats.org/drawingml/2006/main" xmlns:p="http://schemas.openxmlformats.org/presentationml/2006/main" xmlns:r="http://schemas.openxmlformats.org/officeDocument/2006/relationships">
+  <p:cSld>
+    <p:spTree>
+      <p:nvGrpSpPr>
+        <p:cNvPr id="1" name=""/>
+        <p:cNvGrpSpPr/>
+        <p:nvPr/>
+      </p:nvGrpSpPr>
+      <p:grpSpPr>
+        <a:xfrm>
+          <a:off x="0" y="0"/>
+          <a:ext cx="0" cy="0"/>
+          <a:chOff x="0" y="0"/>
+          <a:chExt cx="0" cy="0"/>
+        </a:xfrm>
+      </p:grpSpPr>
+      <p:sp>
+        <p:nvSpPr>
+          <p:cNvPr id="2" name="Slide Image Placeholder 1"/>
+          <p:cNvSpPr>
+            <a:spLocks noGrp="1"/>
+          </p:cNvSpPr>
+          <p:nvPr>
+            <p:ph type="sldImg" idx="2"/>
+          </p:nvPr>
+        </p:nvSpPr>
+        <p:spPr/>
+      </p:sp>
+      <p:sp>
+        <p:nvSpPr>
+          <p:cNvPr id="3" name="Notes Placeholder 2"/>
+          <p:cNvSpPr>
+            <a:spLocks noGrp="1"/>
+          </p:cNvSpPr>
+          <p:nvPr>
+            <p:ph type="body" idx="3" sz="quarter"/>
+          </p:nvPr>
+        </p:nvSpPr>
+        <p:spPr/>
+        <p:txBody>
+          <a:bodyPr/>
+          <a:lstStyle/>
+          <a:p>
+            <a:r>
+              <a:t>SAY Four things. First, apply the change rather than carry it; that is also what lets a generated test run against the change. Second, join the two test layers: tests are generated from each ticket and Selenium runs in CI, but neither checks the other yet. Third, prompt caching: nothing is cached today, so every agent pays full price for the same repository snapshot, and cached input costs a quarter as much. And more languages and more scanners; the scoring is a table, so a new scanner is one row.</a:t>
+            </a:r>
+          </a:p>
+        </p:txBody>
+      </p:sp>
+      <p:sp>
+        <p:nvSpPr>
+          <p:cNvPr id="4" name="Slide Number Placeholder 3"/>
+          <p:cNvSpPr>
+            <a:spLocks noGrp="1"/>
+          </p:cNvSpPr>
+          <p:nvPr>
+            <p:ph type="sldNum" idx="5" sz="quarter"/>
+          </p:nvPr>
+        </p:nvSpPr>
+        <p:spPr/>
+      </p:sp>
+    </p:spTree>
+  </p:cSld>
+  <p:clrMapOvr>
+    <a:masterClrMapping/>
+  </p:clrMapOvr>
+</p:notes>
+</file>
+
+<file path=ppt/notesSlides/notesSlide16.xml><?xml version="1.0" encoding="utf-8"?>
+<p:notes xmlns:a="http://schemas.openxmlformats.org/drawingml/2006/main" xmlns:p="http://schemas.openxmlformats.org/presentationml/2006/main" xmlns:r="http://schemas.openxmlformats.org/officeDocument/2006/relationships">
+  <p:cSld>
+    <p:spTree>
+      <p:nvGrpSpPr>
+        <p:cNvPr id="1" name=""/>
+        <p:cNvGrpSpPr/>
+        <p:nvPr/>
+      </p:nvGrpSpPr>
+      <p:grpSpPr>
+        <a:xfrm>
+          <a:off x="0" y="0"/>
+          <a:ext cx="0" cy="0"/>
+          <a:chOff x="0" y="0"/>
+          <a:chExt cx="0" cy="0"/>
+        </a:xfrm>
+      </p:grpSpPr>
+      <p:sp>
+        <p:nvSpPr>
+          <p:cNvPr id="2" name="Slide Image Placeholder 1"/>
+          <p:cNvSpPr>
+            <a:spLocks noGrp="1"/>
+          </p:cNvSpPr>
+          <p:nvPr>
+            <p:ph type="sldImg" idx="2"/>
+          </p:nvPr>
+        </p:nvSpPr>
+        <p:spPr/>
+      </p:sp>
+      <p:sp>
+        <p:nvSpPr>
+          <p:cNvPr id="3" name="Notes Placeholder 2"/>
+          <p:cNvSpPr>
+            <a:spLocks noGrp="1"/>
+          </p:cNvSpPr>
+          <p:nvPr>
+            <p:ph type="body" idx="3" sz="quarter"/>
+          </p:nvPr>
+        </p:nvSpPr>
+        <p:spPr/>
+        <p:txBody>
+          <a:bodyPr/>
+          <a:lstStyle/>
+          <a:p>
+            <a:r>
+              <a:t>SAY Let me show you the half that matters: a ticket that deliberately carries a credential. Watch the line numbers when it blocks.</a:t>
+            </a:r>
+          </a:p>
+          <a:p/>
+          <a:p>
+            <a:r>
+              <a:t>IF ASKED — "why does the screen say develop, not security?" The review and the security check run inside one GitHub job called develop, and the product marks the job. Open the security panel: it shows the verdict and the two line numbers.</a:t>
+            </a:r>
+          </a:p>
+        </p:txBody>
+      </p:sp>
+      <p:sp>
+        <p:nvSpPr>
+          <p:cNvPr id="4" name="Slide Number Placeholder 3"/>
+          <p:cNvSpPr>
+            <a:spLocks noGrp="1"/>
+          </p:cNvSpPr>
+          <p:nvPr>
+            <p:ph type="sldNum" idx="5" sz="quarter"/>
+          </p:nvPr>
+        </p:nvSpPr>
+        <p:spPr/>
+      </p:sp>
+    </p:spTree>
+  </p:cSld>
+  <p:clrMapOvr>
+    <a:masterClrMapping/>
+  </p:clrMapOvr>
+</p:notes>
+</file>
+
+<file path=ppt/notesSlides/notesSlide17.xml><?xml version="1.0" encoding="utf-8"?>
+<p:notes xmlns:a="http://schemas.openxmlformats.org/drawingml/2006/main" xmlns:p="http://schemas.openxmlformats.org/presentationml/2006/main" xmlns:r="http://schemas.openxmlformats.org/officeDocument/2006/relationships">
+  <p:cSld>
+    <p:spTree>
+      <p:nvGrpSpPr>
+        <p:cNvPr id="1" name=""/>
+        <p:cNvGrpSpPr/>
+        <p:nvPr/>
+      </p:nvGrpSpPr>
+      <p:grpSpPr>
+        <a:xfrm>
+          <a:off x="0" y="0"/>
+          <a:ext cx="0" cy="0"/>
+          <a:chOff x="0" y="0"/>
+          <a:chExt cx="0" cy="0"/>
+        </a:xfrm>
+      </p:grpSpPr>
+      <p:sp>
+        <p:nvSpPr>
+          <p:cNvPr id="2" name="Slide Image Placeholder 1"/>
+          <p:cNvSpPr>
+            <a:spLocks noGrp="1"/>
+          </p:cNvSpPr>
+          <p:nvPr>
+            <p:ph type="sldImg" idx="2"/>
+          </p:nvPr>
+        </p:nvSpPr>
+        <p:spPr/>
+      </p:sp>
+      <p:sp>
+        <p:nvSpPr>
+          <p:cNvPr id="3" name="Notes Placeholder 2"/>
+          <p:cNvSpPr>
+            <a:spLocks noGrp="1"/>
+          </p:cNvSpPr>
+          <p:nvPr>
+            <p:ph type="body" idx="3" sz="quarter"/>
+          </p:nvPr>
+        </p:nvSpPr>
+        <p:spPr/>
+        <p:txBody>
+          <a:bodyPr/>
+          <a:lstStyle/>
+          <a:p>
+            <a:r>
+              <a:t>SAY That is The Agent Org. It is live at theagentorg.rosettacloud.app. Questions.</a:t>
+            </a:r>
+          </a:p>
+        </p:txBody>
+      </p:sp>
+      <p:sp>
+        <p:nvSpPr>
+          <p:cNvPr id="4" name="Slide Number Placeholder 3"/>
+          <p:cNvSpPr>
+            <a:spLocks noGrp="1"/>
+          </p:cNvSpPr>
+          <p:nvPr>
+            <p:ph type="sldNum" idx="5" sz="quarter"/>
+          </p:nvPr>
+        </p:nvSpPr>
+        <p:spPr/>
+      </p:sp>
+    </p:spTree>
+  </p:cSld>
+  <p:clrMapOvr>
+    <a:masterClrMapping/>
+  </p:clrMapOvr>
+</p:notes>
+</file>
+
+<file path=ppt/notesSlides/notesSlide2.xml><?xml version="1.0" encoding="utf-8"?>
+<p:notes xmlns:a="http://schemas.openxmlformats.org/drawingml/2006/main" xmlns:p="http://schemas.openxmlformats.org/presentationml/2006/main" xmlns:r="http://schemas.openxmlformats.org/officeDocument/2006/relationships">
+  <p:cSld>
+    <p:spTree>
+      <p:nvGrpSpPr>
+        <p:cNvPr id="1" name=""/>
+        <p:cNvGrpSpPr/>
+        <p:nvPr/>
+      </p:nvGrpSpPr>
+      <p:grpSpPr>
+        <a:xfrm>
+          <a:off x="0" y="0"/>
+          <a:ext cx="0" cy="0"/>
+          <a:chOff x="0" y="0"/>
+          <a:chExt cx="0" cy="0"/>
+        </a:xfrm>
+      </p:grpSpPr>
+      <p:sp>
+        <p:nvSpPr>
+          <p:cNvPr id="2" name="Slide Image Placeholder 1"/>
+          <p:cNvSpPr>
+            <a:spLocks noGrp="1"/>
+          </p:cNvSpPr>
+          <p:nvPr>
+            <p:ph type="sldImg" idx="2"/>
+          </p:nvPr>
+        </p:nvSpPr>
+        <p:spPr/>
+      </p:sp>
+      <p:sp>
+        <p:nvSpPr>
+          <p:cNvPr id="3" name="Notes Placeholder 2"/>
+          <p:cNvSpPr>
+            <a:spLocks noGrp="1"/>
+          </p:cNvSpPr>
+          <p:nvPr>
+            <p:ph type="body" idx="3" sz="quarter"/>
+          </p:nvPr>
+        </p:nvSpPr>
+        <p:spPr/>
+        <p:txBody>
+          <a:bodyPr/>
+          <a:lstStyle/>
+          <a:p>
+            <a:r>
+              <a:t>SAY We are RosettaTeam. I am Mohamed Sorour, a senior DevOps engineer at Vezeeta and a master's student in computer science, AI specialization, at Georgia Tech. Mariam is an associate solution engineer at RENOSYSTEMS. Habiba is a junior DevOps engineer, and Reem and Aya are junior testing engineers, all three Digilians alumni. All five of us are here, and each of us takes questions on our own part.</a:t>
+            </a:r>
+          </a:p>
+        </p:txBody>
+      </p:sp>
+      <p:sp>
+        <p:nvSpPr>
+          <p:cNvPr id="4" name="Slide Number Placeholder 3"/>
+          <p:cNvSpPr>
+            <a:spLocks noGrp="1"/>
+          </p:cNvSpPr>
+          <p:nvPr>
+            <p:ph type="sldNum" idx="5" sz="quarter"/>
+          </p:nvPr>
+        </p:nvSpPr>
+        <p:spPr/>
+      </p:sp>
+    </p:spTree>
+  </p:cSld>
+  <p:clrMapOvr>
+    <a:masterClrMapping/>
+  </p:clrMapOvr>
+</p:notes>
+</file>
+
+<file path=ppt/notesSlides/notesSlide3.xml><?xml version="1.0" encoding="utf-8"?>
+<p:notes xmlns:a="http://schemas.openxmlformats.org/drawingml/2006/main" xmlns:p="http://schemas.openxmlformats.org/presentationml/2006/main" xmlns:r="http://schemas.openxmlformats.org/officeDocument/2006/relationships">
+  <p:cSld>
+    <p:spTree>
+      <p:nvGrpSpPr>
+        <p:cNvPr id="1" name=""/>
+        <p:cNvGrpSpPr/>
+        <p:nvPr/>
+      </p:nvGrpSpPr>
+      <p:grpSpPr>
+        <a:xfrm>
+          <a:off x="0" y="0"/>
+          <a:ext cx="0" cy="0"/>
+          <a:chOff x="0" y="0"/>
+          <a:chExt cx="0" cy="0"/>
+        </a:xfrm>
+      </p:grpSpPr>
+      <p:sp>
+        <p:nvSpPr>
+          <p:cNvPr id="2" name="Slide Image Placeholder 1"/>
+          <p:cNvSpPr>
+            <a:spLocks noGrp="1"/>
+          </p:cNvSpPr>
+          <p:nvPr>
+            <p:ph type="sldImg" idx="2"/>
+          </p:nvPr>
+        </p:nvSpPr>
+        <p:spPr/>
+      </p:sp>
+      <p:sp>
+        <p:nvSpPr>
+          <p:cNvPr id="3" name="Notes Placeholder 2"/>
+          <p:cNvSpPr>
+            <a:spLocks noGrp="1"/>
+          </p:cNvSpPr>
+          <p:nvPr>
+            <p:ph type="body" idx="3" sz="quarter"/>
+          </p:nvPr>
+        </p:nvSpPr>
+        <p:spPr/>
+        <p:txBody>
+          <a:bodyPr/>
+          <a:lstStyle/>
+          <a:p>
+            <a:r>
+              <a:t>SAY Here is the twenty minutes. Three on the overview, then the architecture, the business impact, and how this differs from what vendors ship. Then what is built, your ten notes from the pre-final, and what it does not do. What is next, five minutes live, and the rest of the slot is yours.</a:t>
+            </a:r>
+          </a:p>
+        </p:txBody>
+      </p:sp>
+      <p:sp>
+        <p:nvSpPr>
+          <p:cNvPr id="4" name="Slide Number Placeholder 3"/>
+          <p:cNvSpPr>
+            <a:spLocks noGrp="1"/>
+          </p:cNvSpPr>
+          <p:nvPr>
+            <p:ph type="sldNum" idx="5" sz="quarter"/>
+          </p:nvPr>
+        </p:nvSpPr>
+        <p:spPr/>
+      </p:sp>
+    </p:spTree>
+  </p:cSld>
+  <p:clrMapOvr>
+    <a:masterClrMapping/>
+  </p:clrMapOvr>
+</p:notes>
+</file>
+
+<file path=ppt/notesSlides/notesSlide4.xml><?xml version="1.0" encoding="utf-8"?>
+<p:notes xmlns:a="http://schemas.openxmlformats.org/drawingml/2006/main" xmlns:p="http://schemas.openxmlformats.org/presentationml/2006/main" xmlns:r="http://schemas.openxmlformats.org/officeDocument/2006/relationships">
+  <p:cSld>
+    <p:spTree>
+      <p:nvGrpSpPr>
+        <p:cNvPr id="1" name=""/>
+        <p:cNvGrpSpPr/>
+        <p:nvPr/>
+      </p:nvGrpSpPr>
+      <p:grpSpPr>
+        <a:xfrm>
+          <a:off x="0" y="0"/>
+          <a:ext cx="0" cy="0"/>
+          <a:chOff x="0" y="0"/>
+          <a:chExt cx="0" cy="0"/>
+        </a:xfrm>
+      </p:grpSpPr>
+      <p:sp>
+        <p:nvSpPr>
+          <p:cNvPr id="2" name="Slide Image Placeholder 1"/>
+          <p:cNvSpPr>
+            <a:spLocks noGrp="1"/>
+          </p:cNvSpPr>
+          <p:nvPr>
+            <p:ph type="sldImg" idx="2"/>
+          </p:nvPr>
+        </p:nvSpPr>
+        <p:spPr/>
+      </p:sp>
+      <p:sp>
+        <p:nvSpPr>
+          <p:cNvPr id="3" name="Notes Placeholder 2"/>
+          <p:cNvSpPr>
+            <a:spLocks noGrp="1"/>
+          </p:cNvSpPr>
+          <p:nvPr>
+            <p:ph type="body" idx="3" sz="quarter"/>
+          </p:nvPr>
+        </p:nvSpPr>
+        <p:spPr/>
+        <p:txBody>
+          <a:bodyPr/>
+          <a:lstStyle/>
+          <a:p>
+            <a:r>
+              <a:t>SAY Coding agents already open pull requests without a person in the loop. What is new is that the reviewer of that change is increasingly another model. A model can be persuaded, distracted or prompt-injected, which makes it the wrong thing to place between a committed credential and your main branch. We measured our own baseline with no checks in the loop: a poisoned change reached the branch every time. So the question is not whether an agent can write the change. It is what stands between that change and production.</a:t>
+            </a:r>
+          </a:p>
+          <a:p/>
+          <a:p>
+            <a:r>
+              <a:t>IF ASKED — "isn't this what branch protection is for?" Branch protection enforces a status check, and every AI reviewer in our research reports a neutral status: it never fails the check. We come back to that on the differentiation slide.</a:t>
+            </a:r>
+          </a:p>
+        </p:txBody>
+      </p:sp>
+      <p:sp>
+        <p:nvSpPr>
+          <p:cNvPr id="4" name="Slide Number Placeholder 3"/>
+          <p:cNvSpPr>
+            <a:spLocks noGrp="1"/>
+          </p:cNvSpPr>
+          <p:nvPr>
+            <p:ph type="sldNum" idx="5" sz="quarter"/>
+          </p:nvPr>
+        </p:nvSpPr>
+        <p:spPr/>
+      </p:sp>
+    </p:spTree>
+  </p:cSld>
+  <p:clrMapOvr>
+    <a:masterClrMapping/>
+  </p:clrMapOvr>
+</p:notes>
+</file>
+
+<file path=ppt/notesSlides/notesSlide5.xml><?xml version="1.0" encoding="utf-8"?>
+<p:notes xmlns:a="http://schemas.openxmlformats.org/drawingml/2006/main" xmlns:p="http://schemas.openxmlformats.org/presentationml/2006/main" xmlns:r="http://schemas.openxmlformats.org/officeDocument/2006/relationships">
+  <p:cSld>
+    <p:spTree>
+      <p:nvGrpSpPr>
+        <p:cNvPr id="1" name=""/>
+        <p:cNvGrpSpPr/>
+        <p:nvPr/>
+      </p:nvGrpSpPr>
+      <p:grpSpPr>
+        <a:xfrm>
+          <a:off x="0" y="0"/>
+          <a:ext cx="0" cy="0"/>
+          <a:chOff x="0" y="0"/>
+          <a:chExt cx="0" cy="0"/>
+        </a:xfrm>
+      </p:grpSpPr>
+      <p:sp>
+        <p:nvSpPr>
+          <p:cNvPr id="2" name="Slide Image Placeholder 1"/>
+          <p:cNvSpPr>
+            <a:spLocks noGrp="1"/>
+          </p:cNvSpPr>
+          <p:nvPr>
+            <p:ph type="sldImg" idx="2"/>
+          </p:nvPr>
+        </p:nvSpPr>
+        <p:spPr/>
+      </p:sp>
+      <p:sp>
+        <p:nvSpPr>
+          <p:cNvPr id="3" name="Notes Placeholder 2"/>
+          <p:cNvSpPr>
+            <a:spLocks noGrp="1"/>
+          </p:cNvSpPr>
+          <p:nvPr>
+            <p:ph type="body" idx="3" sz="quarter"/>
+          </p:nvPr>
+        </p:nvSpPr>
+        <p:spPr/>
+        <p:txBody>
+          <a:bodyPr/>
+          <a:lstStyle/>
+          <a:p>
+            <a:r>
+              <a:t>SAY This is the pipeline, and it is the same shape you will see on screen in a few minutes. The filled dots are agents. The three rings are gates: the run stops there until a named person approves it in GitHub. Five agents: planner, developer, reviewer, security and SRE, each in its own runtime. Three human gates. And one rule that is not a model, which is the next slide.</a:t>
+            </a:r>
+          </a:p>
+        </p:txBody>
+      </p:sp>
+      <p:sp>
+        <p:nvSpPr>
+          <p:cNvPr id="4" name="Slide Number Placeholder 3"/>
+          <p:cNvSpPr>
+            <a:spLocks noGrp="1"/>
+          </p:cNvSpPr>
+          <p:nvPr>
+            <p:ph type="sldNum" idx="5" sz="quarter"/>
+          </p:nvPr>
+        </p:nvSpPr>
+        <p:spPr/>
+      </p:sp>
+    </p:spTree>
+  </p:cSld>
+  <p:clrMapOvr>
+    <a:masterClrMapping/>
+  </p:clrMapOvr>
+</p:notes>
+</file>
+
+<file path=ppt/notesSlides/notesSlide6.xml><?xml version="1.0" encoding="utf-8"?>
+<p:notes xmlns:a="http://schemas.openxmlformats.org/drawingml/2006/main" xmlns:p="http://schemas.openxmlformats.org/presentationml/2006/main" xmlns:r="http://schemas.openxmlformats.org/officeDocument/2006/relationships">
+  <p:cSld>
+    <p:spTree>
+      <p:nvGrpSpPr>
+        <p:cNvPr id="1" name=""/>
+        <p:cNvGrpSpPr/>
+        <p:nvPr/>
+      </p:nvGrpSpPr>
+      <p:grpSpPr>
+        <a:xfrm>
+          <a:off x="0" y="0"/>
+          <a:ext cx="0" cy="0"/>
+          <a:chOff x="0" y="0"/>
+          <a:chExt cx="0" cy="0"/>
+        </a:xfrm>
+      </p:grpSpPr>
+      <p:sp>
+        <p:nvSpPr>
+          <p:cNvPr id="2" name="Slide Image Placeholder 1"/>
+          <p:cNvSpPr>
+            <a:spLocks noGrp="1"/>
+          </p:cNvSpPr>
+          <p:nvPr>
+            <p:ph type="sldImg" idx="2"/>
+          </p:nvPr>
+        </p:nvSpPr>
+        <p:spPr/>
+      </p:sp>
+      <p:sp>
+        <p:nvSpPr>
+          <p:cNvPr id="3" name="Notes Placeholder 2"/>
+          <p:cNvSpPr>
+            <a:spLocks noGrp="1"/>
+          </p:cNvSpPr>
+          <p:nvPr>
+            <p:ph type="body" idx="3" sz="quarter"/>
+          </p:nvPr>
+        </p:nvSpPr>
+        <p:spPr/>
+        <p:txBody>
+          <a:bodyPr/>
+          <a:lstStyle/>
+          <a:p>
+            <a:r>
+              <a:t>SAY Every agent here is a language model, and any of them can be wrong. So the component that stops a change is deliberately not one of them. Compare the two columns. The reviewer is a model reading the change. It catches intent, logic and a plan mismatch, and it is advisory: when it objects, the change goes back to the developer, but it cannot stop the run. The security stage is three scanners and a fixed rule. Same input, same answer, every time, and there is no model in it, so there is nothing to argue with.</a:t>
+            </a:r>
+          </a:p>
+          <a:p/>
+          <a:p>
+            <a:r>
+              <a:t>SAY — the line that lands The demo you are about to see would still block with the reviewer removed entirely. It would not block with the scanners removed.</a:t>
+            </a:r>
+          </a:p>
+          <a:p/>
+          <a:p>
+            <a:r>
+              <a:t>IF ASKED — "what if the scanners miss something?" Then the reviewer is the only thing that saw it, the reviewer is advisory, and the change can reach main past three human gates. That is an accepted limit, not a defended one, and it is why each gate needs a named person.</a:t>
+            </a:r>
+          </a:p>
+        </p:txBody>
+      </p:sp>
+      <p:sp>
+        <p:nvSpPr>
+          <p:cNvPr id="4" name="Slide Number Placeholder 3"/>
+          <p:cNvSpPr>
+            <a:spLocks noGrp="1"/>
+          </p:cNvSpPr>
+          <p:nvPr>
+            <p:ph type="sldNum" idx="5" sz="quarter"/>
+          </p:nvPr>
+        </p:nvSpPr>
+        <p:spPr/>
+      </p:sp>
+    </p:spTree>
+  </p:cSld>
+  <p:clrMapOvr>
+    <a:masterClrMapping/>
+  </p:clrMapOvr>
+</p:notes>
+</file>
+
+<file path=ppt/notesSlides/notesSlide7.xml><?xml version="1.0" encoding="utf-8"?>
+<p:notes xmlns:a="http://schemas.openxmlformats.org/drawingml/2006/main" xmlns:p="http://schemas.openxmlformats.org/presentationml/2006/main" xmlns:r="http://schemas.openxmlformats.org/officeDocument/2006/relationships">
+  <p:cSld>
+    <p:spTree>
+      <p:nvGrpSpPr>
+        <p:cNvPr id="1" name=""/>
+        <p:cNvGrpSpPr/>
+        <p:nvPr/>
+      </p:nvGrpSpPr>
+      <p:grpSpPr>
+        <a:xfrm>
+          <a:off x="0" y="0"/>
+          <a:ext cx="0" cy="0"/>
+          <a:chOff x="0" y="0"/>
+          <a:chExt cx="0" cy="0"/>
+        </a:xfrm>
+      </p:grpSpPr>
+      <p:sp>
+        <p:nvSpPr>
+          <p:cNvPr id="2" name="Slide Image Placeholder 1"/>
+          <p:cNvSpPr>
+            <a:spLocks noGrp="1"/>
+          </p:cNvSpPr>
+          <p:nvPr>
+            <p:ph type="sldImg" idx="2"/>
+          </p:nvPr>
+        </p:nvSpPr>
+        <p:spPr/>
+      </p:sp>
+      <p:sp>
+        <p:nvSpPr>
+          <p:cNvPr id="3" name="Notes Placeholder 2"/>
+          <p:cNvSpPr>
+            <a:spLocks noGrp="1"/>
+          </p:cNvSpPr>
+          <p:nvPr>
+            <p:ph type="body" idx="3" sz="quarter"/>
+          </p:nvPr>
+        </p:nvSpPr>
+        <p:spPr/>
+        <p:txBody>
+          <a:bodyPr/>
+          <a:lstStyle/>
+          <a:p>
+            <a:r>
+              <a:t>SAY This is the rule that decides, since you asked about it in the pre-final. Semgrep and Trivy report their own severities, and one table translates them. Gitleaks reports no severity at all, so a secret is critical by policy: a committed credential has no lesser grade. Then one comparison: block when any finding is at or above the threshold. Two things keep it honest. A severity the table does not recognise counts as high, the blocking level, so an unknown can never slip through. And a threshold outside the allowed values is rejected, never quietly adjusted.</a:t>
+            </a:r>
+          </a:p>
+          <a:p/>
+          <a:p>
+            <a:r>
+              <a:t>IF ASKED — "why is gitleaks always critical?" It reports no severity at all, only the rule, the file and the line. The severity has to come from somewhere, and ranking credentials would mean deciding which ones we are willing to merge.</a:t>
+            </a:r>
+          </a:p>
+          <a:p/>
+          <a:p>
+            <a:r>
+              <a:t>IF ASKED — "what does Trivy's 'unknown' become?" Low. Trivy uses it for a vulnerability with no published score, which is a real answer, not a missing one. What counts as high is a severity word the table has never seen.</a:t>
+            </a:r>
+          </a:p>
+        </p:txBody>
+      </p:sp>
+      <p:sp>
+        <p:nvSpPr>
+          <p:cNvPr id="4" name="Slide Number Placeholder 3"/>
+          <p:cNvSpPr>
+            <a:spLocks noGrp="1"/>
+          </p:cNvSpPr>
+          <p:nvPr>
+            <p:ph type="sldNum" idx="5" sz="quarter"/>
+          </p:nvPr>
+        </p:nvSpPr>
+        <p:spPr/>
+      </p:sp>
+    </p:spTree>
+  </p:cSld>
+  <p:clrMapOvr>
+    <a:masterClrMapping/>
+  </p:clrMapOvr>
+</p:notes>
+</file>
+
+<file path=ppt/notesSlides/notesSlide8.xml><?xml version="1.0" encoding="utf-8"?>
+<p:notes xmlns:a="http://schemas.openxmlformats.org/drawingml/2006/main" xmlns:p="http://schemas.openxmlformats.org/presentationml/2006/main" xmlns:r="http://schemas.openxmlformats.org/officeDocument/2006/relationships">
+  <p:cSld>
+    <p:spTree>
+      <p:nvGrpSpPr>
+        <p:cNvPr id="1" name=""/>
+        <p:cNvGrpSpPr/>
+        <p:nvPr/>
+      </p:nvGrpSpPr>
+      <p:grpSpPr>
+        <a:xfrm>
+          <a:off x="0" y="0"/>
+          <a:ext cx="0" cy="0"/>
+          <a:chOff x="0" y="0"/>
+          <a:chExt cx="0" cy="0"/>
+        </a:xfrm>
+      </p:grpSpPr>
+      <p:sp>
+        <p:nvSpPr>
+          <p:cNvPr id="2" name="Slide Image Placeholder 1"/>
+          <p:cNvSpPr>
+            <a:spLocks noGrp="1"/>
+          </p:cNvSpPr>
+          <p:nvPr>
+            <p:ph type="sldImg" idx="2"/>
+          </p:nvPr>
+        </p:nvSpPr>
+        <p:spPr/>
+      </p:sp>
+      <p:sp>
+        <p:nvSpPr>
+          <p:cNvPr id="3" name="Notes Placeholder 2"/>
+          <p:cNvSpPr>
+            <a:spLocks noGrp="1"/>
+          </p:cNvSpPr>
+          <p:nvPr>
+            <p:ph type="body" idx="3" sz="quarter"/>
+          </p:nvPr>
+        </p:nvSpPr>
+        <p:spPr/>
+        <p:txBody>
+          <a:bodyPr/>
+          <a:lstStyle/>
+          <a:p>
+            <a:r>
+              <a:t>SAY Follow the numbers. One: an engineer opens an issue, or starts a run from our app. Two: GitHub sends a signed webhook to a Lambda function, which checks the signature before anything else happens and hands the event to EventBridge. Three: a rule matches new issues and starts the pipeline; if that fails, the event waits in an SQS dead-letter queue. The pipeline is seven GitHub Actions jobs. Four: each job takes an AWS role through OIDC, so there is no stored AWS key anywhere, and calls that agent's Bedrock AgentCore runtime. Five: the agents call Amazon Nova 2 Lite. Six: the security stage is three scanners and a fixed threshold, with no model in it. Seven: the gates wait for a named person, in GitHub or in our app. Eight: the app, on Amplify with Cognito sign-in, reads each run from DynamoDB through a role that can only see its own tenant's data.</a:t>
+            </a:r>
+          </a:p>
+          <a:p/>
+          <a:p>
+            <a:r>
+              <a:t>IF ASKED — "why AgentCore and not just Lambda?" Each agent is an isolated runtime with its own identity and logs, and the security image is the only one carrying the three scanners. Isolation is the point.</a:t>
+            </a:r>
+          </a:p>
+          <a:p/>
+          <a:p>
+            <a:r>
+              <a:t>IF ASKED — "where is a run's state kept?" It is passed from job to job by GitHub Actions, and every stage writes a copy to DynamoDB, which is what the app reads.</a:t>
+            </a:r>
+          </a:p>
+        </p:txBody>
+      </p:sp>
+      <p:sp>
+        <p:nvSpPr>
+          <p:cNvPr id="4" name="Slide Number Placeholder 3"/>
+          <p:cNvSpPr>
+            <a:spLocks noGrp="1"/>
+          </p:cNvSpPr>
+          <p:nvPr>
+            <p:ph type="sldNum" idx="5" sz="quarter"/>
+          </p:nvPr>
+        </p:nvSpPr>
+        <p:spPr/>
+      </p:sp>
+    </p:spTree>
+  </p:cSld>
+  <p:clrMapOvr>
+    <a:masterClrMapping/>
+  </p:clrMapOvr>
+</p:notes>
+</file>
+
+<file path=ppt/notesSlides/notesSlide9.xml><?xml version="1.0" encoding="utf-8"?>
+<p:notes xmlns:a="http://schemas.openxmlformats.org/drawingml/2006/main" xmlns:p="http://schemas.openxmlformats.org/presentationml/2006/main" xmlns:r="http://schemas.openxmlformats.org/officeDocument/2006/relationships">
+  <p:cSld>
+    <p:spTree>
+      <p:nvGrpSpPr>
+        <p:cNvPr id="1" name=""/>
+        <p:cNvGrpSpPr/>
+        <p:nvPr/>
+      </p:nvGrpSpPr>
+      <p:grpSpPr>
+        <a:xfrm>
+          <a:off x="0" y="0"/>
+          <a:ext cx="0" cy="0"/>
+          <a:chOff x="0" y="0"/>
+          <a:chExt cx="0" cy="0"/>
+        </a:xfrm>
+      </p:grpSpPr>
+      <p:sp>
+        <p:nvSpPr>
+          <p:cNvPr id="2" name="Slide Image Placeholder 1"/>
+          <p:cNvSpPr>
+            <a:spLocks noGrp="1"/>
+          </p:cNvSpPr>
+          <p:nvPr>
+            <p:ph type="sldImg" idx="2"/>
+          </p:nvPr>
+        </p:nvSpPr>
+        <p:spPr/>
+      </p:sp>
+      <p:sp>
+        <p:nvSpPr>
+          <p:cNvPr id="3" name="Notes Placeholder 2"/>
+          <p:cNvSpPr>
+            <a:spLocks noGrp="1"/>
+          </p:cNvSpPr>
+          <p:nvPr>
+            <p:ph type="body" idx="3" sz="quarter"/>
+          </p:nvPr>
+        </p:nvSpPr>
+        <p:spPr/>
+        <p:txBody>
+          <a:bodyPr/>
+          <a:lstStyle/>
+          <a:p>
+            <a:r>
+              <a:t>SAY A change costs between one point three and one point seven cents of model time, measured over three clean runs and priced from the AWS Pricing API. The model is 99.9 percent of that. Lambda, EventBridge and DynamoDB together came to twelve millionths of a dollar, which is why the only cost work worth doing is prompt caching. The median time from ticket to merge is five point four minutes, and none of the eight merged changes carried a credential.</a:t>
+            </a:r>
+          </a:p>
+          <a:p/>
+          <a:p>
+            <a:r>
+              <a:t>SAY THE CAVEAT — do not wait to be asked. Eight of thirty-seven runs merged, so the median covers the runs that finished. And the zero is a real result: the same scan finds three credentials in an unmerged pull request, so it is not a scan that finds nothing.</a:t>
+            </a:r>
+          </a:p>
+          <a:p/>
+          <a:p>
+            <a:r>
+              <a:t>IF ASKED — "so it is cheaper than a human reviewer?" I would not make that comparison. The pipeline does not replace the reviewer, it decides what reaches them. The honest measure is minutes of human attention per change, and we have not measured that at scale.</a:t>
+            </a:r>
+          </a:p>
+        </p:txBody>
+      </p:sp>
+      <p:sp>
+        <p:nvSpPr>
+          <p:cNvPr id="4" name="Slide Number Placeholder 3"/>
+          <p:cNvSpPr>
+            <a:spLocks noGrp="1"/>
+          </p:cNvSpPr>
+          <p:nvPr>
+            <p:ph type="sldNum" idx="5" sz="quarter"/>
+          </p:nvPr>
+        </p:nvSpPr>
+        <p:spPr/>
+      </p:sp>
+    </p:spTree>
+  </p:cSld>
+  <p:clrMapOvr>
+    <a:masterClrMapping/>
+  </p:clrMapOvr>
+</p:notes>
 </file>
 
 <file path=ppt/slideLayouts/slideLayout1.xml><?xml version="1.0" encoding="utf-8"?>
@@ -3200,8 +4818,8 @@
         </p:nvSpPr>
         <p:spPr>
           <a:xfrm>
-            <a:off x="1005840" y="1463040"/>
-            <a:ext cx="10149840" cy="1645920"/>
+            <a:off x="1005840" y="1417320"/>
+            <a:ext cx="10149840" cy="1005840"/>
           </a:xfrm>
           <a:prstGeom prst="rect">
             <a:avLst/>
@@ -3216,46 +4834,30 @@
           <a:p>
             <a:pPr algn="l">
               <a:lnSpc>
-                <a:spcPct val="104000"/>
-              </a:lnSpc>
-            </a:pPr>
-            <a:r>
-              <a:rPr sz="4800" b="1">
+                <a:spcPct val="100000"/>
+              </a:lnSpc>
+            </a:pPr>
+            <a:r>
+              <a:rPr sz="6000" b="1">
                 <a:solidFill>
                   <a:srgbClr val="E8ECF3"/>
                 </a:solidFill>
                 <a:latin typeface="Helvetica Neue"/>
               </a:rPr>
-              <a:t>SECURITY GATES FOR</a:t>
-            </a:r>
-          </a:p>
-          <a:p>
-            <a:pPr algn="l">
-              <a:lnSpc>
-                <a:spcPct val="104000"/>
-              </a:lnSpc>
-            </a:pPr>
-            <a:r>
-              <a:rPr sz="4800" b="1">
-                <a:solidFill>
-                  <a:srgbClr val="E8ECF3"/>
-                </a:solidFill>
-                <a:latin typeface="Helvetica Neue"/>
-              </a:rPr>
-              <a:t>AGENT-WRITTEN CODE</a:t>
-            </a:r>
-          </a:p>
-        </p:txBody>
-      </p:sp>
-      <p:sp>
-        <p:nvSpPr>
-          <p:cNvPr id="5" name="Rectangle 4"/>
+              <a:t>The Agent Org</a:t>
+            </a:r>
+          </a:p>
+        </p:txBody>
+      </p:sp>
+      <p:sp>
+        <p:nvSpPr>
+          <p:cNvPr id="5" name="deckkit-rule"/>
           <p:cNvSpPr/>
           <p:nvPr/>
         </p:nvSpPr>
         <p:spPr>
           <a:xfrm>
-            <a:off x="1005840" y="3291840"/>
+            <a:off x="1005840" y="2606040"/>
             <a:ext cx="2377440" cy="38100"/>
           </a:xfrm>
           <a:prstGeom prst="rect">
@@ -3299,8 +4901,8 @@
         </p:nvSpPr>
         <p:spPr>
           <a:xfrm>
-            <a:off x="1005840" y="3657600"/>
-            <a:ext cx="9692640" cy="914400"/>
+            <a:off x="1005840" y="2880360"/>
+            <a:ext cx="10149840" cy="548640"/>
           </a:xfrm>
           <a:prstGeom prst="rect">
             <a:avLst/>
@@ -3315,17 +4917,17 @@
           <a:p>
             <a:pPr algn="l">
               <a:lnSpc>
-                <a:spcPct val="135000"/>
-              </a:lnSpc>
-            </a:pPr>
-            <a:r>
-              <a:rPr sz="2000" b="0">
-                <a:solidFill>
-                  <a:srgbClr val="8B97AB"/>
+                <a:spcPct val="100000"/>
+              </a:lnSpc>
+            </a:pPr>
+            <a:r>
+              <a:rPr sz="2800" b="0">
+                <a:solidFill>
+                  <a:srgbClr val="22D3EE"/>
                 </a:solidFill>
                 <a:latin typeface="Helvetica Neue"/>
               </a:rPr>
-              <a:t>Five agents take a ticket to a pull request. Three human gates and one deterministic rule decide whether it ships.</a:t>
+              <a:t>Security gates for agent-written code</a:t>
             </a:r>
           </a:p>
         </p:txBody>
@@ -3338,8 +4940,8 @@
         </p:nvSpPr>
         <p:spPr>
           <a:xfrm>
-            <a:off x="1005840" y="5212080"/>
-            <a:ext cx="5486400" cy="365760"/>
+            <a:off x="1005840" y="3703320"/>
+            <a:ext cx="9692640" cy="822960"/>
           </a:xfrm>
           <a:prstGeom prst="rect">
             <a:avLst/>
@@ -3354,17 +4956,17 @@
           <a:p>
             <a:pPr algn="l">
               <a:lnSpc>
-                <a:spcPct val="100000"/>
-              </a:lnSpc>
-            </a:pPr>
-            <a:r>
-              <a:rPr sz="1200" b="1">
-                <a:solidFill>
-                  <a:srgbClr val="22D3EE"/>
-                </a:solidFill>
-                <a:latin typeface="Menlo"/>
-              </a:rPr>
-              <a:t>THE AGENT ORG</a:t>
+                <a:spcPct val="135000"/>
+              </a:lnSpc>
+            </a:pPr>
+            <a:r>
+              <a:rPr sz="2000" b="0">
+                <a:solidFill>
+                  <a:srgbClr val="8B97AB"/>
+                </a:solidFill>
+                <a:latin typeface="Helvetica Neue"/>
+              </a:rPr>
+              <a:t>Five agents take a ticket to a pull request. Three human gates and one deterministic rule decide whether it ships.</a:t>
             </a:r>
           </a:p>
         </p:txBody>
@@ -3377,8 +4979,8 @@
         </p:nvSpPr>
         <p:spPr>
           <a:xfrm>
-            <a:off x="1005840" y="5623560"/>
-            <a:ext cx="10149840" cy="914400"/>
+            <a:off x="1005840" y="5440680"/>
+            <a:ext cx="10149840" cy="731520"/>
           </a:xfrm>
           <a:prstGeom prst="rect">
             <a:avLst/>
@@ -3419,7 +5021,7 @@
                 </a:solidFill>
                 <a:latin typeface="Helvetica Neue"/>
               </a:rPr>
-              <a:t>Mohamed Sorour · Mariam · Habiba · Reem · Aya</a:t>
+              <a:t>Mohamed Sorour · Mariam Abdelkader · Habiba Megahed · Reem Shkeep · Aya Ebrahim</a:t>
             </a:r>
           </a:p>
         </p:txBody>
@@ -3608,7 +5210,7 @@
       </p:sp>
       <p:sp>
         <p:nvSpPr>
-          <p:cNvPr id="5" name="Rectangle 4"/>
+          <p:cNvPr id="5" name="deckkit-rule"/>
           <p:cNvSpPr/>
           <p:nvPr/>
         </p:nvSpPr>
@@ -3658,7 +5260,7 @@
         </p:nvSpPr>
         <p:spPr>
           <a:xfrm>
-            <a:off x="1005840" y="2057400"/>
+            <a:off x="1005840" y="2148840"/>
             <a:ext cx="3017520" cy="292608"/>
           </a:xfrm>
           <a:prstGeom prst="rect">
@@ -3697,7 +5299,7 @@
         </p:nvSpPr>
         <p:spPr>
           <a:xfrm>
-            <a:off x="4023360" y="2057400"/>
+            <a:off x="4023360" y="2148840"/>
             <a:ext cx="7132320" cy="292608"/>
           </a:xfrm>
           <a:prstGeom prst="rect">
@@ -3736,7 +5338,7 @@
         </p:nvSpPr>
         <p:spPr>
           <a:xfrm>
-            <a:off x="1005840" y="2386584"/>
+            <a:off x="1005840" y="2478024"/>
             <a:ext cx="10149840" cy="12700"/>
           </a:xfrm>
           <a:prstGeom prst="rect">
@@ -3780,7 +5382,7 @@
         </p:nvSpPr>
         <p:spPr>
           <a:xfrm>
-            <a:off x="1005840" y="2514600"/>
+            <a:off x="1005840" y="2606040"/>
             <a:ext cx="3017520" cy="438912"/>
           </a:xfrm>
           <a:prstGeom prst="rect">
@@ -3800,7 +5402,7 @@
               </a:lnSpc>
             </a:pPr>
             <a:r>
-              <a:rPr sz="1300" b="0">
+              <a:rPr sz="1500" b="0">
                 <a:solidFill>
                   <a:srgbClr val="E8ECF3"/>
                 </a:solidFill>
@@ -3819,7 +5421,7 @@
         </p:nvSpPr>
         <p:spPr>
           <a:xfrm>
-            <a:off x="4023360" y="2514600"/>
+            <a:off x="4023360" y="2606040"/>
             <a:ext cx="7132320" cy="438912"/>
           </a:xfrm>
           <a:prstGeom prst="rect">
@@ -3839,11 +5441,11 @@
               </a:lnSpc>
             </a:pPr>
             <a:r>
-              <a:rPr sz="1300" b="0">
+              <a:rPr sz="1500" b="0">
                 <a:solidFill>
                   <a:srgbClr val="8B97AB"/>
                 </a:solidFill>
-                <a:latin typeface="Menlo"/>
+                <a:latin typeface="Helvetica Neue"/>
               </a:rPr>
               <a:t>“will not block merging changes”</a:t>
             </a:r>
@@ -3858,7 +5460,7 @@
         </p:nvSpPr>
         <p:spPr>
           <a:xfrm>
-            <a:off x="1005840" y="2953512"/>
+            <a:off x="1005840" y="3044952"/>
             <a:ext cx="3017520" cy="438912"/>
           </a:xfrm>
           <a:prstGeom prst="rect">
@@ -3878,7 +5480,7 @@
               </a:lnSpc>
             </a:pPr>
             <a:r>
-              <a:rPr sz="1300" b="0">
+              <a:rPr sz="1500" b="0">
                 <a:solidFill>
                   <a:srgbClr val="E8ECF3"/>
                 </a:solidFill>
@@ -3897,7 +5499,7 @@
         </p:nvSpPr>
         <p:spPr>
           <a:xfrm>
-            <a:off x="4023360" y="2953512"/>
+            <a:off x="4023360" y="3044952"/>
             <a:ext cx="7132320" cy="438912"/>
           </a:xfrm>
           <a:prstGeom prst="rect">
@@ -3917,11 +5519,11 @@
               </a:lnSpc>
             </a:pPr>
             <a:r>
-              <a:rPr sz="1300" b="0">
+              <a:rPr sz="1500" b="0">
                 <a:solidFill>
                   <a:srgbClr val="8B97AB"/>
                 </a:solidFill>
-                <a:latin typeface="Menlo"/>
+                <a:latin typeface="Helvetica Neue"/>
               </a:rPr>
               <a:t>“always completes with a neutral conclusion so it never blocks”</a:t>
             </a:r>
@@ -3936,7 +5538,7 @@
         </p:nvSpPr>
         <p:spPr>
           <a:xfrm>
-            <a:off x="1005840" y="3392424"/>
+            <a:off x="1005840" y="3483864"/>
             <a:ext cx="3017520" cy="438912"/>
           </a:xfrm>
           <a:prstGeom prst="rect">
@@ -3956,7 +5558,7 @@
               </a:lnSpc>
             </a:pPr>
             <a:r>
-              <a:rPr sz="1300" b="0">
+              <a:rPr sz="1500" b="0">
                 <a:solidFill>
                   <a:srgbClr val="E8ECF3"/>
                 </a:solidFill>
@@ -3975,7 +5577,7 @@
         </p:nvSpPr>
         <p:spPr>
           <a:xfrm>
-            <a:off x="4023360" y="3392424"/>
+            <a:off x="4023360" y="3483864"/>
             <a:ext cx="7132320" cy="438912"/>
           </a:xfrm>
           <a:prstGeom prst="rect">
@@ -3995,11 +5597,11 @@
               </a:lnSpc>
             </a:pPr>
             <a:r>
-              <a:rPr sz="1300" b="0">
+              <a:rPr sz="1500" b="0">
                 <a:solidFill>
                   <a:srgbClr val="8B97AB"/>
                 </a:solidFill>
-                <a:latin typeface="Menlo"/>
+                <a:latin typeface="Helvetica Neue"/>
               </a:rPr>
               <a:t>“don't replace tests, branch protections, or required approvals”</a:t>
             </a:r>
@@ -4014,7 +5616,7 @@
         </p:nvSpPr>
         <p:spPr>
           <a:xfrm>
-            <a:off x="1005840" y="3831336"/>
+            <a:off x="1005840" y="3922776"/>
             <a:ext cx="3017520" cy="438912"/>
           </a:xfrm>
           <a:prstGeom prst="rect">
@@ -4034,7 +5636,7 @@
               </a:lnSpc>
             </a:pPr>
             <a:r>
-              <a:rPr sz="1300" b="0">
+              <a:rPr sz="1500" b="0">
                 <a:solidFill>
                   <a:srgbClr val="E8ECF3"/>
                 </a:solidFill>
@@ -4053,7 +5655,7 @@
         </p:nvSpPr>
         <p:spPr>
           <a:xfrm>
-            <a:off x="4023360" y="3831336"/>
+            <a:off x="4023360" y="3922776"/>
             <a:ext cx="7132320" cy="438912"/>
           </a:xfrm>
           <a:prstGeom prst="rect">
@@ -4073,13 +5675,13 @@
               </a:lnSpc>
             </a:pPr>
             <a:r>
-              <a:rPr sz="1300" b="0">
+              <a:rPr sz="1500" b="0">
                 <a:solidFill>
                   <a:srgbClr val="8B97AB"/>
                 </a:solidFill>
-                <a:latin typeface="Menlo"/>
-              </a:rPr>
-              <a:t>findings “default to neutral” — requiring the status does not block</a:t>
+                <a:latin typeface="Helvetica Neue"/>
+              </a:rPr>
+              <a:t>findings “default to neutral”</a:t>
             </a:r>
           </a:p>
         </p:txBody>
@@ -4092,7 +5694,7 @@
         </p:nvSpPr>
         <p:spPr>
           <a:xfrm>
-            <a:off x="1005840" y="4270248"/>
+            <a:off x="1005840" y="4361688"/>
             <a:ext cx="3017520" cy="438912"/>
           </a:xfrm>
           <a:prstGeom prst="rect">
@@ -4112,9 +5714,9 @@
               </a:lnSpc>
             </a:pPr>
             <a:r>
-              <a:rPr sz="1300" b="1">
-                <a:solidFill>
-                  <a:srgbClr val="22D3EE"/>
+              <a:rPr sz="1500" b="0">
+                <a:solidFill>
+                  <a:srgbClr val="E8ECF3"/>
                 </a:solidFill>
                 <a:latin typeface="Helvetica Neue"/>
               </a:rPr>
@@ -4131,7 +5733,7 @@
         </p:nvSpPr>
         <p:spPr>
           <a:xfrm>
-            <a:off x="4023360" y="4270248"/>
+            <a:off x="4023360" y="4361688"/>
             <a:ext cx="7132320" cy="438912"/>
           </a:xfrm>
           <a:prstGeom prst="rect">
@@ -4151,11 +5753,11 @@
               </a:lnSpc>
             </a:pPr>
             <a:r>
-              <a:rPr sz="1300" b="0">
-                <a:solidFill>
-                  <a:srgbClr val="22D3EE"/>
-                </a:solidFill>
-                <a:latin typeface="Menlo"/>
+              <a:rPr sz="1500" b="0">
+                <a:solidFill>
+                  <a:srgbClr val="8B97AB"/>
+                </a:solidFill>
+                <a:latin typeface="Helvetica Neue"/>
               </a:rPr>
               <a:t>“The generator cannot be the validator.”</a:t>
             </a:r>
@@ -4170,8 +5772,8 @@
         </p:nvSpPr>
         <p:spPr>
           <a:xfrm>
-            <a:off x="1005840" y="4846320"/>
-            <a:ext cx="10058400" cy="1371600"/>
+            <a:off x="1005840" y="4983480"/>
+            <a:ext cx="10058400" cy="1188720"/>
           </a:xfrm>
           <a:prstGeom prst="rect">
             <a:avLst/>
@@ -4190,13 +5792,13 @@
               </a:lnSpc>
             </a:pPr>
             <a:r>
-              <a:rPr sz="1500" b="0">
-                <a:solidFill>
-                  <a:srgbClr val="22D3EE"/>
+              <a:rPr sz="1600" b="0">
+                <a:solidFill>
+                  <a:srgbClr val="E8ECF3"/>
                 </a:solidFill>
                 <a:latin typeface="Helvetica Neue"/>
               </a:rPr>
-              <a:t>So the distinction is not that we are deterministic and they are not — Claude Code's permission rules are enforced by the harness rather than the model, and Factory blocks a commit outright. The distinction is the SEAM: every gate they ship guards a tool call inside one agent's session. Ours guards a pipeline stage between agents, with a named human reviewer, and the block is a dependency edge.</a:t>
+              <a:t>Some vendors do enforce rules outside the model: Claude Code's permission rules, Factory's commit blocks. The difference is where the check sits. Theirs guard one agent's actions; ours guards the hand-off between agents, with a named person approving each stage.</a:t>
             </a:r>
           </a:p>
         </p:txBody>
@@ -4386,20 +5988,98 @@
       </p:sp>
       <p:sp>
         <p:nvSpPr>
-          <p:cNvPr id="3" name="Rectangle 2"/>
+          <p:cNvPr id="3" name="TextBox 2"/>
+          <p:cNvSpPr txBox="1"/>
+          <p:nvPr/>
+        </p:nvSpPr>
+        <p:spPr>
+          <a:xfrm>
+            <a:off x="1005840" y="658368"/>
+            <a:ext cx="10149840" cy="292608"/>
+          </a:xfrm>
+          <a:prstGeom prst="rect">
+            <a:avLst/>
+          </a:prstGeom>
+          <a:noFill/>
+        </p:spPr>
+        <p:txBody>
+          <a:bodyPr wrap="square">
+            <a:spAutoFit/>
+          </a:bodyPr>
+          <a:lstStyle/>
+          <a:p>
+            <a:pPr algn="l">
+              <a:lnSpc>
+                <a:spcPct val="100000"/>
+              </a:lnSpc>
+            </a:pPr>
+            <a:r>
+              <a:rPr sz="1200" b="1">
+                <a:solidFill>
+                  <a:srgbClr val="22D3EE"/>
+                </a:solidFill>
+                <a:latin typeface="Helvetica Neue"/>
+              </a:rPr>
+              <a:t>DIFFERENTIATION</a:t>
+            </a:r>
+          </a:p>
+        </p:txBody>
+      </p:sp>
+      <p:sp>
+        <p:nvSpPr>
+          <p:cNvPr id="4" name="TextBox 3"/>
+          <p:cNvSpPr txBox="1"/>
+          <p:nvPr/>
+        </p:nvSpPr>
+        <p:spPr>
+          <a:xfrm>
+            <a:off x="1005840" y="1078992"/>
+            <a:ext cx="10149840" cy="914400"/>
+          </a:xfrm>
+          <a:prstGeom prst="rect">
+            <a:avLst/>
+          </a:prstGeom>
+          <a:noFill/>
+        </p:spPr>
+        <p:txBody>
+          <a:bodyPr wrap="square">
+            <a:spAutoFit/>
+          </a:bodyPr>
+          <a:lstStyle/>
+          <a:p>
+            <a:pPr algn="l">
+              <a:lnSpc>
+                <a:spcPct val="106000"/>
+              </a:lnSpc>
+            </a:pPr>
+            <a:r>
+              <a:rPr sz="3000" b="1">
+                <a:solidFill>
+                  <a:srgbClr val="E8ECF3"/>
+                </a:solidFill>
+                <a:latin typeface="Helvetica Neue"/>
+              </a:rPr>
+              <a:t>When their check breaks, the change goes through</a:t>
+            </a:r>
+          </a:p>
+        </p:txBody>
+      </p:sp>
+      <p:sp>
+        <p:nvSpPr>
+          <p:cNvPr id="5" name="deckkit-rule"/>
           <p:cNvSpPr/>
           <p:nvPr/>
         </p:nvSpPr>
         <p:spPr>
           <a:xfrm>
-            <a:off x="0" y="0"/>
-            <a:ext cx="310896" cy="6858000"/>
+            <a:off x="1005840" y="1883664"/>
+            <a:ext cx="1463040" cy="38100"/>
           </a:xfrm>
           <a:prstGeom prst="rect">
             <a:avLst/>
           </a:prstGeom>
           <a:solidFill>
-            <a:srgbClr val="FB7185"/>
+            <a:srgbClr val="22D3EE"/>
           </a:solidFill>
           <a:ln>
             <a:noFill/>
@@ -4430,101 +6110,25 @@
       </p:sp>
       <p:sp>
         <p:nvSpPr>
-          <p:cNvPr id="4" name="TextBox 3"/>
-          <p:cNvSpPr txBox="1"/>
-          <p:nvPr/>
-        </p:nvSpPr>
-        <p:spPr>
-          <a:xfrm>
-            <a:off x="1005840" y="658368"/>
-            <a:ext cx="10149840" cy="292608"/>
-          </a:xfrm>
-          <a:prstGeom prst="rect">
-            <a:avLst/>
-          </a:prstGeom>
-          <a:noFill/>
-        </p:spPr>
-        <p:txBody>
-          <a:bodyPr wrap="square">
-            <a:spAutoFit/>
-          </a:bodyPr>
-          <a:lstStyle/>
-          <a:p>
-            <a:pPr algn="l">
-              <a:lnSpc>
-                <a:spcPct val="100000"/>
-              </a:lnSpc>
-            </a:pPr>
-            <a:r>
-              <a:rPr sz="1200" b="1">
-                <a:solidFill>
-                  <a:srgbClr val="FB7185"/>
-                </a:solidFill>
-                <a:latin typeface="Helvetica Neue"/>
-              </a:rPr>
-              <a:t>DIFFERENTIATION</a:t>
-            </a:r>
-          </a:p>
-        </p:txBody>
-      </p:sp>
-      <p:sp>
-        <p:nvSpPr>
-          <p:cNvPr id="5" name="TextBox 4"/>
-          <p:cNvSpPr txBox="1"/>
-          <p:nvPr/>
-        </p:nvSpPr>
-        <p:spPr>
-          <a:xfrm>
-            <a:off x="1005840" y="1078992"/>
-            <a:ext cx="10149840" cy="914400"/>
-          </a:xfrm>
-          <a:prstGeom prst="rect">
-            <a:avLst/>
-          </a:prstGeom>
-          <a:noFill/>
-        </p:spPr>
-        <p:txBody>
-          <a:bodyPr wrap="square">
-            <a:spAutoFit/>
-          </a:bodyPr>
-          <a:lstStyle/>
-          <a:p>
-            <a:pPr algn="l">
-              <a:lnSpc>
-                <a:spcPct val="106000"/>
-              </a:lnSpc>
-            </a:pPr>
-            <a:r>
-              <a:rPr sz="3200" b="1">
-                <a:solidFill>
-                  <a:srgbClr val="E8ECF3"/>
-                </a:solidFill>
-                <a:latin typeface="Helvetica Neue"/>
-              </a:rPr>
-              <a:t>Three shipped products fail open</a:t>
-            </a:r>
-          </a:p>
-        </p:txBody>
-      </p:sp>
-      <p:sp>
-        <p:nvSpPr>
           <p:cNvPr id="6" name="Rectangle 5"/>
           <p:cNvSpPr/>
           <p:nvPr/>
         </p:nvSpPr>
         <p:spPr>
           <a:xfrm>
-            <a:off x="1005840" y="1883664"/>
-            <a:ext cx="1463040" cy="38100"/>
+            <a:off x="1005840" y="2240280"/>
+            <a:ext cx="3224784" cy="2011680"/>
           </a:xfrm>
           <a:prstGeom prst="rect">
             <a:avLst/>
           </a:prstGeom>
           <a:solidFill>
-            <a:srgbClr val="FB7185"/>
+            <a:srgbClr val="131A25"/>
           </a:solidFill>
-          <a:ln>
-            <a:noFill/>
+          <a:ln w="12700">
+            <a:solidFill>
+              <a:srgbClr val="1F2937"/>
+            </a:solidFill>
           </a:ln>
           <a:effectLst/>
         </p:spPr>
@@ -4552,14 +6156,92 @@
       </p:sp>
       <p:sp>
         <p:nvSpPr>
-          <p:cNvPr id="7" name="Rectangle 6"/>
+          <p:cNvPr id="7" name="TextBox 6"/>
+          <p:cNvSpPr txBox="1"/>
+          <p:nvPr/>
+        </p:nvSpPr>
+        <p:spPr>
+          <a:xfrm>
+            <a:off x="1188720" y="2386584"/>
+            <a:ext cx="2859024" cy="512064"/>
+          </a:xfrm>
+          <a:prstGeom prst="rect">
+            <a:avLst/>
+          </a:prstGeom>
+          <a:noFill/>
+        </p:spPr>
+        <p:txBody>
+          <a:bodyPr wrap="square">
+            <a:spAutoFit/>
+          </a:bodyPr>
+          <a:lstStyle/>
+          <a:p>
+            <a:pPr algn="l">
+              <a:lnSpc>
+                <a:spcPct val="110000"/>
+              </a:lnSpc>
+            </a:pPr>
+            <a:r>
+              <a:rPr sz="1400" b="1">
+                <a:solidFill>
+                  <a:srgbClr val="22D3EE"/>
+                </a:solidFill>
+                <a:latin typeface="Helvetica Neue"/>
+              </a:rPr>
+              <a:t>Cursor hooks</a:t>
+            </a:r>
+          </a:p>
+        </p:txBody>
+      </p:sp>
+      <p:sp>
+        <p:nvSpPr>
+          <p:cNvPr id="8" name="TextBox 7"/>
+          <p:cNvSpPr txBox="1"/>
+          <p:nvPr/>
+        </p:nvSpPr>
+        <p:spPr>
+          <a:xfrm>
+            <a:off x="1188720" y="2916936"/>
+            <a:ext cx="2859024" cy="1188720"/>
+          </a:xfrm>
+          <a:prstGeom prst="rect">
+            <a:avLst/>
+          </a:prstGeom>
+          <a:noFill/>
+        </p:spPr>
+        <p:txBody>
+          <a:bodyPr wrap="square">
+            <a:spAutoFit/>
+          </a:bodyPr>
+          <a:lstStyle/>
+          <a:p>
+            <a:pPr algn="l">
+              <a:lnSpc>
+                <a:spcPct val="130000"/>
+              </a:lnSpc>
+            </a:pPr>
+            <a:r>
+              <a:rPr sz="1400" b="0">
+                <a:solidFill>
+                  <a:srgbClr val="8B97AB"/>
+                </a:solidFill>
+                <a:latin typeface="Helvetica Neue"/>
+              </a:rPr>
+              <a:t>If a hook itself fails, the action goes ahead. Their documentation calls it “fail-open by default”.</a:t>
+            </a:r>
+          </a:p>
+        </p:txBody>
+      </p:sp>
+      <p:sp>
+        <p:nvSpPr>
+          <p:cNvPr id="9" name="Rectangle 8"/>
           <p:cNvSpPr/>
           <p:nvPr/>
         </p:nvSpPr>
         <p:spPr>
           <a:xfrm>
-            <a:off x="1005840" y="2194560"/>
-            <a:ext cx="3224784" cy="1920240"/>
+            <a:off x="4468368" y="2240280"/>
+            <a:ext cx="3224784" cy="2011680"/>
           </a:xfrm>
           <a:prstGeom prst="rect">
             <a:avLst/>
@@ -4598,13 +6280,13 @@
       </p:sp>
       <p:sp>
         <p:nvSpPr>
-          <p:cNvPr id="8" name="TextBox 7"/>
+          <p:cNvPr id="10" name="TextBox 9"/>
           <p:cNvSpPr txBox="1"/>
           <p:nvPr/>
         </p:nvSpPr>
         <p:spPr>
           <a:xfrm>
-            <a:off x="1188720" y="2340864"/>
+            <a:off x="4651248" y="2386584"/>
             <a:ext cx="2859024" cy="512064"/>
           </a:xfrm>
           <a:prstGeom prst="rect">
@@ -4630,21 +6312,21 @@
                 </a:solidFill>
                 <a:latin typeface="Helvetica Neue"/>
               </a:rPr>
-              <a:t>Cursor hooks</a:t>
-            </a:r>
-          </a:p>
-        </p:txBody>
-      </p:sp>
-      <p:sp>
-        <p:nvSpPr>
-          <p:cNvPr id="9" name="TextBox 8"/>
+              <a:t>Claude Code hooks</a:t>
+            </a:r>
+          </a:p>
+        </p:txBody>
+      </p:sp>
+      <p:sp>
+        <p:nvSpPr>
+          <p:cNvPr id="11" name="TextBox 10"/>
           <p:cNvSpPr txBox="1"/>
           <p:nvPr/>
         </p:nvSpPr>
         <p:spPr>
           <a:xfrm>
-            <a:off x="1188720" y="2871216"/>
-            <a:ext cx="2859024" cy="1097280"/>
+            <a:off x="4651248" y="2916936"/>
+            <a:ext cx="2859024" cy="1188720"/>
           </a:xfrm>
           <a:prstGeom prst="rect">
             <a:avLst/>
@@ -4663,27 +6345,27 @@
               </a:lnSpc>
             </a:pPr>
             <a:r>
-              <a:rPr sz="1300" b="0">
+              <a:rPr sz="1400" b="0">
                 <a:solidFill>
                   <a:srgbClr val="8B97AB"/>
                 </a:solidFill>
                 <a:latin typeface="Helvetica Neue"/>
               </a:rPr>
-              <a:t>exit 2 denies. “Other exit codes — hook failed, action proceeds (fail-open by default).”</a:t>
-            </a:r>
-          </a:p>
-        </p:txBody>
-      </p:sp>
-      <p:sp>
-        <p:nvSpPr>
-          <p:cNvPr id="10" name="Rectangle 9"/>
+              <a:t>Only one specific failure blocks; any other lets the action through, and “a mistyped path silently disables the gate”.</a:t>
+            </a:r>
+          </a:p>
+        </p:txBody>
+      </p:sp>
+      <p:sp>
+        <p:nvSpPr>
+          <p:cNvPr id="12" name="Rectangle 11"/>
           <p:cNvSpPr/>
           <p:nvPr/>
         </p:nvSpPr>
         <p:spPr>
           <a:xfrm>
-            <a:off x="4468368" y="2194560"/>
-            <a:ext cx="3224784" cy="1920240"/>
+            <a:off x="7930896" y="2240280"/>
+            <a:ext cx="3224784" cy="2011680"/>
           </a:xfrm>
           <a:prstGeom prst="rect">
             <a:avLst/>
@@ -4722,13 +6404,13 @@
       </p:sp>
       <p:sp>
         <p:nvSpPr>
-          <p:cNvPr id="11" name="TextBox 10"/>
+          <p:cNvPr id="13" name="TextBox 12"/>
           <p:cNvSpPr txBox="1"/>
           <p:nvPr/>
         </p:nvSpPr>
         <p:spPr>
           <a:xfrm>
-            <a:off x="4651248" y="2340864"/>
+            <a:off x="8113776" y="2386584"/>
             <a:ext cx="2859024" cy="512064"/>
           </a:xfrm>
           <a:prstGeom prst="rect">
@@ -4754,21 +6436,21 @@
                 </a:solidFill>
                 <a:latin typeface="Helvetica Neue"/>
               </a:rPr>
-              <a:t>Claude Code hooks</a:t>
-            </a:r>
-          </a:p>
-        </p:txBody>
-      </p:sp>
-      <p:sp>
-        <p:nvSpPr>
-          <p:cNvPr id="12" name="TextBox 11"/>
+              <a:t>Semgrep</a:t>
+            </a:r>
+          </a:p>
+        </p:txBody>
+      </p:sp>
+      <p:sp>
+        <p:nvSpPr>
+          <p:cNvPr id="14" name="TextBox 13"/>
           <p:cNvSpPr txBox="1"/>
           <p:nvPr/>
         </p:nvSpPr>
         <p:spPr>
           <a:xfrm>
-            <a:off x="4651248" y="2871216"/>
-            <a:ext cx="2859024" cy="1097280"/>
+            <a:off x="8113776" y="2916936"/>
+            <a:ext cx="2859024" cy="1188720"/>
           </a:xfrm>
           <a:prstGeom prst="rect">
             <a:avLst/>
@@ -4787,73 +6469,27 @@
               </a:lnSpc>
             </a:pPr>
             <a:r>
-              <a:rPr sz="1300" b="0">
+              <a:rPr sz="1400" b="0">
                 <a:solidFill>
                   <a:srgbClr val="8B97AB"/>
                 </a:solidFill>
                 <a:latin typeface="Helvetica Neue"/>
               </a:rPr>
-              <a:t>exit 2 blocks and cannot be overridden. Exit 1 does not block, and “a mistyped path silently disables the gate”.</a:t>
-            </a:r>
-          </a:p>
-        </p:txBody>
-      </p:sp>
-      <p:sp>
-        <p:nvSpPr>
-          <p:cNvPr id="13" name="Rectangle 12"/>
-          <p:cNvSpPr/>
-          <p:nvPr/>
-        </p:nvSpPr>
-        <p:spPr>
-          <a:xfrm>
-            <a:off x="7930896" y="2194560"/>
-            <a:ext cx="3224784" cy="1920240"/>
-          </a:xfrm>
-          <a:prstGeom prst="rect">
-            <a:avLst/>
-          </a:prstGeom>
-          <a:solidFill>
-            <a:srgbClr val="131A25"/>
-          </a:solidFill>
-          <a:ln w="12700">
-            <a:solidFill>
-              <a:srgbClr val="1F2937"/>
-            </a:solidFill>
-          </a:ln>
-          <a:effectLst/>
-        </p:spPr>
-        <p:style>
-          <a:lnRef idx="1">
-            <a:schemeClr val="accent1"/>
-          </a:lnRef>
-          <a:fillRef idx="3">
-            <a:schemeClr val="accent1"/>
-          </a:fillRef>
-          <a:effectRef idx="2">
-            <a:schemeClr val="accent1"/>
-          </a:effectRef>
-          <a:fontRef idx="minor">
-            <a:schemeClr val="lt1"/>
-          </a:fontRef>
-        </p:style>
-        <p:txBody>
-          <a:bodyPr rtlCol="0" anchor="ctr"/>
-          <a:lstStyle/>
-          <a:p>
-            <a:pPr algn="ctr"/>
-          </a:p>
-        </p:txBody>
-      </p:sp>
-      <p:sp>
-        <p:nvSpPr>
-          <p:cNvPr id="14" name="TextBox 13"/>
+              <a:t>If the scanner crashes, it reports success. A crash looks exactly like a clean scan.</a:t>
+            </a:r>
+          </a:p>
+        </p:txBody>
+      </p:sp>
+      <p:sp>
+        <p:nvSpPr>
+          <p:cNvPr id="15" name="TextBox 14"/>
           <p:cNvSpPr txBox="1"/>
           <p:nvPr/>
         </p:nvSpPr>
         <p:spPr>
           <a:xfrm>
-            <a:off x="8113776" y="2340864"/>
-            <a:ext cx="2859024" cy="512064"/>
+            <a:off x="1005840" y="4709160"/>
+            <a:ext cx="10058400" cy="1097280"/>
           </a:xfrm>
           <a:prstGeom prst="rect">
             <a:avLst/>
@@ -4868,95 +6504,17 @@
           <a:p>
             <a:pPr algn="l">
               <a:lnSpc>
-                <a:spcPct val="110000"/>
-              </a:lnSpc>
-            </a:pPr>
-            <a:r>
-              <a:rPr sz="1400" b="1">
-                <a:solidFill>
-                  <a:srgbClr val="22D3EE"/>
+                <a:spcPct val="135000"/>
+              </a:lnSpc>
+            </a:pPr>
+            <a:r>
+              <a:rPr sz="1800" b="0">
+                <a:solidFill>
+                  <a:srgbClr val="E8ECF3"/>
                 </a:solidFill>
                 <a:latin typeface="Helvetica Neue"/>
               </a:rPr>
-              <a:t>Semgrep</a:t>
-            </a:r>
-          </a:p>
-        </p:txBody>
-      </p:sp>
-      <p:sp>
-        <p:nvSpPr>
-          <p:cNvPr id="15" name="TextBox 14"/>
-          <p:cNvSpPr txBox="1"/>
-          <p:nvPr/>
-        </p:nvSpPr>
-        <p:spPr>
-          <a:xfrm>
-            <a:off x="8113776" y="2871216"/>
-            <a:ext cx="2859024" cy="1097280"/>
-          </a:xfrm>
-          <a:prstGeom prst="rect">
-            <a:avLst/>
-          </a:prstGeom>
-          <a:noFill/>
-        </p:spPr>
-        <p:txBody>
-          <a:bodyPr wrap="square">
-            <a:spAutoFit/>
-          </a:bodyPr>
-          <a:lstStyle/>
-          <a:p>
-            <a:pPr algn="l">
-              <a:lnSpc>
-                <a:spcPct val="130000"/>
-              </a:lnSpc>
-            </a:pPr>
-            <a:r>
-              <a:rPr sz="1300" b="0">
-                <a:solidFill>
-                  <a:srgbClr val="8B97AB"/>
-                </a:solidFill>
-                <a:latin typeface="Helvetica Neue"/>
-              </a:rPr>
-              <a:t>on an internal crash it “sends an anonymous crash report… and returns exit code 0”.</a:t>
-            </a:r>
-          </a:p>
-        </p:txBody>
-      </p:sp>
-      <p:sp>
-        <p:nvSpPr>
-          <p:cNvPr id="16" name="TextBox 15"/>
-          <p:cNvSpPr txBox="1"/>
-          <p:nvPr/>
-        </p:nvSpPr>
-        <p:spPr>
-          <a:xfrm>
-            <a:off x="1005840" y="4663440"/>
-            <a:ext cx="10058400" cy="1097280"/>
-          </a:xfrm>
-          <a:prstGeom prst="rect">
-            <a:avLst/>
-          </a:prstGeom>
-          <a:noFill/>
-        </p:spPr>
-        <p:txBody>
-          <a:bodyPr wrap="square">
-            <a:spAutoFit/>
-          </a:bodyPr>
-          <a:lstStyle/>
-          <a:p>
-            <a:pPr algn="l">
-              <a:lnSpc>
-                <a:spcPct val="135000"/>
-              </a:lnSpc>
-            </a:pPr>
-            <a:r>
-              <a:rPr sz="1600" b="0">
-                <a:solidFill>
-                  <a:srgbClr val="E8ECF3"/>
-                </a:solidFill>
-                <a:latin typeface="Helvetica Neue"/>
-              </a:rPr>
-              <a:t>A check that did not run, reading as a check that passed. That is the single defect shape this project is built to refuse — which is why a missing scanner raises here rather than returning an empty list, and why an empty list of findings can never be produced by a failure.</a:t>
+              <a:t>A check that did not run, reading as a check that passed. That is the failure this project is built to refuse: in our pipeline a missing or crashed scanner blocks the change.</a:t>
             </a:r>
           </a:p>
         </p:txBody>
@@ -5006,7 +6564,7 @@
     <a:masterClrMapping/>
   </p:clrMapOvr>
   <p:transition spd="med">
-    <p:fade/>
+    <p:wipe dir="l"/>
   </p:transition>
   <p:timing>
     <p:tnLst>
@@ -5038,7 +6596,7 @@
                                       <p:cBhvr>
                                         <p:cTn id="13" dur="1" fill="hold"/>
                                         <p:tgtEl>
-                                          <p:spTgt spid="7"/>
+                                          <p:spTgt spid="6"/>
                                         </p:tgtEl>
                                         <p:attrNameLst>
                                           <p:attrName>style.visibility</p:attrName>
@@ -5052,7 +6610,7 @@
                                       <p:cBhvr>
                                         <p:cTn id="14" dur="450"/>
                                         <p:tgtEl>
-                                          <p:spTgt spid="7"/>
+                                          <p:spTgt spid="6"/>
                                         </p:tgtEl>
                                       </p:cBhvr>
                                     </p:animEffect>
@@ -5087,7 +6645,7 @@
                                       <p:cBhvr>
                                         <p:cTn id="23" dur="1" fill="hold"/>
                                         <p:tgtEl>
-                                          <p:spTgt spid="8"/>
+                                          <p:spTgt spid="7"/>
                                         </p:tgtEl>
                                         <p:attrNameLst>
                                           <p:attrName>style.visibility</p:attrName>
@@ -5101,7 +6659,7 @@
                                       <p:cBhvr>
                                         <p:cTn id="24" dur="450"/>
                                         <p:tgtEl>
-                                          <p:spTgt spid="8"/>
+                                          <p:spTgt spid="7"/>
                                         </p:tgtEl>
                                       </p:cBhvr>
                                     </p:animEffect>
@@ -5136,7 +6694,7 @@
                                       <p:cBhvr>
                                         <p:cTn id="33" dur="1" fill="hold"/>
                                         <p:tgtEl>
-                                          <p:spTgt spid="9"/>
+                                          <p:spTgt spid="8"/>
                                         </p:tgtEl>
                                         <p:attrNameLst>
                                           <p:attrName>style.visibility</p:attrName>
@@ -5150,7 +6708,7 @@
                                       <p:cBhvr>
                                         <p:cTn id="34" dur="450"/>
                                         <p:tgtEl>
-                                          <p:spTgt spid="9"/>
+                                          <p:spTgt spid="8"/>
                                         </p:tgtEl>
                                       </p:cBhvr>
                                     </p:animEffect>
@@ -5185,7 +6743,7 @@
                                       <p:cBhvr>
                                         <p:cTn id="43" dur="1" fill="hold"/>
                                         <p:tgtEl>
-                                          <p:spTgt spid="10"/>
+                                          <p:spTgt spid="9"/>
                                         </p:tgtEl>
                                         <p:attrNameLst>
                                           <p:attrName>style.visibility</p:attrName>
@@ -5199,7 +6757,7 @@
                                       <p:cBhvr>
                                         <p:cTn id="44" dur="450"/>
                                         <p:tgtEl>
-                                          <p:spTgt spid="10"/>
+                                          <p:spTgt spid="9"/>
                                         </p:tgtEl>
                                       </p:cBhvr>
                                     </p:animEffect>
@@ -5234,7 +6792,7 @@
                                       <p:cBhvr>
                                         <p:cTn id="53" dur="1" fill="hold"/>
                                         <p:tgtEl>
-                                          <p:spTgt spid="11"/>
+                                          <p:spTgt spid="10"/>
                                         </p:tgtEl>
                                         <p:attrNameLst>
                                           <p:attrName>style.visibility</p:attrName>
@@ -5248,7 +6806,7 @@
                                       <p:cBhvr>
                                         <p:cTn id="54" dur="450"/>
                                         <p:tgtEl>
-                                          <p:spTgt spid="11"/>
+                                          <p:spTgt spid="10"/>
                                         </p:tgtEl>
                                       </p:cBhvr>
                                     </p:animEffect>
@@ -5283,7 +6841,7 @@
                                       <p:cBhvr>
                                         <p:cTn id="63" dur="1" fill="hold"/>
                                         <p:tgtEl>
-                                          <p:spTgt spid="12"/>
+                                          <p:spTgt spid="11"/>
                                         </p:tgtEl>
                                         <p:attrNameLst>
                                           <p:attrName>style.visibility</p:attrName>
@@ -5297,7 +6855,7 @@
                                       <p:cBhvr>
                                         <p:cTn id="64" dur="450"/>
                                         <p:tgtEl>
-                                          <p:spTgt spid="12"/>
+                                          <p:spTgt spid="11"/>
                                         </p:tgtEl>
                                       </p:cBhvr>
                                     </p:animEffect>
@@ -5332,7 +6890,7 @@
                                       <p:cBhvr>
                                         <p:cTn id="73" dur="1" fill="hold"/>
                                         <p:tgtEl>
-                                          <p:spTgt spid="13"/>
+                                          <p:spTgt spid="12"/>
                                         </p:tgtEl>
                                         <p:attrNameLst>
                                           <p:attrName>style.visibility</p:attrName>
@@ -5346,7 +6904,7 @@
                                       <p:cBhvr>
                                         <p:cTn id="74" dur="450"/>
                                         <p:tgtEl>
-                                          <p:spTgt spid="13"/>
+                                          <p:spTgt spid="12"/>
                                         </p:tgtEl>
                                       </p:cBhvr>
                                     </p:animEffect>
@@ -5381,7 +6939,7 @@
                                       <p:cBhvr>
                                         <p:cTn id="83" dur="1" fill="hold"/>
                                         <p:tgtEl>
-                                          <p:spTgt spid="14"/>
+                                          <p:spTgt spid="13"/>
                                         </p:tgtEl>
                                         <p:attrNameLst>
                                           <p:attrName>style.visibility</p:attrName>
@@ -5395,7 +6953,7 @@
                                       <p:cBhvr>
                                         <p:cTn id="84" dur="450"/>
                                         <p:tgtEl>
-                                          <p:spTgt spid="14"/>
+                                          <p:spTgt spid="13"/>
                                         </p:tgtEl>
                                       </p:cBhvr>
                                     </p:animEffect>
@@ -5430,7 +6988,7 @@
                                       <p:cBhvr>
                                         <p:cTn id="93" dur="1" fill="hold"/>
                                         <p:tgtEl>
-                                          <p:spTgt spid="15"/>
+                                          <p:spTgt spid="14"/>
                                         </p:tgtEl>
                                         <p:attrNameLst>
                                           <p:attrName>style.visibility</p:attrName>
@@ -5444,7 +7002,7 @@
                                       <p:cBhvr>
                                         <p:cTn id="94" dur="450"/>
                                         <p:tgtEl>
-                                          <p:spTgt spid="15"/>
+                                          <p:spTgt spid="14"/>
                                         </p:tgtEl>
                                       </p:cBhvr>
                                     </p:animEffect>
@@ -5479,7 +7037,7 @@
                                       <p:cBhvr>
                                         <p:cTn id="103" dur="1" fill="hold"/>
                                         <p:tgtEl>
-                                          <p:spTgt spid="16"/>
+                                          <p:spTgt spid="15"/>
                                         </p:tgtEl>
                                         <p:attrNameLst>
                                           <p:attrName>style.visibility</p:attrName>
@@ -5493,7 +7051,7 @@
                                       <p:cBhvr>
                                         <p:cTn id="104" dur="450"/>
                                         <p:tgtEl>
-                                          <p:spTgt spid="16"/>
+                                          <p:spTgt spid="15"/>
                                         </p:tgtEl>
                                       </p:cBhvr>
                                     </p:animEffect>
@@ -5665,7 +7223,7 @@
       </p:sp>
       <p:sp>
         <p:nvSpPr>
-          <p:cNvPr id="5" name="Rectangle 4"/>
+          <p:cNvPr id="5" name="deckkit-rule"/>
           <p:cNvSpPr/>
           <p:nvPr/>
         </p:nvSpPr>
@@ -5715,7 +7273,7 @@
         </p:nvSpPr>
         <p:spPr>
           <a:xfrm>
-            <a:off x="1005840" y="1920240"/>
+            <a:off x="1005840" y="2148840"/>
             <a:ext cx="3108960" cy="841248"/>
           </a:xfrm>
           <a:prstGeom prst="rect">
@@ -5737,7 +7295,7 @@
             <a:r>
               <a:rPr sz="4000" b="1">
                 <a:solidFill>
-                  <a:srgbClr val="6EE7B7"/>
+                  <a:srgbClr val="22D3EE"/>
                 </a:solidFill>
                 <a:latin typeface="Helvetica Neue"/>
               </a:rPr>
@@ -5754,7 +7312,7 @@
         </p:nvSpPr>
         <p:spPr>
           <a:xfrm>
-            <a:off x="1005840" y="2706624"/>
+            <a:off x="1005840" y="2935224"/>
             <a:ext cx="3108960" cy="749808"/>
           </a:xfrm>
           <a:prstGeom prst="rect">
@@ -5809,7 +7367,7 @@
         </p:nvSpPr>
         <p:spPr>
           <a:xfrm>
-            <a:off x="4389120" y="1920240"/>
+            <a:off x="4389120" y="2148840"/>
             <a:ext cx="3108960" cy="841248"/>
           </a:xfrm>
           <a:prstGeom prst="rect">
@@ -5831,7 +7389,7 @@
             <a:r>
               <a:rPr sz="4000" b="1">
                 <a:solidFill>
-                  <a:srgbClr val="6EE7B7"/>
+                  <a:srgbClr val="22D3EE"/>
                 </a:solidFill>
                 <a:latin typeface="Helvetica Neue"/>
               </a:rPr>
@@ -5848,7 +7406,7 @@
         </p:nvSpPr>
         <p:spPr>
           <a:xfrm>
-            <a:off x="4389120" y="2706624"/>
+            <a:off x="4389120" y="2935224"/>
             <a:ext cx="3108960" cy="749808"/>
           </a:xfrm>
           <a:prstGeom prst="rect">
@@ -5903,7 +7461,7 @@
         </p:nvSpPr>
         <p:spPr>
           <a:xfrm>
-            <a:off x="7680960" y="1920240"/>
+            <a:off x="7680960" y="2148840"/>
             <a:ext cx="3108960" cy="841248"/>
           </a:xfrm>
           <a:prstGeom prst="rect">
@@ -5942,7 +7500,7 @@
         </p:nvSpPr>
         <p:spPr>
           <a:xfrm>
-            <a:off x="7680960" y="2706624"/>
+            <a:off x="7680960" y="2935224"/>
             <a:ext cx="3108960" cy="749808"/>
           </a:xfrm>
           <a:prstGeom prst="rect">
@@ -5984,7 +7542,7 @@
                 </a:solidFill>
                 <a:latin typeface="Helvetica Neue"/>
               </a:rPr>
-              <a:t>all READY, one version</a:t>
+              <a:t>all ready, one version</a:t>
             </a:r>
           </a:p>
         </p:txBody>
@@ -5997,7 +7555,7 @@
         </p:nvSpPr>
         <p:spPr>
           <a:xfrm>
-            <a:off x="1005840" y="3794760"/>
+            <a:off x="1005840" y="3977639"/>
             <a:ext cx="3224784" cy="1874519"/>
           </a:xfrm>
           <a:prstGeom prst="rect">
@@ -6043,7 +7601,7 @@
         </p:nvSpPr>
         <p:spPr>
           <a:xfrm>
-            <a:off x="1188720" y="3941064"/>
+            <a:off x="1188720" y="4123943"/>
             <a:ext cx="2859024" cy="512064"/>
           </a:xfrm>
           <a:prstGeom prst="rect">
@@ -6082,7 +7640,7 @@
         </p:nvSpPr>
         <p:spPr>
           <a:xfrm>
-            <a:off x="1188720" y="4471416"/>
+            <a:off x="1188720" y="4654295"/>
             <a:ext cx="2859024" cy="1051559"/>
           </a:xfrm>
           <a:prstGeom prst="rect">
@@ -6108,7 +7666,7 @@
                 </a:solidFill>
                 <a:latin typeface="Helvetica Neue"/>
               </a:rPr>
-              <a:t>An issue triggers a Lambda, an event bus dispatches the pipeline, five runtimes answer, three gates pause for a person.</a:t>
+              <a:t>An issue triggers a Lambda, an event bus starts the pipeline, five runtimes answer, and three gates wait for a person.</a:t>
             </a:r>
           </a:p>
         </p:txBody>
@@ -6121,7 +7679,7 @@
         </p:nvSpPr>
         <p:spPr>
           <a:xfrm>
-            <a:off x="4468368" y="3794760"/>
+            <a:off x="4468368" y="3977639"/>
             <a:ext cx="3224784" cy="1874519"/>
           </a:xfrm>
           <a:prstGeom prst="rect">
@@ -6167,7 +7725,7 @@
         </p:nvSpPr>
         <p:spPr>
           <a:xfrm>
-            <a:off x="4651248" y="3941064"/>
+            <a:off x="4651248" y="4123943"/>
             <a:ext cx="2859024" cy="512064"/>
           </a:xfrm>
           <a:prstGeom prst="rect">
@@ -6206,7 +7764,7 @@
         </p:nvSpPr>
         <p:spPr>
           <a:xfrm>
-            <a:off x="4651248" y="4471416"/>
+            <a:off x="4651248" y="4654295"/>
             <a:ext cx="2859024" cy="1051559"/>
           </a:xfrm>
           <a:prstGeom prst="rect">
@@ -6232,7 +7790,7 @@
                 </a:solidFill>
                 <a:latin typeface="Helvetica Neue"/>
               </a:rPr>
-              <a:t>Sign in with GitHub, pick a repository, start a run, watch the stages move, approve a gate, read the cost.</a:t>
+              <a:t>Sign in, pick a repository, start a run, watch each stage, approve a gate, read the cost.</a:t>
             </a:r>
           </a:p>
         </p:txBody>
@@ -6245,7 +7803,7 @@
         </p:nvSpPr>
         <p:spPr>
           <a:xfrm>
-            <a:off x="7930896" y="3794760"/>
+            <a:off x="7930896" y="3977639"/>
             <a:ext cx="3224784" cy="1874519"/>
           </a:xfrm>
           <a:prstGeom prst="rect">
@@ -6291,7 +7849,7 @@
         </p:nvSpPr>
         <p:spPr>
           <a:xfrm>
-            <a:off x="8113776" y="3941064"/>
+            <a:off x="8113776" y="4123943"/>
             <a:ext cx="2859024" cy="512064"/>
           </a:xfrm>
           <a:prstGeom prst="rect">
@@ -6330,7 +7888,7 @@
         </p:nvSpPr>
         <p:spPr>
           <a:xfrm>
-            <a:off x="8113776" y="4471416"/>
+            <a:off x="8113776" y="4654295"/>
             <a:ext cx="2859024" cy="1051559"/>
           </a:xfrm>
           <a:prstGeom prst="rect">
@@ -6356,7 +7914,7 @@
                 </a:solidFill>
                 <a:latin typeface="Helvetica Neue"/>
               </a:rPr>
-              <a:t>One DynamoDB table, isolation enforced by the credential rather than by application code — AWS refuses another tenant's partition.</a:t>
+              <a:t>Each customer's data sits in its own partition, and AWS itself refuses a read of anyone else's.</a:t>
             </a:r>
           </a:p>
         </p:txBody>
@@ -7310,7 +8868,7 @@
       </p:sp>
       <p:sp>
         <p:nvSpPr>
-          <p:cNvPr id="5" name="Rectangle 4"/>
+          <p:cNvPr id="5" name="deckkit-rule"/>
           <p:cNvSpPr/>
           <p:nvPr/>
         </p:nvSpPr>
@@ -7360,8 +8918,8 @@
         </p:nvSpPr>
         <p:spPr>
           <a:xfrm>
-            <a:off x="1005840" y="1783080"/>
-            <a:ext cx="3657600" cy="292608"/>
+            <a:off x="1005840" y="2103120"/>
+            <a:ext cx="3474720" cy="292608"/>
           </a:xfrm>
           <a:prstGeom prst="rect">
             <a:avLst/>
@@ -7399,8 +8957,8 @@
         </p:nvSpPr>
         <p:spPr>
           <a:xfrm>
-            <a:off x="4663440" y="1783080"/>
-            <a:ext cx="6492240" cy="292608"/>
+            <a:off x="4480560" y="2103120"/>
+            <a:ext cx="6675120" cy="292608"/>
           </a:xfrm>
           <a:prstGeom prst="rect">
             <a:avLst/>
@@ -7438,7 +8996,7 @@
         </p:nvSpPr>
         <p:spPr>
           <a:xfrm>
-            <a:off x="1005840" y="2112264"/>
+            <a:off x="1005840" y="2432304"/>
             <a:ext cx="10149840" cy="12700"/>
           </a:xfrm>
           <a:prstGeom prst="rect">
@@ -7482,8 +9040,8 @@
         </p:nvSpPr>
         <p:spPr>
           <a:xfrm>
-            <a:off x="1005840" y="2240280"/>
-            <a:ext cx="3657600" cy="384048"/>
+            <a:off x="1005840" y="2560320"/>
+            <a:ext cx="3474720" cy="384048"/>
           </a:xfrm>
           <a:prstGeom prst="rect">
             <a:avLst/>
@@ -7502,7 +9060,7 @@
               </a:lnSpc>
             </a:pPr>
             <a:r>
-              <a:rPr sz="1200" b="0">
+              <a:rPr sz="1300" b="0">
                 <a:solidFill>
                   <a:srgbClr val="E8ECF3"/>
                 </a:solidFill>
@@ -7521,8 +9079,8 @@
         </p:nvSpPr>
         <p:spPr>
           <a:xfrm>
-            <a:off x="4663440" y="2240280"/>
-            <a:ext cx="6492240" cy="384048"/>
+            <a:off x="4480560" y="2560320"/>
+            <a:ext cx="6675120" cy="384048"/>
           </a:xfrm>
           <a:prstGeom prst="rect">
             <a:avLst/>
@@ -7541,13 +9099,13 @@
               </a:lnSpc>
             </a:pPr>
             <a:r>
-              <a:rPr sz="1200" b="0">
+              <a:rPr sz="1300" b="0">
                 <a:solidFill>
                   <a:srgbClr val="8B97AB"/>
                 </a:solidFill>
-                <a:latin typeface="Menlo"/>
-              </a:rPr>
-              <a:t>measured arms — a reviewer's miss rate moved 6/8 → 8/8</a:t>
+                <a:latin typeface="Helvetica Neue"/>
+              </a:rPr>
+              <a:t>measured before and after: plan-mismatch catches went 6/8 → 8/8</a:t>
             </a:r>
           </a:p>
         </p:txBody>
@@ -7560,8 +9118,8 @@
         </p:nvSpPr>
         <p:spPr>
           <a:xfrm>
-            <a:off x="1005840" y="2624328"/>
-            <a:ext cx="3657600" cy="384048"/>
+            <a:off x="1005840" y="2944368"/>
+            <a:ext cx="3474720" cy="384048"/>
           </a:xfrm>
           <a:prstGeom prst="rect">
             <a:avLst/>
@@ -7580,7 +9138,7 @@
               </a:lnSpc>
             </a:pPr>
             <a:r>
-              <a:rPr sz="1200" b="0">
+              <a:rPr sz="1300" b="0">
                 <a:solidFill>
                   <a:srgbClr val="E8ECF3"/>
                 </a:solidFill>
@@ -7599,8 +9157,8 @@
         </p:nvSpPr>
         <p:spPr>
           <a:xfrm>
-            <a:off x="4663440" y="2624328"/>
-            <a:ext cx="6492240" cy="384048"/>
+            <a:off x="4480560" y="2944368"/>
+            <a:ext cx="6675120" cy="384048"/>
           </a:xfrm>
           <a:prstGeom prst="rect">
             <a:avLst/>
@@ -7619,13 +9177,13 @@
               </a:lnSpc>
             </a:pPr>
             <a:r>
-              <a:rPr sz="1200" b="0">
+              <a:rPr sz="1300" b="0">
                 <a:solidFill>
                   <a:srgbClr val="8B97AB"/>
                 </a:solidFill>
-                <a:latin typeface="Menlo"/>
-              </a:rPr>
-              <a:t>$0.013–0.017 per change, priced from the AWS Pricing API</a:t>
+                <a:latin typeface="Helvetica Neue"/>
+              </a:rPr>
+              <a:t>1.3–1.7¢ of model time per change, priced from the AWS Pricing API</a:t>
             </a:r>
           </a:p>
         </p:txBody>
@@ -7638,8 +9196,8 @@
         </p:nvSpPr>
         <p:spPr>
           <a:xfrm>
-            <a:off x="1005840" y="3008376"/>
-            <a:ext cx="3657600" cy="384048"/>
+            <a:off x="1005840" y="3328416"/>
+            <a:ext cx="3474720" cy="384048"/>
           </a:xfrm>
           <a:prstGeom prst="rect">
             <a:avLst/>
@@ -7658,7 +9216,7 @@
               </a:lnSpc>
             </a:pPr>
             <a:r>
-              <a:rPr sz="1200" b="0">
+              <a:rPr sz="1300" b="0">
                 <a:solidFill>
                   <a:srgbClr val="E8ECF3"/>
                 </a:solidFill>
@@ -7677,8 +9235,8 @@
         </p:nvSpPr>
         <p:spPr>
           <a:xfrm>
-            <a:off x="4663440" y="3008376"/>
-            <a:ext cx="6492240" cy="384048"/>
+            <a:off x="4480560" y="3328416"/>
+            <a:ext cx="6675120" cy="384048"/>
           </a:xfrm>
           <a:prstGeom prst="rect">
             <a:avLst/>
@@ -7697,13 +9255,13 @@
               </a:lnSpc>
             </a:pPr>
             <a:r>
-              <a:rPr sz="1200" b="0">
+              <a:rPr sz="1300" b="0">
                 <a:solidFill>
                   <a:srgbClr val="8B97AB"/>
                 </a:solidFill>
-                <a:latin typeface="Menlo"/>
-              </a:rPr>
-              <a:t>1 of 50 modules import a vendor at module level</a:t>
+                <a:latin typeface="Helvetica Neue"/>
+              </a:rPr>
+              <a:t>8 of 83 modules touch a vendor SDK; 2 load one at start-up</a:t>
             </a:r>
           </a:p>
         </p:txBody>
@@ -7716,8 +9274,8 @@
         </p:nvSpPr>
         <p:spPr>
           <a:xfrm>
-            <a:off x="1005840" y="3392424"/>
-            <a:ext cx="3657600" cy="384048"/>
+            <a:off x="1005840" y="3712464"/>
+            <a:ext cx="3474720" cy="384048"/>
           </a:xfrm>
           <a:prstGeom prst="rect">
             <a:avLst/>
@@ -7736,7 +9294,7 @@
               </a:lnSpc>
             </a:pPr>
             <a:r>
-              <a:rPr sz="1200" b="0">
+              <a:rPr sz="1300" b="0">
                 <a:solidFill>
                   <a:srgbClr val="E8ECF3"/>
                 </a:solidFill>
@@ -7755,8 +9313,8 @@
         </p:nvSpPr>
         <p:spPr>
           <a:xfrm>
-            <a:off x="4663440" y="3392424"/>
-            <a:ext cx="6492240" cy="384048"/>
+            <a:off x="4480560" y="3712464"/>
+            <a:ext cx="6675120" cy="384048"/>
           </a:xfrm>
           <a:prstGeom prst="rect">
             <a:avLst/>
@@ -7775,13 +9333,13 @@
               </a:lnSpc>
             </a:pPr>
             <a:r>
-              <a:rPr sz="1200" b="0">
+              <a:rPr sz="1300" b="0">
                 <a:solidFill>
                   <a:srgbClr val="8B97AB"/>
                 </a:solidFill>
-                <a:latin typeface="Menlo"/>
-              </a:rPr>
-              <a:t>one compose file: database, API and web, verified end to end</a:t>
+                <a:latin typeface="Helvetica Neue"/>
+              </a:rPr>
+              <a:t>one compose file runs the database, the API and the web app</a:t>
             </a:r>
           </a:p>
         </p:txBody>
@@ -7794,8 +9352,8 @@
         </p:nvSpPr>
         <p:spPr>
           <a:xfrm>
-            <a:off x="1005840" y="3776472"/>
-            <a:ext cx="3657600" cy="384048"/>
+            <a:off x="1005840" y="4096512"/>
+            <a:ext cx="3474720" cy="384048"/>
           </a:xfrm>
           <a:prstGeom prst="rect">
             <a:avLst/>
@@ -7814,7 +9372,7 @@
               </a:lnSpc>
             </a:pPr>
             <a:r>
-              <a:rPr sz="1200" b="0">
+              <a:rPr sz="1300" b="0">
                 <a:solidFill>
                   <a:srgbClr val="E8ECF3"/>
                 </a:solidFill>
@@ -7833,8 +9391,8 @@
         </p:nvSpPr>
         <p:spPr>
           <a:xfrm>
-            <a:off x="4663440" y="3776472"/>
-            <a:ext cx="6492240" cy="384048"/>
+            <a:off x="4480560" y="4096512"/>
+            <a:ext cx="6675120" cy="384048"/>
           </a:xfrm>
           <a:prstGeom prst="rect">
             <a:avLst/>
@@ -7853,13 +9411,13 @@
               </a:lnSpc>
             </a:pPr>
             <a:r>
-              <a:rPr sz="1200" b="0">
+              <a:rPr sz="1300" b="0">
                 <a:solidFill>
                   <a:srgbClr val="8B97AB"/>
                 </a:solidFill>
-                <a:latin typeface="Menlo"/>
-              </a:rPr>
-              <a:t>commissioned research; five of our own claims disproved</a:t>
+                <a:latin typeface="Helvetica Neue"/>
+              </a:rPr>
+              <a:t>commissioned research, which disproved five of our own claims</a:t>
             </a:r>
           </a:p>
         </p:txBody>
@@ -7872,8 +9430,8 @@
         </p:nvSpPr>
         <p:spPr>
           <a:xfrm>
-            <a:off x="1005840" y="4160520"/>
-            <a:ext cx="3657600" cy="384048"/>
+            <a:off x="1005840" y="4480560"/>
+            <a:ext cx="3474720" cy="384048"/>
           </a:xfrm>
           <a:prstGeom prst="rect">
             <a:avLst/>
@@ -7892,9 +9450,9 @@
               </a:lnSpc>
             </a:pPr>
             <a:r>
-              <a:rPr sz="1200" b="1">
-                <a:solidFill>
-                  <a:srgbClr val="22D3EE"/>
+              <a:rPr sz="1300" b="0">
+                <a:solidFill>
+                  <a:srgbClr val="E8ECF3"/>
                 </a:solidFill>
                 <a:latin typeface="Helvetica Neue"/>
               </a:rPr>
@@ -7911,8 +9469,8 @@
         </p:nvSpPr>
         <p:spPr>
           <a:xfrm>
-            <a:off x="4663440" y="4160520"/>
-            <a:ext cx="6492240" cy="384048"/>
+            <a:off x="4480560" y="4480560"/>
+            <a:ext cx="6675120" cy="384048"/>
           </a:xfrm>
           <a:prstGeom prst="rect">
             <a:avLst/>
@@ -7931,13 +9489,13 @@
               </a:lnSpc>
             </a:pPr>
             <a:r>
-              <a:rPr sz="1200" b="0">
-                <a:solidFill>
-                  <a:srgbClr val="22D3EE"/>
-                </a:solidFill>
-                <a:latin typeface="Menlo"/>
-              </a:rPr>
-              <a:t>one policy table for three scanners — BUILT BECAUSE OF THIS NOTE</a:t>
+              <a:rPr sz="1300" b="0">
+                <a:solidFill>
+                  <a:srgbClr val="8B97AB"/>
+                </a:solidFill>
+                <a:latin typeface="Helvetica Neue"/>
+              </a:rPr>
+              <a:t>one scoring table for all three scanners, built because of this note</a:t>
             </a:r>
           </a:p>
         </p:txBody>
@@ -7950,8 +9508,8 @@
         </p:nvSpPr>
         <p:spPr>
           <a:xfrm>
-            <a:off x="1005840" y="4544568"/>
-            <a:ext cx="3657600" cy="384048"/>
+            <a:off x="1005840" y="4864608"/>
+            <a:ext cx="3474720" cy="384048"/>
           </a:xfrm>
           <a:prstGeom prst="rect">
             <a:avLst/>
@@ -7970,7 +9528,7 @@
               </a:lnSpc>
             </a:pPr>
             <a:r>
-              <a:rPr sz="1200" b="0">
+              <a:rPr sz="1300" b="0">
                 <a:solidFill>
                   <a:srgbClr val="E8ECF3"/>
                 </a:solidFill>
@@ -7989,8 +9547,8 @@
         </p:nvSpPr>
         <p:spPr>
           <a:xfrm>
-            <a:off x="4663440" y="4544568"/>
-            <a:ext cx="6492240" cy="384048"/>
+            <a:off x="4480560" y="4864608"/>
+            <a:ext cx="6675120" cy="384048"/>
           </a:xfrm>
           <a:prstGeom prst="rect">
             <a:avLst/>
@@ -8009,13 +9567,13 @@
               </a:lnSpc>
             </a:pPr>
             <a:r>
-              <a:rPr sz="1200" b="0">
+              <a:rPr sz="1300" b="0">
                 <a:solidFill>
                   <a:srgbClr val="8B97AB"/>
                 </a:solidFill>
-                <a:latin typeface="Menlo"/>
-              </a:rPr>
-              <a:t>tests generated per run; Selenium now runs in CI</a:t>
+                <a:latin typeface="Helvetica Neue"/>
+              </a:rPr>
+              <a:t>an agent writes tests from the ticket; Selenium runs in CI</a:t>
             </a:r>
           </a:p>
         </p:txBody>
@@ -8028,8 +9586,8 @@
         </p:nvSpPr>
         <p:spPr>
           <a:xfrm>
-            <a:off x="1005840" y="4928616"/>
-            <a:ext cx="3657600" cy="384048"/>
+            <a:off x="1005840" y="5248656"/>
+            <a:ext cx="3474720" cy="384048"/>
           </a:xfrm>
           <a:prstGeom prst="rect">
             <a:avLst/>
@@ -8048,7 +9606,7 @@
               </a:lnSpc>
             </a:pPr>
             <a:r>
-              <a:rPr sz="1200" b="0">
+              <a:rPr sz="1300" b="0">
                 <a:solidFill>
                   <a:srgbClr val="E8ECF3"/>
                 </a:solidFill>
@@ -8067,8 +9625,8 @@
         </p:nvSpPr>
         <p:spPr>
           <a:xfrm>
-            <a:off x="4663440" y="4928616"/>
-            <a:ext cx="6492240" cy="384048"/>
+            <a:off x="4480560" y="5248656"/>
+            <a:ext cx="6675120" cy="384048"/>
           </a:xfrm>
           <a:prstGeom prst="rect">
             <a:avLst/>
@@ -8087,13 +9645,13 @@
               </a:lnSpc>
             </a:pPr>
             <a:r>
-              <a:rPr sz="1200" b="0">
+              <a:rPr sz="1300" b="0">
                 <a:solidFill>
                   <a:srgbClr val="8B97AB"/>
                 </a:solidFill>
-                <a:latin typeface="Menlo"/>
-              </a:rPr>
-              <a:t>three curated corpora, wired into four agent prompts</a:t>
+                <a:latin typeface="Helvetica Neue"/>
+              </a:rPr>
+              <a:t>three curated knowledge bases, used by four of the agents</a:t>
             </a:r>
           </a:p>
         </p:txBody>
@@ -8106,8 +9664,8 @@
         </p:nvSpPr>
         <p:spPr>
           <a:xfrm>
-            <a:off x="1005840" y="5312664"/>
-            <a:ext cx="3657600" cy="384048"/>
+            <a:off x="1005840" y="5632704"/>
+            <a:ext cx="3474720" cy="384048"/>
           </a:xfrm>
           <a:prstGeom prst="rect">
             <a:avLst/>
@@ -8126,7 +9684,7 @@
               </a:lnSpc>
             </a:pPr>
             <a:r>
-              <a:rPr sz="1200" b="0">
+              <a:rPr sz="1300" b="0">
                 <a:solidFill>
                   <a:srgbClr val="E8ECF3"/>
                 </a:solidFill>
@@ -8145,8 +9703,8 @@
         </p:nvSpPr>
         <p:spPr>
           <a:xfrm>
-            <a:off x="4663440" y="5312664"/>
-            <a:ext cx="6492240" cy="384048"/>
+            <a:off x="4480560" y="5632704"/>
+            <a:ext cx="6675120" cy="384048"/>
           </a:xfrm>
           <a:prstGeom prst="rect">
             <a:avLst/>
@@ -8165,13 +9723,13 @@
               </a:lnSpc>
             </a:pPr>
             <a:r>
-              <a:rPr sz="1200" b="0">
+              <a:rPr sz="1300" b="0">
                 <a:solidFill>
                   <a:srgbClr val="8B97AB"/>
                 </a:solidFill>
-                <a:latin typeface="Menlo"/>
-              </a:rPr>
-              <a:t>sign-in, live run view, gate approval, cost — finished this week</a:t>
+                <a:latin typeface="Helvetica Neue"/>
+              </a:rPr>
+              <a:t>sign-in, a live view of each run, gate approval, and cost</a:t>
             </a:r>
           </a:p>
         </p:txBody>
@@ -8184,8 +9742,8 @@
         </p:nvSpPr>
         <p:spPr>
           <a:xfrm>
-            <a:off x="1005840" y="5696712"/>
-            <a:ext cx="3657600" cy="384048"/>
+            <a:off x="1005840" y="6016752"/>
+            <a:ext cx="3474720" cy="384048"/>
           </a:xfrm>
           <a:prstGeom prst="rect">
             <a:avLst/>
@@ -8204,7 +9762,7 @@
               </a:lnSpc>
             </a:pPr>
             <a:r>
-              <a:rPr sz="1200" b="0">
+              <a:rPr sz="1300" b="0">
                 <a:solidFill>
                   <a:srgbClr val="E8ECF3"/>
                 </a:solidFill>
@@ -8223,8 +9781,8 @@
         </p:nvSpPr>
         <p:spPr>
           <a:xfrm>
-            <a:off x="4663440" y="5696712"/>
-            <a:ext cx="6492240" cy="384048"/>
+            <a:off x="4480560" y="6016752"/>
+            <a:ext cx="6675120" cy="384048"/>
           </a:xfrm>
           <a:prstGeom prst="rect">
             <a:avLst/>
@@ -8243,13 +9801,13 @@
               </a:lnSpc>
             </a:pPr>
             <a:r>
-              <a:rPr sz="1200" b="0">
+              <a:rPr sz="1300" b="0">
                 <a:solidFill>
                   <a:srgbClr val="8B97AB"/>
                 </a:solidFill>
-                <a:latin typeface="Menlo"/>
-              </a:rPr>
-              <a:t>tenancy, control-plane API, per-tenant isolation</a:t>
+                <a:latin typeface="Helvetica Neue"/>
+              </a:rPr>
+              <a:t>multi-tenant, with a control-plane API and per-tenant isolation</a:t>
             </a:r>
           </a:p>
         </p:txBody>
@@ -8438,7 +9996,7 @@
       </p:sp>
       <p:sp>
         <p:nvSpPr>
-          <p:cNvPr id="5" name="Rectangle 4"/>
+          <p:cNvPr id="5" name="deckkit-rule"/>
           <p:cNvSpPr/>
           <p:nvPr/>
         </p:nvSpPr>
@@ -8488,8 +10046,8 @@
         </p:nvSpPr>
         <p:spPr>
           <a:xfrm>
-            <a:off x="1005840" y="2011680"/>
-            <a:ext cx="10149840" cy="868680"/>
+            <a:off x="1005840" y="2103120"/>
+            <a:ext cx="640080" cy="365760"/>
           </a:xfrm>
           <a:prstGeom prst="rect">
             <a:avLst/>
@@ -8508,13 +10066,13 @@
               </a:lnSpc>
             </a:pPr>
             <a:r>
-              <a:rPr sz="1600" b="0">
-                <a:solidFill>
-                  <a:srgbClr val="E8ECF3"/>
-                </a:solidFill>
-                <a:latin typeface="Helvetica Neue"/>
-              </a:rPr>
-              <a:t>A repository admin can bypass a gate. It is an operator setting, it is reported by the pre-flight check on every run, and it is not hidden.</a:t>
+              <a:rPr sz="1500" b="1">
+                <a:solidFill>
+                  <a:srgbClr val="22D3EE"/>
+                </a:solidFill>
+                <a:latin typeface="Menlo"/>
+              </a:rPr>
+              <a:t>01</a:t>
             </a:r>
           </a:p>
         </p:txBody>
@@ -8527,8 +10085,8 @@
         </p:nvSpPr>
         <p:spPr>
           <a:xfrm>
-            <a:off x="1005840" y="2880360"/>
-            <a:ext cx="10149840" cy="868680"/>
+            <a:off x="1737360" y="2103120"/>
+            <a:ext cx="3931920" cy="640080"/>
           </a:xfrm>
           <a:prstGeom prst="rect">
             <a:avLst/>
@@ -8543,17 +10101,17 @@
           <a:p>
             <a:pPr algn="l">
               <a:lnSpc>
-                <a:spcPct val="120000"/>
-              </a:lnSpc>
-            </a:pPr>
-            <a:r>
-              <a:rPr sz="1600" b="0">
+                <a:spcPct val="115000"/>
+              </a:lnSpc>
+            </a:pPr>
+            <a:r>
+              <a:rPr sz="1600" b="1">
                 <a:solidFill>
                   <a:srgbClr val="E8ECF3"/>
                 </a:solidFill>
                 <a:latin typeface="Helvetica Neue"/>
               </a:rPr>
-              <a:t>If the scanners miss something, the reviewer is the only thing that saw it — and the reviewer is advisory. Three human gates are the last line.</a:t>
+              <a:t>An admin can bypass a gate</a:t>
             </a:r>
           </a:p>
         </p:txBody>
@@ -8566,8 +10124,8 @@
         </p:nvSpPr>
         <p:spPr>
           <a:xfrm>
-            <a:off x="1005840" y="3749040"/>
-            <a:ext cx="10149840" cy="868680"/>
+            <a:off x="5852160" y="2103120"/>
+            <a:ext cx="5303520" cy="914400"/>
           </a:xfrm>
           <a:prstGeom prst="rect">
             <a:avLst/>
@@ -8582,17 +10140,17 @@
           <a:p>
             <a:pPr algn="l">
               <a:lnSpc>
-                <a:spcPct val="120000"/>
-              </a:lnSpc>
-            </a:pPr>
-            <a:r>
-              <a:rPr sz="1600" b="0">
-                <a:solidFill>
-                  <a:srgbClr val="E8ECF3"/>
+                <a:spcPct val="130000"/>
+              </a:lnSpc>
+            </a:pPr>
+            <a:r>
+              <a:rPr sz="1400" b="0">
+                <a:solidFill>
+                  <a:srgbClr val="8B97AB"/>
                 </a:solidFill>
                 <a:latin typeface="Helvetica Neue"/>
               </a:rPr>
-              <a:t>One language, one target repository, three scanners. Breadth is where every competitor is ahead.</a:t>
+              <a:t>A repository setting, not a code path. Our pre-flight check reports it on every run.</a:t>
             </a:r>
           </a:p>
         </p:txBody>
@@ -8605,8 +10163,8 @@
         </p:nvSpPr>
         <p:spPr>
           <a:xfrm>
-            <a:off x="1005840" y="4617719"/>
-            <a:ext cx="10149840" cy="868680"/>
+            <a:off x="1005840" y="3127248"/>
+            <a:ext cx="640080" cy="365760"/>
           </a:xfrm>
           <a:prstGeom prst="rect">
             <a:avLst/>
@@ -8625,20 +10183,332 @@
               </a:lnSpc>
             </a:pPr>
             <a:r>
-              <a:rPr sz="1600" b="0">
+              <a:rPr sz="1500" b="1">
+                <a:solidFill>
+                  <a:srgbClr val="22D3EE"/>
+                </a:solidFill>
+                <a:latin typeface="Menlo"/>
+              </a:rPr>
+              <a:t>02</a:t>
+            </a:r>
+          </a:p>
+        </p:txBody>
+      </p:sp>
+      <p:sp>
+        <p:nvSpPr>
+          <p:cNvPr id="10" name="TextBox 9"/>
+          <p:cNvSpPr txBox="1"/>
+          <p:nvPr/>
+        </p:nvSpPr>
+        <p:spPr>
+          <a:xfrm>
+            <a:off x="1737360" y="3127248"/>
+            <a:ext cx="3931920" cy="640080"/>
+          </a:xfrm>
+          <a:prstGeom prst="rect">
+            <a:avLst/>
+          </a:prstGeom>
+          <a:noFill/>
+        </p:spPr>
+        <p:txBody>
+          <a:bodyPr wrap="square">
+            <a:spAutoFit/>
+          </a:bodyPr>
+          <a:lstStyle/>
+          <a:p>
+            <a:pPr algn="l">
+              <a:lnSpc>
+                <a:spcPct val="115000"/>
+              </a:lnSpc>
+            </a:pPr>
+            <a:r>
+              <a:rPr sz="1600" b="1">
                 <a:solidFill>
                   <a:srgbClr val="E8ECF3"/>
                 </a:solidFill>
                 <a:latin typeface="Helvetica Neue"/>
               </a:rPr>
-              <a:t>A merged pull request carries the reviewed diff as an artifact; applying it to the source is the next step on the roadmap.</a:t>
-            </a:r>
-          </a:p>
-        </p:txBody>
-      </p:sp>
-      <p:sp>
-        <p:nvSpPr>
-          <p:cNvPr id="45" name="TextBox 44"/>
+              <a:t>The reviewer is advisory</a:t>
+            </a:r>
+          </a:p>
+        </p:txBody>
+      </p:sp>
+      <p:sp>
+        <p:nvSpPr>
+          <p:cNvPr id="11" name="TextBox 10"/>
+          <p:cNvSpPr txBox="1"/>
+          <p:nvPr/>
+        </p:nvSpPr>
+        <p:spPr>
+          <a:xfrm>
+            <a:off x="5852160" y="3127248"/>
+            <a:ext cx="5303520" cy="914400"/>
+          </a:xfrm>
+          <a:prstGeom prst="rect">
+            <a:avLst/>
+          </a:prstGeom>
+          <a:noFill/>
+        </p:spPr>
+        <p:txBody>
+          <a:bodyPr wrap="square">
+            <a:spAutoFit/>
+          </a:bodyPr>
+          <a:lstStyle/>
+          <a:p>
+            <a:pPr algn="l">
+              <a:lnSpc>
+                <a:spcPct val="130000"/>
+              </a:lnSpc>
+            </a:pPr>
+            <a:r>
+              <a:rPr sz="1400" b="0">
+                <a:solidFill>
+                  <a:srgbClr val="8B97AB"/>
+                </a:solidFill>
+                <a:latin typeface="Helvetica Neue"/>
+              </a:rPr>
+              <a:t>If the scanners miss something, only the reviewer saw it, and it cannot stop the run. The human gates are the last line.</a:t>
+            </a:r>
+          </a:p>
+        </p:txBody>
+      </p:sp>
+      <p:sp>
+        <p:nvSpPr>
+          <p:cNvPr id="12" name="TextBox 11"/>
+          <p:cNvSpPr txBox="1"/>
+          <p:nvPr/>
+        </p:nvSpPr>
+        <p:spPr>
+          <a:xfrm>
+            <a:off x="1005840" y="4151376"/>
+            <a:ext cx="640080" cy="365760"/>
+          </a:xfrm>
+          <a:prstGeom prst="rect">
+            <a:avLst/>
+          </a:prstGeom>
+          <a:noFill/>
+        </p:spPr>
+        <p:txBody>
+          <a:bodyPr wrap="square">
+            <a:spAutoFit/>
+          </a:bodyPr>
+          <a:lstStyle/>
+          <a:p>
+            <a:pPr algn="l">
+              <a:lnSpc>
+                <a:spcPct val="120000"/>
+              </a:lnSpc>
+            </a:pPr>
+            <a:r>
+              <a:rPr sz="1500" b="1">
+                <a:solidFill>
+                  <a:srgbClr val="22D3EE"/>
+                </a:solidFill>
+                <a:latin typeface="Menlo"/>
+              </a:rPr>
+              <a:t>03</a:t>
+            </a:r>
+          </a:p>
+        </p:txBody>
+      </p:sp>
+      <p:sp>
+        <p:nvSpPr>
+          <p:cNvPr id="13" name="TextBox 12"/>
+          <p:cNvSpPr txBox="1"/>
+          <p:nvPr/>
+        </p:nvSpPr>
+        <p:spPr>
+          <a:xfrm>
+            <a:off x="1737360" y="4151376"/>
+            <a:ext cx="3931920" cy="640080"/>
+          </a:xfrm>
+          <a:prstGeom prst="rect">
+            <a:avLst/>
+          </a:prstGeom>
+          <a:noFill/>
+        </p:spPr>
+        <p:txBody>
+          <a:bodyPr wrap="square">
+            <a:spAutoFit/>
+          </a:bodyPr>
+          <a:lstStyle/>
+          <a:p>
+            <a:pPr algn="l">
+              <a:lnSpc>
+                <a:spcPct val="115000"/>
+              </a:lnSpc>
+            </a:pPr>
+            <a:r>
+              <a:rPr sz="1600" b="1">
+                <a:solidFill>
+                  <a:srgbClr val="E8ECF3"/>
+                </a:solidFill>
+                <a:latin typeface="Helvetica Neue"/>
+              </a:rPr>
+              <a:t>One language, three scanners</a:t>
+            </a:r>
+          </a:p>
+        </p:txBody>
+      </p:sp>
+      <p:sp>
+        <p:nvSpPr>
+          <p:cNvPr id="14" name="TextBox 13"/>
+          <p:cNvSpPr txBox="1"/>
+          <p:nvPr/>
+        </p:nvSpPr>
+        <p:spPr>
+          <a:xfrm>
+            <a:off x="5852160" y="4151376"/>
+            <a:ext cx="5303520" cy="914400"/>
+          </a:xfrm>
+          <a:prstGeom prst="rect">
+            <a:avLst/>
+          </a:prstGeom>
+          <a:noFill/>
+        </p:spPr>
+        <p:txBody>
+          <a:bodyPr wrap="square">
+            <a:spAutoFit/>
+          </a:bodyPr>
+          <a:lstStyle/>
+          <a:p>
+            <a:pPr algn="l">
+              <a:lnSpc>
+                <a:spcPct val="130000"/>
+              </a:lnSpc>
+            </a:pPr>
+            <a:r>
+              <a:rPr sz="1400" b="0">
+                <a:solidFill>
+                  <a:srgbClr val="8B97AB"/>
+                </a:solidFill>
+                <a:latin typeface="Helvetica Neue"/>
+              </a:rPr>
+              <a:t>One Python target today. Breadth is where every competitor is ahead.</a:t>
+            </a:r>
+          </a:p>
+        </p:txBody>
+      </p:sp>
+      <p:sp>
+        <p:nvSpPr>
+          <p:cNvPr id="15" name="TextBox 14"/>
+          <p:cNvSpPr txBox="1"/>
+          <p:nvPr/>
+        </p:nvSpPr>
+        <p:spPr>
+          <a:xfrm>
+            <a:off x="1005840" y="5175504"/>
+            <a:ext cx="640080" cy="365760"/>
+          </a:xfrm>
+          <a:prstGeom prst="rect">
+            <a:avLst/>
+          </a:prstGeom>
+          <a:noFill/>
+        </p:spPr>
+        <p:txBody>
+          <a:bodyPr wrap="square">
+            <a:spAutoFit/>
+          </a:bodyPr>
+          <a:lstStyle/>
+          <a:p>
+            <a:pPr algn="l">
+              <a:lnSpc>
+                <a:spcPct val="120000"/>
+              </a:lnSpc>
+            </a:pPr>
+            <a:r>
+              <a:rPr sz="1500" b="1">
+                <a:solidFill>
+                  <a:srgbClr val="22D3EE"/>
+                </a:solidFill>
+                <a:latin typeface="Menlo"/>
+              </a:rPr>
+              <a:t>04</a:t>
+            </a:r>
+          </a:p>
+        </p:txBody>
+      </p:sp>
+      <p:sp>
+        <p:nvSpPr>
+          <p:cNvPr id="16" name="TextBox 15"/>
+          <p:cNvSpPr txBox="1"/>
+          <p:nvPr/>
+        </p:nvSpPr>
+        <p:spPr>
+          <a:xfrm>
+            <a:off x="1737360" y="5175504"/>
+            <a:ext cx="3931920" cy="640080"/>
+          </a:xfrm>
+          <a:prstGeom prst="rect">
+            <a:avLst/>
+          </a:prstGeom>
+          <a:noFill/>
+        </p:spPr>
+        <p:txBody>
+          <a:bodyPr wrap="square">
+            <a:spAutoFit/>
+          </a:bodyPr>
+          <a:lstStyle/>
+          <a:p>
+            <a:pPr algn="l">
+              <a:lnSpc>
+                <a:spcPct val="115000"/>
+              </a:lnSpc>
+            </a:pPr>
+            <a:r>
+              <a:rPr sz="1600" b="1">
+                <a:solidFill>
+                  <a:srgbClr val="E8ECF3"/>
+                </a:solidFill>
+                <a:latin typeface="Helvetica Neue"/>
+              </a:rPr>
+              <a:t>The change is carried, not applied</a:t>
+            </a:r>
+          </a:p>
+        </p:txBody>
+      </p:sp>
+      <p:sp>
+        <p:nvSpPr>
+          <p:cNvPr id="17" name="TextBox 16"/>
+          <p:cNvSpPr txBox="1"/>
+          <p:nvPr/>
+        </p:nvSpPr>
+        <p:spPr>
+          <a:xfrm>
+            <a:off x="5852160" y="5175504"/>
+            <a:ext cx="5303520" cy="914400"/>
+          </a:xfrm>
+          <a:prstGeom prst="rect">
+            <a:avLst/>
+          </a:prstGeom>
+          <a:noFill/>
+        </p:spPr>
+        <p:txBody>
+          <a:bodyPr wrap="square">
+            <a:spAutoFit/>
+          </a:bodyPr>
+          <a:lstStyle/>
+          <a:p>
+            <a:pPr algn="l">
+              <a:lnSpc>
+                <a:spcPct val="130000"/>
+              </a:lnSpc>
+            </a:pPr>
+            <a:r>
+              <a:rPr sz="1400" b="0">
+                <a:solidFill>
+                  <a:srgbClr val="8B97AB"/>
+                </a:solidFill>
+                <a:latin typeface="Helvetica Neue"/>
+              </a:rPr>
+              <a:t>A merged pull request carries the reviewed diff as a file. Applying it to the source is next.</a:t>
+            </a:r>
+          </a:p>
+        </p:txBody>
+      </p:sp>
+      <p:sp>
+        <p:nvSpPr>
+          <p:cNvPr id="85" name="TextBox 84"/>
           <p:cNvSpPr txBox="1"/>
           <p:nvPr/>
         </p:nvSpPr>
@@ -8811,7 +10681,7 @@
                                       <p:cBhvr>
                                         <p:cTn id="33" dur="1" fill="hold"/>
                                         <p:tgtEl>
-                                          <p:spTgt spid="8"/>
+                                          <p:spTgt spid="9"/>
                                         </p:tgtEl>
                                         <p:attrNameLst>
                                           <p:attrName>style.visibility</p:attrName>
@@ -8825,7 +10695,7 @@
                                       <p:cBhvr>
                                         <p:cTn id="34" dur="450"/>
                                         <p:tgtEl>
-                                          <p:spTgt spid="8"/>
+                                          <p:spTgt spid="9"/>
                                         </p:tgtEl>
                                       </p:cBhvr>
                                     </p:animEffect>
@@ -8860,7 +10730,7 @@
                                       <p:cBhvr>
                                         <p:cTn id="43" dur="1" fill="hold"/>
                                         <p:tgtEl>
-                                          <p:spTgt spid="9"/>
+                                          <p:spTgt spid="10"/>
                                         </p:tgtEl>
                                         <p:attrNameLst>
                                           <p:attrName>style.visibility</p:attrName>
@@ -8874,7 +10744,203 @@
                                       <p:cBhvr>
                                         <p:cTn id="44" dur="450"/>
                                         <p:tgtEl>
-                                          <p:spTgt spid="9"/>
+                                          <p:spTgt spid="10"/>
+                                        </p:tgtEl>
+                                      </p:cBhvr>
+                                    </p:animEffect>
+                                  </p:childTnLst>
+                                </p:cTn>
+                              </p:par>
+                            </p:childTnLst>
+                          </p:cTn>
+                        </p:par>
+                      </p:childTnLst>
+                    </p:cTn>
+                  </p:par>
+                  <p:par>
+                    <p:cTn id="50" fill="hold">
+                      <p:stCondLst>
+                        <p:cond delay="indefinite"/>
+                      </p:stCondLst>
+                      <p:childTnLst>
+                        <p:par>
+                          <p:cTn id="51" fill="hold">
+                            <p:stCondLst>
+                              <p:cond delay="0"/>
+                            </p:stCondLst>
+                            <p:childTnLst>
+                              <p:par>
+                                <p:cTn id="52" presetID="10" presetClass="entr" presetSubtype="0" fill="hold" grpId="0" nodeType="afterEffect">
+                                  <p:stCondLst>
+                                    <p:cond delay="0"/>
+                                  </p:stCondLst>
+                                  <p:childTnLst>
+                                    <p:set>
+                                      <p:cBhvr>
+                                        <p:cTn id="53" dur="1" fill="hold"/>
+                                        <p:tgtEl>
+                                          <p:spTgt spid="12"/>
+                                        </p:tgtEl>
+                                        <p:attrNameLst>
+                                          <p:attrName>style.visibility</p:attrName>
+                                        </p:attrNameLst>
+                                      </p:cBhvr>
+                                      <p:to>
+                                        <p:strVal val="visible"/>
+                                      </p:to>
+                                    </p:set>
+                                    <p:animEffect transition="in" filter="fade">
+                                      <p:cBhvr>
+                                        <p:cTn id="54" dur="450"/>
+                                        <p:tgtEl>
+                                          <p:spTgt spid="12"/>
+                                        </p:tgtEl>
+                                      </p:cBhvr>
+                                    </p:animEffect>
+                                  </p:childTnLst>
+                                </p:cTn>
+                              </p:par>
+                            </p:childTnLst>
+                          </p:cTn>
+                        </p:par>
+                      </p:childTnLst>
+                    </p:cTn>
+                  </p:par>
+                  <p:par>
+                    <p:cTn id="60" fill="hold">
+                      <p:stCondLst>
+                        <p:cond delay="indefinite"/>
+                      </p:stCondLst>
+                      <p:childTnLst>
+                        <p:par>
+                          <p:cTn id="61" fill="hold">
+                            <p:stCondLst>
+                              <p:cond delay="0"/>
+                            </p:stCondLst>
+                            <p:childTnLst>
+                              <p:par>
+                                <p:cTn id="62" presetID="10" presetClass="entr" presetSubtype="0" fill="hold" grpId="0" nodeType="afterEffect">
+                                  <p:stCondLst>
+                                    <p:cond delay="0"/>
+                                  </p:stCondLst>
+                                  <p:childTnLst>
+                                    <p:set>
+                                      <p:cBhvr>
+                                        <p:cTn id="63" dur="1" fill="hold"/>
+                                        <p:tgtEl>
+                                          <p:spTgt spid="13"/>
+                                        </p:tgtEl>
+                                        <p:attrNameLst>
+                                          <p:attrName>style.visibility</p:attrName>
+                                        </p:attrNameLst>
+                                      </p:cBhvr>
+                                      <p:to>
+                                        <p:strVal val="visible"/>
+                                      </p:to>
+                                    </p:set>
+                                    <p:animEffect transition="in" filter="fade">
+                                      <p:cBhvr>
+                                        <p:cTn id="64" dur="450"/>
+                                        <p:tgtEl>
+                                          <p:spTgt spid="13"/>
+                                        </p:tgtEl>
+                                      </p:cBhvr>
+                                    </p:animEffect>
+                                  </p:childTnLst>
+                                </p:cTn>
+                              </p:par>
+                            </p:childTnLst>
+                          </p:cTn>
+                        </p:par>
+                      </p:childTnLst>
+                    </p:cTn>
+                  </p:par>
+                  <p:par>
+                    <p:cTn id="70" fill="hold">
+                      <p:stCondLst>
+                        <p:cond delay="indefinite"/>
+                      </p:stCondLst>
+                      <p:childTnLst>
+                        <p:par>
+                          <p:cTn id="71" fill="hold">
+                            <p:stCondLst>
+                              <p:cond delay="0"/>
+                            </p:stCondLst>
+                            <p:childTnLst>
+                              <p:par>
+                                <p:cTn id="72" presetID="10" presetClass="entr" presetSubtype="0" fill="hold" grpId="0" nodeType="afterEffect">
+                                  <p:stCondLst>
+                                    <p:cond delay="0"/>
+                                  </p:stCondLst>
+                                  <p:childTnLst>
+                                    <p:set>
+                                      <p:cBhvr>
+                                        <p:cTn id="73" dur="1" fill="hold"/>
+                                        <p:tgtEl>
+                                          <p:spTgt spid="15"/>
+                                        </p:tgtEl>
+                                        <p:attrNameLst>
+                                          <p:attrName>style.visibility</p:attrName>
+                                        </p:attrNameLst>
+                                      </p:cBhvr>
+                                      <p:to>
+                                        <p:strVal val="visible"/>
+                                      </p:to>
+                                    </p:set>
+                                    <p:animEffect transition="in" filter="fade">
+                                      <p:cBhvr>
+                                        <p:cTn id="74" dur="450"/>
+                                        <p:tgtEl>
+                                          <p:spTgt spid="15"/>
+                                        </p:tgtEl>
+                                      </p:cBhvr>
+                                    </p:animEffect>
+                                  </p:childTnLst>
+                                </p:cTn>
+                              </p:par>
+                            </p:childTnLst>
+                          </p:cTn>
+                        </p:par>
+                      </p:childTnLst>
+                    </p:cTn>
+                  </p:par>
+                  <p:par>
+                    <p:cTn id="80" fill="hold">
+                      <p:stCondLst>
+                        <p:cond delay="indefinite"/>
+                      </p:stCondLst>
+                      <p:childTnLst>
+                        <p:par>
+                          <p:cTn id="81" fill="hold">
+                            <p:stCondLst>
+                              <p:cond delay="0"/>
+                            </p:stCondLst>
+                            <p:childTnLst>
+                              <p:par>
+                                <p:cTn id="82" presetID="10" presetClass="entr" presetSubtype="0" fill="hold" grpId="0" nodeType="afterEffect">
+                                  <p:stCondLst>
+                                    <p:cond delay="0"/>
+                                  </p:stCondLst>
+                                  <p:childTnLst>
+                                    <p:set>
+                                      <p:cBhvr>
+                                        <p:cTn id="83" dur="1" fill="hold"/>
+                                        <p:tgtEl>
+                                          <p:spTgt spid="16"/>
+                                        </p:tgtEl>
+                                        <p:attrNameLst>
+                                          <p:attrName>style.visibility</p:attrName>
+                                        </p:attrNameLst>
+                                      </p:cBhvr>
+                                      <p:to>
+                                        <p:strVal val="visible"/>
+                                      </p:to>
+                                    </p:set>
+                                    <p:animEffect transition="in" filter="fade">
+                                      <p:cBhvr>
+                                        <p:cTn id="84" dur="450"/>
+                                        <p:tgtEl>
+                                          <p:spTgt spid="16"/>
                                         </p:tgtEl>
                                       </p:cBhvr>
                                     </p:animEffect>
@@ -8968,20 +11034,98 @@
       </p:sp>
       <p:sp>
         <p:nvSpPr>
-          <p:cNvPr id="3" name="Rectangle 2"/>
+          <p:cNvPr id="3" name="TextBox 2"/>
+          <p:cNvSpPr txBox="1"/>
+          <p:nvPr/>
+        </p:nvSpPr>
+        <p:spPr>
+          <a:xfrm>
+            <a:off x="1005840" y="658368"/>
+            <a:ext cx="10149840" cy="292608"/>
+          </a:xfrm>
+          <a:prstGeom prst="rect">
+            <a:avLst/>
+          </a:prstGeom>
+          <a:noFill/>
+        </p:spPr>
+        <p:txBody>
+          <a:bodyPr wrap="square">
+            <a:spAutoFit/>
+          </a:bodyPr>
+          <a:lstStyle/>
+          <a:p>
+            <a:pPr algn="l">
+              <a:lnSpc>
+                <a:spcPct val="100000"/>
+              </a:lnSpc>
+            </a:pPr>
+            <a:r>
+              <a:rPr sz="1200" b="1">
+                <a:solidFill>
+                  <a:srgbClr val="22D3EE"/>
+                </a:solidFill>
+                <a:latin typeface="Helvetica Neue"/>
+              </a:rPr>
+              <a:t>FUTURE WORK</a:t>
+            </a:r>
+          </a:p>
+        </p:txBody>
+      </p:sp>
+      <p:sp>
+        <p:nvSpPr>
+          <p:cNvPr id="4" name="TextBox 3"/>
+          <p:cNvSpPr txBox="1"/>
+          <p:nvPr/>
+        </p:nvSpPr>
+        <p:spPr>
+          <a:xfrm>
+            <a:off x="1005840" y="1078992"/>
+            <a:ext cx="10149840" cy="914400"/>
+          </a:xfrm>
+          <a:prstGeom prst="rect">
+            <a:avLst/>
+          </a:prstGeom>
+          <a:noFill/>
+        </p:spPr>
+        <p:txBody>
+          <a:bodyPr wrap="square">
+            <a:spAutoFit/>
+          </a:bodyPr>
+          <a:lstStyle/>
+          <a:p>
+            <a:pPr algn="l">
+              <a:lnSpc>
+                <a:spcPct val="106000"/>
+              </a:lnSpc>
+            </a:pPr>
+            <a:r>
+              <a:rPr sz="3200" b="1">
+                <a:solidFill>
+                  <a:srgbClr val="E8ECF3"/>
+                </a:solidFill>
+                <a:latin typeface="Helvetica Neue"/>
+              </a:rPr>
+              <a:t>What is next</a:t>
+            </a:r>
+          </a:p>
+        </p:txBody>
+      </p:sp>
+      <p:sp>
+        <p:nvSpPr>
+          <p:cNvPr id="5" name="deckkit-rule"/>
           <p:cNvSpPr/>
           <p:nvPr/>
         </p:nvSpPr>
         <p:spPr>
           <a:xfrm>
-            <a:off x="0" y="0"/>
-            <a:ext cx="310896" cy="6858000"/>
+            <a:off x="1005840" y="1883664"/>
+            <a:ext cx="1463040" cy="38100"/>
           </a:xfrm>
           <a:prstGeom prst="rect">
             <a:avLst/>
           </a:prstGeom>
           <a:solidFill>
-            <a:srgbClr val="6EE7B7"/>
+            <a:srgbClr val="22D3EE"/>
           </a:solidFill>
           <a:ln>
             <a:noFill/>
@@ -9012,14 +11156,14 @@
       </p:sp>
       <p:sp>
         <p:nvSpPr>
-          <p:cNvPr id="4" name="TextBox 3"/>
+          <p:cNvPr id="6" name="TextBox 5"/>
           <p:cNvSpPr txBox="1"/>
           <p:nvPr/>
         </p:nvSpPr>
         <p:spPr>
           <a:xfrm>
-            <a:off x="1005840" y="658368"/>
-            <a:ext cx="10149840" cy="292608"/>
+            <a:off x="1005840" y="2103120"/>
+            <a:ext cx="640080" cy="365760"/>
           </a:xfrm>
           <a:prstGeom prst="rect">
             <a:avLst/>
@@ -9034,31 +11178,31 @@
           <a:p>
             <a:pPr algn="l">
               <a:lnSpc>
-                <a:spcPct val="100000"/>
-              </a:lnSpc>
-            </a:pPr>
-            <a:r>
-              <a:rPr sz="1200" b="1">
-                <a:solidFill>
-                  <a:srgbClr val="6EE7B7"/>
-                </a:solidFill>
-                <a:latin typeface="Helvetica Neue"/>
-              </a:rPr>
-              <a:t>FUTURE WORK</a:t>
-            </a:r>
-          </a:p>
-        </p:txBody>
-      </p:sp>
-      <p:sp>
-        <p:nvSpPr>
-          <p:cNvPr id="5" name="TextBox 4"/>
+                <a:spcPct val="120000"/>
+              </a:lnSpc>
+            </a:pPr>
+            <a:r>
+              <a:rPr sz="1500" b="1">
+                <a:solidFill>
+                  <a:srgbClr val="22D3EE"/>
+                </a:solidFill>
+                <a:latin typeface="Menlo"/>
+              </a:rPr>
+              <a:t>01</a:t>
+            </a:r>
+          </a:p>
+        </p:txBody>
+      </p:sp>
+      <p:sp>
+        <p:nvSpPr>
+          <p:cNvPr id="7" name="TextBox 6"/>
           <p:cNvSpPr txBox="1"/>
           <p:nvPr/>
         </p:nvSpPr>
         <p:spPr>
           <a:xfrm>
-            <a:off x="1005840" y="1078992"/>
-            <a:ext cx="10149840" cy="914400"/>
+            <a:off x="1737360" y="2103120"/>
+            <a:ext cx="3931920" cy="640080"/>
           </a:xfrm>
           <a:prstGeom prst="rect">
             <a:avLst/>
@@ -9073,75 +11217,31 @@
           <a:p>
             <a:pPr algn="l">
               <a:lnSpc>
-                <a:spcPct val="106000"/>
-              </a:lnSpc>
-            </a:pPr>
-            <a:r>
-              <a:rPr sz="3200" b="1">
+                <a:spcPct val="115000"/>
+              </a:lnSpc>
+            </a:pPr>
+            <a:r>
+              <a:rPr sz="1600" b="1">
                 <a:solidFill>
                   <a:srgbClr val="E8ECF3"/>
                 </a:solidFill>
                 <a:latin typeface="Helvetica Neue"/>
               </a:rPr>
-              <a:t>What is next</a:t>
-            </a:r>
-          </a:p>
-        </p:txBody>
-      </p:sp>
-      <p:sp>
-        <p:nvSpPr>
-          <p:cNvPr id="6" name="Rectangle 5"/>
-          <p:cNvSpPr/>
-          <p:nvPr/>
-        </p:nvSpPr>
-        <p:spPr>
-          <a:xfrm>
-            <a:off x="1005840" y="1883664"/>
-            <a:ext cx="1463040" cy="38100"/>
-          </a:xfrm>
-          <a:prstGeom prst="rect">
-            <a:avLst/>
-          </a:prstGeom>
-          <a:solidFill>
-            <a:srgbClr val="6EE7B7"/>
-          </a:solidFill>
-          <a:ln>
-            <a:noFill/>
-          </a:ln>
-          <a:effectLst/>
-        </p:spPr>
-        <p:style>
-          <a:lnRef idx="1">
-            <a:schemeClr val="accent1"/>
-          </a:lnRef>
-          <a:fillRef idx="3">
-            <a:schemeClr val="accent1"/>
-          </a:fillRef>
-          <a:effectRef idx="2">
-            <a:schemeClr val="accent1"/>
-          </a:effectRef>
-          <a:fontRef idx="minor">
-            <a:schemeClr val="lt1"/>
-          </a:fontRef>
-        </p:style>
-        <p:txBody>
-          <a:bodyPr rtlCol="0" anchor="ctr"/>
-          <a:lstStyle/>
-          <a:p>
-            <a:pPr algn="ctr"/>
-          </a:p>
-        </p:txBody>
-      </p:sp>
-      <p:sp>
-        <p:nvSpPr>
-          <p:cNvPr id="7" name="TextBox 6"/>
+              <a:t>Apply the change, not just carry it</a:t>
+            </a:r>
+          </a:p>
+        </p:txBody>
+      </p:sp>
+      <p:sp>
+        <p:nvSpPr>
+          <p:cNvPr id="8" name="TextBox 7"/>
           <p:cNvSpPr txBox="1"/>
           <p:nvPr/>
         </p:nvSpPr>
         <p:spPr>
           <a:xfrm>
-            <a:off x="1005840" y="2103120"/>
-            <a:ext cx="640080" cy="365760"/>
+            <a:off x="5852160" y="2103120"/>
+            <a:ext cx="5303520" cy="914400"/>
           </a:xfrm>
           <a:prstGeom prst="rect">
             <a:avLst/>
@@ -9156,31 +11256,31 @@
           <a:p>
             <a:pPr algn="l">
               <a:lnSpc>
-                <a:spcPct val="120000"/>
-              </a:lnSpc>
-            </a:pPr>
-            <a:r>
-              <a:rPr sz="1500" b="1">
-                <a:solidFill>
-                  <a:srgbClr val="6EE7B7"/>
-                </a:solidFill>
-                <a:latin typeface="Menlo"/>
-              </a:rPr>
-              <a:t>01</a:t>
-            </a:r>
-          </a:p>
-        </p:txBody>
-      </p:sp>
-      <p:sp>
-        <p:nvSpPr>
-          <p:cNvPr id="8" name="TextBox 7"/>
+                <a:spcPct val="130000"/>
+              </a:lnSpc>
+            </a:pPr>
+            <a:r>
+              <a:rPr sz="1400" b="0">
+                <a:solidFill>
+                  <a:srgbClr val="8B97AB"/>
+                </a:solidFill>
+                <a:latin typeface="Helvetica Neue"/>
+              </a:rPr>
+              <a:t>Today a merged pull request carries the reviewed diff as a file. Applying it to the source is next, and lets a generated test run against the change.</a:t>
+            </a:r>
+          </a:p>
+        </p:txBody>
+      </p:sp>
+      <p:sp>
+        <p:nvSpPr>
+          <p:cNvPr id="9" name="TextBox 8"/>
           <p:cNvSpPr txBox="1"/>
           <p:nvPr/>
         </p:nvSpPr>
         <p:spPr>
           <a:xfrm>
-            <a:off x="1737360" y="2103120"/>
-            <a:ext cx="3931920" cy="640080"/>
+            <a:off x="1005840" y="3127248"/>
+            <a:ext cx="640080" cy="365760"/>
           </a:xfrm>
           <a:prstGeom prst="rect">
             <a:avLst/>
@@ -9195,31 +11295,31 @@
           <a:p>
             <a:pPr algn="l">
               <a:lnSpc>
-                <a:spcPct val="115000"/>
-              </a:lnSpc>
-            </a:pPr>
-            <a:r>
-              <a:rPr sz="1600" b="1">
-                <a:solidFill>
-                  <a:srgbClr val="E8ECF3"/>
-                </a:solidFill>
-                <a:latin typeface="Helvetica Neue"/>
-              </a:rPr>
-              <a:t>Apply the change, not just carry it   [NEXT]</a:t>
-            </a:r>
-          </a:p>
-        </p:txBody>
-      </p:sp>
-      <p:sp>
-        <p:nvSpPr>
-          <p:cNvPr id="9" name="TextBox 8"/>
+                <a:spcPct val="120000"/>
+              </a:lnSpc>
+            </a:pPr>
+            <a:r>
+              <a:rPr sz="1500" b="1">
+                <a:solidFill>
+                  <a:srgbClr val="22D3EE"/>
+                </a:solidFill>
+                <a:latin typeface="Menlo"/>
+              </a:rPr>
+              <a:t>02</a:t>
+            </a:r>
+          </a:p>
+        </p:txBody>
+      </p:sp>
+      <p:sp>
+        <p:nvSpPr>
+          <p:cNvPr id="10" name="TextBox 9"/>
           <p:cNvSpPr txBox="1"/>
           <p:nvPr/>
         </p:nvSpPr>
         <p:spPr>
           <a:xfrm>
-            <a:off x="5852160" y="2103120"/>
-            <a:ext cx="5303520" cy="914400"/>
+            <a:off x="1737360" y="3127248"/>
+            <a:ext cx="3931920" cy="640080"/>
           </a:xfrm>
           <a:prstGeom prst="rect">
             <a:avLst/>
@@ -9234,31 +11334,31 @@
           <a:p>
             <a:pPr algn="l">
               <a:lnSpc>
-                <a:spcPct val="130000"/>
-              </a:lnSpc>
-            </a:pPr>
-            <a:r>
-              <a:rPr sz="1300" b="0">
-                <a:solidFill>
-                  <a:srgbClr val="8B97AB"/>
+                <a:spcPct val="115000"/>
+              </a:lnSpc>
+            </a:pPr>
+            <a:r>
+              <a:rPr sz="1600" b="1">
+                <a:solidFill>
+                  <a:srgbClr val="E8ECF3"/>
                 </a:solidFill>
                 <a:latin typeface="Helvetica Neue"/>
               </a:rPr>
-              <a:t>A merged pull request currently carries the reviewed diff as an artifact. Applying it to the source is the next step, and it is what would let a generated test run against the change.</a:t>
-            </a:r>
-          </a:p>
-        </p:txBody>
-      </p:sp>
-      <p:sp>
-        <p:nvSpPr>
-          <p:cNvPr id="10" name="TextBox 9"/>
+              <a:t>Join the two test layers</a:t>
+            </a:r>
+          </a:p>
+        </p:txBody>
+      </p:sp>
+      <p:sp>
+        <p:nvSpPr>
+          <p:cNvPr id="11" name="TextBox 10"/>
           <p:cNvSpPr txBox="1"/>
           <p:nvPr/>
         </p:nvSpPr>
         <p:spPr>
           <a:xfrm>
-            <a:off x="1005840" y="3127248"/>
-            <a:ext cx="640080" cy="365760"/>
+            <a:off x="5852160" y="3127248"/>
+            <a:ext cx="5303520" cy="914400"/>
           </a:xfrm>
           <a:prstGeom prst="rect">
             <a:avLst/>
@@ -9273,31 +11373,31 @@
           <a:p>
             <a:pPr algn="l">
               <a:lnSpc>
-                <a:spcPct val="120000"/>
-              </a:lnSpc>
-            </a:pPr>
-            <a:r>
-              <a:rPr sz="1500" b="1">
-                <a:solidFill>
-                  <a:srgbClr val="6EE7B7"/>
-                </a:solidFill>
-                <a:latin typeface="Menlo"/>
-              </a:rPr>
-              <a:t>02</a:t>
-            </a:r>
-          </a:p>
-        </p:txBody>
-      </p:sp>
-      <p:sp>
-        <p:nvSpPr>
-          <p:cNvPr id="11" name="TextBox 10"/>
+                <a:spcPct val="130000"/>
+              </a:lnSpc>
+            </a:pPr>
+            <a:r>
+              <a:rPr sz="1400" b="0">
+                <a:solidFill>
+                  <a:srgbClr val="8B97AB"/>
+                </a:solidFill>
+                <a:latin typeface="Helvetica Neue"/>
+              </a:rPr>
+              <a:t>Tests are generated from each ticket and Selenium runs in CI; neither checks the other yet.</a:t>
+            </a:r>
+          </a:p>
+        </p:txBody>
+      </p:sp>
+      <p:sp>
+        <p:nvSpPr>
+          <p:cNvPr id="12" name="TextBox 11"/>
           <p:cNvSpPr txBox="1"/>
           <p:nvPr/>
         </p:nvSpPr>
         <p:spPr>
           <a:xfrm>
-            <a:off x="1737360" y="3127248"/>
-            <a:ext cx="3931920" cy="640080"/>
+            <a:off x="1005840" y="4151376"/>
+            <a:ext cx="640080" cy="365760"/>
           </a:xfrm>
           <a:prstGeom prst="rect">
             <a:avLst/>
@@ -9312,31 +11412,31 @@
           <a:p>
             <a:pPr algn="l">
               <a:lnSpc>
-                <a:spcPct val="115000"/>
-              </a:lnSpc>
-            </a:pPr>
-            <a:r>
-              <a:rPr sz="1600" b="1">
-                <a:solidFill>
-                  <a:srgbClr val="E8ECF3"/>
-                </a:solidFill>
-                <a:latin typeface="Helvetica Neue"/>
-              </a:rPr>
-              <a:t>Join the two test layers   [NEXT]</a:t>
-            </a:r>
-          </a:p>
-        </p:txBody>
-      </p:sp>
-      <p:sp>
-        <p:nvSpPr>
-          <p:cNvPr id="12" name="TextBox 11"/>
+                <a:spcPct val="120000"/>
+              </a:lnSpc>
+            </a:pPr>
+            <a:r>
+              <a:rPr sz="1500" b="1">
+                <a:solidFill>
+                  <a:srgbClr val="22D3EE"/>
+                </a:solidFill>
+                <a:latin typeface="Menlo"/>
+              </a:rPr>
+              <a:t>03</a:t>
+            </a:r>
+          </a:p>
+        </p:txBody>
+      </p:sp>
+      <p:sp>
+        <p:nvSpPr>
+          <p:cNvPr id="13" name="TextBox 12"/>
           <p:cNvSpPr txBox="1"/>
           <p:nvPr/>
         </p:nvSpPr>
         <p:spPr>
           <a:xfrm>
-            <a:off x="5852160" y="3127248"/>
-            <a:ext cx="5303520" cy="914400"/>
+            <a:off x="1737360" y="4151376"/>
+            <a:ext cx="3931920" cy="640080"/>
           </a:xfrm>
           <a:prstGeom prst="rect">
             <a:avLst/>
@@ -9351,31 +11451,31 @@
           <a:p>
             <a:pPr algn="l">
               <a:lnSpc>
-                <a:spcPct val="130000"/>
-              </a:lnSpc>
-            </a:pPr>
-            <a:r>
-              <a:rPr sz="1300" b="0">
-                <a:solidFill>
-                  <a:srgbClr val="8B97AB"/>
+                <a:spcPct val="115000"/>
+              </a:lnSpc>
+            </a:pPr>
+            <a:r>
+              <a:rPr sz="1600" b="1">
+                <a:solidFill>
+                  <a:srgbClr val="E8ECF3"/>
                 </a:solidFill>
                 <a:latin typeface="Helvetica Neue"/>
               </a:rPr>
-              <a:t>Tests are generated from the ticket each run; Selenium runs in CI against the app. Neither verifies the other yet.</a:t>
-            </a:r>
-          </a:p>
-        </p:txBody>
-      </p:sp>
-      <p:sp>
-        <p:nvSpPr>
-          <p:cNvPr id="13" name="TextBox 12"/>
+              <a:t>Prompt caching</a:t>
+            </a:r>
+          </a:p>
+        </p:txBody>
+      </p:sp>
+      <p:sp>
+        <p:nvSpPr>
+          <p:cNvPr id="14" name="TextBox 13"/>
           <p:cNvSpPr txBox="1"/>
           <p:nvPr/>
         </p:nvSpPr>
         <p:spPr>
           <a:xfrm>
-            <a:off x="1005840" y="4151376"/>
-            <a:ext cx="640080" cy="365760"/>
+            <a:off x="5852160" y="4151376"/>
+            <a:ext cx="5303520" cy="914400"/>
           </a:xfrm>
           <a:prstGeom prst="rect">
             <a:avLst/>
@@ -9390,31 +11490,31 @@
           <a:p>
             <a:pPr algn="l">
               <a:lnSpc>
-                <a:spcPct val="120000"/>
-              </a:lnSpc>
-            </a:pPr>
-            <a:r>
-              <a:rPr sz="1500" b="1">
-                <a:solidFill>
-                  <a:srgbClr val="6EE7B7"/>
-                </a:solidFill>
-                <a:latin typeface="Menlo"/>
-              </a:rPr>
-              <a:t>03</a:t>
-            </a:r>
-          </a:p>
-        </p:txBody>
-      </p:sp>
-      <p:sp>
-        <p:nvSpPr>
-          <p:cNvPr id="14" name="TextBox 13"/>
+                <a:spcPct val="130000"/>
+              </a:lnSpc>
+            </a:pPr>
+            <a:r>
+              <a:rPr sz="1400" b="0">
+                <a:solidFill>
+                  <a:srgbClr val="8B97AB"/>
+                </a:solidFill>
+                <a:latin typeface="Helvetica Neue"/>
+              </a:rPr>
+              <a:t>Nothing is cached today: every agent re-sends the same repository snapshot at full price. Cached input costs a quarter as much.</a:t>
+            </a:r>
+          </a:p>
+        </p:txBody>
+      </p:sp>
+      <p:sp>
+        <p:nvSpPr>
+          <p:cNvPr id="15" name="TextBox 14"/>
           <p:cNvSpPr txBox="1"/>
           <p:nvPr/>
         </p:nvSpPr>
         <p:spPr>
           <a:xfrm>
-            <a:off x="1737360" y="4151376"/>
-            <a:ext cx="3931920" cy="640080"/>
+            <a:off x="1005840" y="5175504"/>
+            <a:ext cx="640080" cy="365760"/>
           </a:xfrm>
           <a:prstGeom prst="rect">
             <a:avLst/>
@@ -9429,31 +11529,31 @@
           <a:p>
             <a:pPr algn="l">
               <a:lnSpc>
-                <a:spcPct val="115000"/>
-              </a:lnSpc>
-            </a:pPr>
-            <a:r>
-              <a:rPr sz="1600" b="1">
-                <a:solidFill>
-                  <a:srgbClr val="E8ECF3"/>
-                </a:solidFill>
-                <a:latin typeface="Helvetica Neue"/>
-              </a:rPr>
-              <a:t>Prompt caching</a:t>
-            </a:r>
-          </a:p>
-        </p:txBody>
-      </p:sp>
-      <p:sp>
-        <p:nvSpPr>
-          <p:cNvPr id="15" name="TextBox 14"/>
+                <a:spcPct val="120000"/>
+              </a:lnSpc>
+            </a:pPr>
+            <a:r>
+              <a:rPr sz="1500" b="1">
+                <a:solidFill>
+                  <a:srgbClr val="22D3EE"/>
+                </a:solidFill>
+                <a:latin typeface="Menlo"/>
+              </a:rPr>
+              <a:t>04</a:t>
+            </a:r>
+          </a:p>
+        </p:txBody>
+      </p:sp>
+      <p:sp>
+        <p:nvSpPr>
+          <p:cNvPr id="16" name="TextBox 15"/>
           <p:cNvSpPr txBox="1"/>
           <p:nvPr/>
         </p:nvSpPr>
         <p:spPr>
           <a:xfrm>
-            <a:off x="5852160" y="4151376"/>
-            <a:ext cx="5303520" cy="914400"/>
+            <a:off x="1737360" y="5175504"/>
+            <a:ext cx="3931920" cy="640080"/>
           </a:xfrm>
           <a:prstGeom prst="rect">
             <a:avLst/>
@@ -9468,31 +11568,31 @@
           <a:p>
             <a:pPr algn="l">
               <a:lnSpc>
-                <a:spcPct val="130000"/>
-              </a:lnSpc>
-            </a:pPr>
-            <a:r>
-              <a:rPr sz="1300" b="0">
-                <a:solidFill>
-                  <a:srgbClr val="8B97AB"/>
+                <a:spcPct val="115000"/>
+              </a:lnSpc>
+            </a:pPr>
+            <a:r>
+              <a:rPr sz="1600" b="1">
+                <a:solidFill>
+                  <a:srgbClr val="E8ECF3"/>
                 </a:solidFill>
                 <a:latin typeface="Helvetica Neue"/>
               </a:rPr>
-              <a:t>Cache hit rate is a measured zero — five agents re-send the same repository snapshot at four times the cached rate. The only cost work worth doing.</a:t>
-            </a:r>
-          </a:p>
-        </p:txBody>
-      </p:sp>
-      <p:sp>
-        <p:nvSpPr>
-          <p:cNvPr id="16" name="TextBox 15"/>
+              <a:t>More languages, more scanners</a:t>
+            </a:r>
+          </a:p>
+        </p:txBody>
+      </p:sp>
+      <p:sp>
+        <p:nvSpPr>
+          <p:cNvPr id="17" name="TextBox 16"/>
           <p:cNvSpPr txBox="1"/>
           <p:nvPr/>
         </p:nvSpPr>
         <p:spPr>
           <a:xfrm>
-            <a:off x="1005840" y="5175504"/>
-            <a:ext cx="640080" cy="365760"/>
+            <a:off x="5852160" y="5175504"/>
+            <a:ext cx="5303520" cy="914400"/>
           </a:xfrm>
           <a:prstGeom prst="rect">
             <a:avLst/>
@@ -9507,95 +11607,17 @@
           <a:p>
             <a:pPr algn="l">
               <a:lnSpc>
-                <a:spcPct val="120000"/>
-              </a:lnSpc>
-            </a:pPr>
-            <a:r>
-              <a:rPr sz="1500" b="1">
-                <a:solidFill>
-                  <a:srgbClr val="6EE7B7"/>
-                </a:solidFill>
-                <a:latin typeface="Menlo"/>
-              </a:rPr>
-              <a:t>04</a:t>
-            </a:r>
-          </a:p>
-        </p:txBody>
-      </p:sp>
-      <p:sp>
-        <p:nvSpPr>
-          <p:cNvPr id="17" name="TextBox 16"/>
-          <p:cNvSpPr txBox="1"/>
-          <p:nvPr/>
-        </p:nvSpPr>
-        <p:spPr>
-          <a:xfrm>
-            <a:off x="1737360" y="5175504"/>
-            <a:ext cx="3931920" cy="640080"/>
-          </a:xfrm>
-          <a:prstGeom prst="rect">
-            <a:avLst/>
-          </a:prstGeom>
-          <a:noFill/>
-        </p:spPr>
-        <p:txBody>
-          <a:bodyPr wrap="square">
-            <a:spAutoFit/>
-          </a:bodyPr>
-          <a:lstStyle/>
-          <a:p>
-            <a:pPr algn="l">
-              <a:lnSpc>
-                <a:spcPct val="115000"/>
-              </a:lnSpc>
-            </a:pPr>
-            <a:r>
-              <a:rPr sz="1600" b="1">
-                <a:solidFill>
-                  <a:srgbClr val="E8ECF3"/>
+                <a:spcPct val="130000"/>
+              </a:lnSpc>
+            </a:pPr>
+            <a:r>
+              <a:rPr sz="1400" b="0">
+                <a:solidFill>
+                  <a:srgbClr val="8B97AB"/>
                 </a:solidFill>
                 <a:latin typeface="Helvetica Neue"/>
               </a:rPr>
-              <a:t>More languages, more scanners</a:t>
-            </a:r>
-          </a:p>
-        </p:txBody>
-      </p:sp>
-      <p:sp>
-        <p:nvSpPr>
-          <p:cNvPr id="18" name="TextBox 17"/>
-          <p:cNvSpPr txBox="1"/>
-          <p:nvPr/>
-        </p:nvSpPr>
-        <p:spPr>
-          <a:xfrm>
-            <a:off x="5852160" y="5175504"/>
-            <a:ext cx="5303520" cy="914400"/>
-          </a:xfrm>
-          <a:prstGeom prst="rect">
-            <a:avLst/>
-          </a:prstGeom>
-          <a:noFill/>
-        </p:spPr>
-        <p:txBody>
-          <a:bodyPr wrap="square">
-            <a:spAutoFit/>
-          </a:bodyPr>
-          <a:lstStyle/>
-          <a:p>
-            <a:pPr algn="l">
-              <a:lnSpc>
-                <a:spcPct val="130000"/>
-              </a:lnSpc>
-            </a:pPr>
-            <a:r>
-              <a:rPr sz="1300" b="0">
-                <a:solidFill>
-                  <a:srgbClr val="8B97AB"/>
-                </a:solidFill>
-                <a:latin typeface="Helvetica Neue"/>
-              </a:rPr>
-              <a:t>Three scanners and one Python target today. The gate is a table; adding a scanner is a row.</a:t>
+              <a:t>One Python target and three scanners today. The scoring is a table, so a new scanner is one row.</a:t>
             </a:r>
           </a:p>
         </p:txBody>
@@ -9645,7 +11667,7 @@
     <a:masterClrMapping/>
   </p:clrMapOvr>
   <p:transition spd="med">
-    <p:fade/>
+    <p:wipe dir="l"/>
   </p:transition>
   <p:timing>
     <p:tnLst>
@@ -9677,7 +11699,7 @@
                                       <p:cBhvr>
                                         <p:cTn id="13" dur="1" fill="hold"/>
                                         <p:tgtEl>
-                                          <p:spTgt spid="7"/>
+                                          <p:spTgt spid="6"/>
                                         </p:tgtEl>
                                         <p:attrNameLst>
                                           <p:attrName>style.visibility</p:attrName>
@@ -9691,7 +11713,7 @@
                                       <p:cBhvr>
                                         <p:cTn id="14" dur="450"/>
                                         <p:tgtEl>
-                                          <p:spTgt spid="7"/>
+                                          <p:spTgt spid="6"/>
                                         </p:tgtEl>
                                       </p:cBhvr>
                                     </p:animEffect>
@@ -9726,7 +11748,7 @@
                                       <p:cBhvr>
                                         <p:cTn id="23" dur="1" fill="hold"/>
                                         <p:tgtEl>
-                                          <p:spTgt spid="8"/>
+                                          <p:spTgt spid="7"/>
                                         </p:tgtEl>
                                         <p:attrNameLst>
                                           <p:attrName>style.visibility</p:attrName>
@@ -9740,7 +11762,7 @@
                                       <p:cBhvr>
                                         <p:cTn id="24" dur="450"/>
                                         <p:tgtEl>
-                                          <p:spTgt spid="8"/>
+                                          <p:spTgt spid="7"/>
                                         </p:tgtEl>
                                       </p:cBhvr>
                                     </p:animEffect>
@@ -9775,7 +11797,7 @@
                                       <p:cBhvr>
                                         <p:cTn id="33" dur="1" fill="hold"/>
                                         <p:tgtEl>
-                                          <p:spTgt spid="10"/>
+                                          <p:spTgt spid="9"/>
                                         </p:tgtEl>
                                         <p:attrNameLst>
                                           <p:attrName>style.visibility</p:attrName>
@@ -9789,7 +11811,7 @@
                                       <p:cBhvr>
                                         <p:cTn id="34" dur="450"/>
                                         <p:tgtEl>
-                                          <p:spTgt spid="10"/>
+                                          <p:spTgt spid="9"/>
                                         </p:tgtEl>
                                       </p:cBhvr>
                                     </p:animEffect>
@@ -9824,7 +11846,7 @@
                                       <p:cBhvr>
                                         <p:cTn id="43" dur="1" fill="hold"/>
                                         <p:tgtEl>
-                                          <p:spTgt spid="11"/>
+                                          <p:spTgt spid="10"/>
                                         </p:tgtEl>
                                         <p:attrNameLst>
                                           <p:attrName>style.visibility</p:attrName>
@@ -9838,7 +11860,7 @@
                                       <p:cBhvr>
                                         <p:cTn id="44" dur="450"/>
                                         <p:tgtEl>
-                                          <p:spTgt spid="11"/>
+                                          <p:spTgt spid="10"/>
                                         </p:tgtEl>
                                       </p:cBhvr>
                                     </p:animEffect>
@@ -9873,7 +11895,7 @@
                                       <p:cBhvr>
                                         <p:cTn id="53" dur="1" fill="hold"/>
                                         <p:tgtEl>
-                                          <p:spTgt spid="13"/>
+                                          <p:spTgt spid="12"/>
                                         </p:tgtEl>
                                         <p:attrNameLst>
                                           <p:attrName>style.visibility</p:attrName>
@@ -9887,7 +11909,7 @@
                                       <p:cBhvr>
                                         <p:cTn id="54" dur="450"/>
                                         <p:tgtEl>
-                                          <p:spTgt spid="13"/>
+                                          <p:spTgt spid="12"/>
                                         </p:tgtEl>
                                       </p:cBhvr>
                                     </p:animEffect>
@@ -9922,7 +11944,7 @@
                                       <p:cBhvr>
                                         <p:cTn id="63" dur="1" fill="hold"/>
                                         <p:tgtEl>
-                                          <p:spTgt spid="14"/>
+                                          <p:spTgt spid="13"/>
                                         </p:tgtEl>
                                         <p:attrNameLst>
                                           <p:attrName>style.visibility</p:attrName>
@@ -9936,7 +11958,7 @@
                                       <p:cBhvr>
                                         <p:cTn id="64" dur="450"/>
                                         <p:tgtEl>
-                                          <p:spTgt spid="14"/>
+                                          <p:spTgt spid="13"/>
                                         </p:tgtEl>
                                       </p:cBhvr>
                                     </p:animEffect>
@@ -9971,7 +11993,7 @@
                                       <p:cBhvr>
                                         <p:cTn id="73" dur="1" fill="hold"/>
                                         <p:tgtEl>
-                                          <p:spTgt spid="16"/>
+                                          <p:spTgt spid="15"/>
                                         </p:tgtEl>
                                         <p:attrNameLst>
                                           <p:attrName>style.visibility</p:attrName>
@@ -9985,7 +12007,7 @@
                                       <p:cBhvr>
                                         <p:cTn id="74" dur="450"/>
                                         <p:tgtEl>
-                                          <p:spTgt spid="16"/>
+                                          <p:spTgt spid="15"/>
                                         </p:tgtEl>
                                       </p:cBhvr>
                                     </p:animEffect>
@@ -10020,7 +12042,7 @@
                                       <p:cBhvr>
                                         <p:cTn id="83" dur="1" fill="hold"/>
                                         <p:tgtEl>
-                                          <p:spTgt spid="17"/>
+                                          <p:spTgt spid="16"/>
                                         </p:tgtEl>
                                         <p:attrNameLst>
                                           <p:attrName>style.visibility</p:attrName>
@@ -10034,7 +12056,7 @@
                                       <p:cBhvr>
                                         <p:cTn id="84" dur="450"/>
                                         <p:tgtEl>
-                                          <p:spTgt spid="17"/>
+                                          <p:spTgt spid="16"/>
                                         </p:tgtEl>
                                       </p:cBhvr>
                                     </p:animEffect>
@@ -10179,7 +12201,7 @@
         <p:spPr>
           <a:xfrm>
             <a:off x="1005840" y="1828800"/>
-            <a:ext cx="10149840" cy="914400"/>
+            <a:ext cx="10149840" cy="822960"/>
           </a:xfrm>
           <a:prstGeom prst="rect">
             <a:avLst/>
@@ -10211,7 +12233,7 @@
       </p:sp>
       <p:sp>
         <p:nvSpPr>
-          <p:cNvPr id="5" name="Rectangle 4"/>
+          <p:cNvPr id="5" name="deckkit-rule"/>
           <p:cNvSpPr/>
           <p:nvPr/>
         </p:nvSpPr>
@@ -10268,11 +12290,11 @@
             <a:avLst/>
           </a:prstGeom>
           <a:solidFill>
-            <a:srgbClr val="6EE7B7"/>
+            <a:srgbClr val="22D3EE"/>
           </a:solidFill>
           <a:ln w="25400">
             <a:solidFill>
-              <a:srgbClr val="6EE7B7"/>
+              <a:srgbClr val="22D3EE"/>
             </a:solidFill>
           </a:ln>
           <a:effectLst/>
@@ -10314,7 +12336,7 @@
             <a:avLst/>
           </a:prstGeom>
           <a:solidFill>
-            <a:srgbClr val="6EE7B7"/>
+            <a:srgbClr val="22D3EE"/>
           </a:solidFill>
           <a:ln>
             <a:noFill/>
@@ -10401,7 +12423,7 @@
           </a:solidFill>
           <a:ln w="25400">
             <a:solidFill>
-              <a:srgbClr val="6EE7B7"/>
+              <a:srgbClr val="22D3EE"/>
             </a:solidFill>
           </a:ln>
           <a:effectLst/>
@@ -10443,7 +12465,7 @@
             <a:avLst/>
           </a:prstGeom>
           <a:solidFill>
-            <a:srgbClr val="6EE7B7"/>
+            <a:srgbClr val="22D3EE"/>
           </a:solidFill>
           <a:ln>
             <a:noFill/>
@@ -10502,7 +12524,7 @@
             <a:r>
               <a:rPr sz="1100" b="0">
                 <a:solidFill>
-                  <a:srgbClr val="22D3EE"/>
+                  <a:srgbClr val="E8ECF3"/>
                 </a:solidFill>
                 <a:latin typeface="Menlo"/>
               </a:rPr>
@@ -10526,11 +12548,11 @@
             <a:avLst/>
           </a:prstGeom>
           <a:solidFill>
-            <a:srgbClr val="6EE7B7"/>
+            <a:srgbClr val="22D3EE"/>
           </a:solidFill>
           <a:ln w="25400">
             <a:solidFill>
-              <a:srgbClr val="6EE7B7"/>
+              <a:srgbClr val="22D3EE"/>
             </a:solidFill>
           </a:ln>
           <a:effectLst/>
@@ -10572,7 +12594,7 @@
             <a:avLst/>
           </a:prstGeom>
           <a:solidFill>
-            <a:srgbClr val="6EE7B7"/>
+            <a:srgbClr val="22D3EE"/>
           </a:solidFill>
           <a:ln>
             <a:noFill/>
@@ -10655,11 +12677,11 @@
             <a:avLst/>
           </a:prstGeom>
           <a:solidFill>
-            <a:srgbClr val="6EE7B7"/>
+            <a:srgbClr val="22D3EE"/>
           </a:solidFill>
           <a:ln w="25400">
             <a:solidFill>
-              <a:srgbClr val="6EE7B7"/>
+              <a:srgbClr val="22D3EE"/>
             </a:solidFill>
           </a:ln>
           <a:effectLst/>
@@ -10701,7 +12723,7 @@
             <a:avLst/>
           </a:prstGeom>
           <a:solidFill>
-            <a:srgbClr val="6EE7B7"/>
+            <a:srgbClr val="22D3EE"/>
           </a:solidFill>
           <a:ln>
             <a:noFill/>
@@ -10830,7 +12852,7 @@
             <a:avLst/>
           </a:prstGeom>
           <a:solidFill>
-            <a:srgbClr val="FB7185"/>
+            <a:srgbClr val="1F2937"/>
           </a:solidFill>
           <a:ln>
             <a:noFill/>
@@ -11439,11 +13461,11 @@
             <a:r>
               <a:rPr sz="1500" b="0">
                 <a:solidFill>
-                  <a:srgbClr val="22D3EE"/>
+                  <a:srgbClr val="E8ECF3"/>
                 </a:solidFill>
                 <a:latin typeface="Helvetica Neue"/>
               </a:rPr>
-              <a:t>Watch the line numbers: real scanners report 3, 4 and the stand-in fixture reports 4, 5. That pair is the only field that tells the two apart.</a:t>
+              <a:t>Watch the line numbers: the real scanners report lines 3 and 4. The built-in stand-in, used only when a scanner is unavailable, reports 4 and 5, so the pair shows a real scan happened.</a:t>
             </a:r>
           </a:p>
         </p:txBody>
@@ -12549,7 +14571,7 @@
       </p:sp>
       <p:sp>
         <p:nvSpPr>
-          <p:cNvPr id="5" name="Rectangle 4"/>
+          <p:cNvPr id="5" name="deckkit-rule"/>
           <p:cNvSpPr/>
           <p:nvPr/>
         </p:nvSpPr>
@@ -12869,7 +14891,7 @@
       </p:sp>
       <p:sp>
         <p:nvSpPr>
-          <p:cNvPr id="5" name="Rectangle 4"/>
+          <p:cNvPr id="5" name="deckkit-rule"/>
           <p:cNvSpPr/>
           <p:nvPr/>
         </p:nvSpPr>
@@ -12944,7 +14966,46 @@
         <p:spPr>
           <a:xfrm>
             <a:off x="1005840" y="3611880"/>
-            <a:ext cx="1810512" cy="365760"/>
+            <a:ext cx="1810512" cy="566928"/>
+          </a:xfrm>
+          <a:prstGeom prst="rect">
+            <a:avLst/>
+          </a:prstGeom>
+          <a:noFill/>
+        </p:spPr>
+        <p:txBody>
+          <a:bodyPr wrap="square" anchor="b">
+            <a:spAutoFit/>
+          </a:bodyPr>
+          <a:lstStyle/>
+          <a:p>
+            <a:pPr algn="ctr">
+              <a:lnSpc>
+                <a:spcPct val="100000"/>
+              </a:lnSpc>
+            </a:pPr>
+            <a:r>
+              <a:rPr sz="1500" b="1">
+                <a:solidFill>
+                  <a:srgbClr val="E8ECF3"/>
+                </a:solidFill>
+                <a:latin typeface="Helvetica Neue"/>
+              </a:rPr>
+              <a:t>Mohamed Sorour</a:t>
+            </a:r>
+          </a:p>
+        </p:txBody>
+      </p:sp>
+      <p:sp>
+        <p:nvSpPr>
+          <p:cNvPr id="8" name="TextBox 7"/>
+          <p:cNvSpPr txBox="1"/>
+          <p:nvPr/>
+        </p:nvSpPr>
+        <p:spPr>
+          <a:xfrm>
+            <a:off x="1005840" y="4224528"/>
+            <a:ext cx="1810512" cy="548640"/>
           </a:xfrm>
           <a:prstGeom prst="rect">
             <a:avLst/>
@@ -12959,31 +15020,31 @@
           <a:p>
             <a:pPr algn="ctr">
               <a:lnSpc>
-                <a:spcPct val="100000"/>
-              </a:lnSpc>
-            </a:pPr>
-            <a:r>
-              <a:rPr sz="1500" b="1">
-                <a:solidFill>
-                  <a:srgbClr val="E8ECF3"/>
+                <a:spcPct val="110000"/>
+              </a:lnSpc>
+            </a:pPr>
+            <a:r>
+              <a:rPr sz="1300" b="0">
+                <a:solidFill>
+                  <a:srgbClr val="8B97AB"/>
                 </a:solidFill>
                 <a:latin typeface="Helvetica Neue"/>
               </a:rPr>
-              <a:t>Mohamed Sorour</a:t>
-            </a:r>
-          </a:p>
-        </p:txBody>
-      </p:sp>
-      <p:sp>
-        <p:nvSpPr>
-          <p:cNvPr id="8" name="TextBox 7"/>
+              <a:t>Senior DevOps Engineer</a:t>
+            </a:r>
+          </a:p>
+        </p:txBody>
+      </p:sp>
+      <p:sp>
+        <p:nvSpPr>
+          <p:cNvPr id="9" name="TextBox 8"/>
           <p:cNvSpPr txBox="1"/>
           <p:nvPr/>
         </p:nvSpPr>
         <p:spPr>
           <a:xfrm>
-            <a:off x="1005840" y="4005072"/>
-            <a:ext cx="1810512" cy="548640"/>
+            <a:off x="1005840" y="4828032"/>
+            <a:ext cx="1810512" cy="274320"/>
           </a:xfrm>
           <a:prstGeom prst="rect">
             <a:avLst/>
@@ -12998,31 +15059,31 @@
           <a:p>
             <a:pPr algn="ctr">
               <a:lnSpc>
-                <a:spcPct val="110000"/>
-              </a:lnSpc>
-            </a:pPr>
-            <a:r>
-              <a:rPr sz="1300" b="0">
-                <a:solidFill>
-                  <a:srgbClr val="8B97AB"/>
-                </a:solidFill>
-                <a:latin typeface="Helvetica Neue"/>
-              </a:rPr>
-              <a:t>Senior DevOps Engineer</a:t>
-            </a:r>
-          </a:p>
-        </p:txBody>
-      </p:sp>
-      <p:sp>
-        <p:nvSpPr>
-          <p:cNvPr id="9" name="TextBox 8"/>
+                <a:spcPct val="100000"/>
+              </a:lnSpc>
+            </a:pPr>
+            <a:r>
+              <a:rPr sz="1100" b="1">
+                <a:solidFill>
+                  <a:srgbClr val="22D3EE"/>
+                </a:solidFill>
+                <a:latin typeface="Menlo"/>
+              </a:rPr>
+              <a:t>VEZEETA</a:t>
+            </a:r>
+          </a:p>
+        </p:txBody>
+      </p:sp>
+      <p:sp>
+        <p:nvSpPr>
+          <p:cNvPr id="10" name="TextBox 9"/>
           <p:cNvSpPr txBox="1"/>
           <p:nvPr/>
         </p:nvSpPr>
         <p:spPr>
           <a:xfrm>
-            <a:off x="1005840" y="4590288"/>
-            <a:ext cx="1810512" cy="274320"/>
+            <a:off x="1005840" y="5157216"/>
+            <a:ext cx="1810512" cy="731520"/>
           </a:xfrm>
           <a:prstGeom prst="rect">
             <a:avLst/>
@@ -13037,42 +15098,19 @@
           <a:p>
             <a:pPr algn="ctr">
               <a:lnSpc>
-                <a:spcPct val="100000"/>
-              </a:lnSpc>
-            </a:pPr>
-            <a:r>
-              <a:rPr sz="1100" b="1">
-                <a:solidFill>
-                  <a:srgbClr val="22D3EE"/>
-                </a:solidFill>
-                <a:latin typeface="Menlo"/>
-              </a:rPr>
-              <a:t>VEZEETA</a:t>
-            </a:r>
-          </a:p>
-        </p:txBody>
-      </p:sp>
-      <p:sp>
-        <p:nvSpPr>
-          <p:cNvPr id="10" name="TextBox 9"/>
-          <p:cNvSpPr txBox="1"/>
-          <p:nvPr/>
-        </p:nvSpPr>
-        <p:spPr>
-          <a:xfrm>
-            <a:off x="1005840" y="4919472"/>
-            <a:ext cx="1810512" cy="731520"/>
-          </a:xfrm>
-          <a:prstGeom prst="rect">
-            <a:avLst/>
-          </a:prstGeom>
-          <a:noFill/>
-        </p:spPr>
-        <p:txBody>
-          <a:bodyPr wrap="square">
-            <a:spAutoFit/>
-          </a:bodyPr>
-          <a:lstStyle/>
+                <a:spcPct val="115000"/>
+              </a:lnSpc>
+            </a:pPr>
+            <a:r>
+              <a:rPr sz="1100" b="0">
+                <a:solidFill>
+                  <a:srgbClr val="8B97AB"/>
+                </a:solidFill>
+                <a:latin typeface="Helvetica Neue"/>
+              </a:rPr>
+              <a:t>MSc student</a:t>
+            </a:r>
+          </a:p>
           <a:p>
             <a:pPr algn="ctr">
               <a:lnSpc>
@@ -13086,7 +15124,39 @@
                 </a:solidFill>
                 <a:latin typeface="Helvetica Neue"/>
               </a:rPr>
-              <a:t>Aiming for an MSc in Computer Science, AI specialization · Georgia Tech</a:t>
+              <a:t>Computer Science</a:t>
+            </a:r>
+          </a:p>
+          <a:p>
+            <a:pPr algn="ctr">
+              <a:lnSpc>
+                <a:spcPct val="115000"/>
+              </a:lnSpc>
+            </a:pPr>
+            <a:r>
+              <a:rPr sz="1100" b="0">
+                <a:solidFill>
+                  <a:srgbClr val="8B97AB"/>
+                </a:solidFill>
+                <a:latin typeface="Helvetica Neue"/>
+              </a:rPr>
+              <a:t>AI specialization</a:t>
+            </a:r>
+          </a:p>
+          <a:p>
+            <a:pPr algn="ctr">
+              <a:lnSpc>
+                <a:spcPct val="115000"/>
+              </a:lnSpc>
+            </a:pPr>
+            <a:r>
+              <a:rPr sz="1100" b="0">
+                <a:solidFill>
+                  <a:srgbClr val="8B97AB"/>
+                </a:solidFill>
+                <a:latin typeface="Helvetica Neue"/>
+              </a:rPr>
+              <a:t>Georgia Tech</a:t>
             </a:r>
           </a:p>
         </p:txBody>
@@ -13124,7 +15194,46 @@
         <p:spPr>
           <a:xfrm>
             <a:off x="3090672" y="3611880"/>
-            <a:ext cx="1810512" cy="365760"/>
+            <a:ext cx="1810512" cy="566928"/>
+          </a:xfrm>
+          <a:prstGeom prst="rect">
+            <a:avLst/>
+          </a:prstGeom>
+          <a:noFill/>
+        </p:spPr>
+        <p:txBody>
+          <a:bodyPr wrap="square" anchor="b">
+            <a:spAutoFit/>
+          </a:bodyPr>
+          <a:lstStyle/>
+          <a:p>
+            <a:pPr algn="ctr">
+              <a:lnSpc>
+                <a:spcPct val="100000"/>
+              </a:lnSpc>
+            </a:pPr>
+            <a:r>
+              <a:rPr sz="1500" b="1">
+                <a:solidFill>
+                  <a:srgbClr val="E8ECF3"/>
+                </a:solidFill>
+                <a:latin typeface="Helvetica Neue"/>
+              </a:rPr>
+              <a:t>Mariam Abdelkader</a:t>
+            </a:r>
+          </a:p>
+        </p:txBody>
+      </p:sp>
+      <p:sp>
+        <p:nvSpPr>
+          <p:cNvPr id="13" name="TextBox 12"/>
+          <p:cNvSpPr txBox="1"/>
+          <p:nvPr/>
+        </p:nvSpPr>
+        <p:spPr>
+          <a:xfrm>
+            <a:off x="3090672" y="4224528"/>
+            <a:ext cx="1810512" cy="548640"/>
           </a:xfrm>
           <a:prstGeom prst="rect">
             <a:avLst/>
@@ -13139,45 +15248,6 @@
           <a:p>
             <a:pPr algn="ctr">
               <a:lnSpc>
-                <a:spcPct val="100000"/>
-              </a:lnSpc>
-            </a:pPr>
-            <a:r>
-              <a:rPr sz="1500" b="1">
-                <a:solidFill>
-                  <a:srgbClr val="E8ECF3"/>
-                </a:solidFill>
-                <a:latin typeface="Helvetica Neue"/>
-              </a:rPr>
-              <a:t>Mariam Abdelkader</a:t>
-            </a:r>
-          </a:p>
-        </p:txBody>
-      </p:sp>
-      <p:sp>
-        <p:nvSpPr>
-          <p:cNvPr id="13" name="TextBox 12"/>
-          <p:cNvSpPr txBox="1"/>
-          <p:nvPr/>
-        </p:nvSpPr>
-        <p:spPr>
-          <a:xfrm>
-            <a:off x="3090672" y="4005072"/>
-            <a:ext cx="1810512" cy="548640"/>
-          </a:xfrm>
-          <a:prstGeom prst="rect">
-            <a:avLst/>
-          </a:prstGeom>
-          <a:noFill/>
-        </p:spPr>
-        <p:txBody>
-          <a:bodyPr wrap="square">
-            <a:spAutoFit/>
-          </a:bodyPr>
-          <a:lstStyle/>
-          <a:p>
-            <a:pPr algn="ctr">
-              <a:lnSpc>
                 <a:spcPct val="110000"/>
               </a:lnSpc>
             </a:pPr>
@@ -13201,7 +15271,7 @@
         </p:nvSpPr>
         <p:spPr>
           <a:xfrm>
-            <a:off x="3090672" y="4590288"/>
+            <a:off x="3090672" y="4828032"/>
             <a:ext cx="1810512" cy="274320"/>
           </a:xfrm>
           <a:prstGeom prst="rect">
@@ -13265,7 +15335,46 @@
         <p:spPr>
           <a:xfrm>
             <a:off x="5175504" y="3611880"/>
-            <a:ext cx="1810512" cy="365760"/>
+            <a:ext cx="1810512" cy="566928"/>
+          </a:xfrm>
+          <a:prstGeom prst="rect">
+            <a:avLst/>
+          </a:prstGeom>
+          <a:noFill/>
+        </p:spPr>
+        <p:txBody>
+          <a:bodyPr wrap="square" anchor="b">
+            <a:spAutoFit/>
+          </a:bodyPr>
+          <a:lstStyle/>
+          <a:p>
+            <a:pPr algn="ctr">
+              <a:lnSpc>
+                <a:spcPct val="100000"/>
+              </a:lnSpc>
+            </a:pPr>
+            <a:r>
+              <a:rPr sz="1500" b="1">
+                <a:solidFill>
+                  <a:srgbClr val="E8ECF3"/>
+                </a:solidFill>
+                <a:latin typeface="Helvetica Neue"/>
+              </a:rPr>
+              <a:t>Habiba Megahed</a:t>
+            </a:r>
+          </a:p>
+        </p:txBody>
+      </p:sp>
+      <p:sp>
+        <p:nvSpPr>
+          <p:cNvPr id="17" name="TextBox 16"/>
+          <p:cNvSpPr txBox="1"/>
+          <p:nvPr/>
+        </p:nvSpPr>
+        <p:spPr>
+          <a:xfrm>
+            <a:off x="5175504" y="4224528"/>
+            <a:ext cx="1810512" cy="548640"/>
           </a:xfrm>
           <a:prstGeom prst="rect">
             <a:avLst/>
@@ -13280,45 +15389,6 @@
           <a:p>
             <a:pPr algn="ctr">
               <a:lnSpc>
-                <a:spcPct val="100000"/>
-              </a:lnSpc>
-            </a:pPr>
-            <a:r>
-              <a:rPr sz="1500" b="1">
-                <a:solidFill>
-                  <a:srgbClr val="E8ECF3"/>
-                </a:solidFill>
-                <a:latin typeface="Helvetica Neue"/>
-              </a:rPr>
-              <a:t>Habiba Megahed</a:t>
-            </a:r>
-          </a:p>
-        </p:txBody>
-      </p:sp>
-      <p:sp>
-        <p:nvSpPr>
-          <p:cNvPr id="17" name="TextBox 16"/>
-          <p:cNvSpPr txBox="1"/>
-          <p:nvPr/>
-        </p:nvSpPr>
-        <p:spPr>
-          <a:xfrm>
-            <a:off x="5175504" y="4005072"/>
-            <a:ext cx="1810512" cy="548640"/>
-          </a:xfrm>
-          <a:prstGeom prst="rect">
-            <a:avLst/>
-          </a:prstGeom>
-          <a:noFill/>
-        </p:spPr>
-        <p:txBody>
-          <a:bodyPr wrap="square">
-            <a:spAutoFit/>
-          </a:bodyPr>
-          <a:lstStyle/>
-          <a:p>
-            <a:pPr algn="ctr">
-              <a:lnSpc>
                 <a:spcPct val="110000"/>
               </a:lnSpc>
             </a:pPr>
@@ -13342,7 +15412,7 @@
         </p:nvSpPr>
         <p:spPr>
           <a:xfrm>
-            <a:off x="5175504" y="4590288"/>
+            <a:off x="5175504" y="4828032"/>
             <a:ext cx="1810512" cy="274320"/>
           </a:xfrm>
           <a:prstGeom prst="rect">
@@ -13406,7 +15476,46 @@
         <p:spPr>
           <a:xfrm>
             <a:off x="7260336" y="3611880"/>
-            <a:ext cx="1810512" cy="365760"/>
+            <a:ext cx="1810512" cy="566928"/>
+          </a:xfrm>
+          <a:prstGeom prst="rect">
+            <a:avLst/>
+          </a:prstGeom>
+          <a:noFill/>
+        </p:spPr>
+        <p:txBody>
+          <a:bodyPr wrap="square" anchor="b">
+            <a:spAutoFit/>
+          </a:bodyPr>
+          <a:lstStyle/>
+          <a:p>
+            <a:pPr algn="ctr">
+              <a:lnSpc>
+                <a:spcPct val="100000"/>
+              </a:lnSpc>
+            </a:pPr>
+            <a:r>
+              <a:rPr sz="1500" b="1">
+                <a:solidFill>
+                  <a:srgbClr val="E8ECF3"/>
+                </a:solidFill>
+                <a:latin typeface="Helvetica Neue"/>
+              </a:rPr>
+              <a:t>Reem Shkeep</a:t>
+            </a:r>
+          </a:p>
+        </p:txBody>
+      </p:sp>
+      <p:sp>
+        <p:nvSpPr>
+          <p:cNvPr id="21" name="TextBox 20"/>
+          <p:cNvSpPr txBox="1"/>
+          <p:nvPr/>
+        </p:nvSpPr>
+        <p:spPr>
+          <a:xfrm>
+            <a:off x="7260336" y="4224528"/>
+            <a:ext cx="1810512" cy="548640"/>
           </a:xfrm>
           <a:prstGeom prst="rect">
             <a:avLst/>
@@ -13421,45 +15530,6 @@
           <a:p>
             <a:pPr algn="ctr">
               <a:lnSpc>
-                <a:spcPct val="100000"/>
-              </a:lnSpc>
-            </a:pPr>
-            <a:r>
-              <a:rPr sz="1500" b="1">
-                <a:solidFill>
-                  <a:srgbClr val="E8ECF3"/>
-                </a:solidFill>
-                <a:latin typeface="Helvetica Neue"/>
-              </a:rPr>
-              <a:t>Reem Shkeep</a:t>
-            </a:r>
-          </a:p>
-        </p:txBody>
-      </p:sp>
-      <p:sp>
-        <p:nvSpPr>
-          <p:cNvPr id="21" name="TextBox 20"/>
-          <p:cNvSpPr txBox="1"/>
-          <p:nvPr/>
-        </p:nvSpPr>
-        <p:spPr>
-          <a:xfrm>
-            <a:off x="7260336" y="4005072"/>
-            <a:ext cx="1810512" cy="548640"/>
-          </a:xfrm>
-          <a:prstGeom prst="rect">
-            <a:avLst/>
-          </a:prstGeom>
-          <a:noFill/>
-        </p:spPr>
-        <p:txBody>
-          <a:bodyPr wrap="square">
-            <a:spAutoFit/>
-          </a:bodyPr>
-          <a:lstStyle/>
-          <a:p>
-            <a:pPr algn="ctr">
-              <a:lnSpc>
                 <a:spcPct val="110000"/>
               </a:lnSpc>
             </a:pPr>
@@ -13483,7 +15553,7 @@
         </p:nvSpPr>
         <p:spPr>
           <a:xfrm>
-            <a:off x="7260336" y="4590288"/>
+            <a:off x="7260336" y="4828032"/>
             <a:ext cx="1810512" cy="274320"/>
           </a:xfrm>
           <a:prstGeom prst="rect">
@@ -13547,7 +15617,46 @@
         <p:spPr>
           <a:xfrm>
             <a:off x="9345168" y="3611880"/>
-            <a:ext cx="1810512" cy="365760"/>
+            <a:ext cx="1810512" cy="566928"/>
+          </a:xfrm>
+          <a:prstGeom prst="rect">
+            <a:avLst/>
+          </a:prstGeom>
+          <a:noFill/>
+        </p:spPr>
+        <p:txBody>
+          <a:bodyPr wrap="square" anchor="b">
+            <a:spAutoFit/>
+          </a:bodyPr>
+          <a:lstStyle/>
+          <a:p>
+            <a:pPr algn="ctr">
+              <a:lnSpc>
+                <a:spcPct val="100000"/>
+              </a:lnSpc>
+            </a:pPr>
+            <a:r>
+              <a:rPr sz="1500" b="1">
+                <a:solidFill>
+                  <a:srgbClr val="E8ECF3"/>
+                </a:solidFill>
+                <a:latin typeface="Helvetica Neue"/>
+              </a:rPr>
+              <a:t>Aya Ebrahim</a:t>
+            </a:r>
+          </a:p>
+        </p:txBody>
+      </p:sp>
+      <p:sp>
+        <p:nvSpPr>
+          <p:cNvPr id="25" name="TextBox 24"/>
+          <p:cNvSpPr txBox="1"/>
+          <p:nvPr/>
+        </p:nvSpPr>
+        <p:spPr>
+          <a:xfrm>
+            <a:off x="9345168" y="4224528"/>
+            <a:ext cx="1810512" cy="548640"/>
           </a:xfrm>
           <a:prstGeom prst="rect">
             <a:avLst/>
@@ -13562,31 +15671,31 @@
           <a:p>
             <a:pPr algn="ctr">
               <a:lnSpc>
-                <a:spcPct val="100000"/>
-              </a:lnSpc>
-            </a:pPr>
-            <a:r>
-              <a:rPr sz="1500" b="1">
-                <a:solidFill>
-                  <a:srgbClr val="E8ECF3"/>
+                <a:spcPct val="110000"/>
+              </a:lnSpc>
+            </a:pPr>
+            <a:r>
+              <a:rPr sz="1300" b="0">
+                <a:solidFill>
+                  <a:srgbClr val="8B97AB"/>
                 </a:solidFill>
                 <a:latin typeface="Helvetica Neue"/>
               </a:rPr>
-              <a:t>Aya Ebrahim</a:t>
-            </a:r>
-          </a:p>
-        </p:txBody>
-      </p:sp>
-      <p:sp>
-        <p:nvSpPr>
-          <p:cNvPr id="25" name="TextBox 24"/>
+              <a:t>Junior Testing Engineer</a:t>
+            </a:r>
+          </a:p>
+        </p:txBody>
+      </p:sp>
+      <p:sp>
+        <p:nvSpPr>
+          <p:cNvPr id="26" name="TextBox 25"/>
           <p:cNvSpPr txBox="1"/>
           <p:nvPr/>
         </p:nvSpPr>
         <p:spPr>
           <a:xfrm>
-            <a:off x="9345168" y="4005072"/>
-            <a:ext cx="1810512" cy="548640"/>
+            <a:off x="9345168" y="4828032"/>
+            <a:ext cx="1810512" cy="274320"/>
           </a:xfrm>
           <a:prstGeom prst="rect">
             <a:avLst/>
@@ -13601,45 +15710,6 @@
           <a:p>
             <a:pPr algn="ctr">
               <a:lnSpc>
-                <a:spcPct val="110000"/>
-              </a:lnSpc>
-            </a:pPr>
-            <a:r>
-              <a:rPr sz="1300" b="0">
-                <a:solidFill>
-                  <a:srgbClr val="8B97AB"/>
-                </a:solidFill>
-                <a:latin typeface="Helvetica Neue"/>
-              </a:rPr>
-              <a:t>Junior Testing Engineer</a:t>
-            </a:r>
-          </a:p>
-        </p:txBody>
-      </p:sp>
-      <p:sp>
-        <p:nvSpPr>
-          <p:cNvPr id="26" name="TextBox 25"/>
-          <p:cNvSpPr txBox="1"/>
-          <p:nvPr/>
-        </p:nvSpPr>
-        <p:spPr>
-          <a:xfrm>
-            <a:off x="9345168" y="4590288"/>
-            <a:ext cx="1810512" cy="274320"/>
-          </a:xfrm>
-          <a:prstGeom prst="rect">
-            <a:avLst/>
-          </a:prstGeom>
-          <a:noFill/>
-        </p:spPr>
-        <p:txBody>
-          <a:bodyPr wrap="square">
-            <a:spAutoFit/>
-          </a:bodyPr>
-          <a:lstStyle/>
-          <a:p>
-            <a:pPr algn="ctr">
-              <a:lnSpc>
                 <a:spcPct val="100000"/>
               </a:lnSpc>
             </a:pPr>
@@ -13657,46 +15727,7 @@
       </p:sp>
       <p:sp>
         <p:nvSpPr>
-          <p:cNvPr id="27" name="TextBox 26"/>
-          <p:cNvSpPr txBox="1"/>
-          <p:nvPr/>
-        </p:nvSpPr>
-        <p:spPr>
-          <a:xfrm>
-            <a:off x="1005840" y="5852160"/>
-            <a:ext cx="10058400" cy="548640"/>
-          </a:xfrm>
-          <a:prstGeom prst="rect">
-            <a:avLst/>
-          </a:prstGeom>
-          <a:noFill/>
-        </p:spPr>
-        <p:txBody>
-          <a:bodyPr wrap="square">
-            <a:spAutoFit/>
-          </a:bodyPr>
-          <a:lstStyle/>
-          <a:p>
-            <a:pPr algn="l">
-              <a:lnSpc>
-                <a:spcPct val="130000"/>
-              </a:lnSpc>
-            </a:pPr>
-            <a:r>
-              <a:rPr sz="1500" b="0">
-                <a:solidFill>
-                  <a:srgbClr val="8B97AB"/>
-                </a:solidFill>
-                <a:latin typeface="Helvetica Neue"/>
-              </a:rPr>
-              <a:t>The work is divided by file rather than by feature, which is how fourteen parallel workstreams landed without collisions.</a:t>
-            </a:r>
-          </a:p>
-        </p:txBody>
-      </p:sp>
-      <p:sp>
-        <p:nvSpPr>
-          <p:cNvPr id="28" name="TextBox 27"/>
+          <p:cNvPr id="55" name="TextBox 54"/>
           <p:cNvSpPr txBox="1"/>
           <p:nvPr/>
         </p:nvSpPr>
@@ -13771,7 +15802,7 @@
                                       <p:cBhvr>
                                         <p:cTn id="13" dur="1" fill="hold"/>
                                         <p:tgtEl>
-                                          <p:spTgt spid="27"/>
+                                          <p:spTgt spid="7"/>
                                         </p:tgtEl>
                                         <p:attrNameLst>
                                           <p:attrName>style.visibility</p:attrName>
@@ -13785,7 +15816,203 @@
                                       <p:cBhvr>
                                         <p:cTn id="14" dur="450"/>
                                         <p:tgtEl>
-                                          <p:spTgt spid="27"/>
+                                          <p:spTgt spid="7"/>
+                                        </p:tgtEl>
+                                      </p:cBhvr>
+                                    </p:animEffect>
+                                  </p:childTnLst>
+                                </p:cTn>
+                              </p:par>
+                            </p:childTnLst>
+                          </p:cTn>
+                        </p:par>
+                      </p:childTnLst>
+                    </p:cTn>
+                  </p:par>
+                  <p:par>
+                    <p:cTn id="20" fill="hold">
+                      <p:stCondLst>
+                        <p:cond delay="indefinite"/>
+                      </p:stCondLst>
+                      <p:childTnLst>
+                        <p:par>
+                          <p:cTn id="21" fill="hold">
+                            <p:stCondLst>
+                              <p:cond delay="0"/>
+                            </p:stCondLst>
+                            <p:childTnLst>
+                              <p:par>
+                                <p:cTn id="22" presetID="10" presetClass="entr" presetSubtype="0" fill="hold" grpId="0" nodeType="afterEffect">
+                                  <p:stCondLst>
+                                    <p:cond delay="0"/>
+                                  </p:stCondLst>
+                                  <p:childTnLst>
+                                    <p:set>
+                                      <p:cBhvr>
+                                        <p:cTn id="23" dur="1" fill="hold"/>
+                                        <p:tgtEl>
+                                          <p:spTgt spid="12"/>
+                                        </p:tgtEl>
+                                        <p:attrNameLst>
+                                          <p:attrName>style.visibility</p:attrName>
+                                        </p:attrNameLst>
+                                      </p:cBhvr>
+                                      <p:to>
+                                        <p:strVal val="visible"/>
+                                      </p:to>
+                                    </p:set>
+                                    <p:animEffect transition="in" filter="fade">
+                                      <p:cBhvr>
+                                        <p:cTn id="24" dur="450"/>
+                                        <p:tgtEl>
+                                          <p:spTgt spid="12"/>
+                                        </p:tgtEl>
+                                      </p:cBhvr>
+                                    </p:animEffect>
+                                  </p:childTnLst>
+                                </p:cTn>
+                              </p:par>
+                            </p:childTnLst>
+                          </p:cTn>
+                        </p:par>
+                      </p:childTnLst>
+                    </p:cTn>
+                  </p:par>
+                  <p:par>
+                    <p:cTn id="30" fill="hold">
+                      <p:stCondLst>
+                        <p:cond delay="indefinite"/>
+                      </p:stCondLst>
+                      <p:childTnLst>
+                        <p:par>
+                          <p:cTn id="31" fill="hold">
+                            <p:stCondLst>
+                              <p:cond delay="0"/>
+                            </p:stCondLst>
+                            <p:childTnLst>
+                              <p:par>
+                                <p:cTn id="32" presetID="10" presetClass="entr" presetSubtype="0" fill="hold" grpId="0" nodeType="afterEffect">
+                                  <p:stCondLst>
+                                    <p:cond delay="0"/>
+                                  </p:stCondLst>
+                                  <p:childTnLst>
+                                    <p:set>
+                                      <p:cBhvr>
+                                        <p:cTn id="33" dur="1" fill="hold"/>
+                                        <p:tgtEl>
+                                          <p:spTgt spid="16"/>
+                                        </p:tgtEl>
+                                        <p:attrNameLst>
+                                          <p:attrName>style.visibility</p:attrName>
+                                        </p:attrNameLst>
+                                      </p:cBhvr>
+                                      <p:to>
+                                        <p:strVal val="visible"/>
+                                      </p:to>
+                                    </p:set>
+                                    <p:animEffect transition="in" filter="fade">
+                                      <p:cBhvr>
+                                        <p:cTn id="34" dur="450"/>
+                                        <p:tgtEl>
+                                          <p:spTgt spid="16"/>
+                                        </p:tgtEl>
+                                      </p:cBhvr>
+                                    </p:animEffect>
+                                  </p:childTnLst>
+                                </p:cTn>
+                              </p:par>
+                            </p:childTnLst>
+                          </p:cTn>
+                        </p:par>
+                      </p:childTnLst>
+                    </p:cTn>
+                  </p:par>
+                  <p:par>
+                    <p:cTn id="40" fill="hold">
+                      <p:stCondLst>
+                        <p:cond delay="indefinite"/>
+                      </p:stCondLst>
+                      <p:childTnLst>
+                        <p:par>
+                          <p:cTn id="41" fill="hold">
+                            <p:stCondLst>
+                              <p:cond delay="0"/>
+                            </p:stCondLst>
+                            <p:childTnLst>
+                              <p:par>
+                                <p:cTn id="42" presetID="10" presetClass="entr" presetSubtype="0" fill="hold" grpId="0" nodeType="afterEffect">
+                                  <p:stCondLst>
+                                    <p:cond delay="0"/>
+                                  </p:stCondLst>
+                                  <p:childTnLst>
+                                    <p:set>
+                                      <p:cBhvr>
+                                        <p:cTn id="43" dur="1" fill="hold"/>
+                                        <p:tgtEl>
+                                          <p:spTgt spid="20"/>
+                                        </p:tgtEl>
+                                        <p:attrNameLst>
+                                          <p:attrName>style.visibility</p:attrName>
+                                        </p:attrNameLst>
+                                      </p:cBhvr>
+                                      <p:to>
+                                        <p:strVal val="visible"/>
+                                      </p:to>
+                                    </p:set>
+                                    <p:animEffect transition="in" filter="fade">
+                                      <p:cBhvr>
+                                        <p:cTn id="44" dur="450"/>
+                                        <p:tgtEl>
+                                          <p:spTgt spid="20"/>
+                                        </p:tgtEl>
+                                      </p:cBhvr>
+                                    </p:animEffect>
+                                  </p:childTnLst>
+                                </p:cTn>
+                              </p:par>
+                            </p:childTnLst>
+                          </p:cTn>
+                        </p:par>
+                      </p:childTnLst>
+                    </p:cTn>
+                  </p:par>
+                  <p:par>
+                    <p:cTn id="50" fill="hold">
+                      <p:stCondLst>
+                        <p:cond delay="indefinite"/>
+                      </p:stCondLst>
+                      <p:childTnLst>
+                        <p:par>
+                          <p:cTn id="51" fill="hold">
+                            <p:stCondLst>
+                              <p:cond delay="0"/>
+                            </p:stCondLst>
+                            <p:childTnLst>
+                              <p:par>
+                                <p:cTn id="52" presetID="10" presetClass="entr" presetSubtype="0" fill="hold" grpId="0" nodeType="afterEffect">
+                                  <p:stCondLst>
+                                    <p:cond delay="0"/>
+                                  </p:stCondLst>
+                                  <p:childTnLst>
+                                    <p:set>
+                                      <p:cBhvr>
+                                        <p:cTn id="53" dur="1" fill="hold"/>
+                                        <p:tgtEl>
+                                          <p:spTgt spid="24"/>
+                                        </p:tgtEl>
+                                        <p:attrNameLst>
+                                          <p:attrName>style.visibility</p:attrName>
+                                        </p:attrNameLst>
+                                      </p:cBhvr>
+                                      <p:to>
+                                        <p:strVal val="visible"/>
+                                      </p:to>
+                                    </p:set>
+                                    <p:animEffect transition="in" filter="fade">
+                                      <p:cBhvr>
+                                        <p:cTn id="54" dur="450"/>
+                                        <p:tgtEl>
+                                          <p:spTgt spid="24"/>
                                         </p:tgtEl>
                                       </p:cBhvr>
                                     </p:animEffect>
@@ -13957,7 +16184,7 @@
       </p:sp>
       <p:sp>
         <p:nvSpPr>
-          <p:cNvPr id="5" name="Rectangle 4"/>
+          <p:cNvPr id="5" name="deckkit-rule"/>
           <p:cNvSpPr/>
           <p:nvPr/>
         </p:nvSpPr>
@@ -15004,7 +17231,7 @@
             <a:r>
               <a:rPr sz="1600" b="1">
                 <a:solidFill>
-                  <a:srgbClr val="22D3EE"/>
+                  <a:srgbClr val="E8ECF3"/>
                 </a:solidFill>
                 <a:latin typeface="Helvetica Neue"/>
               </a:rPr>
@@ -15160,7 +17387,7 @@
             <a:r>
               <a:rPr sz="1600" b="1">
                 <a:solidFill>
-                  <a:srgbClr val="22D3EE"/>
+                  <a:srgbClr val="E8ECF3"/>
                 </a:solidFill>
                 <a:latin typeface="Helvetica Neue"/>
               </a:rPr>
@@ -15431,7 +17658,7 @@
       </p:sp>
       <p:sp>
         <p:nvSpPr>
-          <p:cNvPr id="5" name="Rectangle 4"/>
+          <p:cNvPr id="5" name="deckkit-rule"/>
           <p:cNvSpPr/>
           <p:nvPr/>
         </p:nvSpPr>
@@ -15546,7 +17773,7 @@
                 </a:solidFill>
                 <a:latin typeface="Helvetica Neue"/>
               </a:rPr>
-              <a:t>A model can be persuaded, distracted or prompt-injected. It is the wrong thing to place between a committed credential and a default branch.</a:t>
+              <a:t>A model can be persuaded, distracted or prompt-injected. It is the wrong thing to place between a committed credential and the main branch.</a:t>
             </a:r>
           </a:p>
         </p:txBody>
@@ -15618,9 +17845,9 @@
               </a:lnSpc>
             </a:pPr>
             <a:r>
-              <a:rPr sz="1800" b="0">
-                <a:solidFill>
-                  <a:srgbClr val="22D3EE"/>
+              <a:rPr sz="1800" b="1">
+                <a:solidFill>
+                  <a:srgbClr val="E8ECF3"/>
                 </a:solidFill>
                 <a:latin typeface="Helvetica Neue"/>
               </a:rPr>
@@ -16039,7 +18266,7 @@
       </p:sp>
       <p:sp>
         <p:nvSpPr>
-          <p:cNvPr id="5" name="Rectangle 4"/>
+          <p:cNvPr id="5" name="deckkit-rule"/>
           <p:cNvSpPr/>
           <p:nvPr/>
         </p:nvSpPr>
@@ -16096,11 +18323,11 @@
             <a:avLst/>
           </a:prstGeom>
           <a:solidFill>
-            <a:srgbClr val="6EE7B7"/>
+            <a:srgbClr val="22D3EE"/>
           </a:solidFill>
           <a:ln w="25400">
             <a:solidFill>
-              <a:srgbClr val="6EE7B7"/>
+              <a:srgbClr val="22D3EE"/>
             </a:solidFill>
           </a:ln>
           <a:effectLst/>
@@ -16142,7 +18369,7 @@
             <a:avLst/>
           </a:prstGeom>
           <a:solidFill>
-            <a:srgbClr val="6EE7B7"/>
+            <a:srgbClr val="22D3EE"/>
           </a:solidFill>
           <a:ln>
             <a:noFill/>
@@ -16229,7 +18456,7 @@
           </a:solidFill>
           <a:ln w="25400">
             <a:solidFill>
-              <a:srgbClr val="6EE7B7"/>
+              <a:srgbClr val="22D3EE"/>
             </a:solidFill>
           </a:ln>
           <a:effectLst/>
@@ -16271,7 +18498,7 @@
             <a:avLst/>
           </a:prstGeom>
           <a:solidFill>
-            <a:srgbClr val="6EE7B7"/>
+            <a:srgbClr val="22D3EE"/>
           </a:solidFill>
           <a:ln>
             <a:noFill/>
@@ -16330,7 +18557,7 @@
             <a:r>
               <a:rPr sz="1100" b="0">
                 <a:solidFill>
-                  <a:srgbClr val="22D3EE"/>
+                  <a:srgbClr val="E8ECF3"/>
                 </a:solidFill>
                 <a:latin typeface="Menlo"/>
               </a:rPr>
@@ -16354,11 +18581,11 @@
             <a:avLst/>
           </a:prstGeom>
           <a:solidFill>
-            <a:srgbClr val="6EE7B7"/>
+            <a:srgbClr val="22D3EE"/>
           </a:solidFill>
           <a:ln w="25400">
             <a:solidFill>
-              <a:srgbClr val="6EE7B7"/>
+              <a:srgbClr val="22D3EE"/>
             </a:solidFill>
           </a:ln>
           <a:effectLst/>
@@ -16400,7 +18627,7 @@
             <a:avLst/>
           </a:prstGeom>
           <a:solidFill>
-            <a:srgbClr val="6EE7B7"/>
+            <a:srgbClr val="22D3EE"/>
           </a:solidFill>
           <a:ln>
             <a:noFill/>
@@ -16483,11 +18710,11 @@
             <a:avLst/>
           </a:prstGeom>
           <a:solidFill>
-            <a:srgbClr val="6EE7B7"/>
+            <a:srgbClr val="22D3EE"/>
           </a:solidFill>
           <a:ln w="25400">
             <a:solidFill>
-              <a:srgbClr val="6EE7B7"/>
+              <a:srgbClr val="22D3EE"/>
             </a:solidFill>
           </a:ln>
           <a:effectLst/>
@@ -16529,7 +18756,7 @@
             <a:avLst/>
           </a:prstGeom>
           <a:solidFill>
-            <a:srgbClr val="6EE7B7"/>
+            <a:srgbClr val="22D3EE"/>
           </a:solidFill>
           <a:ln>
             <a:noFill/>
@@ -16612,11 +18839,11 @@
             <a:avLst/>
           </a:prstGeom>
           <a:solidFill>
-            <a:srgbClr val="6EE7B7"/>
+            <a:srgbClr val="22D3EE"/>
           </a:solidFill>
           <a:ln w="25400">
             <a:solidFill>
-              <a:srgbClr val="6EE7B7"/>
+              <a:srgbClr val="22D3EE"/>
             </a:solidFill>
           </a:ln>
           <a:effectLst/>
@@ -16658,7 +18885,7 @@
             <a:avLst/>
           </a:prstGeom>
           <a:solidFill>
-            <a:srgbClr val="6EE7B7"/>
+            <a:srgbClr val="22D3EE"/>
           </a:solidFill>
           <a:ln>
             <a:noFill/>
@@ -16745,7 +18972,7 @@
           </a:solidFill>
           <a:ln w="25400">
             <a:solidFill>
-              <a:srgbClr val="6EE7B7"/>
+              <a:srgbClr val="22D3EE"/>
             </a:solidFill>
           </a:ln>
           <a:effectLst/>
@@ -16787,7 +19014,7 @@
             <a:avLst/>
           </a:prstGeom>
           <a:solidFill>
-            <a:srgbClr val="6EE7B7"/>
+            <a:srgbClr val="22D3EE"/>
           </a:solidFill>
           <a:ln>
             <a:noFill/>
@@ -16846,7 +19073,7 @@
             <a:r>
               <a:rPr sz="1100" b="0">
                 <a:solidFill>
-                  <a:srgbClr val="22D3EE"/>
+                  <a:srgbClr val="E8ECF3"/>
                 </a:solidFill>
                 <a:latin typeface="Menlo"/>
               </a:rPr>
@@ -16870,11 +19097,11 @@
             <a:avLst/>
           </a:prstGeom>
           <a:solidFill>
-            <a:srgbClr val="6EE7B7"/>
+            <a:srgbClr val="22D3EE"/>
           </a:solidFill>
           <a:ln w="25400">
             <a:solidFill>
-              <a:srgbClr val="6EE7B7"/>
+              <a:srgbClr val="22D3EE"/>
             </a:solidFill>
           </a:ln>
           <a:effectLst/>
@@ -16916,7 +19143,7 @@
             <a:avLst/>
           </a:prstGeom>
           <a:solidFill>
-            <a:srgbClr val="6EE7B7"/>
+            <a:srgbClr val="22D3EE"/>
           </a:solidFill>
           <a:ln>
             <a:noFill/>
@@ -17003,7 +19230,7 @@
           </a:solidFill>
           <a:ln w="25400">
             <a:solidFill>
-              <a:srgbClr val="6EE7B7"/>
+              <a:srgbClr val="22D3EE"/>
             </a:solidFill>
           </a:ln>
           <a:effectLst/>
@@ -17045,7 +19272,7 @@
             <a:avLst/>
           </a:prstGeom>
           <a:solidFill>
-            <a:srgbClr val="6EE7B7"/>
+            <a:srgbClr val="22D3EE"/>
           </a:solidFill>
           <a:ln>
             <a:noFill/>
@@ -17104,7 +19331,7 @@
             <a:r>
               <a:rPr sz="1100" b="0">
                 <a:solidFill>
-                  <a:srgbClr val="22D3EE"/>
+                  <a:srgbClr val="E8ECF3"/>
                 </a:solidFill>
                 <a:latin typeface="Menlo"/>
               </a:rPr>
@@ -17128,11 +19355,11 @@
             <a:avLst/>
           </a:prstGeom>
           <a:solidFill>
-            <a:srgbClr val="6EE7B7"/>
+            <a:srgbClr val="22D3EE"/>
           </a:solidFill>
           <a:ln w="25400">
             <a:solidFill>
-              <a:srgbClr val="6EE7B7"/>
+              <a:srgbClr val="22D3EE"/>
             </a:solidFill>
           </a:ln>
           <a:effectLst/>
@@ -17232,7 +19459,7 @@
                 </a:solidFill>
                 <a:latin typeface="Helvetica Neue"/>
               </a:rPr>
-              <a:t>A filled dot is an agent stage. A ring is a gate — the pipeline stops there until a named reviewer approves it in GitHub.</a:t>
+              <a:t>A filled dot is an agent. A ring is a gate: the pipeline stops there until a named person approves it.</a:t>
             </a:r>
           </a:p>
         </p:txBody>
@@ -17356,7 +19583,7 @@
                 </a:solidFill>
                 <a:latin typeface="Helvetica Neue"/>
               </a:rPr>
-              <a:t>planner, developer, reviewer, security, SRE — each an isolated runtime, one image, five roles.</a:t>
+              <a:t>planner, developer, reviewer, security and SRE, each in its own isolated runtime on AWS.</a:t>
             </a:r>
           </a:p>
         </p:txBody>
@@ -17480,7 +19707,7 @@
                 </a:solidFill>
                 <a:latin typeface="Helvetica Neue"/>
               </a:rPr>
-              <a:t>GitHub Environments with required reviewers. A gate pauses a JOB, which is why the pipeline is cut into seven.</a:t>
+              <a:t>a required reviewer in GitHub. The run waits at each gate until a named person approves it.</a:t>
             </a:r>
           </a:p>
         </p:txBody>
@@ -19117,14 +21344,92 @@
       </p:sp>
       <p:sp>
         <p:nvSpPr>
-          <p:cNvPr id="3" name="Rectangle 2"/>
+          <p:cNvPr id="3" name="TextBox 2"/>
+          <p:cNvSpPr txBox="1"/>
+          <p:nvPr/>
+        </p:nvSpPr>
+        <p:spPr>
+          <a:xfrm>
+            <a:off x="1005840" y="658368"/>
+            <a:ext cx="10149840" cy="292608"/>
+          </a:xfrm>
+          <a:prstGeom prst="rect">
+            <a:avLst/>
+          </a:prstGeom>
+          <a:noFill/>
+        </p:spPr>
+        <p:txBody>
+          <a:bodyPr wrap="square">
+            <a:spAutoFit/>
+          </a:bodyPr>
+          <a:lstStyle/>
+          <a:p>
+            <a:pPr algn="l">
+              <a:lnSpc>
+                <a:spcPct val="100000"/>
+              </a:lnSpc>
+            </a:pPr>
+            <a:r>
+              <a:rPr sz="1200" b="1">
+                <a:solidFill>
+                  <a:srgbClr val="22D3EE"/>
+                </a:solidFill>
+                <a:latin typeface="Helvetica Neue"/>
+              </a:rPr>
+              <a:t>OVERVIEW</a:t>
+            </a:r>
+          </a:p>
+        </p:txBody>
+      </p:sp>
+      <p:sp>
+        <p:nvSpPr>
+          <p:cNvPr id="4" name="TextBox 3"/>
+          <p:cNvSpPr txBox="1"/>
+          <p:nvPr/>
+        </p:nvSpPr>
+        <p:spPr>
+          <a:xfrm>
+            <a:off x="1005840" y="1078992"/>
+            <a:ext cx="10149840" cy="914400"/>
+          </a:xfrm>
+          <a:prstGeom prst="rect">
+            <a:avLst/>
+          </a:prstGeom>
+          <a:noFill/>
+        </p:spPr>
+        <p:txBody>
+          <a:bodyPr wrap="square">
+            <a:spAutoFit/>
+          </a:bodyPr>
+          <a:lstStyle/>
+          <a:p>
+            <a:pPr algn="l">
+              <a:lnSpc>
+                <a:spcPct val="106000"/>
+              </a:lnSpc>
+            </a:pPr>
+            <a:r>
+              <a:rPr sz="3000" b="1">
+                <a:solidFill>
+                  <a:srgbClr val="E8ECF3"/>
+                </a:solidFill>
+                <a:latin typeface="Helvetica Neue"/>
+              </a:rPr>
+              <a:t>Non-deterministic models. A deterministic gate.</a:t>
+            </a:r>
+          </a:p>
+        </p:txBody>
+      </p:sp>
+      <p:sp>
+        <p:nvSpPr>
+          <p:cNvPr id="5" name="deckkit-rule"/>
           <p:cNvSpPr/>
           <p:nvPr/>
         </p:nvSpPr>
         <p:spPr>
           <a:xfrm>
-            <a:off x="0" y="0"/>
-            <a:ext cx="310896" cy="6858000"/>
+            <a:off x="1005840" y="1883664"/>
+            <a:ext cx="1463040" cy="38100"/>
           </a:xfrm>
           <a:prstGeom prst="rect">
             <a:avLst/>
@@ -19161,14 +21466,14 @@
       </p:sp>
       <p:sp>
         <p:nvSpPr>
-          <p:cNvPr id="4" name="TextBox 3"/>
+          <p:cNvPr id="6" name="TextBox 5"/>
           <p:cNvSpPr txBox="1"/>
           <p:nvPr/>
         </p:nvSpPr>
         <p:spPr>
           <a:xfrm>
-            <a:off x="1005840" y="658368"/>
-            <a:ext cx="10149840" cy="292608"/>
+            <a:off x="1005840" y="2103120"/>
+            <a:ext cx="10058400" cy="685800"/>
           </a:xfrm>
           <a:prstGeom prst="rect">
             <a:avLst/>
@@ -19183,31 +21488,31 @@
           <a:p>
             <a:pPr algn="l">
               <a:lnSpc>
-                <a:spcPct val="100000"/>
-              </a:lnSpc>
-            </a:pPr>
-            <a:r>
-              <a:rPr sz="1200" b="1">
-                <a:solidFill>
-                  <a:srgbClr val="22D3EE"/>
+                <a:spcPct val="130000"/>
+              </a:lnSpc>
+            </a:pPr>
+            <a:r>
+              <a:rPr sz="1700" b="0">
+                <a:solidFill>
+                  <a:srgbClr val="8B97AB"/>
                 </a:solidFill>
                 <a:latin typeface="Helvetica Neue"/>
               </a:rPr>
-              <a:t>OVERVIEW</a:t>
-            </a:r>
-          </a:p>
-        </p:txBody>
-      </p:sp>
-      <p:sp>
-        <p:nvSpPr>
-          <p:cNvPr id="5" name="TextBox 4"/>
+              <a:t>Every agent here is a language model, and any of them can be wrong. The component that stops a change is not one of them.</a:t>
+            </a:r>
+          </a:p>
+        </p:txBody>
+      </p:sp>
+      <p:sp>
+        <p:nvSpPr>
+          <p:cNvPr id="7" name="TextBox 6"/>
           <p:cNvSpPr txBox="1"/>
           <p:nvPr/>
         </p:nvSpPr>
         <p:spPr>
           <a:xfrm>
-            <a:off x="1005840" y="1078992"/>
-            <a:ext cx="10149840" cy="914400"/>
+            <a:off x="1005840" y="2926080"/>
+            <a:ext cx="2468880" cy="292608"/>
           </a:xfrm>
           <a:prstGeom prst="rect">
             <a:avLst/>
@@ -19222,37 +21527,115 @@
           <a:p>
             <a:pPr algn="l">
               <a:lnSpc>
-                <a:spcPct val="106000"/>
-              </a:lnSpc>
-            </a:pPr>
-            <a:r>
-              <a:rPr sz="3000" b="1">
-                <a:solidFill>
-                  <a:srgbClr val="E8ECF3"/>
+                <a:spcPct val="100000"/>
+              </a:lnSpc>
+            </a:pPr>
+            <a:r>
+              <a:rPr sz="1100" b="1">
+                <a:solidFill>
+                  <a:srgbClr val="22D3EE"/>
                 </a:solidFill>
                 <a:latin typeface="Helvetica Neue"/>
               </a:rPr>
-              <a:t>Non-deterministic models. A deterministic gate.</a:t>
-            </a:r>
-          </a:p>
-        </p:txBody>
-      </p:sp>
-      <p:sp>
-        <p:nvSpPr>
-          <p:cNvPr id="6" name="Rectangle 5"/>
+              <a:t/>
+            </a:r>
+          </a:p>
+        </p:txBody>
+      </p:sp>
+      <p:sp>
+        <p:nvSpPr>
+          <p:cNvPr id="8" name="TextBox 7"/>
+          <p:cNvSpPr txBox="1"/>
+          <p:nvPr/>
+        </p:nvSpPr>
+        <p:spPr>
+          <a:xfrm>
+            <a:off x="3474720" y="2926080"/>
+            <a:ext cx="3840480" cy="292608"/>
+          </a:xfrm>
+          <a:prstGeom prst="rect">
+            <a:avLst/>
+          </a:prstGeom>
+          <a:noFill/>
+        </p:spPr>
+        <p:txBody>
+          <a:bodyPr wrap="square">
+            <a:spAutoFit/>
+          </a:bodyPr>
+          <a:lstStyle/>
+          <a:p>
+            <a:pPr algn="l">
+              <a:lnSpc>
+                <a:spcPct val="100000"/>
+              </a:lnSpc>
+            </a:pPr>
+            <a:r>
+              <a:rPr sz="1100" b="1">
+                <a:solidFill>
+                  <a:srgbClr val="22D3EE"/>
+                </a:solidFill>
+                <a:latin typeface="Helvetica Neue"/>
+              </a:rPr>
+              <a:t>THE REVIEWER</a:t>
+            </a:r>
+          </a:p>
+        </p:txBody>
+      </p:sp>
+      <p:sp>
+        <p:nvSpPr>
+          <p:cNvPr id="9" name="TextBox 8"/>
+          <p:cNvSpPr txBox="1"/>
+          <p:nvPr/>
+        </p:nvSpPr>
+        <p:spPr>
+          <a:xfrm>
+            <a:off x="7315200" y="2926080"/>
+            <a:ext cx="3840480" cy="292608"/>
+          </a:xfrm>
+          <a:prstGeom prst="rect">
+            <a:avLst/>
+          </a:prstGeom>
+          <a:noFill/>
+        </p:spPr>
+        <p:txBody>
+          <a:bodyPr wrap="square">
+            <a:spAutoFit/>
+          </a:bodyPr>
+          <a:lstStyle/>
+          <a:p>
+            <a:pPr algn="l">
+              <a:lnSpc>
+                <a:spcPct val="100000"/>
+              </a:lnSpc>
+            </a:pPr>
+            <a:r>
+              <a:rPr sz="1100" b="1">
+                <a:solidFill>
+                  <a:srgbClr val="22D3EE"/>
+                </a:solidFill>
+                <a:latin typeface="Helvetica Neue"/>
+              </a:rPr>
+              <a:t>THE SECURITY STAGE</a:t>
+            </a:r>
+          </a:p>
+        </p:txBody>
+      </p:sp>
+      <p:sp>
+        <p:nvSpPr>
+          <p:cNvPr id="10" name="Rectangle 9"/>
           <p:cNvSpPr/>
           <p:nvPr/>
         </p:nvSpPr>
         <p:spPr>
           <a:xfrm>
-            <a:off x="1005840" y="1883664"/>
-            <a:ext cx="1463040" cy="38100"/>
+            <a:off x="1005840" y="3255264"/>
+            <a:ext cx="10149840" cy="12700"/>
           </a:xfrm>
           <a:prstGeom prst="rect">
             <a:avLst/>
           </a:prstGeom>
           <a:solidFill>
-            <a:srgbClr val="22D3EE"/>
+            <a:srgbClr val="1F2937"/>
           </a:solidFill>
           <a:ln>
             <a:noFill/>
@@ -19283,14 +21666,14 @@
       </p:sp>
       <p:sp>
         <p:nvSpPr>
-          <p:cNvPr id="7" name="TextBox 6"/>
+          <p:cNvPr id="11" name="TextBox 10"/>
           <p:cNvSpPr txBox="1"/>
           <p:nvPr/>
         </p:nvSpPr>
         <p:spPr>
           <a:xfrm>
-            <a:off x="1005840" y="1783080"/>
-            <a:ext cx="10058400" cy="685800"/>
+            <a:off x="1005840" y="3383280"/>
+            <a:ext cx="2468880" cy="457200"/>
           </a:xfrm>
           <a:prstGeom prst="rect">
             <a:avLst/>
@@ -19305,31 +21688,31 @@
           <a:p>
             <a:pPr algn="l">
               <a:lnSpc>
-                <a:spcPct val="130000"/>
-              </a:lnSpc>
-            </a:pPr>
-            <a:r>
-              <a:rPr sz="1700" b="0">
-                <a:solidFill>
-                  <a:srgbClr val="8B97AB"/>
+                <a:spcPct val="100000"/>
+              </a:lnSpc>
+            </a:pPr>
+            <a:r>
+              <a:rPr sz="1500" b="0">
+                <a:solidFill>
+                  <a:srgbClr val="E8ECF3"/>
                 </a:solidFill>
                 <a:latin typeface="Helvetica Neue"/>
               </a:rPr>
-              <a:t>Every agent here is a language model, and every one of them can be wrong. The component that stops a change is not one of them.</a:t>
-            </a:r>
-          </a:p>
-        </p:txBody>
-      </p:sp>
-      <p:sp>
-        <p:nvSpPr>
-          <p:cNvPr id="8" name="TextBox 7"/>
+              <a:t>what it is</a:t>
+            </a:r>
+          </a:p>
+        </p:txBody>
+      </p:sp>
+      <p:sp>
+        <p:nvSpPr>
+          <p:cNvPr id="12" name="TextBox 11"/>
           <p:cNvSpPr txBox="1"/>
           <p:nvPr/>
         </p:nvSpPr>
         <p:spPr>
           <a:xfrm>
-            <a:off x="1005840" y="2697480"/>
-            <a:ext cx="2286000" cy="292608"/>
+            <a:off x="3474720" y="3383280"/>
+            <a:ext cx="3840480" cy="457200"/>
           </a:xfrm>
           <a:prstGeom prst="rect">
             <a:avLst/>
@@ -19348,27 +21731,27 @@
               </a:lnSpc>
             </a:pPr>
             <a:r>
-              <a:rPr sz="1100" b="1">
-                <a:solidFill>
-                  <a:srgbClr val="22D3EE"/>
+              <a:rPr sz="1500" b="0">
+                <a:solidFill>
+                  <a:srgbClr val="8B97AB"/>
                 </a:solidFill>
                 <a:latin typeface="Helvetica Neue"/>
               </a:rPr>
-              <a:t/>
-            </a:r>
-          </a:p>
-        </p:txBody>
-      </p:sp>
-      <p:sp>
-        <p:nvSpPr>
-          <p:cNvPr id="9" name="TextBox 8"/>
+              <a:t>a model reading the change</a:t>
+            </a:r>
+          </a:p>
+        </p:txBody>
+      </p:sp>
+      <p:sp>
+        <p:nvSpPr>
+          <p:cNvPr id="13" name="TextBox 12"/>
           <p:cNvSpPr txBox="1"/>
           <p:nvPr/>
         </p:nvSpPr>
         <p:spPr>
           <a:xfrm>
-            <a:off x="3291840" y="2697480"/>
-            <a:ext cx="3840480" cy="292608"/>
+            <a:off x="7315200" y="3383280"/>
+            <a:ext cx="3840480" cy="457200"/>
           </a:xfrm>
           <a:prstGeom prst="rect">
             <a:avLst/>
@@ -19387,27 +21770,27 @@
               </a:lnSpc>
             </a:pPr>
             <a:r>
-              <a:rPr sz="1100" b="1">
-                <a:solidFill>
-                  <a:srgbClr val="22D3EE"/>
+              <a:rPr sz="1500" b="0">
+                <a:solidFill>
+                  <a:srgbClr val="8B97AB"/>
                 </a:solidFill>
                 <a:latin typeface="Helvetica Neue"/>
               </a:rPr>
-              <a:t>THE REVIEWER</a:t>
-            </a:r>
-          </a:p>
-        </p:txBody>
-      </p:sp>
-      <p:sp>
-        <p:nvSpPr>
-          <p:cNvPr id="10" name="TextBox 9"/>
+              <a:t>three scanners and a fixed rule</a:t>
+            </a:r>
+          </a:p>
+        </p:txBody>
+      </p:sp>
+      <p:sp>
+        <p:nvSpPr>
+          <p:cNvPr id="14" name="TextBox 13"/>
           <p:cNvSpPr txBox="1"/>
           <p:nvPr/>
         </p:nvSpPr>
         <p:spPr>
           <a:xfrm>
-            <a:off x="7132320" y="2697480"/>
-            <a:ext cx="4023360" cy="292608"/>
+            <a:off x="1005840" y="3840480"/>
+            <a:ext cx="2468880" cy="457200"/>
           </a:xfrm>
           <a:prstGeom prst="rect">
             <a:avLst/>
@@ -19426,71 +21809,27 @@
               </a:lnSpc>
             </a:pPr>
             <a:r>
-              <a:rPr sz="1100" b="1">
-                <a:solidFill>
-                  <a:srgbClr val="22D3EE"/>
+              <a:rPr sz="1500" b="0">
+                <a:solidFill>
+                  <a:srgbClr val="E8ECF3"/>
                 </a:solidFill>
                 <a:latin typeface="Helvetica Neue"/>
               </a:rPr>
-              <a:t>THE SECURITY STAGE</a:t>
-            </a:r>
-          </a:p>
-        </p:txBody>
-      </p:sp>
-      <p:sp>
-        <p:nvSpPr>
-          <p:cNvPr id="11" name="Rectangle 10"/>
-          <p:cNvSpPr/>
-          <p:nvPr/>
-        </p:nvSpPr>
-        <p:spPr>
-          <a:xfrm>
-            <a:off x="1005840" y="3026664"/>
-            <a:ext cx="10149840" cy="12700"/>
-          </a:xfrm>
-          <a:prstGeom prst="rect">
-            <a:avLst/>
-          </a:prstGeom>
-          <a:solidFill>
-            <a:srgbClr val="1F2937"/>
-          </a:solidFill>
-          <a:ln>
-            <a:noFill/>
-          </a:ln>
-          <a:effectLst/>
-        </p:spPr>
-        <p:style>
-          <a:lnRef idx="1">
-            <a:schemeClr val="accent1"/>
-          </a:lnRef>
-          <a:fillRef idx="3">
-            <a:schemeClr val="accent1"/>
-          </a:fillRef>
-          <a:effectRef idx="2">
-            <a:schemeClr val="accent1"/>
-          </a:effectRef>
-          <a:fontRef idx="minor">
-            <a:schemeClr val="lt1"/>
-          </a:fontRef>
-        </p:style>
-        <p:txBody>
-          <a:bodyPr rtlCol="0" anchor="ctr"/>
-          <a:lstStyle/>
-          <a:p>
-            <a:pPr algn="ctr"/>
-          </a:p>
-        </p:txBody>
-      </p:sp>
-      <p:sp>
-        <p:nvSpPr>
-          <p:cNvPr id="12" name="TextBox 11"/>
+              <a:t>what it catches</a:t>
+            </a:r>
+          </a:p>
+        </p:txBody>
+      </p:sp>
+      <p:sp>
+        <p:nvSpPr>
+          <p:cNvPr id="15" name="TextBox 14"/>
           <p:cNvSpPr txBox="1"/>
           <p:nvPr/>
         </p:nvSpPr>
         <p:spPr>
           <a:xfrm>
-            <a:off x="1005840" y="3154680"/>
-            <a:ext cx="2286000" cy="457200"/>
+            <a:off x="3474720" y="3840480"/>
+            <a:ext cx="3840480" cy="457200"/>
           </a:xfrm>
           <a:prstGeom prst="rect">
             <a:avLst/>
@@ -19509,26 +21848,26 @@
               </a:lnSpc>
             </a:pPr>
             <a:r>
-              <a:rPr sz="1400" b="0">
-                <a:solidFill>
-                  <a:srgbClr val="E8ECF3"/>
+              <a:rPr sz="1500" b="0">
+                <a:solidFill>
+                  <a:srgbClr val="8B97AB"/>
                 </a:solidFill>
                 <a:latin typeface="Helvetica Neue"/>
               </a:rPr>
-              <a:t>what it is</a:t>
-            </a:r>
-          </a:p>
-        </p:txBody>
-      </p:sp>
-      <p:sp>
-        <p:nvSpPr>
-          <p:cNvPr id="13" name="TextBox 12"/>
+              <a:t>intent, logic, a plan mismatch</a:t>
+            </a:r>
+          </a:p>
+        </p:txBody>
+      </p:sp>
+      <p:sp>
+        <p:nvSpPr>
+          <p:cNvPr id="16" name="TextBox 15"/>
           <p:cNvSpPr txBox="1"/>
           <p:nvPr/>
         </p:nvSpPr>
         <p:spPr>
           <a:xfrm>
-            <a:off x="3291840" y="3154680"/>
+            <a:off x="7315200" y="3840480"/>
             <a:ext cx="3840480" cy="457200"/>
           </a:xfrm>
           <a:prstGeom prst="rect">
@@ -19548,27 +21887,27 @@
               </a:lnSpc>
             </a:pPr>
             <a:r>
-              <a:rPr sz="1400" b="0">
+              <a:rPr sz="1500" b="0">
                 <a:solidFill>
                   <a:srgbClr val="8B97AB"/>
                 </a:solidFill>
-                <a:latin typeface="Menlo"/>
-              </a:rPr>
-              <a:t>a model reading the diff</a:t>
-            </a:r>
-          </a:p>
-        </p:txBody>
-      </p:sp>
-      <p:sp>
-        <p:nvSpPr>
-          <p:cNvPr id="14" name="TextBox 13"/>
+                <a:latin typeface="Helvetica Neue"/>
+              </a:rPr>
+              <a:t>credentials, known CVEs, unsafe code</a:t>
+            </a:r>
+          </a:p>
+        </p:txBody>
+      </p:sp>
+      <p:sp>
+        <p:nvSpPr>
+          <p:cNvPr id="17" name="TextBox 16"/>
           <p:cNvSpPr txBox="1"/>
           <p:nvPr/>
         </p:nvSpPr>
         <p:spPr>
           <a:xfrm>
-            <a:off x="7132320" y="3154680"/>
-            <a:ext cx="4023360" cy="457200"/>
+            <a:off x="1005840" y="4297680"/>
+            <a:ext cx="2468880" cy="457200"/>
           </a:xfrm>
           <a:prstGeom prst="rect">
             <a:avLst/>
@@ -19587,27 +21926,27 @@
               </a:lnSpc>
             </a:pPr>
             <a:r>
-              <a:rPr sz="1400" b="0">
-                <a:solidFill>
-                  <a:srgbClr val="8B97AB"/>
-                </a:solidFill>
-                <a:latin typeface="Menlo"/>
-              </a:rPr>
-              <a:t>three scanners and a fixed rule</a:t>
-            </a:r>
-          </a:p>
-        </p:txBody>
-      </p:sp>
-      <p:sp>
-        <p:nvSpPr>
-          <p:cNvPr id="15" name="TextBox 14"/>
+              <a:rPr sz="1500" b="0">
+                <a:solidFill>
+                  <a:srgbClr val="E8ECF3"/>
+                </a:solidFill>
+                <a:latin typeface="Helvetica Neue"/>
+              </a:rPr>
+              <a:t>its authority</a:t>
+            </a:r>
+          </a:p>
+        </p:txBody>
+      </p:sp>
+      <p:sp>
+        <p:nvSpPr>
+          <p:cNvPr id="18" name="TextBox 17"/>
           <p:cNvSpPr txBox="1"/>
           <p:nvPr/>
         </p:nvSpPr>
         <p:spPr>
           <a:xfrm>
-            <a:off x="1005840" y="3611880"/>
-            <a:ext cx="2286000" cy="457200"/>
+            <a:off x="3474720" y="4297680"/>
+            <a:ext cx="3840480" cy="457200"/>
           </a:xfrm>
           <a:prstGeom prst="rect">
             <a:avLst/>
@@ -19626,26 +21965,26 @@
               </a:lnSpc>
             </a:pPr>
             <a:r>
-              <a:rPr sz="1400" b="0">
-                <a:solidFill>
-                  <a:srgbClr val="E8ECF3"/>
+              <a:rPr sz="1500" b="0">
+                <a:solidFill>
+                  <a:srgbClr val="8B97AB"/>
                 </a:solidFill>
                 <a:latin typeface="Helvetica Neue"/>
               </a:rPr>
-              <a:t>catches</a:t>
-            </a:r>
-          </a:p>
-        </p:txBody>
-      </p:sp>
-      <p:sp>
-        <p:nvSpPr>
-          <p:cNvPr id="16" name="TextBox 15"/>
+              <a:t>advisory: it sends the change back</a:t>
+            </a:r>
+          </a:p>
+        </p:txBody>
+      </p:sp>
+      <p:sp>
+        <p:nvSpPr>
+          <p:cNvPr id="19" name="TextBox 18"/>
           <p:cNvSpPr txBox="1"/>
           <p:nvPr/>
         </p:nvSpPr>
         <p:spPr>
           <a:xfrm>
-            <a:off x="3291840" y="3611880"/>
+            <a:off x="7315200" y="4297680"/>
             <a:ext cx="3840480" cy="457200"/>
           </a:xfrm>
           <a:prstGeom prst="rect">
@@ -19665,27 +22004,27 @@
               </a:lnSpc>
             </a:pPr>
             <a:r>
-              <a:rPr sz="1400" b="0">
+              <a:rPr sz="1500" b="0">
                 <a:solidFill>
                   <a:srgbClr val="8B97AB"/>
                 </a:solidFill>
-                <a:latin typeface="Menlo"/>
-              </a:rPr>
-              <a:t>intent, logic, plan mismatch</a:t>
-            </a:r>
-          </a:p>
-        </p:txBody>
-      </p:sp>
-      <p:sp>
-        <p:nvSpPr>
-          <p:cNvPr id="17" name="TextBox 16"/>
+                <a:latin typeface="Helvetica Neue"/>
+              </a:rPr>
+              <a:t>binding: it stops the run</a:t>
+            </a:r>
+          </a:p>
+        </p:txBody>
+      </p:sp>
+      <p:sp>
+        <p:nvSpPr>
+          <p:cNvPr id="20" name="TextBox 19"/>
           <p:cNvSpPr txBox="1"/>
           <p:nvPr/>
         </p:nvSpPr>
         <p:spPr>
           <a:xfrm>
-            <a:off x="7132320" y="3611880"/>
-            <a:ext cx="4023360" cy="457200"/>
+            <a:off x="1005840" y="4754880"/>
+            <a:ext cx="2468880" cy="457200"/>
           </a:xfrm>
           <a:prstGeom prst="rect">
             <a:avLst/>
@@ -19704,27 +22043,27 @@
               </a:lnSpc>
             </a:pPr>
             <a:r>
-              <a:rPr sz="1400" b="0">
-                <a:solidFill>
-                  <a:srgbClr val="8B97AB"/>
-                </a:solidFill>
-                <a:latin typeface="Menlo"/>
-              </a:rPr>
-              <a:t>credentials, CVEs, injectable patterns</a:t>
-            </a:r>
-          </a:p>
-        </p:txBody>
-      </p:sp>
-      <p:sp>
-        <p:nvSpPr>
-          <p:cNvPr id="18" name="TextBox 17"/>
+              <a:rPr sz="1500" b="0">
+                <a:solidFill>
+                  <a:srgbClr val="E8ECF3"/>
+                </a:solidFill>
+                <a:latin typeface="Helvetica Neue"/>
+              </a:rPr>
+              <a:t>same input twice</a:t>
+            </a:r>
+          </a:p>
+        </p:txBody>
+      </p:sp>
+      <p:sp>
+        <p:nvSpPr>
+          <p:cNvPr id="21" name="TextBox 20"/>
           <p:cNvSpPr txBox="1"/>
           <p:nvPr/>
         </p:nvSpPr>
         <p:spPr>
           <a:xfrm>
-            <a:off x="1005840" y="4069080"/>
-            <a:ext cx="2286000" cy="457200"/>
+            <a:off x="3474720" y="4754880"/>
+            <a:ext cx="3840480" cy="457200"/>
           </a:xfrm>
           <a:prstGeom prst="rect">
             <a:avLst/>
@@ -19743,26 +22082,26 @@
               </a:lnSpc>
             </a:pPr>
             <a:r>
-              <a:rPr sz="1400" b="0">
-                <a:solidFill>
-                  <a:srgbClr val="E8ECF3"/>
+              <a:rPr sz="1500" b="0">
+                <a:solidFill>
+                  <a:srgbClr val="8B97AB"/>
                 </a:solidFill>
                 <a:latin typeface="Helvetica Neue"/>
               </a:rPr>
-              <a:t>authority</a:t>
-            </a:r>
-          </a:p>
-        </p:txBody>
-      </p:sp>
-      <p:sp>
-        <p:nvSpPr>
-          <p:cNvPr id="19" name="TextBox 18"/>
+              <a:t>may answer differently</a:t>
+            </a:r>
+          </a:p>
+        </p:txBody>
+      </p:sp>
+      <p:sp>
+        <p:nvSpPr>
+          <p:cNvPr id="22" name="TextBox 21"/>
           <p:cNvSpPr txBox="1"/>
           <p:nvPr/>
         </p:nvSpPr>
         <p:spPr>
           <a:xfrm>
-            <a:off x="3291840" y="4069080"/>
+            <a:off x="7315200" y="4754880"/>
             <a:ext cx="3840480" cy="457200"/>
           </a:xfrm>
           <a:prstGeom prst="rect">
@@ -19782,27 +22121,27 @@
               </a:lnSpc>
             </a:pPr>
             <a:r>
-              <a:rPr sz="1400" b="0">
+              <a:rPr sz="1500" b="0">
                 <a:solidFill>
                   <a:srgbClr val="8B97AB"/>
                 </a:solidFill>
-                <a:latin typeface="Menlo"/>
-              </a:rPr>
-              <a:t>ADVISORY — it loops, it cannot stop</a:t>
-            </a:r>
-          </a:p>
-        </p:txBody>
-      </p:sp>
-      <p:sp>
-        <p:nvSpPr>
-          <p:cNvPr id="20" name="TextBox 19"/>
+                <a:latin typeface="Helvetica Neue"/>
+              </a:rPr>
+              <a:t>the same answer, always</a:t>
+            </a:r>
+          </a:p>
+        </p:txBody>
+      </p:sp>
+      <p:sp>
+        <p:nvSpPr>
+          <p:cNvPr id="23" name="TextBox 22"/>
           <p:cNvSpPr txBox="1"/>
           <p:nvPr/>
         </p:nvSpPr>
         <p:spPr>
           <a:xfrm>
-            <a:off x="7132320" y="4069080"/>
-            <a:ext cx="4023360" cy="457200"/>
+            <a:off x="1005840" y="5212080"/>
+            <a:ext cx="2468880" cy="457200"/>
           </a:xfrm>
           <a:prstGeom prst="rect">
             <a:avLst/>
@@ -19821,27 +22160,27 @@
               </a:lnSpc>
             </a:pPr>
             <a:r>
-              <a:rPr sz="1400" b="0">
-                <a:solidFill>
-                  <a:srgbClr val="8B97AB"/>
-                </a:solidFill>
-                <a:latin typeface="Menlo"/>
-              </a:rPr>
-              <a:t>BINDING — it ends the run</a:t>
-            </a:r>
-          </a:p>
-        </p:txBody>
-      </p:sp>
-      <p:sp>
-        <p:nvSpPr>
-          <p:cNvPr id="21" name="TextBox 20"/>
+              <a:rPr sz="1500" b="0">
+                <a:solidFill>
+                  <a:srgbClr val="E8ECF3"/>
+                </a:solidFill>
+                <a:latin typeface="Helvetica Neue"/>
+              </a:rPr>
+              <a:t>can be talked out of it</a:t>
+            </a:r>
+          </a:p>
+        </p:txBody>
+      </p:sp>
+      <p:sp>
+        <p:nvSpPr>
+          <p:cNvPr id="24" name="TextBox 23"/>
           <p:cNvSpPr txBox="1"/>
           <p:nvPr/>
         </p:nvSpPr>
         <p:spPr>
           <a:xfrm>
-            <a:off x="1005840" y="4526280"/>
-            <a:ext cx="2286000" cy="457200"/>
+            <a:off x="3474720" y="5212080"/>
+            <a:ext cx="3840480" cy="457200"/>
           </a:xfrm>
           <a:prstGeom prst="rect">
             <a:avLst/>
@@ -19860,26 +22199,26 @@
               </a:lnSpc>
             </a:pPr>
             <a:r>
-              <a:rPr sz="1400" b="0">
-                <a:solidFill>
-                  <a:srgbClr val="E8ECF3"/>
+              <a:rPr sz="1500" b="0">
+                <a:solidFill>
+                  <a:srgbClr val="8B97AB"/>
                 </a:solidFill>
                 <a:latin typeface="Helvetica Neue"/>
               </a:rPr>
-              <a:t>same input twice</a:t>
-            </a:r>
-          </a:p>
-        </p:txBody>
-      </p:sp>
-      <p:sp>
-        <p:nvSpPr>
-          <p:cNvPr id="22" name="TextBox 21"/>
+              <a:t>yes, it reads a prompt</a:t>
+            </a:r>
+          </a:p>
+        </p:txBody>
+      </p:sp>
+      <p:sp>
+        <p:nvSpPr>
+          <p:cNvPr id="25" name="TextBox 24"/>
           <p:cNvSpPr txBox="1"/>
           <p:nvPr/>
         </p:nvSpPr>
         <p:spPr>
           <a:xfrm>
-            <a:off x="3291840" y="4526280"/>
+            <a:off x="7315200" y="5212080"/>
             <a:ext cx="3840480" cy="457200"/>
           </a:xfrm>
           <a:prstGeom prst="rect">
@@ -19899,27 +22238,27 @@
               </a:lnSpc>
             </a:pPr>
             <a:r>
-              <a:rPr sz="1400" b="0">
+              <a:rPr sz="1500" b="0">
                 <a:solidFill>
                   <a:srgbClr val="8B97AB"/>
                 </a:solidFill>
-                <a:latin typeface="Menlo"/>
-              </a:rPr>
-              <a:t>may differ</a:t>
-            </a:r>
-          </a:p>
-        </p:txBody>
-      </p:sp>
-      <p:sp>
-        <p:nvSpPr>
-          <p:cNvPr id="23" name="TextBox 22"/>
+                <a:latin typeface="Helvetica Neue"/>
+              </a:rPr>
+              <a:t>no, there is no model in it</a:t>
+            </a:r>
+          </a:p>
+        </p:txBody>
+      </p:sp>
+      <p:sp>
+        <p:nvSpPr>
+          <p:cNvPr id="26" name="TextBox 25"/>
           <p:cNvSpPr txBox="1"/>
           <p:nvPr/>
         </p:nvSpPr>
         <p:spPr>
           <a:xfrm>
-            <a:off x="7132320" y="4526280"/>
-            <a:ext cx="4023360" cy="457200"/>
+            <a:off x="1005840" y="5669280"/>
+            <a:ext cx="10058400" cy="640080"/>
           </a:xfrm>
           <a:prstGeom prst="rect">
             <a:avLst/>
@@ -19934,134 +22273,17 @@
           <a:p>
             <a:pPr algn="l">
               <a:lnSpc>
-                <a:spcPct val="100000"/>
-              </a:lnSpc>
-            </a:pPr>
-            <a:r>
-              <a:rPr sz="1400" b="0">
-                <a:solidFill>
-                  <a:srgbClr val="8B97AB"/>
-                </a:solidFill>
-                <a:latin typeface="Menlo"/>
-              </a:rPr>
-              <a:t>identical, always</a:t>
-            </a:r>
-          </a:p>
-        </p:txBody>
-      </p:sp>
-      <p:sp>
-        <p:nvSpPr>
-          <p:cNvPr id="24" name="TextBox 23"/>
-          <p:cNvSpPr txBox="1"/>
-          <p:nvPr/>
-        </p:nvSpPr>
-        <p:spPr>
-          <a:xfrm>
-            <a:off x="1005840" y="4983480"/>
-            <a:ext cx="2286000" cy="457200"/>
-          </a:xfrm>
-          <a:prstGeom prst="rect">
-            <a:avLst/>
-          </a:prstGeom>
-          <a:noFill/>
-        </p:spPr>
-        <p:txBody>
-          <a:bodyPr wrap="square">
-            <a:spAutoFit/>
-          </a:bodyPr>
-          <a:lstStyle/>
-          <a:p>
-            <a:pPr algn="l">
-              <a:lnSpc>
-                <a:spcPct val="100000"/>
-              </a:lnSpc>
-            </a:pPr>
-            <a:r>
-              <a:rPr sz="1400" b="1">
-                <a:solidFill>
-                  <a:srgbClr val="22D3EE"/>
+                <a:spcPct val="130000"/>
+              </a:lnSpc>
+            </a:pPr>
+            <a:r>
+              <a:rPr sz="1500" b="0">
+                <a:solidFill>
+                  <a:srgbClr val="E8ECF3"/>
                 </a:solidFill>
                 <a:latin typeface="Helvetica Neue"/>
               </a:rPr>
-              <a:t>can be argued with</a:t>
-            </a:r>
-          </a:p>
-        </p:txBody>
-      </p:sp>
-      <p:sp>
-        <p:nvSpPr>
-          <p:cNvPr id="25" name="TextBox 24"/>
-          <p:cNvSpPr txBox="1"/>
-          <p:nvPr/>
-        </p:nvSpPr>
-        <p:spPr>
-          <a:xfrm>
-            <a:off x="3291840" y="4983480"/>
-            <a:ext cx="3840480" cy="457200"/>
-          </a:xfrm>
-          <a:prstGeom prst="rect">
-            <a:avLst/>
-          </a:prstGeom>
-          <a:noFill/>
-        </p:spPr>
-        <p:txBody>
-          <a:bodyPr wrap="square">
-            <a:spAutoFit/>
-          </a:bodyPr>
-          <a:lstStyle/>
-          <a:p>
-            <a:pPr algn="l">
-              <a:lnSpc>
-                <a:spcPct val="100000"/>
-              </a:lnSpc>
-            </a:pPr>
-            <a:r>
-              <a:rPr sz="1400" b="0">
-                <a:solidFill>
-                  <a:srgbClr val="22D3EE"/>
-                </a:solidFill>
-                <a:latin typeface="Menlo"/>
-              </a:rPr>
-              <a:t>yes, it is a prompt</a:t>
-            </a:r>
-          </a:p>
-        </p:txBody>
-      </p:sp>
-      <p:sp>
-        <p:nvSpPr>
-          <p:cNvPr id="26" name="TextBox 25"/>
-          <p:cNvSpPr txBox="1"/>
-          <p:nvPr/>
-        </p:nvSpPr>
-        <p:spPr>
-          <a:xfrm>
-            <a:off x="7132320" y="4983480"/>
-            <a:ext cx="4023360" cy="457200"/>
-          </a:xfrm>
-          <a:prstGeom prst="rect">
-            <a:avLst/>
-          </a:prstGeom>
-          <a:noFill/>
-        </p:spPr>
-        <p:txBody>
-          <a:bodyPr wrap="square">
-            <a:spAutoFit/>
-          </a:bodyPr>
-          <a:lstStyle/>
-          <a:p>
-            <a:pPr algn="l">
-              <a:lnSpc>
-                <a:spcPct val="100000"/>
-              </a:lnSpc>
-            </a:pPr>
-            <a:r>
-              <a:rPr sz="1400" b="0">
-                <a:solidFill>
-                  <a:srgbClr val="22D3EE"/>
-                </a:solidFill>
-                <a:latin typeface="Menlo"/>
-              </a:rPr>
-              <a:t>no model is involved</a:t>
+              <a:t>The block is built into the pipeline, not added as a status check: when security refuses, its job fails and the next gate cannot start.</a:t>
             </a:r>
           </a:p>
         </p:txBody>
@@ -20069,45 +22291,6 @@
       <p:sp>
         <p:nvSpPr>
           <p:cNvPr id="27" name="TextBox 26"/>
-          <p:cNvSpPr txBox="1"/>
-          <p:nvPr/>
-        </p:nvSpPr>
-        <p:spPr>
-          <a:xfrm>
-            <a:off x="1005840" y="5532120"/>
-            <a:ext cx="10058400" cy="822960"/>
-          </a:xfrm>
-          <a:prstGeom prst="rect">
-            <a:avLst/>
-          </a:prstGeom>
-          <a:noFill/>
-        </p:spPr>
-        <p:txBody>
-          <a:bodyPr wrap="square">
-            <a:spAutoFit/>
-          </a:bodyPr>
-          <a:lstStyle/>
-          <a:p>
-            <a:pPr algn="l">
-              <a:lnSpc>
-                <a:spcPct val="130000"/>
-              </a:lnSpc>
-            </a:pPr>
-            <a:r>
-              <a:rPr sz="1500" b="0">
-                <a:solidFill>
-                  <a:srgbClr val="22D3EE"/>
-                </a:solidFill>
-                <a:latin typeface="Helvetica Neue"/>
-              </a:rPr>
-              <a:t>The block is a dependency edge, not a status check: the develop stage exits 3 and the next gate declares that it needs it. There is no condition to misconfigure and no required check to forget.</a:t>
-            </a:r>
-          </a:p>
-        </p:txBody>
-      </p:sp>
-      <p:sp>
-        <p:nvSpPr>
-          <p:cNvPr id="28" name="TextBox 27"/>
           <p:cNvSpPr txBox="1"/>
           <p:nvPr/>
         </p:nvSpPr>
@@ -20182,7 +22365,7 @@
                                       <p:cBhvr>
                                         <p:cTn id="13" dur="1" fill="hold"/>
                                         <p:tgtEl>
-                                          <p:spTgt spid="27"/>
+                                          <p:spTgt spid="26"/>
                                         </p:tgtEl>
                                         <p:attrNameLst>
                                           <p:attrName>style.visibility</p:attrName>
@@ -20196,7 +22379,7 @@
                                       <p:cBhvr>
                                         <p:cTn id="14" dur="450"/>
                                         <p:tgtEl>
-                                          <p:spTgt spid="27"/>
+                                          <p:spTgt spid="26"/>
                                         </p:tgtEl>
                                       </p:cBhvr>
                                     </p:animEffect>
@@ -20368,7 +22551,7 @@
       </p:sp>
       <p:sp>
         <p:nvSpPr>
-          <p:cNvPr id="5" name="Rectangle 4"/>
+          <p:cNvPr id="5" name="deckkit-rule"/>
           <p:cNvSpPr/>
           <p:nvPr/>
         </p:nvSpPr>
@@ -20418,7 +22601,7 @@
         </p:nvSpPr>
         <p:spPr>
           <a:xfrm>
-            <a:off x="1005840" y="1828800"/>
+            <a:off x="1005840" y="2148840"/>
             <a:ext cx="2377440" cy="292608"/>
           </a:xfrm>
           <a:prstGeom prst="rect">
@@ -20457,7 +22640,7 @@
         </p:nvSpPr>
         <p:spPr>
           <a:xfrm>
-            <a:off x="3383280" y="1828800"/>
+            <a:off x="3383280" y="2148840"/>
             <a:ext cx="7772400" cy="292608"/>
           </a:xfrm>
           <a:prstGeom prst="rect">
@@ -20496,7 +22679,7 @@
         </p:nvSpPr>
         <p:spPr>
           <a:xfrm>
-            <a:off x="1005840" y="2157984"/>
+            <a:off x="1005840" y="2478024"/>
             <a:ext cx="10149840" cy="12700"/>
           </a:xfrm>
           <a:prstGeom prst="rect">
@@ -20540,7 +22723,7 @@
         </p:nvSpPr>
         <p:spPr>
           <a:xfrm>
-            <a:off x="1005840" y="2286000"/>
+            <a:off x="1005840" y="2606040"/>
             <a:ext cx="2377440" cy="457200"/>
           </a:xfrm>
           <a:prstGeom prst="rect">
@@ -20560,7 +22743,7 @@
               </a:lnSpc>
             </a:pPr>
             <a:r>
-              <a:rPr sz="1400" b="0">
+              <a:rPr sz="1500" b="0">
                 <a:solidFill>
                   <a:srgbClr val="E8ECF3"/>
                 </a:solidFill>
@@ -20579,7 +22762,7 @@
         </p:nvSpPr>
         <p:spPr>
           <a:xfrm>
-            <a:off x="3383280" y="2286000"/>
+            <a:off x="3383280" y="2606040"/>
             <a:ext cx="7772400" cy="457200"/>
           </a:xfrm>
           <a:prstGeom prst="rect">
@@ -20599,13 +22782,13 @@
               </a:lnSpc>
             </a:pPr>
             <a:r>
-              <a:rPr sz="1400" b="0">
+              <a:rPr sz="1500" b="0">
                 <a:solidFill>
                   <a:srgbClr val="8B97AB"/>
                 </a:solidFill>
-                <a:latin typeface="Menlo"/>
-              </a:rPr>
-              <a:t>MAPPED from its own — seven keys across two vocabularies</a:t>
+                <a:latin typeface="Helvetica Neue"/>
+              </a:rPr>
+              <a:t>its own severity, translated through one table</a:t>
             </a:r>
           </a:p>
         </p:txBody>
@@ -20618,7 +22801,7 @@
         </p:nvSpPr>
         <p:spPr>
           <a:xfrm>
-            <a:off x="1005840" y="2743200"/>
+            <a:off x="1005840" y="3063240"/>
             <a:ext cx="2377440" cy="457200"/>
           </a:xfrm>
           <a:prstGeom prst="rect">
@@ -20638,7 +22821,7 @@
               </a:lnSpc>
             </a:pPr>
             <a:r>
-              <a:rPr sz="1400" b="0">
+              <a:rPr sz="1500" b="0">
                 <a:solidFill>
                   <a:srgbClr val="E8ECF3"/>
                 </a:solidFill>
@@ -20657,7 +22840,7 @@
         </p:nvSpPr>
         <p:spPr>
           <a:xfrm>
-            <a:off x="3383280" y="2743200"/>
+            <a:off x="3383280" y="3063240"/>
             <a:ext cx="7772400" cy="457200"/>
           </a:xfrm>
           <a:prstGeom prst="rect">
@@ -20677,13 +22860,13 @@
               </a:lnSpc>
             </a:pPr>
             <a:r>
-              <a:rPr sz="1400" b="0">
+              <a:rPr sz="1500" b="0">
                 <a:solidFill>
                   <a:srgbClr val="8B97AB"/>
                 </a:solidFill>
-                <a:latin typeface="Menlo"/>
-              </a:rPr>
-              <a:t>MAPPED from its own; UNKNOWN is a real answer, not a fall-through</a:t>
+                <a:latin typeface="Helvetica Neue"/>
+              </a:rPr>
+              <a:t>its own severity, translated through the same table</a:t>
             </a:r>
           </a:p>
         </p:txBody>
@@ -20696,7 +22879,7 @@
         </p:nvSpPr>
         <p:spPr>
           <a:xfrm>
-            <a:off x="1005840" y="3200400"/>
+            <a:off x="1005840" y="3520440"/>
             <a:ext cx="2377440" cy="457200"/>
           </a:xfrm>
           <a:prstGeom prst="rect">
@@ -20716,9 +22899,9 @@
               </a:lnSpc>
             </a:pPr>
             <a:r>
-              <a:rPr sz="1400" b="1">
-                <a:solidFill>
-                  <a:srgbClr val="22D3EE"/>
+              <a:rPr sz="1500" b="0">
+                <a:solidFill>
+                  <a:srgbClr val="E8ECF3"/>
                 </a:solidFill>
                 <a:latin typeface="Helvetica Neue"/>
               </a:rPr>
@@ -20735,7 +22918,7 @@
         </p:nvSpPr>
         <p:spPr>
           <a:xfrm>
-            <a:off x="3383280" y="3200400"/>
+            <a:off x="3383280" y="3520440"/>
             <a:ext cx="7772400" cy="457200"/>
           </a:xfrm>
           <a:prstGeom prst="rect">
@@ -20755,13 +22938,13 @@
               </a:lnSpc>
             </a:pPr>
             <a:r>
-              <a:rPr sz="1400" b="0">
-                <a:solidFill>
-                  <a:srgbClr val="22D3EE"/>
-                </a:solidFill>
-                <a:latin typeface="Menlo"/>
-              </a:rPr>
-              <a:t>ASSIGNED critical by policy — it reports no severity at all</a:t>
+              <a:rPr sz="1500" b="0">
+                <a:solidFill>
+                  <a:srgbClr val="8B97AB"/>
+                </a:solidFill>
+                <a:latin typeface="Helvetica Neue"/>
+              </a:rPr>
+              <a:t>it reports no severity, so every secret is critical, by policy</a:t>
             </a:r>
           </a:p>
         </p:txBody>
@@ -20774,8 +22957,8 @@
         </p:nvSpPr>
         <p:spPr>
           <a:xfrm>
-            <a:off x="1005840" y="3749039"/>
-            <a:ext cx="10149840" cy="658368"/>
+            <a:off x="1005840" y="4160520"/>
+            <a:ext cx="10149840" cy="566928"/>
           </a:xfrm>
           <a:prstGeom prst="rect">
             <a:avLst/>
@@ -20794,13 +22977,13 @@
               </a:lnSpc>
             </a:pPr>
             <a:r>
-              <a:rPr sz="1500" b="0">
+              <a:rPr sz="1600" b="0">
                 <a:solidFill>
                   <a:srgbClr val="E8ECF3"/>
                 </a:solidFill>
                 <a:latin typeface="Helvetica Neue"/>
               </a:rPr>
-              <a:t>The rule is a comparison: block when any finding sits at or above the threshold. No model, no network, no ordering dependence.</a:t>
+              <a:t>One comparison decides: block when any finding is at or above the threshold.</a:t>
             </a:r>
           </a:p>
         </p:txBody>
@@ -20813,8 +22996,8 @@
         </p:nvSpPr>
         <p:spPr>
           <a:xfrm>
-            <a:off x="1005840" y="4407407"/>
-            <a:ext cx="10149840" cy="658368"/>
+            <a:off x="1005840" y="4727448"/>
+            <a:ext cx="10149840" cy="566928"/>
           </a:xfrm>
           <a:prstGeom prst="rect">
             <a:avLst/>
@@ -20833,13 +23016,13 @@
               </a:lnSpc>
             </a:pPr>
             <a:r>
-              <a:rPr sz="1500" b="0">
+              <a:rPr sz="1600" b="0">
                 <a:solidFill>
                   <a:srgbClr val="E8ECF3"/>
                 </a:solidFill>
                 <a:latin typeface="Helvetica Neue"/>
               </a:rPr>
-              <a:t>An unrecognised severity fails closed AT the block threshold, and that constant is refused at import if it ever drops below it.</a:t>
+              <a:t>A severity the table does not recognise counts as high, the blocking level, so an unknown can never pass.</a:t>
             </a:r>
           </a:p>
         </p:txBody>
@@ -20852,8 +23035,8 @@
         </p:nvSpPr>
         <p:spPr>
           <a:xfrm>
-            <a:off x="1005840" y="5065775"/>
-            <a:ext cx="10149840" cy="658368"/>
+            <a:off x="1005840" y="5294376"/>
+            <a:ext cx="10149840" cy="566928"/>
           </a:xfrm>
           <a:prstGeom prst="rect">
             <a:avLst/>
@@ -20872,13 +23055,13 @@
               </a:lnSpc>
             </a:pPr>
             <a:r>
-              <a:rPr sz="1500" b="0">
+              <a:rPr sz="1600" b="0">
                 <a:solidFill>
                   <a:srgbClr val="E8ECF3"/>
                 </a:solidFill>
                 <a:latin typeface="Helvetica Neue"/>
               </a:rPr>
-              <a:t>The floor is derived from the policy rather than written down twice — two copies of one fact agree until one of them moves.</a:t>
+              <a:t>A secret is always critical, so no threshold setting lets a committed credential through.</a:t>
             </a:r>
           </a:p>
         </p:txBody>
@@ -20891,8 +23074,8 @@
         </p:nvSpPr>
         <p:spPr>
           <a:xfrm>
-            <a:off x="1005840" y="5724143"/>
-            <a:ext cx="10149840" cy="658368"/>
+            <a:off x="1005840" y="5861304"/>
+            <a:ext cx="10149840" cy="566928"/>
           </a:xfrm>
           <a:prstGeom prst="rect">
             <a:avLst/>
@@ -20911,13 +23094,13 @@
               </a:lnSpc>
             </a:pPr>
             <a:r>
-              <a:rPr sz="1500" b="0">
+              <a:rPr sz="1600" b="0">
                 <a:solidFill>
                   <a:srgbClr val="E8ECF3"/>
                 </a:solidFill>
                 <a:latin typeface="Helvetica Neue"/>
               </a:rPr>
-              <a:t>A threshold outside the vocabulary is REFUSED, never clamped: clamping runs the gate at a setting nobody asked for and reports success.</a:t>
+              <a:t>A threshold outside the allowed values is rejected, never quietly adjusted.</a:t>
             </a:r>
           </a:p>
         </p:txBody>
@@ -21538,7 +23721,7 @@
       </p:sp>
       <p:sp>
         <p:nvSpPr>
-          <p:cNvPr id="5" name="Rectangle 4"/>
+          <p:cNvPr id="5" name="deckkit-rule"/>
           <p:cNvSpPr/>
           <p:nvPr/>
         </p:nvSpPr>
@@ -21588,7 +23771,7 @@
         </p:nvSpPr>
         <p:spPr>
           <a:xfrm>
-            <a:off x="1005840" y="2011680"/>
+            <a:off x="1005840" y="2148840"/>
             <a:ext cx="3108960" cy="841248"/>
           </a:xfrm>
           <a:prstGeom prst="rect">
@@ -21610,11 +23793,11 @@
             <a:r>
               <a:rPr sz="4000" b="1">
                 <a:solidFill>
-                  <a:srgbClr val="6EE7B7"/>
+                  <a:srgbClr val="22D3EE"/>
                 </a:solidFill>
                 <a:latin typeface="Helvetica Neue"/>
               </a:rPr>
-              <a:t>$0.013–0.017</a:t>
+              <a:t>1.3–1.7¢</a:t>
             </a:r>
           </a:p>
         </p:txBody>
@@ -21627,7 +23810,7 @@
         </p:nvSpPr>
         <p:spPr>
           <a:xfrm>
-            <a:off x="1005840" y="2798064"/>
+            <a:off x="1005840" y="2935224"/>
             <a:ext cx="3108960" cy="749808"/>
           </a:xfrm>
           <a:prstGeom prst="rect">
@@ -21682,7 +23865,7 @@
         </p:nvSpPr>
         <p:spPr>
           <a:xfrm>
-            <a:off x="4389120" y="2011680"/>
+            <a:off x="4389120" y="2148840"/>
             <a:ext cx="3108960" cy="841248"/>
           </a:xfrm>
           <a:prstGeom prst="rect">
@@ -21721,7 +23904,7 @@
         </p:nvSpPr>
         <p:spPr>
           <a:xfrm>
-            <a:off x="4389120" y="2798064"/>
+            <a:off x="4389120" y="2935224"/>
             <a:ext cx="3108960" cy="749808"/>
           </a:xfrm>
           <a:prstGeom prst="rect">
@@ -21776,7 +23959,7 @@
         </p:nvSpPr>
         <p:spPr>
           <a:xfrm>
-            <a:off x="7680960" y="2011680"/>
+            <a:off x="7680960" y="2148840"/>
             <a:ext cx="3108960" cy="841248"/>
           </a:xfrm>
           <a:prstGeom prst="rect">
@@ -21798,7 +23981,7 @@
             <a:r>
               <a:rPr sz="4000" b="1">
                 <a:solidFill>
-                  <a:srgbClr val="6EE7B7"/>
+                  <a:srgbClr val="22D3EE"/>
                 </a:solidFill>
                 <a:latin typeface="Helvetica Neue"/>
               </a:rPr>
@@ -21815,7 +23998,7 @@
         </p:nvSpPr>
         <p:spPr>
           <a:xfrm>
-            <a:off x="7680960" y="2798064"/>
+            <a:off x="7680960" y="2935224"/>
             <a:ext cx="3108960" cy="749808"/>
           </a:xfrm>
           <a:prstGeom prst="rect">
@@ -21870,7 +24053,7 @@
         </p:nvSpPr>
         <p:spPr>
           <a:xfrm>
-            <a:off x="1005840" y="3931920"/>
+            <a:off x="1005840" y="4069080"/>
             <a:ext cx="10149840" cy="868680"/>
           </a:xfrm>
           <a:prstGeom prst="rect">
@@ -21896,7 +24079,7 @@
                 </a:solidFill>
                 <a:latin typeface="Helvetica Neue"/>
               </a:rPr>
-              <a:t>Infrastructure is 99.9% of nothing beside the model: Lambda, EventBridge and DynamoDB together came to twelve millionths of a dollar per change. Any cost work that is not prompt caching is noise.</a:t>
+              <a:t>The model is 99.9% of what a change costs. Lambda, EventBridge and DynamoDB together came to twelve millionths of a dollar. The only cost work worth doing is prompt caching.</a:t>
             </a:r>
           </a:p>
         </p:txBody>
@@ -21909,7 +24092,7 @@
         </p:nvSpPr>
         <p:spPr>
           <a:xfrm>
-            <a:off x="1005840" y="4800600"/>
+            <a:off x="1005840" y="4937760"/>
             <a:ext cx="10149840" cy="868680"/>
           </a:xfrm>
           <a:prstGeom prst="rect">
@@ -21935,7 +24118,7 @@
                 </a:solidFill>
                 <a:latin typeface="Helvetica Neue"/>
               </a:rPr>
-              <a:t>The value is not the cents. It is that a credential cannot reach the default branch by being approved quickly — refusing that is the one thing the pipeline does without a model in the path.</a:t>
+              <a:t>The value is not the cents. A credential cannot reach the main branch by being approved quickly, and that refusal has no model in it.</a:t>
             </a:r>
           </a:p>
         </p:txBody>
@@ -21948,8 +24131,8 @@
         </p:nvSpPr>
         <p:spPr>
           <a:xfrm>
-            <a:off x="1005840" y="5760720"/>
-            <a:ext cx="10058400" cy="731520"/>
+            <a:off x="1005840" y="5806440"/>
+            <a:ext cx="10058400" cy="640080"/>
           </a:xfrm>
           <a:prstGeom prst="rect">
             <a:avLst/>
@@ -21974,7 +24157,7 @@
                 </a:solidFill>
                 <a:latin typeface="Helvetica Neue"/>
               </a:rPr>
-              <a:t>Stated honestly: 8 merges of 37 runs, so the median is over the ones that finished. And the zero has a positive control — the same scan finds 3 in unmerged PR #50, so it is a measurement and not a broken grep.</a:t>
+              <a:t>8 of 37 runs merged, so the median covers the runs that finished. The same scan finds 3 credentials in unmerged pull request #50, so the zero is a real result.</a:t>
             </a:r>
           </a:p>
         </p:txBody>
@@ -22818,4 +25001,324 @@
   </a:objectDefaults>
   <a:extraClrSchemeLst/>
 </a:theme>
+</file>
+
+<file path=ppt/theme/theme2.xml><?xml version="1.0" encoding="utf-8"?>
+<a:theme xmlns:a="http://schemas.openxmlformats.org/drawingml/2006/main" name="Office Theme">
+  <a:themeElements>
+    <a:clrScheme name="Office">
+      <a:dk1>
+        <a:sysClr val="windowText" lastClr="000000"/>
+      </a:dk1>
+      <a:lt1>
+        <a:sysClr val="window" lastClr="FFFFFF"/>
+      </a:lt1>
+      <a:dk2>
+        <a:srgbClr val="1F497D"/>
+      </a:dk2>
+      <a:lt2>
+        <a:srgbClr val="EEECE1"/>
+      </a:lt2>
+      <a:accent1>
+        <a:srgbClr val="4F81BD"/>
+      </a:accent1>
+      <a:accent2>
+        <a:srgbClr val="C0504D"/>
+      </a:accent2>
+      <a:accent3>
+        <a:srgbClr val="9BBB59"/>
+      </a:accent3>
+      <a:accent4>
+        <a:srgbClr val="8064A2"/>
+      </a:accent4>
+      <a:accent5>
+        <a:srgbClr val="4BACC6"/>
+      </a:accent5>
+      <a:accent6>
+        <a:srgbClr val="F79646"/>
+      </a:accent6>
+      <a:hlink>
+        <a:srgbClr val="0000FF"/>
+      </a:hlink>
+      <a:folHlink>
+        <a:srgbClr val="800080"/>
+      </a:folHlink>
+    </a:clrScheme>
+    <a:fontScheme name="Office">
+      <a:majorFont>
+        <a:latin typeface="Calibri"/>
+        <a:ea typeface=""/>
+        <a:cs typeface=""/>
+        <a:font script="Jpan" typeface="ＭＳ Ｐゴシック"/>
+        <a:font script="Hang" typeface="맑은 고딕"/>
+        <a:font script="Hans" typeface="宋体"/>
+        <a:font script="Hant" typeface="新細明體"/>
+        <a:font script="Arab" typeface="Times New Roman"/>
+        <a:font script="Hebr" typeface="Times New Roman"/>
+        <a:font script="Thai" typeface="Angsana New"/>
+        <a:font script="Ethi" typeface="Nyala"/>
+        <a:font script="Beng" typeface="Vrinda"/>
+        <a:font script="Gujr" typeface="Shruti"/>
+        <a:font script="Khmr" typeface="MoolBoran"/>
+        <a:font script="Knda" typeface="Tunga"/>
+        <a:font script="Guru" typeface="Raavi"/>
+        <a:font script="Cans" typeface="Euphemia"/>
+        <a:font script="Cher" typeface="Plantagenet Cherokee"/>
+        <a:font script="Yiii" typeface="Microsoft Yi Baiti"/>
+        <a:font script="Tibt" typeface="Microsoft Himalaya"/>
+        <a:font script="Thaa" typeface="MV Boli"/>
+        <a:font script="Deva" typeface="Mangal"/>
+        <a:font script="Telu" typeface="Gautami"/>
+        <a:font script="Taml" typeface="Latha"/>
+        <a:font script="Syrc" typeface="Estrangelo Edessa"/>
+        <a:font script="Orya" typeface="Kalinga"/>
+        <a:font script="Mlym" typeface="Kartika"/>
+        <a:font script="Laoo" typeface="DokChampa"/>
+        <a:font script="Sinh" typeface="Iskoola Pota"/>
+        <a:font script="Mong" typeface="Mongolian Baiti"/>
+        <a:font script="Viet" typeface="Times New Roman"/>
+        <a:font script="Uigh" typeface="Microsoft Uighur"/>
+        <a:font script="Geor" typeface="Sylfaen"/>
+      </a:majorFont>
+      <a:minorFont>
+        <a:latin typeface="Calibri"/>
+        <a:ea typeface=""/>
+        <a:cs typeface=""/>
+        <a:font script="Jpan" typeface="ＭＳ Ｐゴシック"/>
+        <a:font script="Hang" typeface="맑은 고딕"/>
+        <a:font script="Hans" typeface="宋体"/>
+        <a:font script="Hant" typeface="新細明體"/>
+        <a:font script="Arab" typeface="Arial"/>
+        <a:font script="Hebr" typeface="Arial"/>
+        <a:font script="Thai" typeface="Cordia New"/>
+        <a:font script="Ethi" typeface="Nyala"/>
+        <a:font script="Beng" typeface="Vrinda"/>
+        <a:font script="Gujr" typeface="Shruti"/>
+        <a:font script="Khmr" typeface="DaunPenh"/>
+        <a:font script="Knda" typeface="Tunga"/>
+        <a:font script="Guru" typeface="Raavi"/>
+        <a:font script="Cans" typeface="Euphemia"/>
+        <a:font script="Cher" typeface="Plantagenet Cherokee"/>
+        <a:font script="Yiii" typeface="Microsoft Yi Baiti"/>
+        <a:font script="Tibt" typeface="Microsoft Himalaya"/>
+        <a:font script="Thaa" typeface="MV Boli"/>
+        <a:font script="Deva" typeface="Mangal"/>
+        <a:font script="Telu" typeface="Gautami"/>
+        <a:font script="Taml" typeface="Latha"/>
+        <a:font script="Syrc" typeface="Estrangelo Edessa"/>
+        <a:font script="Orya" typeface="Kalinga"/>
+        <a:font script="Mlym" typeface="Kartika"/>
+        <a:font script="Laoo" typeface="DokChampa"/>
+        <a:font script="Sinh" typeface="Iskoola Pota"/>
+        <a:font script="Mong" typeface="Mongolian Baiti"/>
+        <a:font script="Viet" typeface="Arial"/>
+        <a:font script="Uigh" typeface="Microsoft Uighur"/>
+        <a:font script="Geor" typeface="Sylfaen"/>
+      </a:minorFont>
+    </a:fontScheme>
+    <a:fmtScheme name="Office">
+      <a:fillStyleLst>
+        <a:solidFill>
+          <a:schemeClr val="phClr"/>
+        </a:solidFill>
+        <a:gradFill rotWithShape="1">
+          <a:gsLst>
+            <a:gs pos="0">
+              <a:schemeClr val="phClr">
+                <a:tint val="50000"/>
+                <a:satMod val="300000"/>
+              </a:schemeClr>
+            </a:gs>
+            <a:gs pos="35000">
+              <a:schemeClr val="phClr">
+                <a:tint val="37000"/>
+                <a:satMod val="300000"/>
+              </a:schemeClr>
+            </a:gs>
+            <a:gs pos="100000">
+              <a:schemeClr val="phClr">
+                <a:tint val="15000"/>
+                <a:satMod val="350000"/>
+              </a:schemeClr>
+            </a:gs>
+          </a:gsLst>
+          <a:lin ang="16200000" scaled="1"/>
+        </a:gradFill>
+        <a:gradFill rotWithShape="1">
+          <a:gsLst>
+            <a:gs pos="0">
+              <a:schemeClr val="phClr">
+                <a:tint val="100000"/>
+                <a:shade val="100000"/>
+                <a:satMod val="130000"/>
+              </a:schemeClr>
+            </a:gs>
+            <a:gs pos="100000">
+              <a:schemeClr val="phClr">
+                <a:tint val="50000"/>
+                <a:shade val="100000"/>
+                <a:satMod val="350000"/>
+              </a:schemeClr>
+            </a:gs>
+          </a:gsLst>
+          <a:lin ang="16200000" scaled="0"/>
+        </a:gradFill>
+      </a:fillStyleLst>
+      <a:lnStyleLst>
+        <a:ln w="9525" cap="flat" cmpd="sng" algn="ctr">
+          <a:solidFill>
+            <a:schemeClr val="phClr">
+              <a:shade val="95000"/>
+              <a:satMod val="105000"/>
+            </a:schemeClr>
+          </a:solidFill>
+          <a:prstDash val="solid"/>
+        </a:ln>
+        <a:ln w="25400" cap="flat" cmpd="sng" algn="ctr">
+          <a:solidFill>
+            <a:schemeClr val="phClr"/>
+          </a:solidFill>
+          <a:prstDash val="solid"/>
+        </a:ln>
+        <a:ln w="38100" cap="flat" cmpd="sng" algn="ctr">
+          <a:solidFill>
+            <a:schemeClr val="phClr"/>
+          </a:solidFill>
+          <a:prstDash val="solid"/>
+        </a:ln>
+      </a:lnStyleLst>
+      <a:effectStyleLst>
+        <a:effectStyle>
+          <a:effectLst>
+            <a:outerShdw blurRad="40000" dist="20000" dir="5400000" rotWithShape="0">
+              <a:srgbClr val="000000">
+                <a:alpha val="38000"/>
+              </a:srgbClr>
+            </a:outerShdw>
+          </a:effectLst>
+        </a:effectStyle>
+        <a:effectStyle>
+          <a:effectLst>
+            <a:outerShdw blurRad="40000" dist="23000" dir="5400000" rotWithShape="0">
+              <a:srgbClr val="000000">
+                <a:alpha val="35000"/>
+              </a:srgbClr>
+            </a:outerShdw>
+          </a:effectLst>
+        </a:effectStyle>
+        <a:effectStyle>
+          <a:effectLst>
+            <a:outerShdw blurRad="40000" dist="23000" dir="5400000" rotWithShape="0">
+              <a:srgbClr val="000000">
+                <a:alpha val="35000"/>
+              </a:srgbClr>
+            </a:outerShdw>
+          </a:effectLst>
+          <a:scene3d>
+            <a:camera prst="orthographicFront">
+              <a:rot lat="0" lon="0" rev="0"/>
+            </a:camera>
+            <a:lightRig rig="threePt" dir="t">
+              <a:rot lat="0" lon="0" rev="1200000"/>
+            </a:lightRig>
+          </a:scene3d>
+          <a:sp3d>
+            <a:bevelT w="63500" h="25400"/>
+          </a:sp3d>
+        </a:effectStyle>
+      </a:effectStyleLst>
+      <a:bgFillStyleLst>
+        <a:solidFill>
+          <a:schemeClr val="phClr"/>
+        </a:solidFill>
+        <a:gradFill rotWithShape="1">
+          <a:gsLst>
+            <a:gs pos="0">
+              <a:schemeClr val="phClr">
+                <a:tint val="40000"/>
+                <a:satMod val="350000"/>
+              </a:schemeClr>
+            </a:gs>
+            <a:gs pos="40000">
+              <a:schemeClr val="phClr">
+                <a:tint val="45000"/>
+                <a:shade val="99000"/>
+                <a:satMod val="350000"/>
+              </a:schemeClr>
+            </a:gs>
+            <a:gs pos="100000">
+              <a:schemeClr val="phClr">
+                <a:shade val="20000"/>
+                <a:satMod val="255000"/>
+              </a:schemeClr>
+            </a:gs>
+          </a:gsLst>
+          <a:path path="circle">
+            <a:fillToRect l="50000" t="-80000" r="50000" b="180000"/>
+          </a:path>
+        </a:gradFill>
+        <a:gradFill rotWithShape="1">
+          <a:gsLst>
+            <a:gs pos="0">
+              <a:schemeClr val="phClr">
+                <a:tint val="80000"/>
+                <a:satMod val="300000"/>
+              </a:schemeClr>
+            </a:gs>
+            <a:gs pos="100000">
+              <a:schemeClr val="phClr">
+                <a:shade val="30000"/>
+                <a:satMod val="200000"/>
+              </a:schemeClr>
+            </a:gs>
+          </a:gsLst>
+          <a:path path="circle">
+            <a:fillToRect l="50000" t="50000" r="50000" b="50000"/>
+          </a:path>
+        </a:gradFill>
+      </a:bgFillStyleLst>
+    </a:fmtScheme>
+  </a:themeElements>
+  <a:objectDefaults>
+    <a:spDef>
+      <a:spPr/>
+      <a:bodyPr/>
+      <a:lstStyle/>
+      <a:style>
+        <a:lnRef idx="1">
+          <a:schemeClr val="accent1"/>
+        </a:lnRef>
+        <a:fillRef idx="3">
+          <a:schemeClr val="accent1"/>
+        </a:fillRef>
+        <a:effectRef idx="2">
+          <a:schemeClr val="accent1"/>
+        </a:effectRef>
+        <a:fontRef idx="minor">
+          <a:schemeClr val="lt1"/>
+        </a:fontRef>
+      </a:style>
+    </a:spDef>
+    <a:lnDef>
+      <a:spPr/>
+      <a:bodyPr/>
+      <a:lstStyle/>
+      <a:style>
+        <a:lnRef idx="2">
+          <a:schemeClr val="accent1"/>
+        </a:lnRef>
+        <a:fillRef idx="0">
+          <a:schemeClr val="accent1"/>
+        </a:fillRef>
+        <a:effectRef idx="1">
+          <a:schemeClr val="accent1"/>
+        </a:effectRef>
+        <a:fontRef idx="minor">
+          <a:schemeClr val="tx1"/>
+        </a:fontRef>
+      </a:style>
+    </a:lnDef>
+  </a:objectDefaults>
+  <a:extraClrSchemeLst/>
+</a:theme>
 </file>
--- a/talks/devops-hackathon-final/pitch/TheAgentOrg-Final.pptx
+++ b/talks/devops-hackathon-final/pitch/TheAgentOrg-Final.pptx
@@ -1032,7 +1032,7 @@
           <a:p/>
           <a:p>
             <a:r>
-              <a:t>IF ASKED — "why does the screen say develop, not security?" The review and the security check run inside one GitHub job called develop, and the product marks the job. Open the security panel: it shows the verdict and the two line numbers.</a:t>
+              <a:t>IF ASKED — "what are the three cards?" One per scanner, each showing its own worst finding against the threshold. Only gitleaks reached it, so only gitleaks blocks. That comparison is the whole decision, and a run that passes shows it too.</a:t>
             </a:r>
           </a:p>
         </p:txBody>

--- a/talks/devops-hackathon-final/pitch/TheAgentOrg-Final.pptx
+++ b/talks/devops-hackathon-final/pitch/TheAgentOrg-Final.pptx
@@ -588,7 +588,13 @@
           <a:lstStyle/>
           <a:p>
             <a:r>
-              <a:t>SAY None of this is our wording. GitHub Copilot's review "will not block merging changes". Anthropic's code review "always completes with a neutral conclusion so it never blocks". OpenAI's Codex guidance says it doesn't "replace tests, branch protections, or required approvals". Cursor's findings default to neutral. And Snyk's own page puts our thesis in six words: the generator cannot be the validator.</a:t>
+              <a:t>SAY None of this is our wording. GitHub Copilot's review leaves, by default, "a Comment review, not a Request changes review", so it never blocks. Anthropic's code review "always completes with a neutral conclusion so it never blocks merging". OpenAI's Codex guidance says it doesn't "replace tests, branch protections, or required approvals". Cursor's findings "default to neutral". And Snyk's own page puts our thesis in six words: the generator cannot be the validator.</a:t>
+            </a:r>
+          </a:p>
+          <a:p/>
+          <a:p>
+            <a:r>
+              <a:t>IF ASKED — "can't Copilot approve pull requests now?" Yes, if a team turns that on. That lets the model pass a change; it still cannot block one. It makes our point sharper, not weaker.</a:t>
             </a:r>
           </a:p>
           <a:p/>
@@ -670,7 +676,7 @@
           <a:lstStyle/>
           <a:p>
             <a:r>
-              <a:t>SAY This is the argument for the whole design. With Cursor's hooks, if the hook itself fails, the action goes ahead; their documentation calls it fail-open by default. With Claude Code's hooks, only one specific failure blocks; any other lets the action through, and a mistyped path silently disables the gate. And if Semgrep crashes, it reports success. A check that did not run, reading as a check that passed. That is exactly what we refuse: in our pipeline, a missing or crashed scanner blocks the change.</a:t>
+              <a:t>SAY This is the argument for the whole design. With Cursor's hooks, if the hook itself fails, the action goes ahead; their documentation calls it fail-open by default. With Claude Code's hooks, only one specific failure blocks; any other lets the action through, and in their words, "a mistyped path in settings.json leaves the gate silently disabled". And by default, if Semgrep crashes, it still reports success. A check that did not run, reading as a check that passed. That is exactly what we refuse: in our pipeline, a missing or crashed scanner blocks the change.</a:t>
             </a:r>
           </a:p>
         </p:txBody>
@@ -740,7 +746,7 @@
           <a:lstStyle/>
           <a:p>
             <a:r>
-              <a:t>SAY Two thousand one hundred and seventy-two automated tests across ninety-three files, plus three hundred and eleven for the web app. Five agent runtimes, all ready on the same version; a split would mean a half-finished deploy, and we check for it before every demo. It runs in the cloud from a real issue. It is a product, not a script: you sign in, pick a repository, start a run, watch each stage, approve a gate and read what it cost. And it is multi-tenant: each customer's data sits in its own partition, and AWS itself refuses a read of anyone else's, so our code does not have to remember to.</a:t>
+              <a:t>SAY Two thousand one hundred and seventy-two automated tests across ninety-three files, plus three hundred and thirty-four for the web app. Five agent runtimes, all ready on the same version; a split would mean a half-finished deploy, and we check for it before every demo. It runs in the cloud from a real issue. It is a product, not a script: you sign in, pick a repository, start a run, watch each stage, approve a gate and read what it cost. And it is multi-tenant: each customer's data sits in its own partition, and AWS itself refuses a read of anyone else's, so our code does not have to remember to.</a:t>
             </a:r>
           </a:p>
         </p:txBody>
@@ -1318,7 +1324,7 @@
           <a:p/>
           <a:p>
             <a:r>
-              <a:t>IF ASKED — "isn't this what branch protection is for?" Branch protection enforces a status check, and every AI reviewer in our research reports a neutral status: it never fails the check. We come back to that on the differentiation slide.</a:t>
+              <a:t>IF ASKED — "isn't this what branch protection is for?" Branch protection enforces what it is told to. The AI reviewers we checked leave a comment or report a neutral status by default, so requiring them does not stop a merge. We come back to that on the differentiation slide.</a:t>
             </a:r>
           </a:p>
         </p:txBody>
@@ -1458,7 +1464,13 @@
           <a:lstStyle/>
           <a:p>
             <a:r>
-              <a:t>SAY Every agent here is a language model, and any of them can be wrong. So the component that stops a change is deliberately not one of them. Compare the two columns. The reviewer is a model reading the change. It catches intent, logic and a plan mismatch, and it is advisory: when it objects, the change goes back to the developer, but it cannot stop the run. The security stage is three scanners and a fixed rule. Same input, same answer, every time, and there is no model in it, so there is nothing to argue with.</a:t>
+              <a:t>SAY Every agent here is a language model, and any of them can be wrong. So the component that stops a change is deliberately not one of them. Compare the two columns. The reviewer is a model reading the change. It catches intent, logic and a plan mismatch, and it is advisory: when it objects, the change goes back to the developer, but it cannot stop the run. The security stage is three scanners and a fixed rule. Same input, same answer, every time, and no model takes part in the decision, so there is nothing to argue with.</a:t>
+            </a:r>
+          </a:p>
+          <a:p/>
+          <a:p>
+            <a:r>
+              <a:t>IF ASKED — "but the security agent calls a model?" Only to write the sentence that explains the verdict, after the verdict is decided. That text cannot change it.</a:t>
             </a:r>
           </a:p>
           <a:p/>
@@ -1622,19 +1634,31 @@
           <a:lstStyle/>
           <a:p>
             <a:r>
-              <a:t>SAY Follow the numbers. One: an engineer opens an issue, or starts a run from our app. Two: GitHub sends a signed webhook to a Lambda function, which checks the signature before anything else happens and hands the event to EventBridge. Three: a rule matches new issues and starts the pipeline; if that fails, the event waits in an SQS dead-letter queue. The pipeline is seven GitHub Actions jobs. Four: each job takes an AWS role through OIDC, so there is no stored AWS key anywhere, and calls that agent's Bedrock AgentCore runtime. Five: the agents call Amazon Nova 2 Lite. Six: the security stage is three scanners and a fixed threshold, with no model in it. Seven: the gates wait for a named person, in GitHub or in our app. Eight: the app, on Amplify with Cognito sign-in, reads each run from DynamoDB through a role that can only see its own tenant's data.</a:t>
+              <a:t>SAY Follow the numbers. One: an engineer opens an issue, or starts a run from our app. Two: GitHub sends a signed webhook to a Lambda function, which checks the signature before anything else happens and hands the event to EventBridge. Three: a rule matches new issues and starts the pipeline; if that fails, the event waits in an SQS dead-letter queue. The pipeline is seven GitHub Actions jobs. Four: each agent job takes an AWS role through OIDC, so there is no stored AWS key anywhere, and calls its agent on Bedrock AgentCore: planner, developer, reviewer, security, SRE. Five: the agents call Amazon Nova 2 Lite. Six: the security stage decides with three scanners and a fixed threshold, no model; the model only writes the explanation afterwards. Seven: the gates wait for a named person, in GitHub or in our app. Eight: the app, on Amplify, reads each run from DynamoDB through a role that can only see its own tenant's data.</a:t>
             </a:r>
           </a:p>
           <a:p/>
           <a:p>
             <a:r>
+              <a:t>IF ASKED — "the security agent calls the model too?" Yes, for one thing: the sentence explaining the verdict. The verdict is computed first, by the scanners and the threshold, and the model's text goes into a separate field that cannot change it. Take the model away and the block still happens.</a:t>
+            </a:r>
+          </a:p>
+          <a:p/>
+          <a:p>
+            <a:r>
               <a:t>IF ASKED — "why AgentCore and not just Lambda?" Each agent is an isolated runtime with its own identity and logs, and the security image is the only one carrying the three scanners. Isolation is the point.</a:t>
             </a:r>
           </a:p>
           <a:p/>
           <a:p>
             <a:r>
-              <a:t>IF ASKED — "where is a run's state kept?" It is passed from job to job by GitHub Actions, and every stage writes a copy to DynamoDB, which is what the app reads.</a:t>
+              <a:t>IF ASKED — "where is a run's state kept?" It is passed from job to job by GitHub Actions. The four jobs that hold an AWS role (plan, develop, SRE and promote) write a copy to DynamoDB, which is what the app reads. The gates hold no AWS credentials on purpose, so a gate's decision reaches DynamoDB with the next job.</a:t>
+            </a:r>
+          </a:p>
+          <a:p/>
+          <a:p>
+            <a:r>
+              <a:t>IF ASKED — "how do people sign in?" Email through Amazon Cognito, or GitHub.</a:t>
             </a:r>
           </a:p>
         </p:txBody>
@@ -1704,13 +1728,13 @@
           <a:lstStyle/>
           <a:p>
             <a:r>
-              <a:t>SAY A change costs between one point three and one point seven cents of model time, measured over three clean runs and priced from the AWS Pricing API. The model is 99.9 percent of that. Lambda, EventBridge and DynamoDB together came to twelve millionths of a dollar, which is why the only cost work worth doing is prompt caching. The median time from ticket to merge is five point four minutes, and none of the eight merged changes carried a credential.</a:t>
+              <a:t>SAY A change costs between one point three and one point seven cents of model time, measured over three clean runs and priced from the AWS Pricing API. The model is 99.9 percent of that. Lambda, EventBridge and DynamoDB together came to twelve millionths of a dollar, which is why the only cost work worth doing is prompt caching. The median time from ticket to merge is just under eight minutes, and none of the twelve merged changes carried a credential.</a:t>
             </a:r>
           </a:p>
           <a:p/>
           <a:p>
             <a:r>
-              <a:t>SAY THE CAVEAT — do not wait to be asked. Eight of thirty-seven runs merged, so the median covers the runs that finished. And the zero is a real result: the same scan finds three credentials in an unmerged pull request, so it is not a scan that finds nothing.</a:t>
+              <a:t>SAY THE CAVEAT — do not wait to be asked. Twelve of fifty-seven runs merged, so the median covers the runs that finished, and a person clicked every gate in it. And the zero is a real result: the same scan finds three credentials in an unmerged pull request, so it is not a scan that finds nothing.</a:t>
             </a:r>
           </a:p>
           <a:p/>
@@ -5447,7 +5471,7 @@
                 </a:solidFill>
                 <a:latin typeface="Helvetica Neue"/>
               </a:rPr>
-              <a:t>“will not block merging changes”</a:t>
+              <a:t>by default “a ‘Comment’ review, not … a ‘Request changes’ review”</a:t>
             </a:r>
           </a:p>
         </p:txBody>
@@ -5525,7 +5549,7 @@
                 </a:solidFill>
                 <a:latin typeface="Helvetica Neue"/>
               </a:rPr>
-              <a:t>“always completes with a neutral conclusion so it never blocks”</a:t>
+              <a:t>“always completes with a neutral conclusion so it never blocks merging”</a:t>
             </a:r>
           </a:p>
         </p:txBody>
@@ -6117,7 +6141,7 @@
         <p:spPr>
           <a:xfrm>
             <a:off x="1005840" y="2240280"/>
-            <a:ext cx="3224784" cy="2011680"/>
+            <a:ext cx="3224784" cy="2331720"/>
           </a:xfrm>
           <a:prstGeom prst="rect">
             <a:avLst/>
@@ -6202,7 +6226,7 @@
         <p:spPr>
           <a:xfrm>
             <a:off x="1188720" y="2916936"/>
-            <a:ext cx="2859024" cy="1188720"/>
+            <a:ext cx="2859024" cy="1508760"/>
           </a:xfrm>
           <a:prstGeom prst="rect">
             <a:avLst/>
@@ -6241,7 +6265,7 @@
         <p:spPr>
           <a:xfrm>
             <a:off x="4468368" y="2240280"/>
-            <a:ext cx="3224784" cy="2011680"/>
+            <a:ext cx="3224784" cy="2331720"/>
           </a:xfrm>
           <a:prstGeom prst="rect">
             <a:avLst/>
@@ -6326,7 +6350,7 @@
         <p:spPr>
           <a:xfrm>
             <a:off x="4651248" y="2916936"/>
-            <a:ext cx="2859024" cy="1188720"/>
+            <a:ext cx="2859024" cy="1508760"/>
           </a:xfrm>
           <a:prstGeom prst="rect">
             <a:avLst/>
@@ -6351,7 +6375,7 @@
                 </a:solidFill>
                 <a:latin typeface="Helvetica Neue"/>
               </a:rPr>
-              <a:t>Only one specific failure blocks; any other lets the action through, and “a mistyped path silently disables the gate”.</a:t>
+              <a:t>Only one specific failure blocks; any other lets the action through. Their documentation: “a mistyped path in settings.json leaves the gate silently disabled”.</a:t>
             </a:r>
           </a:p>
         </p:txBody>
@@ -6365,7 +6389,7 @@
         <p:spPr>
           <a:xfrm>
             <a:off x="7930896" y="2240280"/>
-            <a:ext cx="3224784" cy="2011680"/>
+            <a:ext cx="3224784" cy="2331720"/>
           </a:xfrm>
           <a:prstGeom prst="rect">
             <a:avLst/>
@@ -6450,7 +6474,7 @@
         <p:spPr>
           <a:xfrm>
             <a:off x="8113776" y="2916936"/>
-            <a:ext cx="2859024" cy="1188720"/>
+            <a:ext cx="2859024" cy="1508760"/>
           </a:xfrm>
           <a:prstGeom prst="rect">
             <a:avLst/>
@@ -6475,7 +6499,7 @@
                 </a:solidFill>
                 <a:latin typeface="Helvetica Neue"/>
               </a:rPr>
-              <a:t>If the scanner crashes, it reports success. A crash looks exactly like a clean scan.</a:t>
+              <a:t>By default, if the scanner crashes it still reports success, so a crash reads like a clean scan.</a:t>
             </a:r>
           </a:p>
         </p:txBody>
@@ -7393,7 +7417,7 @@
                 </a:solidFill>
                 <a:latin typeface="Helvetica Neue"/>
               </a:rPr>
-              <a:t>311</a:t>
+              <a:t>334</a:t>
             </a:r>
           </a:p>
         </p:txBody>
@@ -7448,7 +7472,7 @@
                 </a:solidFill>
                 <a:latin typeface="Helvetica Neue"/>
               </a:rPr>
-              <a:t>across 24 files</a:t>
+              <a:t>across 26 files</a:t>
             </a:r>
           </a:p>
         </p:txBody>
@@ -9339,7 +9363,7 @@
                 </a:solidFill>
                 <a:latin typeface="Helvetica Neue"/>
               </a:rPr>
-              <a:t>one compose file runs the database, the API and the web app</a:t>
+              <a:t>one compose file runs the web app, the API, the worker and a local model</a:t>
             </a:r>
           </a:p>
         </p:txBody>
@@ -22244,7 +22268,7 @@
                 </a:solidFill>
                 <a:latin typeface="Helvetica Neue"/>
               </a:rPr>
-              <a:t>no, there is no model in it</a:t>
+              <a:t>no, no model takes part in the decision</a:t>
             </a:r>
           </a:p>
         </p:txBody>
@@ -23891,7 +23915,7 @@
                 </a:solidFill>
                 <a:latin typeface="Helvetica Neue"/>
               </a:rPr>
-              <a:t>5.39 min</a:t>
+              <a:t>7.88 min</a:t>
             </a:r>
           </a:p>
         </p:txBody>
@@ -23946,7 +23970,7 @@
                 </a:solidFill>
                 <a:latin typeface="Helvetica Neue"/>
               </a:rPr>
-              <a:t>8 merges</a:t>
+              <a:t>12 merges</a:t>
             </a:r>
           </a:p>
         </p:txBody>
@@ -23985,7 +24009,7 @@
                 </a:solidFill>
                 <a:latin typeface="Helvetica Neue"/>
               </a:rPr>
-              <a:t>0 of 8</a:t>
+              <a:t>0 of 12</a:t>
             </a:r>
           </a:p>
         </p:txBody>
@@ -24157,7 +24181,7 @@
                 </a:solidFill>
                 <a:latin typeface="Helvetica Neue"/>
               </a:rPr>
-              <a:t>8 of 37 runs merged, so the median covers the runs that finished. The same scan finds 3 credentials in unmerged pull request #50, so the zero is a real result.</a:t>
+              <a:t>12 of 57 runs merged, so the median covers the runs that finished. The same scan finds 3 credentials in unmerged pull request #72, so the zero is a real result.</a:t>
             </a:r>
           </a:p>
         </p:txBody>

--- a/talks/devops-hackathon-final/pitch/TheAgentOrg-Final.pptx
+++ b/talks/devops-hackathon-final/pitch/TheAgentOrg-Final.pptx
@@ -746,7 +746,7 @@
           <a:lstStyle/>
           <a:p>
             <a:r>
-              <a:t>SAY Two thousand one hundred and seventy-two automated tests across ninety-three files, plus three hundred and thirty-four for the web app. Five agent runtimes, all ready on the same version; a split would mean a half-finished deploy, and we check for it before every demo. It runs in the cloud from a real issue. It is a product, not a script: you sign in, pick a repository, start a run, watch each stage, approve a gate and read what it cost. And it is multi-tenant: each customer's data sits in its own partition, and AWS itself refuses a read of anyone else's, so our code does not have to remember to.</a:t>
+              <a:t>SAY Two thousand one hundred and seventy-six automated tests across ninety-five files, plus three hundred and thirty-eight for the web app. Five agent runtimes, all ready on the same version; a split would mean a half-finished deploy, and we check for it before every demo. It runs in the cloud from a real issue. It is a product, not a script: you sign in, pick a repository, start a run, watch each stage, approve a gate and read what it cost. And it is multi-tenant: each customer's data sits in its own partition, and AWS itself refuses a read of anyone else's, so our code does not have to remember to.</a:t>
             </a:r>
           </a:p>
         </p:txBody>
@@ -7323,7 +7323,7 @@
                 </a:solidFill>
                 <a:latin typeface="Helvetica Neue"/>
               </a:rPr>
-              <a:t>2172</a:t>
+              <a:t>2176</a:t>
             </a:r>
           </a:p>
         </p:txBody>
@@ -7378,7 +7378,7 @@
                 </a:solidFill>
                 <a:latin typeface="Helvetica Neue"/>
               </a:rPr>
-              <a:t>across 93 files</a:t>
+              <a:t>across 95 files</a:t>
             </a:r>
           </a:p>
         </p:txBody>
@@ -7417,7 +7417,7 @@
                 </a:solidFill>
                 <a:latin typeface="Helvetica Neue"/>
               </a:rPr>
-              <a:t>334</a:t>
+              <a:t>338</a:t>
             </a:r>
           </a:p>
         </p:txBody>
@@ -7511,7 +7511,7 @@
                 </a:solidFill>
                 <a:latin typeface="Helvetica Neue"/>
               </a:rPr>
-              <a:t>v54</a:t>
+              <a:t>v55</a:t>
             </a:r>
           </a:p>
         </p:txBody>

--- a/talks/devops-hackathon-final/pitch/TheAgentOrg-Final.pptx
+++ b/talks/devops-hackathon-final/pitch/TheAgentOrg-Final.pptx
@@ -1032,13 +1032,25 @@
           <a:lstStyle/>
           <a:p>
             <a:r>
-              <a:t>SAY Let me show you the half that matters: a ticket that deliberately carries a credential. Watch the line numbers when it blocks.</a:t>
+              <a:t>SAY Let me show you the half that matters. This ticket asks for something that looks reasonable: pin an old version of the requests library for a legacy proxy. Nothing is planted and no demo flag is set. Watch what the reviewer says, and what the scanners say.</a:t>
             </a:r>
           </a:p>
           <a:p/>
           <a:p>
             <a:r>
-              <a:t>IF ASKED — "what are the three cards?" One per scanner, each showing its own worst finding against the threshold. Only gitleaks reached it, so only gitleaks blocks. That comparison is the whole decision, and a run that passes shows it too.</a:t>
+              <a:t>IF ASKED — "what are the three cards?" One per scanner, each showing its own worst finding against the threshold. Only Trivy reached it, with a high-severity CVE; the medium ones stay below the line. That comparison is the whole decision.</a:t>
+            </a:r>
+          </a:p>
+          <a:p/>
+          <a:p>
+            <a:r>
+              <a:t>IF ASKED — "the explanation under the verdict is wrong" It can be: that paragraph is written by the model after the verdict, and it has no say in it. That is exactly why the model does not decide.</a:t>
+            </a:r>
+          </a:p>
+          <a:p/>
+          <a:p>
+            <a:r>
+              <a:t>IF ASKED — "why does the page say a stage used a canned answer?" The agent that writes tests from the ticket did not get an answer from the model this time, so it used its built-in stand-in, and the page says so rather than hiding it. It does not affect the block.</a:t>
             </a:r>
           </a:p>
         </p:txBody>
@@ -13450,7 +13462,7 @@
                 </a:solidFill>
                 <a:latin typeface="Helvetica Neue"/>
               </a:rPr>
-              <a:t>A ticket that deliberately carries a credential. The scanners find it, the run stops at the security stage, and nothing after it runs.</a:t>
+              <a:t>A real ticket: pin an old version of a library for a legacy system. Nothing is planted and no demo flag is set. Trivy finds a known vulnerability, the run stops at the security stage, and nothing after it runs.</a:t>
             </a:r>
           </a:p>
         </p:txBody>
@@ -13489,7 +13501,7 @@
                 </a:solidFill>
                 <a:latin typeface="Helvetica Neue"/>
               </a:rPr>
-              <a:t>Watch the line numbers: the real scanners report lines 3 and 4. The built-in stand-in, used only when a scanner is unavailable, reports 4 and 5, so the pair shows a real scan happened.</a:t>
+              <a:t>Watch the threshold: the high-severity finding stops the run, and the medium ones do not. The same comparison, per scanner, is on the screen.</a:t>
             </a:r>
           </a:p>
         </p:txBody>
@@ -17298,7 +17310,7 @@
                 </a:solidFill>
                 <a:latin typeface="Helvetica Neue"/>
               </a:rPr>
-              <a:t>a ticket that carries a credential, refused</a:t>
+              <a:t>a ticket that pins a vulnerable library, refused</a:t>
             </a:r>
           </a:p>
         </p:txBody>

--- a/talks/devops-hackathon-final/pitch/TheAgentOrg-Final.pptx
+++ b/talks/devops-hackathon-final/pitch/TheAgentOrg-Final.pptx
@@ -746,7 +746,7 @@
           <a:lstStyle/>
           <a:p>
             <a:r>
-              <a:t>SAY Two thousand one hundred and seventy-six automated tests across ninety-five files, plus three hundred and thirty-eight for the web app. Five agent runtimes, all ready on the same version; a split would mean a half-finished deploy, and we check for it before every demo. It runs in the cloud from a real issue. It is a product, not a script: you sign in, pick a repository, start a run, watch each stage, approve a gate and read what it cost. And it is multi-tenant: each customer's data sits in its own partition, and AWS itself refuses a read of anyone else's, so our code does not have to remember to.</a:t>
+              <a:t>SAY Two thousand one hundred and eighty-two automated tests across ninety-six files, plus three hundred and thirty-eight for the web app. Five agent runtimes, all ready on the same version; a split would mean a half-finished deploy, and we check for it before every demo. It runs in the cloud from a real issue. It is a product, not a script: you sign in, pick a repository, start a run, watch each stage, approve a gate and read what it cost. And it is multi-tenant: each customer's data sits in its own partition, and AWS itself refuses a read of anyone else's, so our code does not have to remember to.</a:t>
             </a:r>
           </a:p>
         </p:txBody>
@@ -817,6 +817,12 @@
           <a:p>
             <a:r>
               <a:t>SAY You gave us ten notes in the pre-final, and every row here is an answer that now exists. One in particular. You asked how the scanners' scores turn into a go or no-go, because you doubted the determinism claim, and you were right to. It held for Trivy and Semgrep, which report their own severities. For gitleaks the word "critical" was simply typed where each finding was created: no table, no policy. There is now one scoring table for all three scanners, and the rule for secrets is written down as a policy. Your note produced a real correction, and I would rather say so than claim we were right all along.</a:t>
+            </a:r>
+          </a:p>
+          <a:p/>
+          <a:p>
+            <a:r>
+              <a:t>IF ASKED — "is the knowledge base real?" Yes. Three hand-written knowledge bases: why past changes were sent back, the team's settled conventions, and security advisories. Before answering, four of the agents look up what is relevant, with plain keyword matching, no vector database. Measured: with it, the reviewer caught a change that did not match its ticket 8 times out of 8; without it, 6. It is switched on in the deployed system, and it never touches the security verdict.</a:t>
             </a:r>
           </a:p>
           <a:p/>
@@ -7335,7 +7341,7 @@
                 </a:solidFill>
                 <a:latin typeface="Helvetica Neue"/>
               </a:rPr>
-              <a:t>2176</a:t>
+              <a:t>2182</a:t>
             </a:r>
           </a:p>
         </p:txBody>
@@ -7390,7 +7396,7 @@
                 </a:solidFill>
                 <a:latin typeface="Helvetica Neue"/>
               </a:rPr>
-              <a:t>across 95 files</a:t>
+              <a:t>across 96 files</a:t>
             </a:r>
           </a:p>
         </p:txBody>
@@ -7523,7 +7529,7 @@
                 </a:solidFill>
                 <a:latin typeface="Helvetica Neue"/>
               </a:rPr>
-              <a:t>v55</a:t>
+              <a:t>v56</a:t>
             </a:r>
           </a:p>
         </p:txBody>

--- a/talks/devops-hackathon-final/pitch/TheAgentOrg-Final.pptx
+++ b/talks/devops-hackathon-final/pitch/TheAgentOrg-Final.pptx
@@ -22,6 +22,7 @@
     <p:sldId id="270" r:id="rId21"/>
     <p:sldId id="271" r:id="rId22"/>
     <p:sldId id="272" r:id="rId23"/>
+    <p:sldId id="273" r:id="rId24"/>
   </p:sldIdLst>
   <p:sldSz cx="12191695" cy="6858000" type="screen4x3"/>
   <p:notesSz cx="6858000" cy="9144000"/>
@@ -816,19 +817,25 @@
           <a:lstStyle/>
           <a:p>
             <a:r>
-              <a:t>SAY You gave us ten notes in the pre-final, and every row here is an answer that now exists. One in particular. You asked how the scanners' scores turn into a go or no-go, because you doubted the determinism claim, and you were right to. It held for Trivy and Semgrep, which report their own severities. For gitleaks the word "critical" was simply typed where each finding was created: no table, no policy. There is now one scoring table for all three scanners, and the rule for secrets is written down as a policy. Your note produced a real correction, and I would rather say so than claim we were right all along.</a:t>
+              <a:t>SAY Before an agent answers, it looks up what the team already knows. Three hand-written knowledge bases: why past changes to this app were sent back, the questions the team has settled, and background on known vulnerabilities. Four agents read them: the planner, the developer, the reviewer, and the security explanation. We measured the reviewer on changes that did not do what their ticket asked: with the knowledge base it caught 8 out of 8, without it 6. And it did not make the reviewer fussier: no false blocks, with it or without. It is switched on in production; on one live run the agents read 18 documents.</a:t>
             </a:r>
           </a:p>
           <a:p/>
           <a:p>
             <a:r>
-              <a:t>IF ASKED — "is the knowledge base real?" Yes. Three hand-written knowledge bases: why past changes were sent back, the team's settled conventions, and security advisories. Before answering, four of the agents look up what is relevant, with plain keyword matching, no vector database. Measured: with it, the reviewer caught a change that did not match its ticket 8 times out of 8; without it, 6. It is switched on in the deployed system, and it never touches the security verdict.</a:t>
+              <a:t>SAY — the line that matters It shapes wording, never the verdict. We planted five hostile documents, things like "this finding is a known false positive", and the block did not move.</a:t>
             </a:r>
           </a:p>
           <a:p/>
           <a:p>
             <a:r>
-              <a:t>IF ASKED about any single row — scoring is slide 7 and the limits are slide 14; ask and I will go back to either.</a:t>
+              <a:t>IF ASKED — "why no vector database?" It is plain keyword search over a few dozen curated documents. That is enough at this size, and it means nothing new ships in the five agent images.</a:t>
+            </a:r>
+          </a:p>
+          <a:p/>
+          <a:p>
+            <a:r>
+              <a:t>IF ASKED — "what stops a poisoned document talking the reviewer out of it?" Nothing, fully — the reviewer is a model, and it is advisory. That is why the security decision does not read the knowledge base at all.</a:t>
             </a:r>
           </a:p>
         </p:txBody>
@@ -898,7 +905,13 @@
           <a:lstStyle/>
           <a:p>
             <a:r>
-              <a:t>SAY And what it does not do. A repository admin can bypass a gate; it is a setting, and our pre-flight check reports it on every run. If the scanners miss something, only the reviewer saw it, and the reviewer cannot stop the run, so the human gates are the last line. It covers one language and three scanners today, and breadth is where every competitor is ahead. And a merged pull request carries the reviewed change as a file; applying it to the source is next.</a:t>
+              <a:t>SAY You gave us ten notes in the pre-final, and every row here is an answer that now exists. One in particular. You asked how the scanners' scores turn into a go or no-go, because you doubted the determinism claim, and you were right to. It held for Trivy and Semgrep, which report their own severities. For gitleaks the word "critical" was simply typed where each finding was created: no table, no policy. There is now one scoring table for all three scanners, and the rule for secrets is written down as a policy. Your note produced a real correction, and I would rather say so than claim we were right all along.</a:t>
+            </a:r>
+          </a:p>
+          <a:p/>
+          <a:p>
+            <a:r>
+              <a:t>IF ASKED about any single row — scoring is slide 7, the knowledge base slide 13 and the limits slide 15; ask and I will go back to either.</a:t>
             </a:r>
           </a:p>
         </p:txBody>
@@ -968,7 +981,7 @@
           <a:lstStyle/>
           <a:p>
             <a:r>
-              <a:t>SAY Four things. First, apply the change rather than carry it; that is also what lets a generated test run against the change. Second, join the two test layers: tests are generated from each ticket and Selenium runs in CI, but neither checks the other yet. Third, prompt caching: nothing is cached today, so every agent pays full price for the same repository snapshot, and cached input costs a quarter as much. And more languages and more scanners; the scoring is a table, so a new scanner is one row.</a:t>
+              <a:t>SAY And what it does not do. A repository admin can bypass a gate; it is a setting, and our pre-flight check reports it on every run. If the scanners miss something, only the reviewer saw it, and the reviewer cannot stop the run, so the human gates are the last line. It covers one language and three scanners today, and breadth is where every competitor is ahead. And a merged pull request carries the reviewed change as a file; applying it to the source is next.</a:t>
             </a:r>
           </a:p>
         </p:txBody>
@@ -1038,25 +1051,7 @@
           <a:lstStyle/>
           <a:p>
             <a:r>
-              <a:t>SAY Let me show you the half that matters. This ticket asks for something that looks reasonable: pin an old version of the requests library for a legacy proxy. Nothing is planted and no demo flag is set. Watch what the reviewer says, and what the scanners say.</a:t>
-            </a:r>
-          </a:p>
-          <a:p/>
-          <a:p>
-            <a:r>
-              <a:t>IF ASKED — "what are the three cards?" One per scanner, each showing its own worst finding against the threshold. Only Trivy reached it, with a high-severity CVE; the medium ones stay below the line. That comparison is the whole decision.</a:t>
-            </a:r>
-          </a:p>
-          <a:p/>
-          <a:p>
-            <a:r>
-              <a:t>IF ASKED — "the explanation under the verdict is wrong" It can be: that paragraph is written by the model after the verdict, and it has no say in it. That is exactly why the model does not decide.</a:t>
-            </a:r>
-          </a:p>
-          <a:p/>
-          <a:p>
-            <a:r>
-              <a:t>IF ASKED — "why does the page say a stage used a canned answer?" The agent that writes tests from the ticket did not get an answer from the model this time, so it used its built-in stand-in, and the page says so rather than hiding it. It does not affect the block.</a:t>
+              <a:t>SAY Four things. First, apply the change rather than carry it; that is also what lets a generated test run against the change. Second, join the two test layers: tests are generated from each ticket and Selenium runs in CI, but neither checks the other yet. Third, prompt caching: nothing is cached today, so every agent pays full price for the same repository snapshot, and cached input costs a quarter as much. And more languages and more scanners; the scoring is a table, so a new scanner is one row.</a:t>
             </a:r>
           </a:p>
         </p:txBody>
@@ -1126,6 +1121,94 @@
           <a:lstStyle/>
           <a:p>
             <a:r>
+              <a:t>SAY Let me show you the half that matters. This ticket asks for something that looks reasonable: pin an old version of the requests library for a legacy proxy. Nothing is planted and no demo flag is set. Watch what the reviewer says, and what the scanners say.</a:t>
+            </a:r>
+          </a:p>
+          <a:p/>
+          <a:p>
+            <a:r>
+              <a:t>IF ASKED — "what are the three cards?" One per scanner, each showing its own worst finding against the threshold. Only Trivy reached it, with a high-severity CVE; the medium ones stay below the line. That comparison is the whole decision.</a:t>
+            </a:r>
+          </a:p>
+          <a:p/>
+          <a:p>
+            <a:r>
+              <a:t>IF ASKED — "the explanation under the verdict is wrong" It can be: that paragraph is written by the model after the verdict, and it has no say in it. That is exactly why the model does not decide.</a:t>
+            </a:r>
+          </a:p>
+          <a:p/>
+          <a:p>
+            <a:r>
+              <a:t>IF ASKED — "why does the page say a stage used a canned answer?" The agent that writes tests from the ticket did not get an answer from the model this time, so it used its built-in stand-in, and the page says so rather than hiding it. It does not affect the block.</a:t>
+            </a:r>
+          </a:p>
+        </p:txBody>
+      </p:sp>
+      <p:sp>
+        <p:nvSpPr>
+          <p:cNvPr id="4" name="Slide Number Placeholder 3"/>
+          <p:cNvSpPr>
+            <a:spLocks noGrp="1"/>
+          </p:cNvSpPr>
+          <p:nvPr>
+            <p:ph type="sldNum" idx="5" sz="quarter"/>
+          </p:nvPr>
+        </p:nvSpPr>
+        <p:spPr/>
+      </p:sp>
+    </p:spTree>
+  </p:cSld>
+  <p:clrMapOvr>
+    <a:masterClrMapping/>
+  </p:clrMapOvr>
+</p:notes>
+</file>
+
+<file path=ppt/notesSlides/notesSlide18.xml><?xml version="1.0" encoding="utf-8"?>
+<p:notes xmlns:a="http://schemas.openxmlformats.org/drawingml/2006/main" xmlns:p="http://schemas.openxmlformats.org/presentationml/2006/main" xmlns:r="http://schemas.openxmlformats.org/officeDocument/2006/relationships">
+  <p:cSld>
+    <p:spTree>
+      <p:nvGrpSpPr>
+        <p:cNvPr id="1" name=""/>
+        <p:cNvGrpSpPr/>
+        <p:nvPr/>
+      </p:nvGrpSpPr>
+      <p:grpSpPr>
+        <a:xfrm>
+          <a:off x="0" y="0"/>
+          <a:ext cx="0" cy="0"/>
+          <a:chOff x="0" y="0"/>
+          <a:chExt cx="0" cy="0"/>
+        </a:xfrm>
+      </p:grpSpPr>
+      <p:sp>
+        <p:nvSpPr>
+          <p:cNvPr id="2" name="Slide Image Placeholder 1"/>
+          <p:cNvSpPr>
+            <a:spLocks noGrp="1"/>
+          </p:cNvSpPr>
+          <p:nvPr>
+            <p:ph type="sldImg" idx="2"/>
+          </p:nvPr>
+        </p:nvSpPr>
+        <p:spPr/>
+      </p:sp>
+      <p:sp>
+        <p:nvSpPr>
+          <p:cNvPr id="3" name="Notes Placeholder 2"/>
+          <p:cNvSpPr>
+            <a:spLocks noGrp="1"/>
+          </p:cNvSpPr>
+          <p:nvPr>
+            <p:ph type="body" idx="3" sz="quarter"/>
+          </p:nvPr>
+        </p:nvSpPr>
+        <p:spPr/>
+        <p:txBody>
+          <a:bodyPr/>
+          <a:lstStyle/>
+          <a:p>
+            <a:r>
               <a:t>SAY That is The Agent Org. It is live at theagentorg.rosettacloud.app. Questions.</a:t>
             </a:r>
           </a:p>
@@ -1196,7 +1279,7 @@
           <a:lstStyle/>
           <a:p>
             <a:r>
-              <a:t>SAY We are RosettaTeam. I am Mohamed Sorour, a senior DevOps engineer at Vezeeta and a master's student in computer science, AI specialization, at Georgia Tech. Mariam is an associate solution engineer at RENOSYSTEMS. Habiba is a junior DevOps engineer, and Reem and Aya are junior testing engineers, all three Digilians alumni. All five of us are here, and each of us takes questions on our own part.</a:t>
+              <a:t>SAY We are RosettaTeam. I am Mohamed Sorour, a senior DevOps engineer at Vezeeta, an AWS Community Builder, and a master's student in computer science, AI specialization, at Georgia Tech. Mariam is an associate solution engineer at RENOSYSTEMS. Habiba is a junior DevOps engineer, and Reem and Aya are junior testing engineers, all three Digilians alumni. All five of us are here, and each of us takes questions on our own part.</a:t>
             </a:r>
           </a:p>
         </p:txBody>
@@ -1266,7 +1349,7 @@
           <a:lstStyle/>
           <a:p>
             <a:r>
-              <a:t>SAY Here is the twenty minutes. Three on the overview, then the architecture, the business impact, and how this differs from what vendors ship. Then what is built, your ten notes from the pre-final, and what it does not do. What is next, five minutes live, and the rest of the slot is yours.</a:t>
+              <a:t>SAY Here is the twenty minutes. Three on the overview, then the architecture, the business impact, and how this differs from what vendors ship. Then what is built, the knowledge base the agents read, your ten notes from the pre-final, and what it does not do. What is next, five minutes live, and the rest of the slot is yours.</a:t>
             </a:r>
           </a:p>
         </p:txBody>
@@ -8864,7 +8947,7 @@
                 </a:solidFill>
                 <a:latin typeface="Helvetica Neue"/>
               </a:rPr>
-              <a:t>PROGRESS</a:t>
+              <a:t>PROGRESS · KNOWLEDGE BASE</a:t>
             </a:r>
           </a:p>
         </p:txBody>
@@ -8903,7 +8986,7 @@
                 </a:solidFill>
                 <a:latin typeface="Helvetica Neue"/>
               </a:rPr>
-              <a:t>Your ten notes from the pre-final</a:t>
+              <a:t>What the agents read before they answer</a:t>
             </a:r>
           </a:p>
         </p:txBody>
@@ -8960,8 +9043,8 @@
         </p:nvSpPr>
         <p:spPr>
           <a:xfrm>
-            <a:off x="1005840" y="2103120"/>
-            <a:ext cx="3474720" cy="292608"/>
+            <a:off x="1005840" y="2148840"/>
+            <a:ext cx="3108960" cy="841248"/>
           </a:xfrm>
           <a:prstGeom prst="rect">
             <a:avLst/>
@@ -8980,13 +9063,13 @@
               </a:lnSpc>
             </a:pPr>
             <a:r>
-              <a:rPr sz="1100" b="1">
+              <a:rPr sz="4000" b="1">
                 <a:solidFill>
                   <a:srgbClr val="22D3EE"/>
                 </a:solidFill>
                 <a:latin typeface="Helvetica Neue"/>
               </a:rPr>
-              <a:t>WHAT YOU ASKED FOR</a:t>
+              <a:t>8/8</a:t>
             </a:r>
           </a:p>
         </p:txBody>
@@ -8999,8 +9082,8 @@
         </p:nvSpPr>
         <p:spPr>
           <a:xfrm>
-            <a:off x="4480560" y="2103120"/>
-            <a:ext cx="6675120" cy="292608"/>
+            <a:off x="1005840" y="2935224"/>
+            <a:ext cx="3108960" cy="749808"/>
           </a:xfrm>
           <a:prstGeom prst="rect">
             <a:avLst/>
@@ -9015,40 +9098,246 @@
           <a:p>
             <a:pPr algn="l">
               <a:lnSpc>
+                <a:spcPct val="125000"/>
+              </a:lnSpc>
+            </a:pPr>
+            <a:r>
+              <a:rPr sz="1500" b="0">
+                <a:solidFill>
+                  <a:srgbClr val="8B97AB"/>
+                </a:solidFill>
+                <a:latin typeface="Helvetica Neue"/>
+              </a:rPr>
+              <a:t>plan mismatches caught</a:t>
+            </a:r>
+          </a:p>
+          <a:p>
+            <a:pPr algn="l">
+              <a:lnSpc>
+                <a:spcPct val="125000"/>
+              </a:lnSpc>
+            </a:pPr>
+            <a:r>
+              <a:rPr sz="1500" b="0">
+                <a:solidFill>
+                  <a:srgbClr val="8B97AB"/>
+                </a:solidFill>
+                <a:latin typeface="Helvetica Neue"/>
+              </a:rPr>
+              <a:t>with it — 6/8 without</a:t>
+            </a:r>
+          </a:p>
+        </p:txBody>
+      </p:sp>
+      <p:sp>
+        <p:nvSpPr>
+          <p:cNvPr id="8" name="TextBox 7"/>
+          <p:cNvSpPr txBox="1"/>
+          <p:nvPr/>
+        </p:nvSpPr>
+        <p:spPr>
+          <a:xfrm>
+            <a:off x="4389120" y="2148840"/>
+            <a:ext cx="3108960" cy="841248"/>
+          </a:xfrm>
+          <a:prstGeom prst="rect">
+            <a:avLst/>
+          </a:prstGeom>
+          <a:noFill/>
+        </p:spPr>
+        <p:txBody>
+          <a:bodyPr wrap="square">
+            <a:spAutoFit/>
+          </a:bodyPr>
+          <a:lstStyle/>
+          <a:p>
+            <a:pPr algn="l">
+              <a:lnSpc>
                 <a:spcPct val="100000"/>
               </a:lnSpc>
             </a:pPr>
             <a:r>
-              <a:rPr sz="1100" b="1">
+              <a:rPr sz="4000" b="1">
                 <a:solidFill>
                   <a:srgbClr val="22D3EE"/>
                 </a:solidFill>
                 <a:latin typeface="Helvetica Neue"/>
               </a:rPr>
-              <a:t>WHAT EXISTS NOW</a:t>
-            </a:r>
-          </a:p>
-        </p:txBody>
-      </p:sp>
-      <p:sp>
-        <p:nvSpPr>
-          <p:cNvPr id="8" name="Rectangle 7"/>
+              <a:t>0/40</a:t>
+            </a:r>
+          </a:p>
+        </p:txBody>
+      </p:sp>
+      <p:sp>
+        <p:nvSpPr>
+          <p:cNvPr id="9" name="TextBox 8"/>
+          <p:cNvSpPr txBox="1"/>
+          <p:nvPr/>
+        </p:nvSpPr>
+        <p:spPr>
+          <a:xfrm>
+            <a:off x="4389120" y="2935224"/>
+            <a:ext cx="3108960" cy="749808"/>
+          </a:xfrm>
+          <a:prstGeom prst="rect">
+            <a:avLst/>
+          </a:prstGeom>
+          <a:noFill/>
+        </p:spPr>
+        <p:txBody>
+          <a:bodyPr wrap="square">
+            <a:spAutoFit/>
+          </a:bodyPr>
+          <a:lstStyle/>
+          <a:p>
+            <a:pPr algn="l">
+              <a:lnSpc>
+                <a:spcPct val="125000"/>
+              </a:lnSpc>
+            </a:pPr>
+            <a:r>
+              <a:rPr sz="1500" b="0">
+                <a:solidFill>
+                  <a:srgbClr val="8B97AB"/>
+                </a:solidFill>
+                <a:latin typeface="Helvetica Neue"/>
+              </a:rPr>
+              <a:t>false blocks, with it</a:t>
+            </a:r>
+          </a:p>
+          <a:p>
+            <a:pPr algn="l">
+              <a:lnSpc>
+                <a:spcPct val="125000"/>
+              </a:lnSpc>
+            </a:pPr>
+            <a:r>
+              <a:rPr sz="1500" b="0">
+                <a:solidFill>
+                  <a:srgbClr val="8B97AB"/>
+                </a:solidFill>
+                <a:latin typeface="Helvetica Neue"/>
+              </a:rPr>
+              <a:t>or without it</a:t>
+            </a:r>
+          </a:p>
+        </p:txBody>
+      </p:sp>
+      <p:sp>
+        <p:nvSpPr>
+          <p:cNvPr id="10" name="TextBox 9"/>
+          <p:cNvSpPr txBox="1"/>
+          <p:nvPr/>
+        </p:nvSpPr>
+        <p:spPr>
+          <a:xfrm>
+            <a:off x="7680960" y="2148840"/>
+            <a:ext cx="3108960" cy="841248"/>
+          </a:xfrm>
+          <a:prstGeom prst="rect">
+            <a:avLst/>
+          </a:prstGeom>
+          <a:noFill/>
+        </p:spPr>
+        <p:txBody>
+          <a:bodyPr wrap="square">
+            <a:spAutoFit/>
+          </a:bodyPr>
+          <a:lstStyle/>
+          <a:p>
+            <a:pPr algn="l">
+              <a:lnSpc>
+                <a:spcPct val="100000"/>
+              </a:lnSpc>
+            </a:pPr>
+            <a:r>
+              <a:rPr sz="4000" b="1">
+                <a:solidFill>
+                  <a:srgbClr val="22D3EE"/>
+                </a:solidFill>
+                <a:latin typeface="Helvetica Neue"/>
+              </a:rPr>
+              <a:t>18</a:t>
+            </a:r>
+          </a:p>
+        </p:txBody>
+      </p:sp>
+      <p:sp>
+        <p:nvSpPr>
+          <p:cNvPr id="11" name="TextBox 10"/>
+          <p:cNvSpPr txBox="1"/>
+          <p:nvPr/>
+        </p:nvSpPr>
+        <p:spPr>
+          <a:xfrm>
+            <a:off x="7680960" y="2935224"/>
+            <a:ext cx="3108960" cy="749808"/>
+          </a:xfrm>
+          <a:prstGeom prst="rect">
+            <a:avLst/>
+          </a:prstGeom>
+          <a:noFill/>
+        </p:spPr>
+        <p:txBody>
+          <a:bodyPr wrap="square">
+            <a:spAutoFit/>
+          </a:bodyPr>
+          <a:lstStyle/>
+          <a:p>
+            <a:pPr algn="l">
+              <a:lnSpc>
+                <a:spcPct val="125000"/>
+              </a:lnSpc>
+            </a:pPr>
+            <a:r>
+              <a:rPr sz="1500" b="0">
+                <a:solidFill>
+                  <a:srgbClr val="8B97AB"/>
+                </a:solidFill>
+                <a:latin typeface="Helvetica Neue"/>
+              </a:rPr>
+              <a:t>documents read on one</a:t>
+            </a:r>
+          </a:p>
+          <a:p>
+            <a:pPr algn="l">
+              <a:lnSpc>
+                <a:spcPct val="125000"/>
+              </a:lnSpc>
+            </a:pPr>
+            <a:r>
+              <a:rPr sz="1500" b="0">
+                <a:solidFill>
+                  <a:srgbClr val="8B97AB"/>
+                </a:solidFill>
+                <a:latin typeface="Helvetica Neue"/>
+              </a:rPr>
+              <a:t>live run, in production</a:t>
+            </a:r>
+          </a:p>
+        </p:txBody>
+      </p:sp>
+      <p:sp>
+        <p:nvSpPr>
+          <p:cNvPr id="12" name="Rectangle 11"/>
           <p:cNvSpPr/>
           <p:nvPr/>
         </p:nvSpPr>
         <p:spPr>
           <a:xfrm>
-            <a:off x="1005840" y="2432304"/>
-            <a:ext cx="10149840" cy="12700"/>
+            <a:off x="1005840" y="3977639"/>
+            <a:ext cx="3224784" cy="1645920"/>
           </a:xfrm>
           <a:prstGeom prst="rect">
             <a:avLst/>
           </a:prstGeom>
           <a:solidFill>
-            <a:srgbClr val="1F2937"/>
+            <a:srgbClr val="131A25"/>
           </a:solidFill>
-          <a:ln>
-            <a:noFill/>
+          <a:ln w="12700">
+            <a:solidFill>
+              <a:srgbClr val="1F2937"/>
+            </a:solidFill>
           </a:ln>
           <a:effectLst/>
         </p:spPr>
@@ -9076,14 +9365,14 @@
       </p:sp>
       <p:sp>
         <p:nvSpPr>
-          <p:cNvPr id="9" name="TextBox 8"/>
+          <p:cNvPr id="13" name="TextBox 12"/>
           <p:cNvSpPr txBox="1"/>
           <p:nvPr/>
         </p:nvSpPr>
         <p:spPr>
           <a:xfrm>
-            <a:off x="1005840" y="2560320"/>
-            <a:ext cx="3474720" cy="384048"/>
+            <a:off x="1188720" y="4123943"/>
+            <a:ext cx="2859024" cy="512064"/>
           </a:xfrm>
           <a:prstGeom prst="rect">
             <a:avLst/>
@@ -9098,31 +9387,31 @@
           <a:p>
             <a:pPr algn="l">
               <a:lnSpc>
-                <a:spcPct val="100000"/>
-              </a:lnSpc>
-            </a:pPr>
-            <a:r>
-              <a:rPr sz="1300" b="0">
-                <a:solidFill>
-                  <a:srgbClr val="E8ECF3"/>
+                <a:spcPct val="110000"/>
+              </a:lnSpc>
+            </a:pPr>
+            <a:r>
+              <a:rPr sz="1400" b="1">
+                <a:solidFill>
+                  <a:srgbClr val="22D3EE"/>
                 </a:solidFill>
                 <a:latin typeface="Helvetica Neue"/>
               </a:rPr>
-              <a:t>Evaluation criteria</a:t>
-            </a:r>
-          </a:p>
-        </p:txBody>
-      </p:sp>
-      <p:sp>
-        <p:nvSpPr>
-          <p:cNvPr id="10" name="TextBox 9"/>
+              <a:t>Past rejections</a:t>
+            </a:r>
+          </a:p>
+        </p:txBody>
+      </p:sp>
+      <p:sp>
+        <p:nvSpPr>
+          <p:cNvPr id="14" name="TextBox 13"/>
           <p:cNvSpPr txBox="1"/>
           <p:nvPr/>
         </p:nvSpPr>
         <p:spPr>
           <a:xfrm>
-            <a:off x="4480560" y="2560320"/>
-            <a:ext cx="6675120" cy="384048"/>
+            <a:off x="1188720" y="4654295"/>
+            <a:ext cx="2859024" cy="822960"/>
           </a:xfrm>
           <a:prstGeom prst="rect">
             <a:avLst/>
@@ -9137,7 +9426,7 @@
           <a:p>
             <a:pPr algn="l">
               <a:lnSpc>
-                <a:spcPct val="100000"/>
+                <a:spcPct val="130000"/>
               </a:lnSpc>
             </a:pPr>
             <a:r>
@@ -9147,792 +9436,32 @@
                 </a:solidFill>
                 <a:latin typeface="Helvetica Neue"/>
               </a:rPr>
-              <a:t>measured before and after: plan-mismatch catches went 6/8 → 8/8</a:t>
-            </a:r>
-          </a:p>
-        </p:txBody>
-      </p:sp>
-      <p:sp>
-        <p:nvSpPr>
-          <p:cNvPr id="11" name="TextBox 10"/>
-          <p:cNvSpPr txBox="1"/>
-          <p:nvPr/>
-        </p:nvSpPr>
-        <p:spPr>
-          <a:xfrm>
-            <a:off x="1005840" y="2944368"/>
-            <a:ext cx="3474720" cy="384048"/>
-          </a:xfrm>
-          <a:prstGeom prst="rect">
-            <a:avLst/>
-          </a:prstGeom>
-          <a:noFill/>
-        </p:spPr>
-        <p:txBody>
-          <a:bodyPr wrap="square">
-            <a:spAutoFit/>
-          </a:bodyPr>
-          <a:lstStyle/>
-          <a:p>
-            <a:pPr algn="l">
-              <a:lnSpc>
-                <a:spcPct val="100000"/>
-              </a:lnSpc>
-            </a:pPr>
-            <a:r>
-              <a:rPr sz="1300" b="0">
-                <a:solidFill>
-                  <a:srgbClr val="E8ECF3"/>
-                </a:solidFill>
-                <a:latin typeface="Helvetica Neue"/>
-              </a:rPr>
-              <a:t>Time and cost vs a coding agent</a:t>
-            </a:r>
-          </a:p>
-        </p:txBody>
-      </p:sp>
-      <p:sp>
-        <p:nvSpPr>
-          <p:cNvPr id="12" name="TextBox 11"/>
-          <p:cNvSpPr txBox="1"/>
-          <p:nvPr/>
-        </p:nvSpPr>
-        <p:spPr>
-          <a:xfrm>
-            <a:off x="4480560" y="2944368"/>
-            <a:ext cx="6675120" cy="384048"/>
-          </a:xfrm>
-          <a:prstGeom prst="rect">
-            <a:avLst/>
-          </a:prstGeom>
-          <a:noFill/>
-        </p:spPr>
-        <p:txBody>
-          <a:bodyPr wrap="square">
-            <a:spAutoFit/>
-          </a:bodyPr>
-          <a:lstStyle/>
-          <a:p>
-            <a:pPr algn="l">
-              <a:lnSpc>
-                <a:spcPct val="100000"/>
-              </a:lnSpc>
-            </a:pPr>
-            <a:r>
-              <a:rPr sz="1300" b="0">
-                <a:solidFill>
-                  <a:srgbClr val="8B97AB"/>
-                </a:solidFill>
-                <a:latin typeface="Helvetica Neue"/>
-              </a:rPr>
-              <a:t>1.3–1.7¢ of model time per change, priced from the AWS Pricing API</a:t>
-            </a:r>
-          </a:p>
-        </p:txBody>
-      </p:sp>
-      <p:sp>
-        <p:nvSpPr>
-          <p:cNvPr id="13" name="TextBox 12"/>
-          <p:cNvSpPr txBox="1"/>
-          <p:nvPr/>
-        </p:nvSpPr>
-        <p:spPr>
-          <a:xfrm>
-            <a:off x="1005840" y="3328416"/>
-            <a:ext cx="3474720" cy="384048"/>
-          </a:xfrm>
-          <a:prstGeom prst="rect">
-            <a:avLst/>
-          </a:prstGeom>
-          <a:noFill/>
-        </p:spPr>
-        <p:txBody>
-          <a:bodyPr wrap="square">
-            <a:spAutoFit/>
-          </a:bodyPr>
-          <a:lstStyle/>
-          <a:p>
-            <a:pPr algn="l">
-              <a:lnSpc>
-                <a:spcPct val="100000"/>
-              </a:lnSpc>
-            </a:pPr>
-            <a:r>
-              <a:rPr sz="1300" b="0">
-                <a:solidFill>
-                  <a:srgbClr val="E8ECF3"/>
-                </a:solidFill>
-                <a:latin typeface="Helvetica Neue"/>
-              </a:rPr>
-              <a:t>External dependency</a:t>
-            </a:r>
-          </a:p>
-        </p:txBody>
-      </p:sp>
-      <p:sp>
-        <p:nvSpPr>
-          <p:cNvPr id="14" name="TextBox 13"/>
-          <p:cNvSpPr txBox="1"/>
-          <p:nvPr/>
-        </p:nvSpPr>
-        <p:spPr>
-          <a:xfrm>
-            <a:off x="4480560" y="3328416"/>
-            <a:ext cx="6675120" cy="384048"/>
-          </a:xfrm>
-          <a:prstGeom prst="rect">
-            <a:avLst/>
-          </a:prstGeom>
-          <a:noFill/>
-        </p:spPr>
-        <p:txBody>
-          <a:bodyPr wrap="square">
-            <a:spAutoFit/>
-          </a:bodyPr>
-          <a:lstStyle/>
-          <a:p>
-            <a:pPr algn="l">
-              <a:lnSpc>
-                <a:spcPct val="100000"/>
-              </a:lnSpc>
-            </a:pPr>
-            <a:r>
-              <a:rPr sz="1300" b="0">
-                <a:solidFill>
-                  <a:srgbClr val="8B97AB"/>
-                </a:solidFill>
-                <a:latin typeface="Helvetica Neue"/>
-              </a:rPr>
-              <a:t>8 of 83 modules touch a vendor SDK; 2 load one at start-up</a:t>
-            </a:r>
-          </a:p>
-        </p:txBody>
-      </p:sp>
-      <p:sp>
-        <p:nvSpPr>
-          <p:cNvPr id="15" name="TextBox 14"/>
-          <p:cNvSpPr txBox="1"/>
-          <p:nvPr/>
-        </p:nvSpPr>
-        <p:spPr>
-          <a:xfrm>
-            <a:off x="1005840" y="3712464"/>
-            <a:ext cx="3474720" cy="384048"/>
-          </a:xfrm>
-          <a:prstGeom prst="rect">
-            <a:avLst/>
-          </a:prstGeom>
-          <a:noFill/>
-        </p:spPr>
-        <p:txBody>
-          <a:bodyPr wrap="square">
-            <a:spAutoFit/>
-          </a:bodyPr>
-          <a:lstStyle/>
-          <a:p>
-            <a:pPr algn="l">
-              <a:lnSpc>
-                <a:spcPct val="100000"/>
-              </a:lnSpc>
-            </a:pPr>
-            <a:r>
-              <a:rPr sz="1300" b="0">
-                <a:solidFill>
-                  <a:srgbClr val="E8ECF3"/>
-                </a:solidFill>
-                <a:latin typeface="Helvetica Neue"/>
-              </a:rPr>
-              <a:t>Self-hosted</a:t>
-            </a:r>
-          </a:p>
-        </p:txBody>
-      </p:sp>
-      <p:sp>
-        <p:nvSpPr>
-          <p:cNvPr id="16" name="TextBox 15"/>
-          <p:cNvSpPr txBox="1"/>
-          <p:nvPr/>
-        </p:nvSpPr>
-        <p:spPr>
-          <a:xfrm>
-            <a:off x="4480560" y="3712464"/>
-            <a:ext cx="6675120" cy="384048"/>
-          </a:xfrm>
-          <a:prstGeom prst="rect">
-            <a:avLst/>
-          </a:prstGeom>
-          <a:noFill/>
-        </p:spPr>
-        <p:txBody>
-          <a:bodyPr wrap="square">
-            <a:spAutoFit/>
-          </a:bodyPr>
-          <a:lstStyle/>
-          <a:p>
-            <a:pPr algn="l">
-              <a:lnSpc>
-                <a:spcPct val="100000"/>
-              </a:lnSpc>
-            </a:pPr>
-            <a:r>
-              <a:rPr sz="1300" b="0">
-                <a:solidFill>
-                  <a:srgbClr val="8B97AB"/>
-                </a:solidFill>
-                <a:latin typeface="Helvetica Neue"/>
-              </a:rPr>
-              <a:t>one compose file runs the web app, the API, the worker and a local model</a:t>
-            </a:r>
-          </a:p>
-        </p:txBody>
-      </p:sp>
-      <p:sp>
-        <p:nvSpPr>
-          <p:cNvPr id="17" name="TextBox 16"/>
-          <p:cNvSpPr txBox="1"/>
-          <p:nvPr/>
-        </p:nvSpPr>
-        <p:spPr>
-          <a:xfrm>
-            <a:off x="1005840" y="4096512"/>
-            <a:ext cx="3474720" cy="384048"/>
-          </a:xfrm>
-          <a:prstGeom prst="rect">
-            <a:avLst/>
-          </a:prstGeom>
-          <a:noFill/>
-        </p:spPr>
-        <p:txBody>
-          <a:bodyPr wrap="square">
-            <a:spAutoFit/>
-          </a:bodyPr>
-          <a:lstStyle/>
-          <a:p>
-            <a:pPr algn="l">
-              <a:lnSpc>
-                <a:spcPct val="100000"/>
-              </a:lnSpc>
-            </a:pPr>
-            <a:r>
-              <a:rPr sz="1300" b="0">
-                <a:solidFill>
-                  <a:srgbClr val="E8ECF3"/>
-                </a:solidFill>
-                <a:latin typeface="Helvetica Neue"/>
-              </a:rPr>
-              <a:t>Competitive advantage</a:t>
-            </a:r>
-          </a:p>
-        </p:txBody>
-      </p:sp>
-      <p:sp>
-        <p:nvSpPr>
-          <p:cNvPr id="18" name="TextBox 17"/>
-          <p:cNvSpPr txBox="1"/>
-          <p:nvPr/>
-        </p:nvSpPr>
-        <p:spPr>
-          <a:xfrm>
-            <a:off x="4480560" y="4096512"/>
-            <a:ext cx="6675120" cy="384048"/>
-          </a:xfrm>
-          <a:prstGeom prst="rect">
-            <a:avLst/>
-          </a:prstGeom>
-          <a:noFill/>
-        </p:spPr>
-        <p:txBody>
-          <a:bodyPr wrap="square">
-            <a:spAutoFit/>
-          </a:bodyPr>
-          <a:lstStyle/>
-          <a:p>
-            <a:pPr algn="l">
-              <a:lnSpc>
-                <a:spcPct val="100000"/>
-              </a:lnSpc>
-            </a:pPr>
-            <a:r>
-              <a:rPr sz="1300" b="0">
-                <a:solidFill>
-                  <a:srgbClr val="8B97AB"/>
-                </a:solidFill>
-                <a:latin typeface="Helvetica Neue"/>
-              </a:rPr>
-              <a:t>commissioned research, which disproved five of our own claims</a:t>
-            </a:r>
-          </a:p>
-        </p:txBody>
-      </p:sp>
-      <p:sp>
-        <p:nvSpPr>
-          <p:cNvPr id="19" name="TextBox 18"/>
-          <p:cNvSpPr txBox="1"/>
-          <p:nvPr/>
-        </p:nvSpPr>
-        <p:spPr>
-          <a:xfrm>
-            <a:off x="1005840" y="4480560"/>
-            <a:ext cx="3474720" cy="384048"/>
-          </a:xfrm>
-          <a:prstGeom prst="rect">
-            <a:avLst/>
-          </a:prstGeom>
-          <a:noFill/>
-        </p:spPr>
-        <p:txBody>
-          <a:bodyPr wrap="square">
-            <a:spAutoFit/>
-          </a:bodyPr>
-          <a:lstStyle/>
-          <a:p>
-            <a:pPr algn="l">
-              <a:lnSpc>
-                <a:spcPct val="100000"/>
-              </a:lnSpc>
-            </a:pPr>
-            <a:r>
-              <a:rPr sz="1300" b="0">
-                <a:solidFill>
-                  <a:srgbClr val="E8ECF3"/>
-                </a:solidFill>
-                <a:latin typeface="Helvetica Neue"/>
-              </a:rPr>
-              <a:t>Scanner scoring → go / no-go</a:t>
-            </a:r>
-          </a:p>
-        </p:txBody>
-      </p:sp>
-      <p:sp>
-        <p:nvSpPr>
-          <p:cNvPr id="20" name="TextBox 19"/>
-          <p:cNvSpPr txBox="1"/>
-          <p:nvPr/>
-        </p:nvSpPr>
-        <p:spPr>
-          <a:xfrm>
-            <a:off x="4480560" y="4480560"/>
-            <a:ext cx="6675120" cy="384048"/>
-          </a:xfrm>
-          <a:prstGeom prst="rect">
-            <a:avLst/>
-          </a:prstGeom>
-          <a:noFill/>
-        </p:spPr>
-        <p:txBody>
-          <a:bodyPr wrap="square">
-            <a:spAutoFit/>
-          </a:bodyPr>
-          <a:lstStyle/>
-          <a:p>
-            <a:pPr algn="l">
-              <a:lnSpc>
-                <a:spcPct val="100000"/>
-              </a:lnSpc>
-            </a:pPr>
-            <a:r>
-              <a:rPr sz="1300" b="0">
-                <a:solidFill>
-                  <a:srgbClr val="8B97AB"/>
-                </a:solidFill>
-                <a:latin typeface="Helvetica Neue"/>
-              </a:rPr>
-              <a:t>one scoring table for all three scanners, built because of this note</a:t>
-            </a:r>
-          </a:p>
-        </p:txBody>
-      </p:sp>
-      <p:sp>
-        <p:nvSpPr>
-          <p:cNvPr id="21" name="TextBox 20"/>
-          <p:cNvSpPr txBox="1"/>
-          <p:nvPr/>
-        </p:nvSpPr>
-        <p:spPr>
-          <a:xfrm>
-            <a:off x="1005840" y="4864608"/>
-            <a:ext cx="3474720" cy="384048"/>
-          </a:xfrm>
-          <a:prstGeom prst="rect">
-            <a:avLst/>
-          </a:prstGeom>
-          <a:noFill/>
-        </p:spPr>
-        <p:txBody>
-          <a:bodyPr wrap="square">
-            <a:spAutoFit/>
-          </a:bodyPr>
-          <a:lstStyle/>
-          <a:p>
-            <a:pPr algn="l">
-              <a:lnSpc>
-                <a:spcPct val="100000"/>
-              </a:lnSpc>
-            </a:pPr>
-            <a:r>
-              <a:rPr sz="1300" b="0">
-                <a:solidFill>
-                  <a:srgbClr val="E8ECF3"/>
-                </a:solidFill>
-                <a:latin typeface="Helvetica Neue"/>
-              </a:rPr>
-              <a:t>Generated tests + Selenium</a:t>
-            </a:r>
-          </a:p>
-        </p:txBody>
-      </p:sp>
-      <p:sp>
-        <p:nvSpPr>
-          <p:cNvPr id="22" name="TextBox 21"/>
-          <p:cNvSpPr txBox="1"/>
-          <p:nvPr/>
-        </p:nvSpPr>
-        <p:spPr>
-          <a:xfrm>
-            <a:off x="4480560" y="4864608"/>
-            <a:ext cx="6675120" cy="384048"/>
-          </a:xfrm>
-          <a:prstGeom prst="rect">
-            <a:avLst/>
-          </a:prstGeom>
-          <a:noFill/>
-        </p:spPr>
-        <p:txBody>
-          <a:bodyPr wrap="square">
-            <a:spAutoFit/>
-          </a:bodyPr>
-          <a:lstStyle/>
-          <a:p>
-            <a:pPr algn="l">
-              <a:lnSpc>
-                <a:spcPct val="100000"/>
-              </a:lnSpc>
-            </a:pPr>
-            <a:r>
-              <a:rPr sz="1300" b="0">
-                <a:solidFill>
-                  <a:srgbClr val="8B97AB"/>
-                </a:solidFill>
-                <a:latin typeface="Helvetica Neue"/>
-              </a:rPr>
-              <a:t>an agent writes tests from the ticket; Selenium runs in CI</a:t>
-            </a:r>
-          </a:p>
-        </p:txBody>
-      </p:sp>
-      <p:sp>
-        <p:nvSpPr>
-          <p:cNvPr id="23" name="TextBox 22"/>
-          <p:cNvSpPr txBox="1"/>
-          <p:nvPr/>
-        </p:nvSpPr>
-        <p:spPr>
-          <a:xfrm>
-            <a:off x="1005840" y="5248656"/>
-            <a:ext cx="3474720" cy="384048"/>
-          </a:xfrm>
-          <a:prstGeom prst="rect">
-            <a:avLst/>
-          </a:prstGeom>
-          <a:noFill/>
-        </p:spPr>
-        <p:txBody>
-          <a:bodyPr wrap="square">
-            <a:spAutoFit/>
-          </a:bodyPr>
-          <a:lstStyle/>
-          <a:p>
-            <a:pPr algn="l">
-              <a:lnSpc>
-                <a:spcPct val="100000"/>
-              </a:lnSpc>
-            </a:pPr>
-            <a:r>
-              <a:rPr sz="1300" b="0">
-                <a:solidFill>
-                  <a:srgbClr val="E8ECF3"/>
-                </a:solidFill>
-                <a:latin typeface="Helvetica Neue"/>
-              </a:rPr>
-              <a:t>RAG / knowledge lake</a:t>
-            </a:r>
-          </a:p>
-        </p:txBody>
-      </p:sp>
-      <p:sp>
-        <p:nvSpPr>
-          <p:cNvPr id="24" name="TextBox 23"/>
-          <p:cNvSpPr txBox="1"/>
-          <p:nvPr/>
-        </p:nvSpPr>
-        <p:spPr>
-          <a:xfrm>
-            <a:off x="4480560" y="5248656"/>
-            <a:ext cx="6675120" cy="384048"/>
-          </a:xfrm>
-          <a:prstGeom prst="rect">
-            <a:avLst/>
-          </a:prstGeom>
-          <a:noFill/>
-        </p:spPr>
-        <p:txBody>
-          <a:bodyPr wrap="square">
-            <a:spAutoFit/>
-          </a:bodyPr>
-          <a:lstStyle/>
-          <a:p>
-            <a:pPr algn="l">
-              <a:lnSpc>
-                <a:spcPct val="100000"/>
-              </a:lnSpc>
-            </a:pPr>
-            <a:r>
-              <a:rPr sz="1300" b="0">
-                <a:solidFill>
-                  <a:srgbClr val="8B97AB"/>
-                </a:solidFill>
-                <a:latin typeface="Helvetica Neue"/>
-              </a:rPr>
-              <a:t>three curated knowledge bases, used by four of the agents</a:t>
-            </a:r>
-          </a:p>
-        </p:txBody>
-      </p:sp>
-      <p:sp>
-        <p:nvSpPr>
-          <p:cNvPr id="25" name="TextBox 24"/>
-          <p:cNvSpPr txBox="1"/>
-          <p:nvPr/>
-        </p:nvSpPr>
-        <p:spPr>
-          <a:xfrm>
-            <a:off x="1005840" y="5632704"/>
-            <a:ext cx="3474720" cy="384048"/>
-          </a:xfrm>
-          <a:prstGeom prst="rect">
-            <a:avLst/>
-          </a:prstGeom>
-          <a:noFill/>
-        </p:spPr>
-        <p:txBody>
-          <a:bodyPr wrap="square">
-            <a:spAutoFit/>
-          </a:bodyPr>
-          <a:lstStyle/>
-          <a:p>
-            <a:pPr algn="l">
-              <a:lnSpc>
-                <a:spcPct val="100000"/>
-              </a:lnSpc>
-            </a:pPr>
-            <a:r>
-              <a:rPr sz="1300" b="0">
-                <a:solidFill>
-                  <a:srgbClr val="E8ECF3"/>
-                </a:solidFill>
-                <a:latin typeface="Helvetica Neue"/>
-              </a:rPr>
-              <a:t>A real UI</a:t>
-            </a:r>
-          </a:p>
-        </p:txBody>
-      </p:sp>
-      <p:sp>
-        <p:nvSpPr>
-          <p:cNvPr id="26" name="TextBox 25"/>
-          <p:cNvSpPr txBox="1"/>
-          <p:nvPr/>
-        </p:nvSpPr>
-        <p:spPr>
-          <a:xfrm>
-            <a:off x="4480560" y="5632704"/>
-            <a:ext cx="6675120" cy="384048"/>
-          </a:xfrm>
-          <a:prstGeom prst="rect">
-            <a:avLst/>
-          </a:prstGeom>
-          <a:noFill/>
-        </p:spPr>
-        <p:txBody>
-          <a:bodyPr wrap="square">
-            <a:spAutoFit/>
-          </a:bodyPr>
-          <a:lstStyle/>
-          <a:p>
-            <a:pPr algn="l">
-              <a:lnSpc>
-                <a:spcPct val="100000"/>
-              </a:lnSpc>
-            </a:pPr>
-            <a:r>
-              <a:rPr sz="1300" b="0">
-                <a:solidFill>
-                  <a:srgbClr val="8B97AB"/>
-                </a:solidFill>
-                <a:latin typeface="Helvetica Neue"/>
-              </a:rPr>
-              <a:t>sign-in, a live view of each run, gate approval, and cost</a:t>
-            </a:r>
-          </a:p>
-        </p:txBody>
-      </p:sp>
-      <p:sp>
-        <p:nvSpPr>
-          <p:cNvPr id="27" name="TextBox 26"/>
-          <p:cNvSpPr txBox="1"/>
-          <p:nvPr/>
-        </p:nvSpPr>
-        <p:spPr>
-          <a:xfrm>
-            <a:off x="1005840" y="6016752"/>
-            <a:ext cx="3474720" cy="384048"/>
-          </a:xfrm>
-          <a:prstGeom prst="rect">
-            <a:avLst/>
-          </a:prstGeom>
-          <a:noFill/>
-        </p:spPr>
-        <p:txBody>
-          <a:bodyPr wrap="square">
-            <a:spAutoFit/>
-          </a:bodyPr>
-          <a:lstStyle/>
-          <a:p>
-            <a:pPr algn="l">
-              <a:lnSpc>
-                <a:spcPct val="100000"/>
-              </a:lnSpc>
-            </a:pPr>
-            <a:r>
-              <a:rPr sz="1300" b="0">
-                <a:solidFill>
-                  <a:srgbClr val="E8ECF3"/>
-                </a:solidFill>
-                <a:latin typeface="Helvetica Neue"/>
-              </a:rPr>
-              <a:t>Restructure as SaaS</a:t>
-            </a:r>
-          </a:p>
-        </p:txBody>
-      </p:sp>
-      <p:sp>
-        <p:nvSpPr>
-          <p:cNvPr id="28" name="TextBox 27"/>
-          <p:cNvSpPr txBox="1"/>
-          <p:nvPr/>
-        </p:nvSpPr>
-        <p:spPr>
-          <a:xfrm>
-            <a:off x="4480560" y="6016752"/>
-            <a:ext cx="6675120" cy="384048"/>
-          </a:xfrm>
-          <a:prstGeom prst="rect">
-            <a:avLst/>
-          </a:prstGeom>
-          <a:noFill/>
-        </p:spPr>
-        <p:txBody>
-          <a:bodyPr wrap="square">
-            <a:spAutoFit/>
-          </a:bodyPr>
-          <a:lstStyle/>
-          <a:p>
-            <a:pPr algn="l">
-              <a:lnSpc>
-                <a:spcPct val="100000"/>
-              </a:lnSpc>
-            </a:pPr>
-            <a:r>
-              <a:rPr sz="1300" b="0">
-                <a:solidFill>
-                  <a:srgbClr val="8B97AB"/>
-                </a:solidFill>
-                <a:latin typeface="Helvetica Neue"/>
-              </a:rPr>
-              <a:t>multi-tenant, with a control-plane API and per-tenant isolation</a:t>
-            </a:r>
-          </a:p>
-        </p:txBody>
-      </p:sp>
-      <p:sp>
-        <p:nvSpPr>
-          <p:cNvPr id="29" name="TextBox 28"/>
-          <p:cNvSpPr txBox="1"/>
-          <p:nvPr/>
-        </p:nvSpPr>
-        <p:spPr>
-          <a:xfrm>
-            <a:off x="11247120" y="6291072"/>
-            <a:ext cx="548640" cy="274320"/>
-          </a:xfrm>
-          <a:prstGeom prst="rect">
-            <a:avLst/>
-          </a:prstGeom>
-          <a:noFill/>
-        </p:spPr>
-        <p:txBody>
-          <a:bodyPr wrap="square">
-            <a:spAutoFit/>
-          </a:bodyPr>
-          <a:lstStyle/>
-          <a:p>
-            <a:pPr algn="r">
-              <a:lnSpc>
-                <a:spcPct val="120000"/>
-              </a:lnSpc>
-            </a:pPr>
-            <a:r>
-              <a:rPr sz="1100" b="0">
-                <a:solidFill>
-                  <a:srgbClr val="8B97AB"/>
-                </a:solidFill>
-                <a:latin typeface="Helvetica Neue"/>
-              </a:rPr>
-              <a:t>13</a:t>
-            </a:r>
-          </a:p>
-        </p:txBody>
-      </p:sp>
-    </p:spTree>
-  </p:cSld>
-  <p:clrMapOvr>
-    <a:masterClrMapping/>
-  </p:clrMapOvr>
-  <p:transition spd="med">
-    <p:wipe dir="l"/>
-  </p:transition>
-</p:sld>
-</file>
-
-<file path=ppt/slides/slide14.xml><?xml version="1.0" encoding="utf-8"?>
-<p:sld xmlns:a="http://schemas.openxmlformats.org/drawingml/2006/main" xmlns:p="http://schemas.openxmlformats.org/presentationml/2006/main" xmlns:r="http://schemas.openxmlformats.org/officeDocument/2006/relationships">
-  <p:cSld>
-    <p:spTree>
-      <p:nvGrpSpPr>
-        <p:cNvPr id="1" name=""/>
-        <p:cNvGrpSpPr/>
-        <p:nvPr/>
-      </p:nvGrpSpPr>
-      <p:grpSpPr/>
-      <p:sp>
-        <p:nvSpPr>
-          <p:cNvPr id="2" name="Rectangle 1"/>
+              <a:t>Why earlier changes to this app were sent back, so the developer does not repeat a mistake.</a:t>
+            </a:r>
+          </a:p>
+        </p:txBody>
+      </p:sp>
+      <p:sp>
+        <p:nvSpPr>
+          <p:cNvPr id="15" name="Rectangle 14"/>
           <p:cNvSpPr/>
           <p:nvPr/>
         </p:nvSpPr>
         <p:spPr>
           <a:xfrm>
-            <a:off x="0" y="0"/>
-            <a:ext cx="12191695" cy="6858000"/>
+            <a:off x="4468368" y="3977639"/>
+            <a:ext cx="3224784" cy="1645920"/>
           </a:xfrm>
           <a:prstGeom prst="rect">
             <a:avLst/>
           </a:prstGeom>
           <a:solidFill>
-            <a:srgbClr val="0B0F17"/>
+            <a:srgbClr val="131A25"/>
           </a:solidFill>
-          <a:ln>
-            <a:noFill/>
+          <a:ln w="12700">
+            <a:solidFill>
+              <a:srgbClr val="1F2937"/>
+            </a:solidFill>
           </a:ln>
           <a:effectLst/>
         </p:spPr>
@@ -9960,14 +9489,14 @@
       </p:sp>
       <p:sp>
         <p:nvSpPr>
-          <p:cNvPr id="3" name="TextBox 2"/>
+          <p:cNvPr id="16" name="TextBox 15"/>
           <p:cNvSpPr txBox="1"/>
           <p:nvPr/>
         </p:nvSpPr>
         <p:spPr>
           <a:xfrm>
-            <a:off x="1005840" y="658368"/>
-            <a:ext cx="10149840" cy="292608"/>
+            <a:off x="4651248" y="4123943"/>
+            <a:ext cx="2859024" cy="512064"/>
           </a:xfrm>
           <a:prstGeom prst="rect">
             <a:avLst/>
@@ -9982,31 +9511,31 @@
           <a:p>
             <a:pPr algn="l">
               <a:lnSpc>
-                <a:spcPct val="100000"/>
-              </a:lnSpc>
-            </a:pPr>
-            <a:r>
-              <a:rPr sz="1200" b="1">
+                <a:spcPct val="110000"/>
+              </a:lnSpc>
+            </a:pPr>
+            <a:r>
+              <a:rPr sz="1400" b="1">
                 <a:solidFill>
                   <a:srgbClr val="22D3EE"/>
                 </a:solidFill>
                 <a:latin typeface="Helvetica Neue"/>
               </a:rPr>
-              <a:t>PROGRESS · LIMITS</a:t>
-            </a:r>
-          </a:p>
-        </p:txBody>
-      </p:sp>
-      <p:sp>
-        <p:nvSpPr>
-          <p:cNvPr id="4" name="TextBox 3"/>
+              <a:t>Team conventions</a:t>
+            </a:r>
+          </a:p>
+        </p:txBody>
+      </p:sp>
+      <p:sp>
+        <p:nvSpPr>
+          <p:cNvPr id="17" name="TextBox 16"/>
           <p:cNvSpPr txBox="1"/>
           <p:nvPr/>
         </p:nvSpPr>
         <p:spPr>
           <a:xfrm>
-            <a:off x="1005840" y="1078992"/>
-            <a:ext cx="10149840" cy="914400"/>
+            <a:off x="4651248" y="4654295"/>
+            <a:ext cx="2859024" cy="822960"/>
           </a:xfrm>
           <a:prstGeom prst="rect">
             <a:avLst/>
@@ -10021,40 +9550,42 @@
           <a:p>
             <a:pPr algn="l">
               <a:lnSpc>
-                <a:spcPct val="106000"/>
-              </a:lnSpc>
-            </a:pPr>
-            <a:r>
-              <a:rPr sz="3000" b="1">
-                <a:solidFill>
-                  <a:srgbClr val="E8ECF3"/>
+                <a:spcPct val="130000"/>
+              </a:lnSpc>
+            </a:pPr>
+            <a:r>
+              <a:rPr sz="1300" b="0">
+                <a:solidFill>
+                  <a:srgbClr val="8B97AB"/>
                 </a:solidFill>
                 <a:latin typeface="Helvetica Neue"/>
               </a:rPr>
-              <a:t>What this does not do</a:t>
-            </a:r>
-          </a:p>
-        </p:txBody>
-      </p:sp>
-      <p:sp>
-        <p:nvSpPr>
-          <p:cNvPr id="5" name="deckkit-rule"/>
+              <a:t>Questions the team has already settled, so the reviewer stops arguing them again.</a:t>
+            </a:r>
+          </a:p>
+        </p:txBody>
+      </p:sp>
+      <p:sp>
+        <p:nvSpPr>
+          <p:cNvPr id="18" name="Rectangle 17"/>
           <p:cNvSpPr/>
           <p:nvPr/>
         </p:nvSpPr>
         <p:spPr>
           <a:xfrm>
-            <a:off x="1005840" y="1883664"/>
-            <a:ext cx="1463040" cy="38100"/>
+            <a:off x="7930896" y="3977639"/>
+            <a:ext cx="3224784" cy="1645920"/>
           </a:xfrm>
           <a:prstGeom prst="rect">
             <a:avLst/>
           </a:prstGeom>
           <a:solidFill>
-            <a:srgbClr val="22D3EE"/>
+            <a:srgbClr val="131A25"/>
           </a:solidFill>
-          <a:ln>
-            <a:noFill/>
+          <a:ln w="12700">
+            <a:solidFill>
+              <a:srgbClr val="1F2937"/>
+            </a:solidFill>
           </a:ln>
           <a:effectLst/>
         </p:spPr>
@@ -10082,14 +9613,14 @@
       </p:sp>
       <p:sp>
         <p:nvSpPr>
-          <p:cNvPr id="6" name="TextBox 5"/>
+          <p:cNvPr id="19" name="TextBox 18"/>
           <p:cNvSpPr txBox="1"/>
           <p:nvPr/>
         </p:nvSpPr>
         <p:spPr>
           <a:xfrm>
-            <a:off x="1005840" y="2103120"/>
-            <a:ext cx="640080" cy="365760"/>
+            <a:off x="8113776" y="4123943"/>
+            <a:ext cx="2859024" cy="512064"/>
           </a:xfrm>
           <a:prstGeom prst="rect">
             <a:avLst/>
@@ -10104,31 +9635,31 @@
           <a:p>
             <a:pPr algn="l">
               <a:lnSpc>
-                <a:spcPct val="120000"/>
-              </a:lnSpc>
-            </a:pPr>
-            <a:r>
-              <a:rPr sz="1500" b="1">
+                <a:spcPct val="110000"/>
+              </a:lnSpc>
+            </a:pPr>
+            <a:r>
+              <a:rPr sz="1400" b="1">
                 <a:solidFill>
                   <a:srgbClr val="22D3EE"/>
                 </a:solidFill>
-                <a:latin typeface="Menlo"/>
-              </a:rPr>
-              <a:t>01</a:t>
-            </a:r>
-          </a:p>
-        </p:txBody>
-      </p:sp>
-      <p:sp>
-        <p:nvSpPr>
-          <p:cNvPr id="7" name="TextBox 6"/>
+                <a:latin typeface="Helvetica Neue"/>
+              </a:rPr>
+              <a:t>Security advisories</a:t>
+            </a:r>
+          </a:p>
+        </p:txBody>
+      </p:sp>
+      <p:sp>
+        <p:nvSpPr>
+          <p:cNvPr id="20" name="TextBox 19"/>
           <p:cNvSpPr txBox="1"/>
           <p:nvPr/>
         </p:nvSpPr>
         <p:spPr>
           <a:xfrm>
-            <a:off x="1737360" y="2103120"/>
-            <a:ext cx="3931920" cy="640080"/>
+            <a:off x="8113776" y="4654295"/>
+            <a:ext cx="2859024" cy="822960"/>
           </a:xfrm>
           <a:prstGeom prst="rect">
             <a:avLst/>
@@ -10143,31 +9674,31 @@
           <a:p>
             <a:pPr algn="l">
               <a:lnSpc>
-                <a:spcPct val="115000"/>
-              </a:lnSpc>
-            </a:pPr>
-            <a:r>
-              <a:rPr sz="1600" b="1">
-                <a:solidFill>
-                  <a:srgbClr val="E8ECF3"/>
+                <a:spcPct val="130000"/>
+              </a:lnSpc>
+            </a:pPr>
+            <a:r>
+              <a:rPr sz="1300" b="0">
+                <a:solidFill>
+                  <a:srgbClr val="8B97AB"/>
                 </a:solidFill>
                 <a:latin typeface="Helvetica Neue"/>
               </a:rPr>
-              <a:t>An admin can bypass a gate</a:t>
-            </a:r>
-          </a:p>
-        </p:txBody>
-      </p:sp>
-      <p:sp>
-        <p:nvSpPr>
-          <p:cNvPr id="8" name="TextBox 7"/>
+              <a:t>Background on known vulnerabilities, so the security explanation is specific.</a:t>
+            </a:r>
+          </a:p>
+        </p:txBody>
+      </p:sp>
+      <p:sp>
+        <p:nvSpPr>
+          <p:cNvPr id="21" name="TextBox 20"/>
           <p:cNvSpPr txBox="1"/>
           <p:nvPr/>
         </p:nvSpPr>
         <p:spPr>
           <a:xfrm>
-            <a:off x="5852160" y="2103120"/>
-            <a:ext cx="5303520" cy="914400"/>
+            <a:off x="1005840" y="5760720"/>
+            <a:ext cx="10058400" cy="685800"/>
           </a:xfrm>
           <a:prstGeom prst="rect">
             <a:avLst/>
@@ -10182,31 +9713,31 @@
           <a:p>
             <a:pPr algn="l">
               <a:lnSpc>
-                <a:spcPct val="130000"/>
-              </a:lnSpc>
-            </a:pPr>
-            <a:r>
-              <a:rPr sz="1400" b="0">
+                <a:spcPct val="125000"/>
+              </a:lnSpc>
+            </a:pPr>
+            <a:r>
+              <a:rPr sz="1300" b="0">
                 <a:solidFill>
                   <a:srgbClr val="8B97AB"/>
                 </a:solidFill>
                 <a:latin typeface="Helvetica Neue"/>
               </a:rPr>
-              <a:t>A repository setting, not a code path. Our pre-flight check reports it on every run.</a:t>
-            </a:r>
-          </a:p>
-        </p:txBody>
-      </p:sp>
-      <p:sp>
-        <p:nvSpPr>
-          <p:cNvPr id="9" name="TextBox 8"/>
+              <a:t>Four agents read it: planner, developer, reviewer and the security explanation. Keyword search, no vector database. It shapes wording, never the verdict: five hostile documents were planted, and the block did not move.</a:t>
+            </a:r>
+          </a:p>
+        </p:txBody>
+      </p:sp>
+      <p:sp>
+        <p:nvSpPr>
+          <p:cNvPr id="165" name="TextBox 164"/>
           <p:cNvSpPr txBox="1"/>
           <p:nvPr/>
         </p:nvSpPr>
         <p:spPr>
           <a:xfrm>
-            <a:off x="1005840" y="3127248"/>
-            <a:ext cx="640080" cy="365760"/>
+            <a:off x="11247120" y="6291072"/>
+            <a:ext cx="548640" cy="274320"/>
           </a:xfrm>
           <a:prstGeom prst="rect">
             <a:avLst/>
@@ -10219,370 +9750,19 @@
           </a:bodyPr>
           <a:lstStyle/>
           <a:p>
-            <a:pPr algn="l">
+            <a:pPr algn="r">
               <a:lnSpc>
                 <a:spcPct val="120000"/>
               </a:lnSpc>
             </a:pPr>
             <a:r>
-              <a:rPr sz="1500" b="1">
-                <a:solidFill>
-                  <a:srgbClr val="22D3EE"/>
-                </a:solidFill>
-                <a:latin typeface="Menlo"/>
-              </a:rPr>
-              <a:t>02</a:t>
-            </a:r>
-          </a:p>
-        </p:txBody>
-      </p:sp>
-      <p:sp>
-        <p:nvSpPr>
-          <p:cNvPr id="10" name="TextBox 9"/>
-          <p:cNvSpPr txBox="1"/>
-          <p:nvPr/>
-        </p:nvSpPr>
-        <p:spPr>
-          <a:xfrm>
-            <a:off x="1737360" y="3127248"/>
-            <a:ext cx="3931920" cy="640080"/>
-          </a:xfrm>
-          <a:prstGeom prst="rect">
-            <a:avLst/>
-          </a:prstGeom>
-          <a:noFill/>
-        </p:spPr>
-        <p:txBody>
-          <a:bodyPr wrap="square">
-            <a:spAutoFit/>
-          </a:bodyPr>
-          <a:lstStyle/>
-          <a:p>
-            <a:pPr algn="l">
-              <a:lnSpc>
-                <a:spcPct val="115000"/>
-              </a:lnSpc>
-            </a:pPr>
-            <a:r>
-              <a:rPr sz="1600" b="1">
-                <a:solidFill>
-                  <a:srgbClr val="E8ECF3"/>
+              <a:rPr sz="1100" b="0">
+                <a:solidFill>
+                  <a:srgbClr val="8B97AB"/>
                 </a:solidFill>
                 <a:latin typeface="Helvetica Neue"/>
               </a:rPr>
-              <a:t>The reviewer is advisory</a:t>
-            </a:r>
-          </a:p>
-        </p:txBody>
-      </p:sp>
-      <p:sp>
-        <p:nvSpPr>
-          <p:cNvPr id="11" name="TextBox 10"/>
-          <p:cNvSpPr txBox="1"/>
-          <p:nvPr/>
-        </p:nvSpPr>
-        <p:spPr>
-          <a:xfrm>
-            <a:off x="5852160" y="3127248"/>
-            <a:ext cx="5303520" cy="914400"/>
-          </a:xfrm>
-          <a:prstGeom prst="rect">
-            <a:avLst/>
-          </a:prstGeom>
-          <a:noFill/>
-        </p:spPr>
-        <p:txBody>
-          <a:bodyPr wrap="square">
-            <a:spAutoFit/>
-          </a:bodyPr>
-          <a:lstStyle/>
-          <a:p>
-            <a:pPr algn="l">
-              <a:lnSpc>
-                <a:spcPct val="130000"/>
-              </a:lnSpc>
-            </a:pPr>
-            <a:r>
-              <a:rPr sz="1400" b="0">
-                <a:solidFill>
-                  <a:srgbClr val="8B97AB"/>
-                </a:solidFill>
-                <a:latin typeface="Helvetica Neue"/>
-              </a:rPr>
-              <a:t>If the scanners miss something, only the reviewer saw it, and it cannot stop the run. The human gates are the last line.</a:t>
-            </a:r>
-          </a:p>
-        </p:txBody>
-      </p:sp>
-      <p:sp>
-        <p:nvSpPr>
-          <p:cNvPr id="12" name="TextBox 11"/>
-          <p:cNvSpPr txBox="1"/>
-          <p:nvPr/>
-        </p:nvSpPr>
-        <p:spPr>
-          <a:xfrm>
-            <a:off x="1005840" y="4151376"/>
-            <a:ext cx="640080" cy="365760"/>
-          </a:xfrm>
-          <a:prstGeom prst="rect">
-            <a:avLst/>
-          </a:prstGeom>
-          <a:noFill/>
-        </p:spPr>
-        <p:txBody>
-          <a:bodyPr wrap="square">
-            <a:spAutoFit/>
-          </a:bodyPr>
-          <a:lstStyle/>
-          <a:p>
-            <a:pPr algn="l">
-              <a:lnSpc>
-                <a:spcPct val="120000"/>
-              </a:lnSpc>
-            </a:pPr>
-            <a:r>
-              <a:rPr sz="1500" b="1">
-                <a:solidFill>
-                  <a:srgbClr val="22D3EE"/>
-                </a:solidFill>
-                <a:latin typeface="Menlo"/>
-              </a:rPr>
-              <a:t>03</a:t>
-            </a:r>
-          </a:p>
-        </p:txBody>
-      </p:sp>
-      <p:sp>
-        <p:nvSpPr>
-          <p:cNvPr id="13" name="TextBox 12"/>
-          <p:cNvSpPr txBox="1"/>
-          <p:nvPr/>
-        </p:nvSpPr>
-        <p:spPr>
-          <a:xfrm>
-            <a:off x="1737360" y="4151376"/>
-            <a:ext cx="3931920" cy="640080"/>
-          </a:xfrm>
-          <a:prstGeom prst="rect">
-            <a:avLst/>
-          </a:prstGeom>
-          <a:noFill/>
-        </p:spPr>
-        <p:txBody>
-          <a:bodyPr wrap="square">
-            <a:spAutoFit/>
-          </a:bodyPr>
-          <a:lstStyle/>
-          <a:p>
-            <a:pPr algn="l">
-              <a:lnSpc>
-                <a:spcPct val="115000"/>
-              </a:lnSpc>
-            </a:pPr>
-            <a:r>
-              <a:rPr sz="1600" b="1">
-                <a:solidFill>
-                  <a:srgbClr val="E8ECF3"/>
-                </a:solidFill>
-                <a:latin typeface="Helvetica Neue"/>
-              </a:rPr>
-              <a:t>One language, three scanners</a:t>
-            </a:r>
-          </a:p>
-        </p:txBody>
-      </p:sp>
-      <p:sp>
-        <p:nvSpPr>
-          <p:cNvPr id="14" name="TextBox 13"/>
-          <p:cNvSpPr txBox="1"/>
-          <p:nvPr/>
-        </p:nvSpPr>
-        <p:spPr>
-          <a:xfrm>
-            <a:off x="5852160" y="4151376"/>
-            <a:ext cx="5303520" cy="914400"/>
-          </a:xfrm>
-          <a:prstGeom prst="rect">
-            <a:avLst/>
-          </a:prstGeom>
-          <a:noFill/>
-        </p:spPr>
-        <p:txBody>
-          <a:bodyPr wrap="square">
-            <a:spAutoFit/>
-          </a:bodyPr>
-          <a:lstStyle/>
-          <a:p>
-            <a:pPr algn="l">
-              <a:lnSpc>
-                <a:spcPct val="130000"/>
-              </a:lnSpc>
-            </a:pPr>
-            <a:r>
-              <a:rPr sz="1400" b="0">
-                <a:solidFill>
-                  <a:srgbClr val="8B97AB"/>
-                </a:solidFill>
-                <a:latin typeface="Helvetica Neue"/>
-              </a:rPr>
-              <a:t>One Python target today. Breadth is where every competitor is ahead.</a:t>
-            </a:r>
-          </a:p>
-        </p:txBody>
-      </p:sp>
-      <p:sp>
-        <p:nvSpPr>
-          <p:cNvPr id="15" name="TextBox 14"/>
-          <p:cNvSpPr txBox="1"/>
-          <p:nvPr/>
-        </p:nvSpPr>
-        <p:spPr>
-          <a:xfrm>
-            <a:off x="1005840" y="5175504"/>
-            <a:ext cx="640080" cy="365760"/>
-          </a:xfrm>
-          <a:prstGeom prst="rect">
-            <a:avLst/>
-          </a:prstGeom>
-          <a:noFill/>
-        </p:spPr>
-        <p:txBody>
-          <a:bodyPr wrap="square">
-            <a:spAutoFit/>
-          </a:bodyPr>
-          <a:lstStyle/>
-          <a:p>
-            <a:pPr algn="l">
-              <a:lnSpc>
-                <a:spcPct val="120000"/>
-              </a:lnSpc>
-            </a:pPr>
-            <a:r>
-              <a:rPr sz="1500" b="1">
-                <a:solidFill>
-                  <a:srgbClr val="22D3EE"/>
-                </a:solidFill>
-                <a:latin typeface="Menlo"/>
-              </a:rPr>
-              <a:t>04</a:t>
-            </a:r>
-          </a:p>
-        </p:txBody>
-      </p:sp>
-      <p:sp>
-        <p:nvSpPr>
-          <p:cNvPr id="16" name="TextBox 15"/>
-          <p:cNvSpPr txBox="1"/>
-          <p:nvPr/>
-        </p:nvSpPr>
-        <p:spPr>
-          <a:xfrm>
-            <a:off x="1737360" y="5175504"/>
-            <a:ext cx="3931920" cy="640080"/>
-          </a:xfrm>
-          <a:prstGeom prst="rect">
-            <a:avLst/>
-          </a:prstGeom>
-          <a:noFill/>
-        </p:spPr>
-        <p:txBody>
-          <a:bodyPr wrap="square">
-            <a:spAutoFit/>
-          </a:bodyPr>
-          <a:lstStyle/>
-          <a:p>
-            <a:pPr algn="l">
-              <a:lnSpc>
-                <a:spcPct val="115000"/>
-              </a:lnSpc>
-            </a:pPr>
-            <a:r>
-              <a:rPr sz="1600" b="1">
-                <a:solidFill>
-                  <a:srgbClr val="E8ECF3"/>
-                </a:solidFill>
-                <a:latin typeface="Helvetica Neue"/>
-              </a:rPr>
-              <a:t>The change is carried, not applied</a:t>
-            </a:r>
-          </a:p>
-        </p:txBody>
-      </p:sp>
-      <p:sp>
-        <p:nvSpPr>
-          <p:cNvPr id="17" name="TextBox 16"/>
-          <p:cNvSpPr txBox="1"/>
-          <p:nvPr/>
-        </p:nvSpPr>
-        <p:spPr>
-          <a:xfrm>
-            <a:off x="5852160" y="5175504"/>
-            <a:ext cx="5303520" cy="914400"/>
-          </a:xfrm>
-          <a:prstGeom prst="rect">
-            <a:avLst/>
-          </a:prstGeom>
-          <a:noFill/>
-        </p:spPr>
-        <p:txBody>
-          <a:bodyPr wrap="square">
-            <a:spAutoFit/>
-          </a:bodyPr>
-          <a:lstStyle/>
-          <a:p>
-            <a:pPr algn="l">
-              <a:lnSpc>
-                <a:spcPct val="130000"/>
-              </a:lnSpc>
-            </a:pPr>
-            <a:r>
-              <a:rPr sz="1400" b="0">
-                <a:solidFill>
-                  <a:srgbClr val="8B97AB"/>
-                </a:solidFill>
-                <a:latin typeface="Helvetica Neue"/>
-              </a:rPr>
-              <a:t>A merged pull request carries the reviewed diff as a file. Applying it to the source is next.</a:t>
-            </a:r>
-          </a:p>
-        </p:txBody>
-      </p:sp>
-      <p:sp>
-        <p:nvSpPr>
-          <p:cNvPr id="85" name="TextBox 84"/>
-          <p:cNvSpPr txBox="1"/>
-          <p:nvPr/>
-        </p:nvSpPr>
-        <p:spPr>
-          <a:xfrm>
-            <a:off x="11247120" y="6291072"/>
-            <a:ext cx="548640" cy="274320"/>
-          </a:xfrm>
-          <a:prstGeom prst="rect">
-            <a:avLst/>
-          </a:prstGeom>
-          <a:noFill/>
-        </p:spPr>
-        <p:txBody>
-          <a:bodyPr wrap="square">
-            <a:spAutoFit/>
-          </a:bodyPr>
-          <a:lstStyle/>
-          <a:p>
-            <a:pPr algn="r">
-              <a:lnSpc>
-                <a:spcPct val="120000"/>
-              </a:lnSpc>
-            </a:pPr>
-            <a:r>
-              <a:rPr sz="1100" b="0">
-                <a:solidFill>
-                  <a:srgbClr val="8B97AB"/>
-                </a:solidFill>
-                <a:latin typeface="Helvetica Neue"/>
-              </a:rPr>
-              <a:t>14</a:t>
+              <a:t>13</a:t>
             </a:r>
           </a:p>
         </p:txBody>
@@ -10723,7 +9903,7 @@
                                       <p:cBhvr>
                                         <p:cTn id="33" dur="1" fill="hold"/>
                                         <p:tgtEl>
-                                          <p:spTgt spid="9"/>
+                                          <p:spTgt spid="8"/>
                                         </p:tgtEl>
                                         <p:attrNameLst>
                                           <p:attrName>style.visibility</p:attrName>
@@ -10737,7 +9917,7 @@
                                       <p:cBhvr>
                                         <p:cTn id="34" dur="450"/>
                                         <p:tgtEl>
-                                          <p:spTgt spid="9"/>
+                                          <p:spTgt spid="8"/>
                                         </p:tgtEl>
                                       </p:cBhvr>
                                     </p:animEffect>
@@ -10772,7 +9952,7 @@
                                       <p:cBhvr>
                                         <p:cTn id="43" dur="1" fill="hold"/>
                                         <p:tgtEl>
-                                          <p:spTgt spid="10"/>
+                                          <p:spTgt spid="9"/>
                                         </p:tgtEl>
                                         <p:attrNameLst>
                                           <p:attrName>style.visibility</p:attrName>
@@ -10786,7 +9966,7 @@
                                       <p:cBhvr>
                                         <p:cTn id="44" dur="450"/>
                                         <p:tgtEl>
-                                          <p:spTgt spid="10"/>
+                                          <p:spTgt spid="9"/>
                                         </p:tgtEl>
                                       </p:cBhvr>
                                     </p:animEffect>
@@ -10821,7 +10001,7 @@
                                       <p:cBhvr>
                                         <p:cTn id="53" dur="1" fill="hold"/>
                                         <p:tgtEl>
-                                          <p:spTgt spid="12"/>
+                                          <p:spTgt spid="10"/>
                                         </p:tgtEl>
                                         <p:attrNameLst>
                                           <p:attrName>style.visibility</p:attrName>
@@ -10835,7 +10015,7 @@
                                       <p:cBhvr>
                                         <p:cTn id="54" dur="450"/>
                                         <p:tgtEl>
-                                          <p:spTgt spid="12"/>
+                                          <p:spTgt spid="10"/>
                                         </p:tgtEl>
                                       </p:cBhvr>
                                     </p:animEffect>
@@ -10870,7 +10050,7 @@
                                       <p:cBhvr>
                                         <p:cTn id="63" dur="1" fill="hold"/>
                                         <p:tgtEl>
-                                          <p:spTgt spid="13"/>
+                                          <p:spTgt spid="11"/>
                                         </p:tgtEl>
                                         <p:attrNameLst>
                                           <p:attrName>style.visibility</p:attrName>
@@ -10884,7 +10064,7 @@
                                       <p:cBhvr>
                                         <p:cTn id="64" dur="450"/>
                                         <p:tgtEl>
-                                          <p:spTgt spid="13"/>
+                                          <p:spTgt spid="11"/>
                                         </p:tgtEl>
                                       </p:cBhvr>
                                     </p:animEffect>
@@ -10919,7 +10099,7 @@
                                       <p:cBhvr>
                                         <p:cTn id="73" dur="1" fill="hold"/>
                                         <p:tgtEl>
-                                          <p:spTgt spid="15"/>
+                                          <p:spTgt spid="12"/>
                                         </p:tgtEl>
                                         <p:attrNameLst>
                                           <p:attrName>style.visibility</p:attrName>
@@ -10933,7 +10113,7 @@
                                       <p:cBhvr>
                                         <p:cTn id="74" dur="450"/>
                                         <p:tgtEl>
-                                          <p:spTgt spid="15"/>
+                                          <p:spTgt spid="12"/>
                                         </p:tgtEl>
                                       </p:cBhvr>
                                     </p:animEffect>
@@ -10968,7 +10148,7 @@
                                       <p:cBhvr>
                                         <p:cTn id="83" dur="1" fill="hold"/>
                                         <p:tgtEl>
-                                          <p:spTgt spid="16"/>
+                                          <p:spTgt spid="13"/>
                                         </p:tgtEl>
                                         <p:attrNameLst>
                                           <p:attrName>style.visibility</p:attrName>
@@ -10982,7 +10162,399 @@
                                       <p:cBhvr>
                                         <p:cTn id="84" dur="450"/>
                                         <p:tgtEl>
+                                          <p:spTgt spid="13"/>
+                                        </p:tgtEl>
+                                      </p:cBhvr>
+                                    </p:animEffect>
+                                  </p:childTnLst>
+                                </p:cTn>
+                              </p:par>
+                            </p:childTnLst>
+                          </p:cTn>
+                        </p:par>
+                      </p:childTnLst>
+                    </p:cTn>
+                  </p:par>
+                  <p:par>
+                    <p:cTn id="90" fill="hold">
+                      <p:stCondLst>
+                        <p:cond delay="indefinite"/>
+                      </p:stCondLst>
+                      <p:childTnLst>
+                        <p:par>
+                          <p:cTn id="91" fill="hold">
+                            <p:stCondLst>
+                              <p:cond delay="0"/>
+                            </p:stCondLst>
+                            <p:childTnLst>
+                              <p:par>
+                                <p:cTn id="92" presetID="10" presetClass="entr" presetSubtype="0" fill="hold" grpId="0" nodeType="afterEffect">
+                                  <p:stCondLst>
+                                    <p:cond delay="0"/>
+                                  </p:stCondLst>
+                                  <p:childTnLst>
+                                    <p:set>
+                                      <p:cBhvr>
+                                        <p:cTn id="93" dur="1" fill="hold"/>
+                                        <p:tgtEl>
+                                          <p:spTgt spid="14"/>
+                                        </p:tgtEl>
+                                        <p:attrNameLst>
+                                          <p:attrName>style.visibility</p:attrName>
+                                        </p:attrNameLst>
+                                      </p:cBhvr>
+                                      <p:to>
+                                        <p:strVal val="visible"/>
+                                      </p:to>
+                                    </p:set>
+                                    <p:animEffect transition="in" filter="fade">
+                                      <p:cBhvr>
+                                        <p:cTn id="94" dur="450"/>
+                                        <p:tgtEl>
+                                          <p:spTgt spid="14"/>
+                                        </p:tgtEl>
+                                      </p:cBhvr>
+                                    </p:animEffect>
+                                  </p:childTnLst>
+                                </p:cTn>
+                              </p:par>
+                            </p:childTnLst>
+                          </p:cTn>
+                        </p:par>
+                      </p:childTnLst>
+                    </p:cTn>
+                  </p:par>
+                  <p:par>
+                    <p:cTn id="100" fill="hold">
+                      <p:stCondLst>
+                        <p:cond delay="indefinite"/>
+                      </p:stCondLst>
+                      <p:childTnLst>
+                        <p:par>
+                          <p:cTn id="101" fill="hold">
+                            <p:stCondLst>
+                              <p:cond delay="0"/>
+                            </p:stCondLst>
+                            <p:childTnLst>
+                              <p:par>
+                                <p:cTn id="102" presetID="10" presetClass="entr" presetSubtype="0" fill="hold" grpId="0" nodeType="afterEffect">
+                                  <p:stCondLst>
+                                    <p:cond delay="0"/>
+                                  </p:stCondLst>
+                                  <p:childTnLst>
+                                    <p:set>
+                                      <p:cBhvr>
+                                        <p:cTn id="103" dur="1" fill="hold"/>
+                                        <p:tgtEl>
+                                          <p:spTgt spid="15"/>
+                                        </p:tgtEl>
+                                        <p:attrNameLst>
+                                          <p:attrName>style.visibility</p:attrName>
+                                        </p:attrNameLst>
+                                      </p:cBhvr>
+                                      <p:to>
+                                        <p:strVal val="visible"/>
+                                      </p:to>
+                                    </p:set>
+                                    <p:animEffect transition="in" filter="fade">
+                                      <p:cBhvr>
+                                        <p:cTn id="104" dur="450"/>
+                                        <p:tgtEl>
+                                          <p:spTgt spid="15"/>
+                                        </p:tgtEl>
+                                      </p:cBhvr>
+                                    </p:animEffect>
+                                  </p:childTnLst>
+                                </p:cTn>
+                              </p:par>
+                            </p:childTnLst>
+                          </p:cTn>
+                        </p:par>
+                      </p:childTnLst>
+                    </p:cTn>
+                  </p:par>
+                  <p:par>
+                    <p:cTn id="110" fill="hold">
+                      <p:stCondLst>
+                        <p:cond delay="indefinite"/>
+                      </p:stCondLst>
+                      <p:childTnLst>
+                        <p:par>
+                          <p:cTn id="111" fill="hold">
+                            <p:stCondLst>
+                              <p:cond delay="0"/>
+                            </p:stCondLst>
+                            <p:childTnLst>
+                              <p:par>
+                                <p:cTn id="112" presetID="10" presetClass="entr" presetSubtype="0" fill="hold" grpId="0" nodeType="afterEffect">
+                                  <p:stCondLst>
+                                    <p:cond delay="0"/>
+                                  </p:stCondLst>
+                                  <p:childTnLst>
+                                    <p:set>
+                                      <p:cBhvr>
+                                        <p:cTn id="113" dur="1" fill="hold"/>
+                                        <p:tgtEl>
                                           <p:spTgt spid="16"/>
+                                        </p:tgtEl>
+                                        <p:attrNameLst>
+                                          <p:attrName>style.visibility</p:attrName>
+                                        </p:attrNameLst>
+                                      </p:cBhvr>
+                                      <p:to>
+                                        <p:strVal val="visible"/>
+                                      </p:to>
+                                    </p:set>
+                                    <p:animEffect transition="in" filter="fade">
+                                      <p:cBhvr>
+                                        <p:cTn id="114" dur="450"/>
+                                        <p:tgtEl>
+                                          <p:spTgt spid="16"/>
+                                        </p:tgtEl>
+                                      </p:cBhvr>
+                                    </p:animEffect>
+                                  </p:childTnLst>
+                                </p:cTn>
+                              </p:par>
+                            </p:childTnLst>
+                          </p:cTn>
+                        </p:par>
+                      </p:childTnLst>
+                    </p:cTn>
+                  </p:par>
+                  <p:par>
+                    <p:cTn id="120" fill="hold">
+                      <p:stCondLst>
+                        <p:cond delay="indefinite"/>
+                      </p:stCondLst>
+                      <p:childTnLst>
+                        <p:par>
+                          <p:cTn id="121" fill="hold">
+                            <p:stCondLst>
+                              <p:cond delay="0"/>
+                            </p:stCondLst>
+                            <p:childTnLst>
+                              <p:par>
+                                <p:cTn id="122" presetID="10" presetClass="entr" presetSubtype="0" fill="hold" grpId="0" nodeType="afterEffect">
+                                  <p:stCondLst>
+                                    <p:cond delay="0"/>
+                                  </p:stCondLst>
+                                  <p:childTnLst>
+                                    <p:set>
+                                      <p:cBhvr>
+                                        <p:cTn id="123" dur="1" fill="hold"/>
+                                        <p:tgtEl>
+                                          <p:spTgt spid="17"/>
+                                        </p:tgtEl>
+                                        <p:attrNameLst>
+                                          <p:attrName>style.visibility</p:attrName>
+                                        </p:attrNameLst>
+                                      </p:cBhvr>
+                                      <p:to>
+                                        <p:strVal val="visible"/>
+                                      </p:to>
+                                    </p:set>
+                                    <p:animEffect transition="in" filter="fade">
+                                      <p:cBhvr>
+                                        <p:cTn id="124" dur="450"/>
+                                        <p:tgtEl>
+                                          <p:spTgt spid="17"/>
+                                        </p:tgtEl>
+                                      </p:cBhvr>
+                                    </p:animEffect>
+                                  </p:childTnLst>
+                                </p:cTn>
+                              </p:par>
+                            </p:childTnLst>
+                          </p:cTn>
+                        </p:par>
+                      </p:childTnLst>
+                    </p:cTn>
+                  </p:par>
+                  <p:par>
+                    <p:cTn id="130" fill="hold">
+                      <p:stCondLst>
+                        <p:cond delay="indefinite"/>
+                      </p:stCondLst>
+                      <p:childTnLst>
+                        <p:par>
+                          <p:cTn id="131" fill="hold">
+                            <p:stCondLst>
+                              <p:cond delay="0"/>
+                            </p:stCondLst>
+                            <p:childTnLst>
+                              <p:par>
+                                <p:cTn id="132" presetID="10" presetClass="entr" presetSubtype="0" fill="hold" grpId="0" nodeType="afterEffect">
+                                  <p:stCondLst>
+                                    <p:cond delay="0"/>
+                                  </p:stCondLst>
+                                  <p:childTnLst>
+                                    <p:set>
+                                      <p:cBhvr>
+                                        <p:cTn id="133" dur="1" fill="hold"/>
+                                        <p:tgtEl>
+                                          <p:spTgt spid="18"/>
+                                        </p:tgtEl>
+                                        <p:attrNameLst>
+                                          <p:attrName>style.visibility</p:attrName>
+                                        </p:attrNameLst>
+                                      </p:cBhvr>
+                                      <p:to>
+                                        <p:strVal val="visible"/>
+                                      </p:to>
+                                    </p:set>
+                                    <p:animEffect transition="in" filter="fade">
+                                      <p:cBhvr>
+                                        <p:cTn id="134" dur="450"/>
+                                        <p:tgtEl>
+                                          <p:spTgt spid="18"/>
+                                        </p:tgtEl>
+                                      </p:cBhvr>
+                                    </p:animEffect>
+                                  </p:childTnLst>
+                                </p:cTn>
+                              </p:par>
+                            </p:childTnLst>
+                          </p:cTn>
+                        </p:par>
+                      </p:childTnLst>
+                    </p:cTn>
+                  </p:par>
+                  <p:par>
+                    <p:cTn id="140" fill="hold">
+                      <p:stCondLst>
+                        <p:cond delay="indefinite"/>
+                      </p:stCondLst>
+                      <p:childTnLst>
+                        <p:par>
+                          <p:cTn id="141" fill="hold">
+                            <p:stCondLst>
+                              <p:cond delay="0"/>
+                            </p:stCondLst>
+                            <p:childTnLst>
+                              <p:par>
+                                <p:cTn id="142" presetID="10" presetClass="entr" presetSubtype="0" fill="hold" grpId="0" nodeType="afterEffect">
+                                  <p:stCondLst>
+                                    <p:cond delay="0"/>
+                                  </p:stCondLst>
+                                  <p:childTnLst>
+                                    <p:set>
+                                      <p:cBhvr>
+                                        <p:cTn id="143" dur="1" fill="hold"/>
+                                        <p:tgtEl>
+                                          <p:spTgt spid="19"/>
+                                        </p:tgtEl>
+                                        <p:attrNameLst>
+                                          <p:attrName>style.visibility</p:attrName>
+                                        </p:attrNameLst>
+                                      </p:cBhvr>
+                                      <p:to>
+                                        <p:strVal val="visible"/>
+                                      </p:to>
+                                    </p:set>
+                                    <p:animEffect transition="in" filter="fade">
+                                      <p:cBhvr>
+                                        <p:cTn id="144" dur="450"/>
+                                        <p:tgtEl>
+                                          <p:spTgt spid="19"/>
+                                        </p:tgtEl>
+                                      </p:cBhvr>
+                                    </p:animEffect>
+                                  </p:childTnLst>
+                                </p:cTn>
+                              </p:par>
+                            </p:childTnLst>
+                          </p:cTn>
+                        </p:par>
+                      </p:childTnLst>
+                    </p:cTn>
+                  </p:par>
+                  <p:par>
+                    <p:cTn id="150" fill="hold">
+                      <p:stCondLst>
+                        <p:cond delay="indefinite"/>
+                      </p:stCondLst>
+                      <p:childTnLst>
+                        <p:par>
+                          <p:cTn id="151" fill="hold">
+                            <p:stCondLst>
+                              <p:cond delay="0"/>
+                            </p:stCondLst>
+                            <p:childTnLst>
+                              <p:par>
+                                <p:cTn id="152" presetID="10" presetClass="entr" presetSubtype="0" fill="hold" grpId="0" nodeType="afterEffect">
+                                  <p:stCondLst>
+                                    <p:cond delay="0"/>
+                                  </p:stCondLst>
+                                  <p:childTnLst>
+                                    <p:set>
+                                      <p:cBhvr>
+                                        <p:cTn id="153" dur="1" fill="hold"/>
+                                        <p:tgtEl>
+                                          <p:spTgt spid="20"/>
+                                        </p:tgtEl>
+                                        <p:attrNameLst>
+                                          <p:attrName>style.visibility</p:attrName>
+                                        </p:attrNameLst>
+                                      </p:cBhvr>
+                                      <p:to>
+                                        <p:strVal val="visible"/>
+                                      </p:to>
+                                    </p:set>
+                                    <p:animEffect transition="in" filter="fade">
+                                      <p:cBhvr>
+                                        <p:cTn id="154" dur="450"/>
+                                        <p:tgtEl>
+                                          <p:spTgt spid="20"/>
+                                        </p:tgtEl>
+                                      </p:cBhvr>
+                                    </p:animEffect>
+                                  </p:childTnLst>
+                                </p:cTn>
+                              </p:par>
+                            </p:childTnLst>
+                          </p:cTn>
+                        </p:par>
+                      </p:childTnLst>
+                    </p:cTn>
+                  </p:par>
+                  <p:par>
+                    <p:cTn id="160" fill="hold">
+                      <p:stCondLst>
+                        <p:cond delay="indefinite"/>
+                      </p:stCondLst>
+                      <p:childTnLst>
+                        <p:par>
+                          <p:cTn id="161" fill="hold">
+                            <p:stCondLst>
+                              <p:cond delay="0"/>
+                            </p:stCondLst>
+                            <p:childTnLst>
+                              <p:par>
+                                <p:cTn id="162" presetID="10" presetClass="entr" presetSubtype="0" fill="hold" grpId="0" nodeType="afterEffect">
+                                  <p:stCondLst>
+                                    <p:cond delay="0"/>
+                                  </p:stCondLst>
+                                  <p:childTnLst>
+                                    <p:set>
+                                      <p:cBhvr>
+                                        <p:cTn id="163" dur="1" fill="hold"/>
+                                        <p:tgtEl>
+                                          <p:spTgt spid="21"/>
+                                        </p:tgtEl>
+                                        <p:attrNameLst>
+                                          <p:attrName>style.visibility</p:attrName>
+                                        </p:attrNameLst>
+                                      </p:cBhvr>
+                                      <p:to>
+                                        <p:strVal val="visible"/>
+                                      </p:to>
+                                    </p:set>
+                                    <p:animEffect transition="in" filter="fade">
+                                      <p:cBhvr>
+                                        <p:cTn id="164" dur="450"/>
+                                        <p:tgtEl>
+                                          <p:spTgt spid="21"/>
                                         </p:tgtEl>
                                       </p:cBhvr>
                                     </p:animEffect>
@@ -11020,7 +10592,7 @@
 </p:sld>
 </file>
 
-<file path=ppt/slides/slide15.xml><?xml version="1.0" encoding="utf-8"?>
+<file path=ppt/slides/slide14.xml><?xml version="1.0" encoding="utf-8"?>
 <p:sld xmlns:a="http://schemas.openxmlformats.org/drawingml/2006/main" xmlns:p="http://schemas.openxmlformats.org/presentationml/2006/main" xmlns:r="http://schemas.openxmlformats.org/officeDocument/2006/relationships">
   <p:cSld>
     <p:spTree>
@@ -11108,7 +10680,7 @@
                 </a:solidFill>
                 <a:latin typeface="Helvetica Neue"/>
               </a:rPr>
-              <a:t>FUTURE WORK</a:t>
+              <a:t>PROGRESS</a:t>
             </a:r>
           </a:p>
         </p:txBody>
@@ -11141,13 +10713,13 @@
               </a:lnSpc>
             </a:pPr>
             <a:r>
-              <a:rPr sz="3200" b="1">
+              <a:rPr sz="3000" b="1">
                 <a:solidFill>
                   <a:srgbClr val="E8ECF3"/>
                 </a:solidFill>
                 <a:latin typeface="Helvetica Neue"/>
               </a:rPr>
-              <a:t>What is next</a:t>
+              <a:t>Your ten notes from the pre-final</a:t>
             </a:r>
           </a:p>
         </p:txBody>
@@ -11205,7 +10777,7 @@
         <p:spPr>
           <a:xfrm>
             <a:off x="1005840" y="2103120"/>
-            <a:ext cx="640080" cy="365760"/>
+            <a:ext cx="3474720" cy="292608"/>
           </a:xfrm>
           <a:prstGeom prst="rect">
             <a:avLst/>
@@ -11220,17 +10792,17 @@
           <a:p>
             <a:pPr algn="l">
               <a:lnSpc>
-                <a:spcPct val="120000"/>
-              </a:lnSpc>
-            </a:pPr>
-            <a:r>
-              <a:rPr sz="1500" b="1">
+                <a:spcPct val="100000"/>
+              </a:lnSpc>
+            </a:pPr>
+            <a:r>
+              <a:rPr sz="1100" b="1">
                 <a:solidFill>
                   <a:srgbClr val="22D3EE"/>
                 </a:solidFill>
-                <a:latin typeface="Menlo"/>
-              </a:rPr>
-              <a:t>01</a:t>
+                <a:latin typeface="Helvetica Neue"/>
+              </a:rPr>
+              <a:t>WHAT YOU ASKED FOR</a:t>
             </a:r>
           </a:p>
         </p:txBody>
@@ -11243,8 +10815,8 @@
         </p:nvSpPr>
         <p:spPr>
           <a:xfrm>
-            <a:off x="1737360" y="2103120"/>
-            <a:ext cx="3931920" cy="640080"/>
+            <a:off x="4480560" y="2103120"/>
+            <a:ext cx="6675120" cy="292608"/>
           </a:xfrm>
           <a:prstGeom prst="rect">
             <a:avLst/>
@@ -11259,31 +10831,75 @@
           <a:p>
             <a:pPr algn="l">
               <a:lnSpc>
-                <a:spcPct val="115000"/>
-              </a:lnSpc>
-            </a:pPr>
-            <a:r>
-              <a:rPr sz="1600" b="1">
-                <a:solidFill>
-                  <a:srgbClr val="E8ECF3"/>
+                <a:spcPct val="100000"/>
+              </a:lnSpc>
+            </a:pPr>
+            <a:r>
+              <a:rPr sz="1100" b="1">
+                <a:solidFill>
+                  <a:srgbClr val="22D3EE"/>
                 </a:solidFill>
                 <a:latin typeface="Helvetica Neue"/>
               </a:rPr>
-              <a:t>Apply the change, not just carry it</a:t>
-            </a:r>
-          </a:p>
-        </p:txBody>
-      </p:sp>
-      <p:sp>
-        <p:nvSpPr>
-          <p:cNvPr id="8" name="TextBox 7"/>
+              <a:t>WHAT EXISTS NOW</a:t>
+            </a:r>
+          </a:p>
+        </p:txBody>
+      </p:sp>
+      <p:sp>
+        <p:nvSpPr>
+          <p:cNvPr id="8" name="Rectangle 7"/>
+          <p:cNvSpPr/>
+          <p:nvPr/>
+        </p:nvSpPr>
+        <p:spPr>
+          <a:xfrm>
+            <a:off x="1005840" y="2432304"/>
+            <a:ext cx="10149840" cy="12700"/>
+          </a:xfrm>
+          <a:prstGeom prst="rect">
+            <a:avLst/>
+          </a:prstGeom>
+          <a:solidFill>
+            <a:srgbClr val="1F2937"/>
+          </a:solidFill>
+          <a:ln>
+            <a:noFill/>
+          </a:ln>
+          <a:effectLst/>
+        </p:spPr>
+        <p:style>
+          <a:lnRef idx="1">
+            <a:schemeClr val="accent1"/>
+          </a:lnRef>
+          <a:fillRef idx="3">
+            <a:schemeClr val="accent1"/>
+          </a:fillRef>
+          <a:effectRef idx="2">
+            <a:schemeClr val="accent1"/>
+          </a:effectRef>
+          <a:fontRef idx="minor">
+            <a:schemeClr val="lt1"/>
+          </a:fontRef>
+        </p:style>
+        <p:txBody>
+          <a:bodyPr rtlCol="0" anchor="ctr"/>
+          <a:lstStyle/>
+          <a:p>
+            <a:pPr algn="ctr"/>
+          </a:p>
+        </p:txBody>
+      </p:sp>
+      <p:sp>
+        <p:nvSpPr>
+          <p:cNvPr id="9" name="TextBox 8"/>
           <p:cNvSpPr txBox="1"/>
           <p:nvPr/>
         </p:nvSpPr>
         <p:spPr>
           <a:xfrm>
-            <a:off x="5852160" y="2103120"/>
-            <a:ext cx="5303520" cy="914400"/>
+            <a:off x="1005840" y="2560320"/>
+            <a:ext cx="3474720" cy="384048"/>
           </a:xfrm>
           <a:prstGeom prst="rect">
             <a:avLst/>
@@ -11298,31 +10914,31 @@
           <a:p>
             <a:pPr algn="l">
               <a:lnSpc>
-                <a:spcPct val="130000"/>
-              </a:lnSpc>
-            </a:pPr>
-            <a:r>
-              <a:rPr sz="1400" b="0">
-                <a:solidFill>
-                  <a:srgbClr val="8B97AB"/>
+                <a:spcPct val="100000"/>
+              </a:lnSpc>
+            </a:pPr>
+            <a:r>
+              <a:rPr sz="1300" b="0">
+                <a:solidFill>
+                  <a:srgbClr val="E8ECF3"/>
                 </a:solidFill>
                 <a:latin typeface="Helvetica Neue"/>
               </a:rPr>
-              <a:t>Today a merged pull request carries the reviewed diff as a file. Applying it to the source is next, and lets a generated test run against the change.</a:t>
-            </a:r>
-          </a:p>
-        </p:txBody>
-      </p:sp>
-      <p:sp>
-        <p:nvSpPr>
-          <p:cNvPr id="9" name="TextBox 8"/>
+              <a:t>Evaluation criteria</a:t>
+            </a:r>
+          </a:p>
+        </p:txBody>
+      </p:sp>
+      <p:sp>
+        <p:nvSpPr>
+          <p:cNvPr id="10" name="TextBox 9"/>
           <p:cNvSpPr txBox="1"/>
           <p:nvPr/>
         </p:nvSpPr>
         <p:spPr>
           <a:xfrm>
-            <a:off x="1005840" y="3127248"/>
-            <a:ext cx="640080" cy="365760"/>
+            <a:off x="4480560" y="2560320"/>
+            <a:ext cx="6675120" cy="384048"/>
           </a:xfrm>
           <a:prstGeom prst="rect">
             <a:avLst/>
@@ -11337,31 +10953,31 @@
           <a:p>
             <a:pPr algn="l">
               <a:lnSpc>
-                <a:spcPct val="120000"/>
-              </a:lnSpc>
-            </a:pPr>
-            <a:r>
-              <a:rPr sz="1500" b="1">
-                <a:solidFill>
-                  <a:srgbClr val="22D3EE"/>
-                </a:solidFill>
-                <a:latin typeface="Menlo"/>
-              </a:rPr>
-              <a:t>02</a:t>
-            </a:r>
-          </a:p>
-        </p:txBody>
-      </p:sp>
-      <p:sp>
-        <p:nvSpPr>
-          <p:cNvPr id="10" name="TextBox 9"/>
+                <a:spcPct val="100000"/>
+              </a:lnSpc>
+            </a:pPr>
+            <a:r>
+              <a:rPr sz="1300" b="0">
+                <a:solidFill>
+                  <a:srgbClr val="8B97AB"/>
+                </a:solidFill>
+                <a:latin typeface="Helvetica Neue"/>
+              </a:rPr>
+              <a:t>measured before and after: plan-mismatch catches went 6/8 → 8/8</a:t>
+            </a:r>
+          </a:p>
+        </p:txBody>
+      </p:sp>
+      <p:sp>
+        <p:nvSpPr>
+          <p:cNvPr id="11" name="TextBox 10"/>
           <p:cNvSpPr txBox="1"/>
           <p:nvPr/>
         </p:nvSpPr>
         <p:spPr>
           <a:xfrm>
-            <a:off x="1737360" y="3127248"/>
-            <a:ext cx="3931920" cy="640080"/>
+            <a:off x="1005840" y="2944368"/>
+            <a:ext cx="3474720" cy="384048"/>
           </a:xfrm>
           <a:prstGeom prst="rect">
             <a:avLst/>
@@ -11376,31 +10992,31 @@
           <a:p>
             <a:pPr algn="l">
               <a:lnSpc>
-                <a:spcPct val="115000"/>
-              </a:lnSpc>
-            </a:pPr>
-            <a:r>
-              <a:rPr sz="1600" b="1">
+                <a:spcPct val="100000"/>
+              </a:lnSpc>
+            </a:pPr>
+            <a:r>
+              <a:rPr sz="1300" b="0">
                 <a:solidFill>
                   <a:srgbClr val="E8ECF3"/>
                 </a:solidFill>
                 <a:latin typeface="Helvetica Neue"/>
               </a:rPr>
-              <a:t>Join the two test layers</a:t>
-            </a:r>
-          </a:p>
-        </p:txBody>
-      </p:sp>
-      <p:sp>
-        <p:nvSpPr>
-          <p:cNvPr id="11" name="TextBox 10"/>
+              <a:t>Time and cost vs a coding agent</a:t>
+            </a:r>
+          </a:p>
+        </p:txBody>
+      </p:sp>
+      <p:sp>
+        <p:nvSpPr>
+          <p:cNvPr id="12" name="TextBox 11"/>
           <p:cNvSpPr txBox="1"/>
           <p:nvPr/>
         </p:nvSpPr>
         <p:spPr>
           <a:xfrm>
-            <a:off x="5852160" y="3127248"/>
-            <a:ext cx="5303520" cy="914400"/>
+            <a:off x="4480560" y="2944368"/>
+            <a:ext cx="6675120" cy="384048"/>
           </a:xfrm>
           <a:prstGeom prst="rect">
             <a:avLst/>
@@ -11415,31 +11031,31 @@
           <a:p>
             <a:pPr algn="l">
               <a:lnSpc>
-                <a:spcPct val="130000"/>
-              </a:lnSpc>
-            </a:pPr>
-            <a:r>
-              <a:rPr sz="1400" b="0">
+                <a:spcPct val="100000"/>
+              </a:lnSpc>
+            </a:pPr>
+            <a:r>
+              <a:rPr sz="1300" b="0">
                 <a:solidFill>
                   <a:srgbClr val="8B97AB"/>
                 </a:solidFill>
                 <a:latin typeface="Helvetica Neue"/>
               </a:rPr>
-              <a:t>Tests are generated from each ticket and Selenium runs in CI; neither checks the other yet.</a:t>
-            </a:r>
-          </a:p>
-        </p:txBody>
-      </p:sp>
-      <p:sp>
-        <p:nvSpPr>
-          <p:cNvPr id="12" name="TextBox 11"/>
+              <a:t>1.3–1.7¢ of model time per change, priced from the AWS Pricing API</a:t>
+            </a:r>
+          </a:p>
+        </p:txBody>
+      </p:sp>
+      <p:sp>
+        <p:nvSpPr>
+          <p:cNvPr id="13" name="TextBox 12"/>
           <p:cNvSpPr txBox="1"/>
           <p:nvPr/>
         </p:nvSpPr>
         <p:spPr>
           <a:xfrm>
-            <a:off x="1005840" y="4151376"/>
-            <a:ext cx="640080" cy="365760"/>
+            <a:off x="1005840" y="3328416"/>
+            <a:ext cx="3474720" cy="384048"/>
           </a:xfrm>
           <a:prstGeom prst="rect">
             <a:avLst/>
@@ -11454,31 +11070,31 @@
           <a:p>
             <a:pPr algn="l">
               <a:lnSpc>
-                <a:spcPct val="120000"/>
-              </a:lnSpc>
-            </a:pPr>
-            <a:r>
-              <a:rPr sz="1500" b="1">
-                <a:solidFill>
-                  <a:srgbClr val="22D3EE"/>
-                </a:solidFill>
-                <a:latin typeface="Menlo"/>
-              </a:rPr>
-              <a:t>03</a:t>
-            </a:r>
-          </a:p>
-        </p:txBody>
-      </p:sp>
-      <p:sp>
-        <p:nvSpPr>
-          <p:cNvPr id="13" name="TextBox 12"/>
+                <a:spcPct val="100000"/>
+              </a:lnSpc>
+            </a:pPr>
+            <a:r>
+              <a:rPr sz="1300" b="0">
+                <a:solidFill>
+                  <a:srgbClr val="E8ECF3"/>
+                </a:solidFill>
+                <a:latin typeface="Helvetica Neue"/>
+              </a:rPr>
+              <a:t>External dependency</a:t>
+            </a:r>
+          </a:p>
+        </p:txBody>
+      </p:sp>
+      <p:sp>
+        <p:nvSpPr>
+          <p:cNvPr id="14" name="TextBox 13"/>
           <p:cNvSpPr txBox="1"/>
           <p:nvPr/>
         </p:nvSpPr>
         <p:spPr>
           <a:xfrm>
-            <a:off x="1737360" y="4151376"/>
-            <a:ext cx="3931920" cy="640080"/>
+            <a:off x="4480560" y="3328416"/>
+            <a:ext cx="6675120" cy="384048"/>
           </a:xfrm>
           <a:prstGeom prst="rect">
             <a:avLst/>
@@ -11493,31 +11109,31 @@
           <a:p>
             <a:pPr algn="l">
               <a:lnSpc>
-                <a:spcPct val="115000"/>
-              </a:lnSpc>
-            </a:pPr>
-            <a:r>
-              <a:rPr sz="1600" b="1">
-                <a:solidFill>
-                  <a:srgbClr val="E8ECF3"/>
+                <a:spcPct val="100000"/>
+              </a:lnSpc>
+            </a:pPr>
+            <a:r>
+              <a:rPr sz="1300" b="0">
+                <a:solidFill>
+                  <a:srgbClr val="8B97AB"/>
                 </a:solidFill>
                 <a:latin typeface="Helvetica Neue"/>
               </a:rPr>
-              <a:t>Prompt caching</a:t>
-            </a:r>
-          </a:p>
-        </p:txBody>
-      </p:sp>
-      <p:sp>
-        <p:nvSpPr>
-          <p:cNvPr id="14" name="TextBox 13"/>
+              <a:t>8 of 83 modules touch a vendor SDK; 2 load one at start-up</a:t>
+            </a:r>
+          </a:p>
+        </p:txBody>
+      </p:sp>
+      <p:sp>
+        <p:nvSpPr>
+          <p:cNvPr id="15" name="TextBox 14"/>
           <p:cNvSpPr txBox="1"/>
           <p:nvPr/>
         </p:nvSpPr>
         <p:spPr>
           <a:xfrm>
-            <a:off x="5852160" y="4151376"/>
-            <a:ext cx="5303520" cy="914400"/>
+            <a:off x="1005840" y="3712464"/>
+            <a:ext cx="3474720" cy="384048"/>
           </a:xfrm>
           <a:prstGeom prst="rect">
             <a:avLst/>
@@ -11532,31 +11148,31 @@
           <a:p>
             <a:pPr algn="l">
               <a:lnSpc>
-                <a:spcPct val="130000"/>
-              </a:lnSpc>
-            </a:pPr>
-            <a:r>
-              <a:rPr sz="1400" b="0">
-                <a:solidFill>
-                  <a:srgbClr val="8B97AB"/>
+                <a:spcPct val="100000"/>
+              </a:lnSpc>
+            </a:pPr>
+            <a:r>
+              <a:rPr sz="1300" b="0">
+                <a:solidFill>
+                  <a:srgbClr val="E8ECF3"/>
                 </a:solidFill>
                 <a:latin typeface="Helvetica Neue"/>
               </a:rPr>
-              <a:t>Nothing is cached today: every agent re-sends the same repository snapshot at full price. Cached input costs a quarter as much.</a:t>
-            </a:r>
-          </a:p>
-        </p:txBody>
-      </p:sp>
-      <p:sp>
-        <p:nvSpPr>
-          <p:cNvPr id="15" name="TextBox 14"/>
+              <a:t>Self-hosted</a:t>
+            </a:r>
+          </a:p>
+        </p:txBody>
+      </p:sp>
+      <p:sp>
+        <p:nvSpPr>
+          <p:cNvPr id="16" name="TextBox 15"/>
           <p:cNvSpPr txBox="1"/>
           <p:nvPr/>
         </p:nvSpPr>
         <p:spPr>
           <a:xfrm>
-            <a:off x="1005840" y="5175504"/>
-            <a:ext cx="640080" cy="365760"/>
+            <a:off x="4480560" y="3712464"/>
+            <a:ext cx="6675120" cy="384048"/>
           </a:xfrm>
           <a:prstGeom prst="rect">
             <a:avLst/>
@@ -11571,31 +11187,31 @@
           <a:p>
             <a:pPr algn="l">
               <a:lnSpc>
-                <a:spcPct val="120000"/>
-              </a:lnSpc>
-            </a:pPr>
-            <a:r>
-              <a:rPr sz="1500" b="1">
-                <a:solidFill>
-                  <a:srgbClr val="22D3EE"/>
-                </a:solidFill>
-                <a:latin typeface="Menlo"/>
-              </a:rPr>
-              <a:t>04</a:t>
-            </a:r>
-          </a:p>
-        </p:txBody>
-      </p:sp>
-      <p:sp>
-        <p:nvSpPr>
-          <p:cNvPr id="16" name="TextBox 15"/>
+                <a:spcPct val="100000"/>
+              </a:lnSpc>
+            </a:pPr>
+            <a:r>
+              <a:rPr sz="1300" b="0">
+                <a:solidFill>
+                  <a:srgbClr val="8B97AB"/>
+                </a:solidFill>
+                <a:latin typeface="Helvetica Neue"/>
+              </a:rPr>
+              <a:t>one compose file runs the web app, the API, the worker and a local model</a:t>
+            </a:r>
+          </a:p>
+        </p:txBody>
+      </p:sp>
+      <p:sp>
+        <p:nvSpPr>
+          <p:cNvPr id="17" name="TextBox 16"/>
           <p:cNvSpPr txBox="1"/>
           <p:nvPr/>
         </p:nvSpPr>
         <p:spPr>
           <a:xfrm>
-            <a:off x="1737360" y="5175504"/>
-            <a:ext cx="3931920" cy="640080"/>
+            <a:off x="1005840" y="4096512"/>
+            <a:ext cx="3474720" cy="384048"/>
           </a:xfrm>
           <a:prstGeom prst="rect">
             <a:avLst/>
@@ -11610,31 +11226,31 @@
           <a:p>
             <a:pPr algn="l">
               <a:lnSpc>
-                <a:spcPct val="115000"/>
-              </a:lnSpc>
-            </a:pPr>
-            <a:r>
-              <a:rPr sz="1600" b="1">
+                <a:spcPct val="100000"/>
+              </a:lnSpc>
+            </a:pPr>
+            <a:r>
+              <a:rPr sz="1300" b="0">
                 <a:solidFill>
                   <a:srgbClr val="E8ECF3"/>
                 </a:solidFill>
                 <a:latin typeface="Helvetica Neue"/>
               </a:rPr>
-              <a:t>More languages, more scanners</a:t>
-            </a:r>
-          </a:p>
-        </p:txBody>
-      </p:sp>
-      <p:sp>
-        <p:nvSpPr>
-          <p:cNvPr id="17" name="TextBox 16"/>
+              <a:t>Competitive advantage</a:t>
+            </a:r>
+          </a:p>
+        </p:txBody>
+      </p:sp>
+      <p:sp>
+        <p:nvSpPr>
+          <p:cNvPr id="18" name="TextBox 17"/>
           <p:cNvSpPr txBox="1"/>
           <p:nvPr/>
         </p:nvSpPr>
         <p:spPr>
           <a:xfrm>
-            <a:off x="5852160" y="5175504"/>
-            <a:ext cx="5303520" cy="914400"/>
+            <a:off x="4480560" y="4096512"/>
+            <a:ext cx="6675120" cy="384048"/>
           </a:xfrm>
           <a:prstGeom prst="rect">
             <a:avLst/>
@@ -11649,6 +11265,739 @@
           <a:p>
             <a:pPr algn="l">
               <a:lnSpc>
+                <a:spcPct val="100000"/>
+              </a:lnSpc>
+            </a:pPr>
+            <a:r>
+              <a:rPr sz="1300" b="0">
+                <a:solidFill>
+                  <a:srgbClr val="8B97AB"/>
+                </a:solidFill>
+                <a:latin typeface="Helvetica Neue"/>
+              </a:rPr>
+              <a:t>commissioned research, which disproved five of our own claims</a:t>
+            </a:r>
+          </a:p>
+        </p:txBody>
+      </p:sp>
+      <p:sp>
+        <p:nvSpPr>
+          <p:cNvPr id="19" name="TextBox 18"/>
+          <p:cNvSpPr txBox="1"/>
+          <p:nvPr/>
+        </p:nvSpPr>
+        <p:spPr>
+          <a:xfrm>
+            <a:off x="1005840" y="4480560"/>
+            <a:ext cx="3474720" cy="384048"/>
+          </a:xfrm>
+          <a:prstGeom prst="rect">
+            <a:avLst/>
+          </a:prstGeom>
+          <a:noFill/>
+        </p:spPr>
+        <p:txBody>
+          <a:bodyPr wrap="square">
+            <a:spAutoFit/>
+          </a:bodyPr>
+          <a:lstStyle/>
+          <a:p>
+            <a:pPr algn="l">
+              <a:lnSpc>
+                <a:spcPct val="100000"/>
+              </a:lnSpc>
+            </a:pPr>
+            <a:r>
+              <a:rPr sz="1300" b="0">
+                <a:solidFill>
+                  <a:srgbClr val="E8ECF3"/>
+                </a:solidFill>
+                <a:latin typeface="Helvetica Neue"/>
+              </a:rPr>
+              <a:t>Scanner scoring → go / no-go</a:t>
+            </a:r>
+          </a:p>
+        </p:txBody>
+      </p:sp>
+      <p:sp>
+        <p:nvSpPr>
+          <p:cNvPr id="20" name="TextBox 19"/>
+          <p:cNvSpPr txBox="1"/>
+          <p:nvPr/>
+        </p:nvSpPr>
+        <p:spPr>
+          <a:xfrm>
+            <a:off x="4480560" y="4480560"/>
+            <a:ext cx="6675120" cy="384048"/>
+          </a:xfrm>
+          <a:prstGeom prst="rect">
+            <a:avLst/>
+          </a:prstGeom>
+          <a:noFill/>
+        </p:spPr>
+        <p:txBody>
+          <a:bodyPr wrap="square">
+            <a:spAutoFit/>
+          </a:bodyPr>
+          <a:lstStyle/>
+          <a:p>
+            <a:pPr algn="l">
+              <a:lnSpc>
+                <a:spcPct val="100000"/>
+              </a:lnSpc>
+            </a:pPr>
+            <a:r>
+              <a:rPr sz="1300" b="0">
+                <a:solidFill>
+                  <a:srgbClr val="8B97AB"/>
+                </a:solidFill>
+                <a:latin typeface="Helvetica Neue"/>
+              </a:rPr>
+              <a:t>one scoring table for all three scanners, built because of this note</a:t>
+            </a:r>
+          </a:p>
+        </p:txBody>
+      </p:sp>
+      <p:sp>
+        <p:nvSpPr>
+          <p:cNvPr id="21" name="TextBox 20"/>
+          <p:cNvSpPr txBox="1"/>
+          <p:nvPr/>
+        </p:nvSpPr>
+        <p:spPr>
+          <a:xfrm>
+            <a:off x="1005840" y="4864608"/>
+            <a:ext cx="3474720" cy="384048"/>
+          </a:xfrm>
+          <a:prstGeom prst="rect">
+            <a:avLst/>
+          </a:prstGeom>
+          <a:noFill/>
+        </p:spPr>
+        <p:txBody>
+          <a:bodyPr wrap="square">
+            <a:spAutoFit/>
+          </a:bodyPr>
+          <a:lstStyle/>
+          <a:p>
+            <a:pPr algn="l">
+              <a:lnSpc>
+                <a:spcPct val="100000"/>
+              </a:lnSpc>
+            </a:pPr>
+            <a:r>
+              <a:rPr sz="1300" b="0">
+                <a:solidFill>
+                  <a:srgbClr val="E8ECF3"/>
+                </a:solidFill>
+                <a:latin typeface="Helvetica Neue"/>
+              </a:rPr>
+              <a:t>Generated tests + Selenium</a:t>
+            </a:r>
+          </a:p>
+        </p:txBody>
+      </p:sp>
+      <p:sp>
+        <p:nvSpPr>
+          <p:cNvPr id="22" name="TextBox 21"/>
+          <p:cNvSpPr txBox="1"/>
+          <p:nvPr/>
+        </p:nvSpPr>
+        <p:spPr>
+          <a:xfrm>
+            <a:off x="4480560" y="4864608"/>
+            <a:ext cx="6675120" cy="384048"/>
+          </a:xfrm>
+          <a:prstGeom prst="rect">
+            <a:avLst/>
+          </a:prstGeom>
+          <a:noFill/>
+        </p:spPr>
+        <p:txBody>
+          <a:bodyPr wrap="square">
+            <a:spAutoFit/>
+          </a:bodyPr>
+          <a:lstStyle/>
+          <a:p>
+            <a:pPr algn="l">
+              <a:lnSpc>
+                <a:spcPct val="100000"/>
+              </a:lnSpc>
+            </a:pPr>
+            <a:r>
+              <a:rPr sz="1300" b="0">
+                <a:solidFill>
+                  <a:srgbClr val="8B97AB"/>
+                </a:solidFill>
+                <a:latin typeface="Helvetica Neue"/>
+              </a:rPr>
+              <a:t>an agent writes tests from the ticket; Selenium runs in CI</a:t>
+            </a:r>
+          </a:p>
+        </p:txBody>
+      </p:sp>
+      <p:sp>
+        <p:nvSpPr>
+          <p:cNvPr id="23" name="TextBox 22"/>
+          <p:cNvSpPr txBox="1"/>
+          <p:nvPr/>
+        </p:nvSpPr>
+        <p:spPr>
+          <a:xfrm>
+            <a:off x="1005840" y="5248656"/>
+            <a:ext cx="3474720" cy="384048"/>
+          </a:xfrm>
+          <a:prstGeom prst="rect">
+            <a:avLst/>
+          </a:prstGeom>
+          <a:noFill/>
+        </p:spPr>
+        <p:txBody>
+          <a:bodyPr wrap="square">
+            <a:spAutoFit/>
+          </a:bodyPr>
+          <a:lstStyle/>
+          <a:p>
+            <a:pPr algn="l">
+              <a:lnSpc>
+                <a:spcPct val="100000"/>
+              </a:lnSpc>
+            </a:pPr>
+            <a:r>
+              <a:rPr sz="1300" b="0">
+                <a:solidFill>
+                  <a:srgbClr val="E8ECF3"/>
+                </a:solidFill>
+                <a:latin typeface="Helvetica Neue"/>
+              </a:rPr>
+              <a:t>RAG / knowledge lake</a:t>
+            </a:r>
+          </a:p>
+        </p:txBody>
+      </p:sp>
+      <p:sp>
+        <p:nvSpPr>
+          <p:cNvPr id="24" name="TextBox 23"/>
+          <p:cNvSpPr txBox="1"/>
+          <p:nvPr/>
+        </p:nvSpPr>
+        <p:spPr>
+          <a:xfrm>
+            <a:off x="4480560" y="5248656"/>
+            <a:ext cx="6675120" cy="384048"/>
+          </a:xfrm>
+          <a:prstGeom prst="rect">
+            <a:avLst/>
+          </a:prstGeom>
+          <a:noFill/>
+        </p:spPr>
+        <p:txBody>
+          <a:bodyPr wrap="square">
+            <a:spAutoFit/>
+          </a:bodyPr>
+          <a:lstStyle/>
+          <a:p>
+            <a:pPr algn="l">
+              <a:lnSpc>
+                <a:spcPct val="100000"/>
+              </a:lnSpc>
+            </a:pPr>
+            <a:r>
+              <a:rPr sz="1300" b="0">
+                <a:solidFill>
+                  <a:srgbClr val="8B97AB"/>
+                </a:solidFill>
+                <a:latin typeface="Helvetica Neue"/>
+              </a:rPr>
+              <a:t>three curated knowledge bases, used by four of the agents</a:t>
+            </a:r>
+          </a:p>
+        </p:txBody>
+      </p:sp>
+      <p:sp>
+        <p:nvSpPr>
+          <p:cNvPr id="25" name="TextBox 24"/>
+          <p:cNvSpPr txBox="1"/>
+          <p:nvPr/>
+        </p:nvSpPr>
+        <p:spPr>
+          <a:xfrm>
+            <a:off x="1005840" y="5632704"/>
+            <a:ext cx="3474720" cy="384048"/>
+          </a:xfrm>
+          <a:prstGeom prst="rect">
+            <a:avLst/>
+          </a:prstGeom>
+          <a:noFill/>
+        </p:spPr>
+        <p:txBody>
+          <a:bodyPr wrap="square">
+            <a:spAutoFit/>
+          </a:bodyPr>
+          <a:lstStyle/>
+          <a:p>
+            <a:pPr algn="l">
+              <a:lnSpc>
+                <a:spcPct val="100000"/>
+              </a:lnSpc>
+            </a:pPr>
+            <a:r>
+              <a:rPr sz="1300" b="0">
+                <a:solidFill>
+                  <a:srgbClr val="E8ECF3"/>
+                </a:solidFill>
+                <a:latin typeface="Helvetica Neue"/>
+              </a:rPr>
+              <a:t>A real UI</a:t>
+            </a:r>
+          </a:p>
+        </p:txBody>
+      </p:sp>
+      <p:sp>
+        <p:nvSpPr>
+          <p:cNvPr id="26" name="TextBox 25"/>
+          <p:cNvSpPr txBox="1"/>
+          <p:nvPr/>
+        </p:nvSpPr>
+        <p:spPr>
+          <a:xfrm>
+            <a:off x="4480560" y="5632704"/>
+            <a:ext cx="6675120" cy="384048"/>
+          </a:xfrm>
+          <a:prstGeom prst="rect">
+            <a:avLst/>
+          </a:prstGeom>
+          <a:noFill/>
+        </p:spPr>
+        <p:txBody>
+          <a:bodyPr wrap="square">
+            <a:spAutoFit/>
+          </a:bodyPr>
+          <a:lstStyle/>
+          <a:p>
+            <a:pPr algn="l">
+              <a:lnSpc>
+                <a:spcPct val="100000"/>
+              </a:lnSpc>
+            </a:pPr>
+            <a:r>
+              <a:rPr sz="1300" b="0">
+                <a:solidFill>
+                  <a:srgbClr val="8B97AB"/>
+                </a:solidFill>
+                <a:latin typeface="Helvetica Neue"/>
+              </a:rPr>
+              <a:t>sign-in, a live view of each run, gate approval, and cost</a:t>
+            </a:r>
+          </a:p>
+        </p:txBody>
+      </p:sp>
+      <p:sp>
+        <p:nvSpPr>
+          <p:cNvPr id="27" name="TextBox 26"/>
+          <p:cNvSpPr txBox="1"/>
+          <p:nvPr/>
+        </p:nvSpPr>
+        <p:spPr>
+          <a:xfrm>
+            <a:off x="1005840" y="6016752"/>
+            <a:ext cx="3474720" cy="384048"/>
+          </a:xfrm>
+          <a:prstGeom prst="rect">
+            <a:avLst/>
+          </a:prstGeom>
+          <a:noFill/>
+        </p:spPr>
+        <p:txBody>
+          <a:bodyPr wrap="square">
+            <a:spAutoFit/>
+          </a:bodyPr>
+          <a:lstStyle/>
+          <a:p>
+            <a:pPr algn="l">
+              <a:lnSpc>
+                <a:spcPct val="100000"/>
+              </a:lnSpc>
+            </a:pPr>
+            <a:r>
+              <a:rPr sz="1300" b="0">
+                <a:solidFill>
+                  <a:srgbClr val="E8ECF3"/>
+                </a:solidFill>
+                <a:latin typeface="Helvetica Neue"/>
+              </a:rPr>
+              <a:t>Restructure as SaaS</a:t>
+            </a:r>
+          </a:p>
+        </p:txBody>
+      </p:sp>
+      <p:sp>
+        <p:nvSpPr>
+          <p:cNvPr id="28" name="TextBox 27"/>
+          <p:cNvSpPr txBox="1"/>
+          <p:nvPr/>
+        </p:nvSpPr>
+        <p:spPr>
+          <a:xfrm>
+            <a:off x="4480560" y="6016752"/>
+            <a:ext cx="6675120" cy="384048"/>
+          </a:xfrm>
+          <a:prstGeom prst="rect">
+            <a:avLst/>
+          </a:prstGeom>
+          <a:noFill/>
+        </p:spPr>
+        <p:txBody>
+          <a:bodyPr wrap="square">
+            <a:spAutoFit/>
+          </a:bodyPr>
+          <a:lstStyle/>
+          <a:p>
+            <a:pPr algn="l">
+              <a:lnSpc>
+                <a:spcPct val="100000"/>
+              </a:lnSpc>
+            </a:pPr>
+            <a:r>
+              <a:rPr sz="1300" b="0">
+                <a:solidFill>
+                  <a:srgbClr val="8B97AB"/>
+                </a:solidFill>
+                <a:latin typeface="Helvetica Neue"/>
+              </a:rPr>
+              <a:t>multi-tenant, with a control-plane API and per-tenant isolation</a:t>
+            </a:r>
+          </a:p>
+        </p:txBody>
+      </p:sp>
+      <p:sp>
+        <p:nvSpPr>
+          <p:cNvPr id="29" name="TextBox 28"/>
+          <p:cNvSpPr txBox="1"/>
+          <p:nvPr/>
+        </p:nvSpPr>
+        <p:spPr>
+          <a:xfrm>
+            <a:off x="11247120" y="6291072"/>
+            <a:ext cx="548640" cy="274320"/>
+          </a:xfrm>
+          <a:prstGeom prst="rect">
+            <a:avLst/>
+          </a:prstGeom>
+          <a:noFill/>
+        </p:spPr>
+        <p:txBody>
+          <a:bodyPr wrap="square">
+            <a:spAutoFit/>
+          </a:bodyPr>
+          <a:lstStyle/>
+          <a:p>
+            <a:pPr algn="r">
+              <a:lnSpc>
+                <a:spcPct val="120000"/>
+              </a:lnSpc>
+            </a:pPr>
+            <a:r>
+              <a:rPr sz="1100" b="0">
+                <a:solidFill>
+                  <a:srgbClr val="8B97AB"/>
+                </a:solidFill>
+                <a:latin typeface="Helvetica Neue"/>
+              </a:rPr>
+              <a:t>14</a:t>
+            </a:r>
+          </a:p>
+        </p:txBody>
+      </p:sp>
+    </p:spTree>
+  </p:cSld>
+  <p:clrMapOvr>
+    <a:masterClrMapping/>
+  </p:clrMapOvr>
+  <p:transition spd="med">
+    <p:wipe dir="l"/>
+  </p:transition>
+</p:sld>
+</file>
+
+<file path=ppt/slides/slide15.xml><?xml version="1.0" encoding="utf-8"?>
+<p:sld xmlns:a="http://schemas.openxmlformats.org/drawingml/2006/main" xmlns:p="http://schemas.openxmlformats.org/presentationml/2006/main" xmlns:r="http://schemas.openxmlformats.org/officeDocument/2006/relationships">
+  <p:cSld>
+    <p:spTree>
+      <p:nvGrpSpPr>
+        <p:cNvPr id="1" name=""/>
+        <p:cNvGrpSpPr/>
+        <p:nvPr/>
+      </p:nvGrpSpPr>
+      <p:grpSpPr/>
+      <p:sp>
+        <p:nvSpPr>
+          <p:cNvPr id="2" name="Rectangle 1"/>
+          <p:cNvSpPr/>
+          <p:nvPr/>
+        </p:nvSpPr>
+        <p:spPr>
+          <a:xfrm>
+            <a:off x="0" y="0"/>
+            <a:ext cx="12191695" cy="6858000"/>
+          </a:xfrm>
+          <a:prstGeom prst="rect">
+            <a:avLst/>
+          </a:prstGeom>
+          <a:solidFill>
+            <a:srgbClr val="0B0F17"/>
+          </a:solidFill>
+          <a:ln>
+            <a:noFill/>
+          </a:ln>
+          <a:effectLst/>
+        </p:spPr>
+        <p:style>
+          <a:lnRef idx="1">
+            <a:schemeClr val="accent1"/>
+          </a:lnRef>
+          <a:fillRef idx="3">
+            <a:schemeClr val="accent1"/>
+          </a:fillRef>
+          <a:effectRef idx="2">
+            <a:schemeClr val="accent1"/>
+          </a:effectRef>
+          <a:fontRef idx="minor">
+            <a:schemeClr val="lt1"/>
+          </a:fontRef>
+        </p:style>
+        <p:txBody>
+          <a:bodyPr rtlCol="0" anchor="ctr"/>
+          <a:lstStyle/>
+          <a:p>
+            <a:pPr algn="ctr"/>
+          </a:p>
+        </p:txBody>
+      </p:sp>
+      <p:sp>
+        <p:nvSpPr>
+          <p:cNvPr id="3" name="TextBox 2"/>
+          <p:cNvSpPr txBox="1"/>
+          <p:nvPr/>
+        </p:nvSpPr>
+        <p:spPr>
+          <a:xfrm>
+            <a:off x="1005840" y="658368"/>
+            <a:ext cx="10149840" cy="292608"/>
+          </a:xfrm>
+          <a:prstGeom prst="rect">
+            <a:avLst/>
+          </a:prstGeom>
+          <a:noFill/>
+        </p:spPr>
+        <p:txBody>
+          <a:bodyPr wrap="square">
+            <a:spAutoFit/>
+          </a:bodyPr>
+          <a:lstStyle/>
+          <a:p>
+            <a:pPr algn="l">
+              <a:lnSpc>
+                <a:spcPct val="100000"/>
+              </a:lnSpc>
+            </a:pPr>
+            <a:r>
+              <a:rPr sz="1200" b="1">
+                <a:solidFill>
+                  <a:srgbClr val="22D3EE"/>
+                </a:solidFill>
+                <a:latin typeface="Helvetica Neue"/>
+              </a:rPr>
+              <a:t>PROGRESS · LIMITS</a:t>
+            </a:r>
+          </a:p>
+        </p:txBody>
+      </p:sp>
+      <p:sp>
+        <p:nvSpPr>
+          <p:cNvPr id="4" name="TextBox 3"/>
+          <p:cNvSpPr txBox="1"/>
+          <p:nvPr/>
+        </p:nvSpPr>
+        <p:spPr>
+          <a:xfrm>
+            <a:off x="1005840" y="1078992"/>
+            <a:ext cx="10149840" cy="914400"/>
+          </a:xfrm>
+          <a:prstGeom prst="rect">
+            <a:avLst/>
+          </a:prstGeom>
+          <a:noFill/>
+        </p:spPr>
+        <p:txBody>
+          <a:bodyPr wrap="square">
+            <a:spAutoFit/>
+          </a:bodyPr>
+          <a:lstStyle/>
+          <a:p>
+            <a:pPr algn="l">
+              <a:lnSpc>
+                <a:spcPct val="106000"/>
+              </a:lnSpc>
+            </a:pPr>
+            <a:r>
+              <a:rPr sz="3000" b="1">
+                <a:solidFill>
+                  <a:srgbClr val="E8ECF3"/>
+                </a:solidFill>
+                <a:latin typeface="Helvetica Neue"/>
+              </a:rPr>
+              <a:t>What this does not do</a:t>
+            </a:r>
+          </a:p>
+        </p:txBody>
+      </p:sp>
+      <p:sp>
+        <p:nvSpPr>
+          <p:cNvPr id="5" name="deckkit-rule"/>
+          <p:cNvSpPr/>
+          <p:nvPr/>
+        </p:nvSpPr>
+        <p:spPr>
+          <a:xfrm>
+            <a:off x="1005840" y="1883664"/>
+            <a:ext cx="1463040" cy="38100"/>
+          </a:xfrm>
+          <a:prstGeom prst="rect">
+            <a:avLst/>
+          </a:prstGeom>
+          <a:solidFill>
+            <a:srgbClr val="22D3EE"/>
+          </a:solidFill>
+          <a:ln>
+            <a:noFill/>
+          </a:ln>
+          <a:effectLst/>
+        </p:spPr>
+        <p:style>
+          <a:lnRef idx="1">
+            <a:schemeClr val="accent1"/>
+          </a:lnRef>
+          <a:fillRef idx="3">
+            <a:schemeClr val="accent1"/>
+          </a:fillRef>
+          <a:effectRef idx="2">
+            <a:schemeClr val="accent1"/>
+          </a:effectRef>
+          <a:fontRef idx="minor">
+            <a:schemeClr val="lt1"/>
+          </a:fontRef>
+        </p:style>
+        <p:txBody>
+          <a:bodyPr rtlCol="0" anchor="ctr"/>
+          <a:lstStyle/>
+          <a:p>
+            <a:pPr algn="ctr"/>
+          </a:p>
+        </p:txBody>
+      </p:sp>
+      <p:sp>
+        <p:nvSpPr>
+          <p:cNvPr id="6" name="TextBox 5"/>
+          <p:cNvSpPr txBox="1"/>
+          <p:nvPr/>
+        </p:nvSpPr>
+        <p:spPr>
+          <a:xfrm>
+            <a:off x="1005840" y="2103120"/>
+            <a:ext cx="640080" cy="365760"/>
+          </a:xfrm>
+          <a:prstGeom prst="rect">
+            <a:avLst/>
+          </a:prstGeom>
+          <a:noFill/>
+        </p:spPr>
+        <p:txBody>
+          <a:bodyPr wrap="square">
+            <a:spAutoFit/>
+          </a:bodyPr>
+          <a:lstStyle/>
+          <a:p>
+            <a:pPr algn="l">
+              <a:lnSpc>
+                <a:spcPct val="120000"/>
+              </a:lnSpc>
+            </a:pPr>
+            <a:r>
+              <a:rPr sz="1500" b="1">
+                <a:solidFill>
+                  <a:srgbClr val="22D3EE"/>
+                </a:solidFill>
+                <a:latin typeface="Menlo"/>
+              </a:rPr>
+              <a:t>01</a:t>
+            </a:r>
+          </a:p>
+        </p:txBody>
+      </p:sp>
+      <p:sp>
+        <p:nvSpPr>
+          <p:cNvPr id="7" name="TextBox 6"/>
+          <p:cNvSpPr txBox="1"/>
+          <p:nvPr/>
+        </p:nvSpPr>
+        <p:spPr>
+          <a:xfrm>
+            <a:off x="1737360" y="2103120"/>
+            <a:ext cx="3931920" cy="640080"/>
+          </a:xfrm>
+          <a:prstGeom prst="rect">
+            <a:avLst/>
+          </a:prstGeom>
+          <a:noFill/>
+        </p:spPr>
+        <p:txBody>
+          <a:bodyPr wrap="square">
+            <a:spAutoFit/>
+          </a:bodyPr>
+          <a:lstStyle/>
+          <a:p>
+            <a:pPr algn="l">
+              <a:lnSpc>
+                <a:spcPct val="115000"/>
+              </a:lnSpc>
+            </a:pPr>
+            <a:r>
+              <a:rPr sz="1600" b="1">
+                <a:solidFill>
+                  <a:srgbClr val="E8ECF3"/>
+                </a:solidFill>
+                <a:latin typeface="Helvetica Neue"/>
+              </a:rPr>
+              <a:t>An admin can bypass a gate</a:t>
+            </a:r>
+          </a:p>
+        </p:txBody>
+      </p:sp>
+      <p:sp>
+        <p:nvSpPr>
+          <p:cNvPr id="8" name="TextBox 7"/>
+          <p:cNvSpPr txBox="1"/>
+          <p:nvPr/>
+        </p:nvSpPr>
+        <p:spPr>
+          <a:xfrm>
+            <a:off x="5852160" y="2103120"/>
+            <a:ext cx="5303520" cy="914400"/>
+          </a:xfrm>
+          <a:prstGeom prst="rect">
+            <a:avLst/>
+          </a:prstGeom>
+          <a:noFill/>
+        </p:spPr>
+        <p:txBody>
+          <a:bodyPr wrap="square">
+            <a:spAutoFit/>
+          </a:bodyPr>
+          <a:lstStyle/>
+          <a:p>
+            <a:pPr algn="l">
+              <a:lnSpc>
                 <a:spcPct val="130000"/>
               </a:lnSpc>
             </a:pPr>
@@ -11659,7 +12008,358 @@
                 </a:solidFill>
                 <a:latin typeface="Helvetica Neue"/>
               </a:rPr>
-              <a:t>One Python target and three scanners today. The scoring is a table, so a new scanner is one row.</a:t>
+              <a:t>A repository setting, not a code path. Our pre-flight check reports it on every run.</a:t>
+            </a:r>
+          </a:p>
+        </p:txBody>
+      </p:sp>
+      <p:sp>
+        <p:nvSpPr>
+          <p:cNvPr id="9" name="TextBox 8"/>
+          <p:cNvSpPr txBox="1"/>
+          <p:nvPr/>
+        </p:nvSpPr>
+        <p:spPr>
+          <a:xfrm>
+            <a:off x="1005840" y="3127248"/>
+            <a:ext cx="640080" cy="365760"/>
+          </a:xfrm>
+          <a:prstGeom prst="rect">
+            <a:avLst/>
+          </a:prstGeom>
+          <a:noFill/>
+        </p:spPr>
+        <p:txBody>
+          <a:bodyPr wrap="square">
+            <a:spAutoFit/>
+          </a:bodyPr>
+          <a:lstStyle/>
+          <a:p>
+            <a:pPr algn="l">
+              <a:lnSpc>
+                <a:spcPct val="120000"/>
+              </a:lnSpc>
+            </a:pPr>
+            <a:r>
+              <a:rPr sz="1500" b="1">
+                <a:solidFill>
+                  <a:srgbClr val="22D3EE"/>
+                </a:solidFill>
+                <a:latin typeface="Menlo"/>
+              </a:rPr>
+              <a:t>02</a:t>
+            </a:r>
+          </a:p>
+        </p:txBody>
+      </p:sp>
+      <p:sp>
+        <p:nvSpPr>
+          <p:cNvPr id="10" name="TextBox 9"/>
+          <p:cNvSpPr txBox="1"/>
+          <p:nvPr/>
+        </p:nvSpPr>
+        <p:spPr>
+          <a:xfrm>
+            <a:off x="1737360" y="3127248"/>
+            <a:ext cx="3931920" cy="640080"/>
+          </a:xfrm>
+          <a:prstGeom prst="rect">
+            <a:avLst/>
+          </a:prstGeom>
+          <a:noFill/>
+        </p:spPr>
+        <p:txBody>
+          <a:bodyPr wrap="square">
+            <a:spAutoFit/>
+          </a:bodyPr>
+          <a:lstStyle/>
+          <a:p>
+            <a:pPr algn="l">
+              <a:lnSpc>
+                <a:spcPct val="115000"/>
+              </a:lnSpc>
+            </a:pPr>
+            <a:r>
+              <a:rPr sz="1600" b="1">
+                <a:solidFill>
+                  <a:srgbClr val="E8ECF3"/>
+                </a:solidFill>
+                <a:latin typeface="Helvetica Neue"/>
+              </a:rPr>
+              <a:t>The reviewer is advisory</a:t>
+            </a:r>
+          </a:p>
+        </p:txBody>
+      </p:sp>
+      <p:sp>
+        <p:nvSpPr>
+          <p:cNvPr id="11" name="TextBox 10"/>
+          <p:cNvSpPr txBox="1"/>
+          <p:nvPr/>
+        </p:nvSpPr>
+        <p:spPr>
+          <a:xfrm>
+            <a:off x="5852160" y="3127248"/>
+            <a:ext cx="5303520" cy="914400"/>
+          </a:xfrm>
+          <a:prstGeom prst="rect">
+            <a:avLst/>
+          </a:prstGeom>
+          <a:noFill/>
+        </p:spPr>
+        <p:txBody>
+          <a:bodyPr wrap="square">
+            <a:spAutoFit/>
+          </a:bodyPr>
+          <a:lstStyle/>
+          <a:p>
+            <a:pPr algn="l">
+              <a:lnSpc>
+                <a:spcPct val="130000"/>
+              </a:lnSpc>
+            </a:pPr>
+            <a:r>
+              <a:rPr sz="1400" b="0">
+                <a:solidFill>
+                  <a:srgbClr val="8B97AB"/>
+                </a:solidFill>
+                <a:latin typeface="Helvetica Neue"/>
+              </a:rPr>
+              <a:t>If the scanners miss something, only the reviewer saw it, and it cannot stop the run. The human gates are the last line.</a:t>
+            </a:r>
+          </a:p>
+        </p:txBody>
+      </p:sp>
+      <p:sp>
+        <p:nvSpPr>
+          <p:cNvPr id="12" name="TextBox 11"/>
+          <p:cNvSpPr txBox="1"/>
+          <p:nvPr/>
+        </p:nvSpPr>
+        <p:spPr>
+          <a:xfrm>
+            <a:off x="1005840" y="4151376"/>
+            <a:ext cx="640080" cy="365760"/>
+          </a:xfrm>
+          <a:prstGeom prst="rect">
+            <a:avLst/>
+          </a:prstGeom>
+          <a:noFill/>
+        </p:spPr>
+        <p:txBody>
+          <a:bodyPr wrap="square">
+            <a:spAutoFit/>
+          </a:bodyPr>
+          <a:lstStyle/>
+          <a:p>
+            <a:pPr algn="l">
+              <a:lnSpc>
+                <a:spcPct val="120000"/>
+              </a:lnSpc>
+            </a:pPr>
+            <a:r>
+              <a:rPr sz="1500" b="1">
+                <a:solidFill>
+                  <a:srgbClr val="22D3EE"/>
+                </a:solidFill>
+                <a:latin typeface="Menlo"/>
+              </a:rPr>
+              <a:t>03</a:t>
+            </a:r>
+          </a:p>
+        </p:txBody>
+      </p:sp>
+      <p:sp>
+        <p:nvSpPr>
+          <p:cNvPr id="13" name="TextBox 12"/>
+          <p:cNvSpPr txBox="1"/>
+          <p:nvPr/>
+        </p:nvSpPr>
+        <p:spPr>
+          <a:xfrm>
+            <a:off x="1737360" y="4151376"/>
+            <a:ext cx="3931920" cy="640080"/>
+          </a:xfrm>
+          <a:prstGeom prst="rect">
+            <a:avLst/>
+          </a:prstGeom>
+          <a:noFill/>
+        </p:spPr>
+        <p:txBody>
+          <a:bodyPr wrap="square">
+            <a:spAutoFit/>
+          </a:bodyPr>
+          <a:lstStyle/>
+          <a:p>
+            <a:pPr algn="l">
+              <a:lnSpc>
+                <a:spcPct val="115000"/>
+              </a:lnSpc>
+            </a:pPr>
+            <a:r>
+              <a:rPr sz="1600" b="1">
+                <a:solidFill>
+                  <a:srgbClr val="E8ECF3"/>
+                </a:solidFill>
+                <a:latin typeface="Helvetica Neue"/>
+              </a:rPr>
+              <a:t>One language, three scanners</a:t>
+            </a:r>
+          </a:p>
+        </p:txBody>
+      </p:sp>
+      <p:sp>
+        <p:nvSpPr>
+          <p:cNvPr id="14" name="TextBox 13"/>
+          <p:cNvSpPr txBox="1"/>
+          <p:nvPr/>
+        </p:nvSpPr>
+        <p:spPr>
+          <a:xfrm>
+            <a:off x="5852160" y="4151376"/>
+            <a:ext cx="5303520" cy="914400"/>
+          </a:xfrm>
+          <a:prstGeom prst="rect">
+            <a:avLst/>
+          </a:prstGeom>
+          <a:noFill/>
+        </p:spPr>
+        <p:txBody>
+          <a:bodyPr wrap="square">
+            <a:spAutoFit/>
+          </a:bodyPr>
+          <a:lstStyle/>
+          <a:p>
+            <a:pPr algn="l">
+              <a:lnSpc>
+                <a:spcPct val="130000"/>
+              </a:lnSpc>
+            </a:pPr>
+            <a:r>
+              <a:rPr sz="1400" b="0">
+                <a:solidFill>
+                  <a:srgbClr val="8B97AB"/>
+                </a:solidFill>
+                <a:latin typeface="Helvetica Neue"/>
+              </a:rPr>
+              <a:t>One Python target today. Breadth is where every competitor is ahead.</a:t>
+            </a:r>
+          </a:p>
+        </p:txBody>
+      </p:sp>
+      <p:sp>
+        <p:nvSpPr>
+          <p:cNvPr id="15" name="TextBox 14"/>
+          <p:cNvSpPr txBox="1"/>
+          <p:nvPr/>
+        </p:nvSpPr>
+        <p:spPr>
+          <a:xfrm>
+            <a:off x="1005840" y="5175504"/>
+            <a:ext cx="640080" cy="365760"/>
+          </a:xfrm>
+          <a:prstGeom prst="rect">
+            <a:avLst/>
+          </a:prstGeom>
+          <a:noFill/>
+        </p:spPr>
+        <p:txBody>
+          <a:bodyPr wrap="square">
+            <a:spAutoFit/>
+          </a:bodyPr>
+          <a:lstStyle/>
+          <a:p>
+            <a:pPr algn="l">
+              <a:lnSpc>
+                <a:spcPct val="120000"/>
+              </a:lnSpc>
+            </a:pPr>
+            <a:r>
+              <a:rPr sz="1500" b="1">
+                <a:solidFill>
+                  <a:srgbClr val="22D3EE"/>
+                </a:solidFill>
+                <a:latin typeface="Menlo"/>
+              </a:rPr>
+              <a:t>04</a:t>
+            </a:r>
+          </a:p>
+        </p:txBody>
+      </p:sp>
+      <p:sp>
+        <p:nvSpPr>
+          <p:cNvPr id="16" name="TextBox 15"/>
+          <p:cNvSpPr txBox="1"/>
+          <p:nvPr/>
+        </p:nvSpPr>
+        <p:spPr>
+          <a:xfrm>
+            <a:off x="1737360" y="5175504"/>
+            <a:ext cx="3931920" cy="640080"/>
+          </a:xfrm>
+          <a:prstGeom prst="rect">
+            <a:avLst/>
+          </a:prstGeom>
+          <a:noFill/>
+        </p:spPr>
+        <p:txBody>
+          <a:bodyPr wrap="square">
+            <a:spAutoFit/>
+          </a:bodyPr>
+          <a:lstStyle/>
+          <a:p>
+            <a:pPr algn="l">
+              <a:lnSpc>
+                <a:spcPct val="115000"/>
+              </a:lnSpc>
+            </a:pPr>
+            <a:r>
+              <a:rPr sz="1600" b="1">
+                <a:solidFill>
+                  <a:srgbClr val="E8ECF3"/>
+                </a:solidFill>
+                <a:latin typeface="Helvetica Neue"/>
+              </a:rPr>
+              <a:t>The change is carried, not applied</a:t>
+            </a:r>
+          </a:p>
+        </p:txBody>
+      </p:sp>
+      <p:sp>
+        <p:nvSpPr>
+          <p:cNvPr id="17" name="TextBox 16"/>
+          <p:cNvSpPr txBox="1"/>
+          <p:nvPr/>
+        </p:nvSpPr>
+        <p:spPr>
+          <a:xfrm>
+            <a:off x="5852160" y="5175504"/>
+            <a:ext cx="5303520" cy="914400"/>
+          </a:xfrm>
+          <a:prstGeom prst="rect">
+            <a:avLst/>
+          </a:prstGeom>
+          <a:noFill/>
+        </p:spPr>
+        <p:txBody>
+          <a:bodyPr wrap="square">
+            <a:spAutoFit/>
+          </a:bodyPr>
+          <a:lstStyle/>
+          <a:p>
+            <a:pPr algn="l">
+              <a:lnSpc>
+                <a:spcPct val="130000"/>
+              </a:lnSpc>
+            </a:pPr>
+            <a:r>
+              <a:rPr sz="1400" b="0">
+                <a:solidFill>
+                  <a:srgbClr val="8B97AB"/>
+                </a:solidFill>
+                <a:latin typeface="Helvetica Neue"/>
+              </a:rPr>
+              <a:t>A merged pull request carries the reviewed diff as a file. Applying it to the source is next.</a:t>
             </a:r>
           </a:p>
         </p:txBody>
@@ -12161,7 +12861,7 @@
             <a:avLst/>
           </a:prstGeom>
           <a:solidFill>
-            <a:srgbClr val="070A10"/>
+            <a:srgbClr val="0B0F17"/>
           </a:solidFill>
           <a:ln>
             <a:noFill/>
@@ -12192,14 +12892,92 @@
       </p:sp>
       <p:sp>
         <p:nvSpPr>
-          <p:cNvPr id="3" name="Rectangle 2"/>
+          <p:cNvPr id="3" name="TextBox 2"/>
+          <p:cNvSpPr txBox="1"/>
+          <p:nvPr/>
+        </p:nvSpPr>
+        <p:spPr>
+          <a:xfrm>
+            <a:off x="1005840" y="658368"/>
+            <a:ext cx="10149840" cy="292608"/>
+          </a:xfrm>
+          <a:prstGeom prst="rect">
+            <a:avLst/>
+          </a:prstGeom>
+          <a:noFill/>
+        </p:spPr>
+        <p:txBody>
+          <a:bodyPr wrap="square">
+            <a:spAutoFit/>
+          </a:bodyPr>
+          <a:lstStyle/>
+          <a:p>
+            <a:pPr algn="l">
+              <a:lnSpc>
+                <a:spcPct val="100000"/>
+              </a:lnSpc>
+            </a:pPr>
+            <a:r>
+              <a:rPr sz="1200" b="1">
+                <a:solidFill>
+                  <a:srgbClr val="22D3EE"/>
+                </a:solidFill>
+                <a:latin typeface="Helvetica Neue"/>
+              </a:rPr>
+              <a:t>FUTURE WORK</a:t>
+            </a:r>
+          </a:p>
+        </p:txBody>
+      </p:sp>
+      <p:sp>
+        <p:nvSpPr>
+          <p:cNvPr id="4" name="TextBox 3"/>
+          <p:cNvSpPr txBox="1"/>
+          <p:nvPr/>
+        </p:nvSpPr>
+        <p:spPr>
+          <a:xfrm>
+            <a:off x="1005840" y="1078992"/>
+            <a:ext cx="10149840" cy="914400"/>
+          </a:xfrm>
+          <a:prstGeom prst="rect">
+            <a:avLst/>
+          </a:prstGeom>
+          <a:noFill/>
+        </p:spPr>
+        <p:txBody>
+          <a:bodyPr wrap="square">
+            <a:spAutoFit/>
+          </a:bodyPr>
+          <a:lstStyle/>
+          <a:p>
+            <a:pPr algn="l">
+              <a:lnSpc>
+                <a:spcPct val="106000"/>
+              </a:lnSpc>
+            </a:pPr>
+            <a:r>
+              <a:rPr sz="3200" b="1">
+                <a:solidFill>
+                  <a:srgbClr val="E8ECF3"/>
+                </a:solidFill>
+                <a:latin typeface="Helvetica Neue"/>
+              </a:rPr>
+              <a:t>What is next</a:t>
+            </a:r>
+          </a:p>
+        </p:txBody>
+      </p:sp>
+      <p:sp>
+        <p:nvSpPr>
+          <p:cNvPr id="5" name="deckkit-rule"/>
           <p:cNvSpPr/>
           <p:nvPr/>
         </p:nvSpPr>
         <p:spPr>
           <a:xfrm>
-            <a:off x="0" y="0"/>
-            <a:ext cx="310896" cy="6858000"/>
+            <a:off x="1005840" y="1883664"/>
+            <a:ext cx="1463040" cy="38100"/>
           </a:xfrm>
           <a:prstGeom prst="rect">
             <a:avLst/>
@@ -12236,14 +13014,14 @@
       </p:sp>
       <p:sp>
         <p:nvSpPr>
-          <p:cNvPr id="4" name="TextBox 3"/>
+          <p:cNvPr id="6" name="TextBox 5"/>
           <p:cNvSpPr txBox="1"/>
           <p:nvPr/>
         </p:nvSpPr>
         <p:spPr>
           <a:xfrm>
-            <a:off x="1005840" y="1828800"/>
-            <a:ext cx="10149840" cy="822960"/>
+            <a:off x="1005840" y="2103120"/>
+            <a:ext cx="640080" cy="365760"/>
           </a:xfrm>
           <a:prstGeom prst="rect">
             <a:avLst/>
@@ -12262,33 +13040,944 @@
               </a:lnSpc>
             </a:pPr>
             <a:r>
-              <a:rPr sz="4400" b="1">
+              <a:rPr sz="1500" b="1">
+                <a:solidFill>
+                  <a:srgbClr val="22D3EE"/>
+                </a:solidFill>
+                <a:latin typeface="Menlo"/>
+              </a:rPr>
+              <a:t>01</a:t>
+            </a:r>
+          </a:p>
+        </p:txBody>
+      </p:sp>
+      <p:sp>
+        <p:nvSpPr>
+          <p:cNvPr id="7" name="TextBox 6"/>
+          <p:cNvSpPr txBox="1"/>
+          <p:nvPr/>
+        </p:nvSpPr>
+        <p:spPr>
+          <a:xfrm>
+            <a:off x="1737360" y="2103120"/>
+            <a:ext cx="3931920" cy="640080"/>
+          </a:xfrm>
+          <a:prstGeom prst="rect">
+            <a:avLst/>
+          </a:prstGeom>
+          <a:noFill/>
+        </p:spPr>
+        <p:txBody>
+          <a:bodyPr wrap="square">
+            <a:spAutoFit/>
+          </a:bodyPr>
+          <a:lstStyle/>
+          <a:p>
+            <a:pPr algn="l">
+              <a:lnSpc>
+                <a:spcPct val="115000"/>
+              </a:lnSpc>
+            </a:pPr>
+            <a:r>
+              <a:rPr sz="1600" b="1">
                 <a:solidFill>
                   <a:srgbClr val="E8ECF3"/>
                 </a:solidFill>
                 <a:latin typeface="Helvetica Neue"/>
               </a:rPr>
-              <a:t>The demonstration</a:t>
-            </a:r>
-          </a:p>
-        </p:txBody>
-      </p:sp>
-      <p:sp>
-        <p:nvSpPr>
-          <p:cNvPr id="5" name="deckkit-rule"/>
+              <a:t>Apply the change, not just carry it</a:t>
+            </a:r>
+          </a:p>
+        </p:txBody>
+      </p:sp>
+      <p:sp>
+        <p:nvSpPr>
+          <p:cNvPr id="8" name="TextBox 7"/>
+          <p:cNvSpPr txBox="1"/>
+          <p:nvPr/>
+        </p:nvSpPr>
+        <p:spPr>
+          <a:xfrm>
+            <a:off x="5852160" y="2103120"/>
+            <a:ext cx="5303520" cy="914400"/>
+          </a:xfrm>
+          <a:prstGeom prst="rect">
+            <a:avLst/>
+          </a:prstGeom>
+          <a:noFill/>
+        </p:spPr>
+        <p:txBody>
+          <a:bodyPr wrap="square">
+            <a:spAutoFit/>
+          </a:bodyPr>
+          <a:lstStyle/>
+          <a:p>
+            <a:pPr algn="l">
+              <a:lnSpc>
+                <a:spcPct val="130000"/>
+              </a:lnSpc>
+            </a:pPr>
+            <a:r>
+              <a:rPr sz="1400" b="0">
+                <a:solidFill>
+                  <a:srgbClr val="8B97AB"/>
+                </a:solidFill>
+                <a:latin typeface="Helvetica Neue"/>
+              </a:rPr>
+              <a:t>Today a merged pull request carries the reviewed diff as a file. Applying it to the source is next, and lets a generated test run against the change.</a:t>
+            </a:r>
+          </a:p>
+        </p:txBody>
+      </p:sp>
+      <p:sp>
+        <p:nvSpPr>
+          <p:cNvPr id="9" name="TextBox 8"/>
+          <p:cNvSpPr txBox="1"/>
+          <p:nvPr/>
+        </p:nvSpPr>
+        <p:spPr>
+          <a:xfrm>
+            <a:off x="1005840" y="3127248"/>
+            <a:ext cx="640080" cy="365760"/>
+          </a:xfrm>
+          <a:prstGeom prst="rect">
+            <a:avLst/>
+          </a:prstGeom>
+          <a:noFill/>
+        </p:spPr>
+        <p:txBody>
+          <a:bodyPr wrap="square">
+            <a:spAutoFit/>
+          </a:bodyPr>
+          <a:lstStyle/>
+          <a:p>
+            <a:pPr algn="l">
+              <a:lnSpc>
+                <a:spcPct val="120000"/>
+              </a:lnSpc>
+            </a:pPr>
+            <a:r>
+              <a:rPr sz="1500" b="1">
+                <a:solidFill>
+                  <a:srgbClr val="22D3EE"/>
+                </a:solidFill>
+                <a:latin typeface="Menlo"/>
+              </a:rPr>
+              <a:t>02</a:t>
+            </a:r>
+          </a:p>
+        </p:txBody>
+      </p:sp>
+      <p:sp>
+        <p:nvSpPr>
+          <p:cNvPr id="10" name="TextBox 9"/>
+          <p:cNvSpPr txBox="1"/>
+          <p:nvPr/>
+        </p:nvSpPr>
+        <p:spPr>
+          <a:xfrm>
+            <a:off x="1737360" y="3127248"/>
+            <a:ext cx="3931920" cy="640080"/>
+          </a:xfrm>
+          <a:prstGeom prst="rect">
+            <a:avLst/>
+          </a:prstGeom>
+          <a:noFill/>
+        </p:spPr>
+        <p:txBody>
+          <a:bodyPr wrap="square">
+            <a:spAutoFit/>
+          </a:bodyPr>
+          <a:lstStyle/>
+          <a:p>
+            <a:pPr algn="l">
+              <a:lnSpc>
+                <a:spcPct val="115000"/>
+              </a:lnSpc>
+            </a:pPr>
+            <a:r>
+              <a:rPr sz="1600" b="1">
+                <a:solidFill>
+                  <a:srgbClr val="E8ECF3"/>
+                </a:solidFill>
+                <a:latin typeface="Helvetica Neue"/>
+              </a:rPr>
+              <a:t>Join the two test layers</a:t>
+            </a:r>
+          </a:p>
+        </p:txBody>
+      </p:sp>
+      <p:sp>
+        <p:nvSpPr>
+          <p:cNvPr id="11" name="TextBox 10"/>
+          <p:cNvSpPr txBox="1"/>
+          <p:nvPr/>
+        </p:nvSpPr>
+        <p:spPr>
+          <a:xfrm>
+            <a:off x="5852160" y="3127248"/>
+            <a:ext cx="5303520" cy="914400"/>
+          </a:xfrm>
+          <a:prstGeom prst="rect">
+            <a:avLst/>
+          </a:prstGeom>
+          <a:noFill/>
+        </p:spPr>
+        <p:txBody>
+          <a:bodyPr wrap="square">
+            <a:spAutoFit/>
+          </a:bodyPr>
+          <a:lstStyle/>
+          <a:p>
+            <a:pPr algn="l">
+              <a:lnSpc>
+                <a:spcPct val="130000"/>
+              </a:lnSpc>
+            </a:pPr>
+            <a:r>
+              <a:rPr sz="1400" b="0">
+                <a:solidFill>
+                  <a:srgbClr val="8B97AB"/>
+                </a:solidFill>
+                <a:latin typeface="Helvetica Neue"/>
+              </a:rPr>
+              <a:t>Tests are generated from each ticket and Selenium runs in CI; neither checks the other yet.</a:t>
+            </a:r>
+          </a:p>
+        </p:txBody>
+      </p:sp>
+      <p:sp>
+        <p:nvSpPr>
+          <p:cNvPr id="12" name="TextBox 11"/>
+          <p:cNvSpPr txBox="1"/>
+          <p:nvPr/>
+        </p:nvSpPr>
+        <p:spPr>
+          <a:xfrm>
+            <a:off x="1005840" y="4151376"/>
+            <a:ext cx="640080" cy="365760"/>
+          </a:xfrm>
+          <a:prstGeom prst="rect">
+            <a:avLst/>
+          </a:prstGeom>
+          <a:noFill/>
+        </p:spPr>
+        <p:txBody>
+          <a:bodyPr wrap="square">
+            <a:spAutoFit/>
+          </a:bodyPr>
+          <a:lstStyle/>
+          <a:p>
+            <a:pPr algn="l">
+              <a:lnSpc>
+                <a:spcPct val="120000"/>
+              </a:lnSpc>
+            </a:pPr>
+            <a:r>
+              <a:rPr sz="1500" b="1">
+                <a:solidFill>
+                  <a:srgbClr val="22D3EE"/>
+                </a:solidFill>
+                <a:latin typeface="Menlo"/>
+              </a:rPr>
+              <a:t>03</a:t>
+            </a:r>
+          </a:p>
+        </p:txBody>
+      </p:sp>
+      <p:sp>
+        <p:nvSpPr>
+          <p:cNvPr id="13" name="TextBox 12"/>
+          <p:cNvSpPr txBox="1"/>
+          <p:nvPr/>
+        </p:nvSpPr>
+        <p:spPr>
+          <a:xfrm>
+            <a:off x="1737360" y="4151376"/>
+            <a:ext cx="3931920" cy="640080"/>
+          </a:xfrm>
+          <a:prstGeom prst="rect">
+            <a:avLst/>
+          </a:prstGeom>
+          <a:noFill/>
+        </p:spPr>
+        <p:txBody>
+          <a:bodyPr wrap="square">
+            <a:spAutoFit/>
+          </a:bodyPr>
+          <a:lstStyle/>
+          <a:p>
+            <a:pPr algn="l">
+              <a:lnSpc>
+                <a:spcPct val="115000"/>
+              </a:lnSpc>
+            </a:pPr>
+            <a:r>
+              <a:rPr sz="1600" b="1">
+                <a:solidFill>
+                  <a:srgbClr val="E8ECF3"/>
+                </a:solidFill>
+                <a:latin typeface="Helvetica Neue"/>
+              </a:rPr>
+              <a:t>Prompt caching</a:t>
+            </a:r>
+          </a:p>
+        </p:txBody>
+      </p:sp>
+      <p:sp>
+        <p:nvSpPr>
+          <p:cNvPr id="14" name="TextBox 13"/>
+          <p:cNvSpPr txBox="1"/>
+          <p:nvPr/>
+        </p:nvSpPr>
+        <p:spPr>
+          <a:xfrm>
+            <a:off x="5852160" y="4151376"/>
+            <a:ext cx="5303520" cy="914400"/>
+          </a:xfrm>
+          <a:prstGeom prst="rect">
+            <a:avLst/>
+          </a:prstGeom>
+          <a:noFill/>
+        </p:spPr>
+        <p:txBody>
+          <a:bodyPr wrap="square">
+            <a:spAutoFit/>
+          </a:bodyPr>
+          <a:lstStyle/>
+          <a:p>
+            <a:pPr algn="l">
+              <a:lnSpc>
+                <a:spcPct val="130000"/>
+              </a:lnSpc>
+            </a:pPr>
+            <a:r>
+              <a:rPr sz="1400" b="0">
+                <a:solidFill>
+                  <a:srgbClr val="8B97AB"/>
+                </a:solidFill>
+                <a:latin typeface="Helvetica Neue"/>
+              </a:rPr>
+              <a:t>Nothing is cached today: every agent re-sends the same repository snapshot at full price. Cached input costs a quarter as much.</a:t>
+            </a:r>
+          </a:p>
+        </p:txBody>
+      </p:sp>
+      <p:sp>
+        <p:nvSpPr>
+          <p:cNvPr id="15" name="TextBox 14"/>
+          <p:cNvSpPr txBox="1"/>
+          <p:nvPr/>
+        </p:nvSpPr>
+        <p:spPr>
+          <a:xfrm>
+            <a:off x="1005840" y="5175504"/>
+            <a:ext cx="640080" cy="365760"/>
+          </a:xfrm>
+          <a:prstGeom prst="rect">
+            <a:avLst/>
+          </a:prstGeom>
+          <a:noFill/>
+        </p:spPr>
+        <p:txBody>
+          <a:bodyPr wrap="square">
+            <a:spAutoFit/>
+          </a:bodyPr>
+          <a:lstStyle/>
+          <a:p>
+            <a:pPr algn="l">
+              <a:lnSpc>
+                <a:spcPct val="120000"/>
+              </a:lnSpc>
+            </a:pPr>
+            <a:r>
+              <a:rPr sz="1500" b="1">
+                <a:solidFill>
+                  <a:srgbClr val="22D3EE"/>
+                </a:solidFill>
+                <a:latin typeface="Menlo"/>
+              </a:rPr>
+              <a:t>04</a:t>
+            </a:r>
+          </a:p>
+        </p:txBody>
+      </p:sp>
+      <p:sp>
+        <p:nvSpPr>
+          <p:cNvPr id="16" name="TextBox 15"/>
+          <p:cNvSpPr txBox="1"/>
+          <p:nvPr/>
+        </p:nvSpPr>
+        <p:spPr>
+          <a:xfrm>
+            <a:off x="1737360" y="5175504"/>
+            <a:ext cx="3931920" cy="640080"/>
+          </a:xfrm>
+          <a:prstGeom prst="rect">
+            <a:avLst/>
+          </a:prstGeom>
+          <a:noFill/>
+        </p:spPr>
+        <p:txBody>
+          <a:bodyPr wrap="square">
+            <a:spAutoFit/>
+          </a:bodyPr>
+          <a:lstStyle/>
+          <a:p>
+            <a:pPr algn="l">
+              <a:lnSpc>
+                <a:spcPct val="115000"/>
+              </a:lnSpc>
+            </a:pPr>
+            <a:r>
+              <a:rPr sz="1600" b="1">
+                <a:solidFill>
+                  <a:srgbClr val="E8ECF3"/>
+                </a:solidFill>
+                <a:latin typeface="Helvetica Neue"/>
+              </a:rPr>
+              <a:t>More languages, more scanners</a:t>
+            </a:r>
+          </a:p>
+        </p:txBody>
+      </p:sp>
+      <p:sp>
+        <p:nvSpPr>
+          <p:cNvPr id="17" name="TextBox 16"/>
+          <p:cNvSpPr txBox="1"/>
+          <p:nvPr/>
+        </p:nvSpPr>
+        <p:spPr>
+          <a:xfrm>
+            <a:off x="5852160" y="5175504"/>
+            <a:ext cx="5303520" cy="914400"/>
+          </a:xfrm>
+          <a:prstGeom prst="rect">
+            <a:avLst/>
+          </a:prstGeom>
+          <a:noFill/>
+        </p:spPr>
+        <p:txBody>
+          <a:bodyPr wrap="square">
+            <a:spAutoFit/>
+          </a:bodyPr>
+          <a:lstStyle/>
+          <a:p>
+            <a:pPr algn="l">
+              <a:lnSpc>
+                <a:spcPct val="130000"/>
+              </a:lnSpc>
+            </a:pPr>
+            <a:r>
+              <a:rPr sz="1400" b="0">
+                <a:solidFill>
+                  <a:srgbClr val="8B97AB"/>
+                </a:solidFill>
+                <a:latin typeface="Helvetica Neue"/>
+              </a:rPr>
+              <a:t>One Python target and three scanners today. The scoring is a table, so a new scanner is one row.</a:t>
+            </a:r>
+          </a:p>
+        </p:txBody>
+      </p:sp>
+      <p:sp>
+        <p:nvSpPr>
+          <p:cNvPr id="85" name="TextBox 84"/>
+          <p:cNvSpPr txBox="1"/>
+          <p:nvPr/>
+        </p:nvSpPr>
+        <p:spPr>
+          <a:xfrm>
+            <a:off x="11247120" y="6291072"/>
+            <a:ext cx="548640" cy="274320"/>
+          </a:xfrm>
+          <a:prstGeom prst="rect">
+            <a:avLst/>
+          </a:prstGeom>
+          <a:noFill/>
+        </p:spPr>
+        <p:txBody>
+          <a:bodyPr wrap="square">
+            <a:spAutoFit/>
+          </a:bodyPr>
+          <a:lstStyle/>
+          <a:p>
+            <a:pPr algn="r">
+              <a:lnSpc>
+                <a:spcPct val="120000"/>
+              </a:lnSpc>
+            </a:pPr>
+            <a:r>
+              <a:rPr sz="1100" b="0">
+                <a:solidFill>
+                  <a:srgbClr val="8B97AB"/>
+                </a:solidFill>
+                <a:latin typeface="Helvetica Neue"/>
+              </a:rPr>
+              <a:t>16</a:t>
+            </a:r>
+          </a:p>
+        </p:txBody>
+      </p:sp>
+    </p:spTree>
+  </p:cSld>
+  <p:clrMapOvr>
+    <a:masterClrMapping/>
+  </p:clrMapOvr>
+  <p:transition spd="med">
+    <p:wipe dir="l"/>
+  </p:transition>
+  <p:timing>
+    <p:tnLst>
+      <p:par>
+        <p:cTn id="1" dur="indefinite" restart="never" nodeType="tmRoot">
+          <p:childTnLst>
+            <p:seq concurrent="1" nextAc="seek">
+              <p:cTn id="2" dur="indefinite" nodeType="mainSeq">
+                <p:childTnLst>
+                  <p:par>
+                    <p:cTn id="10" fill="hold">
+                      <p:stCondLst>
+                        <p:cond delay="indefinite"/>
+                      </p:stCondLst>
+                      <p:childTnLst>
+                        <p:par>
+                          <p:cTn id="11" fill="hold">
+                            <p:stCondLst>
+                              <p:cond delay="0"/>
+                            </p:stCondLst>
+                            <p:childTnLst>
+                              <p:par>
+                                <p:cTn id="12" presetID="10" presetClass="entr" presetSubtype="0" fill="hold" grpId="0" nodeType="clickEffect">
+                                  <p:stCondLst>
+                                    <p:cond delay="0"/>
+                                  </p:stCondLst>
+                                  <p:childTnLst>
+                                    <p:set>
+                                      <p:cBhvr>
+                                        <p:cTn id="13" dur="1" fill="hold"/>
+                                        <p:tgtEl>
+                                          <p:spTgt spid="6"/>
+                                        </p:tgtEl>
+                                        <p:attrNameLst>
+                                          <p:attrName>style.visibility</p:attrName>
+                                        </p:attrNameLst>
+                                      </p:cBhvr>
+                                      <p:to>
+                                        <p:strVal val="visible"/>
+                                      </p:to>
+                                    </p:set>
+                                    <p:animEffect transition="in" filter="fade">
+                                      <p:cBhvr>
+                                        <p:cTn id="14" dur="450"/>
+                                        <p:tgtEl>
+                                          <p:spTgt spid="6"/>
+                                        </p:tgtEl>
+                                      </p:cBhvr>
+                                    </p:animEffect>
+                                  </p:childTnLst>
+                                </p:cTn>
+                              </p:par>
+                            </p:childTnLst>
+                          </p:cTn>
+                        </p:par>
+                      </p:childTnLst>
+                    </p:cTn>
+                  </p:par>
+                  <p:par>
+                    <p:cTn id="20" fill="hold">
+                      <p:stCondLst>
+                        <p:cond delay="indefinite"/>
+                      </p:stCondLst>
+                      <p:childTnLst>
+                        <p:par>
+                          <p:cTn id="21" fill="hold">
+                            <p:stCondLst>
+                              <p:cond delay="0"/>
+                            </p:stCondLst>
+                            <p:childTnLst>
+                              <p:par>
+                                <p:cTn id="22" presetID="10" presetClass="entr" presetSubtype="0" fill="hold" grpId="0" nodeType="afterEffect">
+                                  <p:stCondLst>
+                                    <p:cond delay="0"/>
+                                  </p:stCondLst>
+                                  <p:childTnLst>
+                                    <p:set>
+                                      <p:cBhvr>
+                                        <p:cTn id="23" dur="1" fill="hold"/>
+                                        <p:tgtEl>
+                                          <p:spTgt spid="7"/>
+                                        </p:tgtEl>
+                                        <p:attrNameLst>
+                                          <p:attrName>style.visibility</p:attrName>
+                                        </p:attrNameLst>
+                                      </p:cBhvr>
+                                      <p:to>
+                                        <p:strVal val="visible"/>
+                                      </p:to>
+                                    </p:set>
+                                    <p:animEffect transition="in" filter="fade">
+                                      <p:cBhvr>
+                                        <p:cTn id="24" dur="450"/>
+                                        <p:tgtEl>
+                                          <p:spTgt spid="7"/>
+                                        </p:tgtEl>
+                                      </p:cBhvr>
+                                    </p:animEffect>
+                                  </p:childTnLst>
+                                </p:cTn>
+                              </p:par>
+                            </p:childTnLst>
+                          </p:cTn>
+                        </p:par>
+                      </p:childTnLst>
+                    </p:cTn>
+                  </p:par>
+                  <p:par>
+                    <p:cTn id="30" fill="hold">
+                      <p:stCondLst>
+                        <p:cond delay="indefinite"/>
+                      </p:stCondLst>
+                      <p:childTnLst>
+                        <p:par>
+                          <p:cTn id="31" fill="hold">
+                            <p:stCondLst>
+                              <p:cond delay="0"/>
+                            </p:stCondLst>
+                            <p:childTnLst>
+                              <p:par>
+                                <p:cTn id="32" presetID="10" presetClass="entr" presetSubtype="0" fill="hold" grpId="0" nodeType="afterEffect">
+                                  <p:stCondLst>
+                                    <p:cond delay="0"/>
+                                  </p:stCondLst>
+                                  <p:childTnLst>
+                                    <p:set>
+                                      <p:cBhvr>
+                                        <p:cTn id="33" dur="1" fill="hold"/>
+                                        <p:tgtEl>
+                                          <p:spTgt spid="9"/>
+                                        </p:tgtEl>
+                                        <p:attrNameLst>
+                                          <p:attrName>style.visibility</p:attrName>
+                                        </p:attrNameLst>
+                                      </p:cBhvr>
+                                      <p:to>
+                                        <p:strVal val="visible"/>
+                                      </p:to>
+                                    </p:set>
+                                    <p:animEffect transition="in" filter="fade">
+                                      <p:cBhvr>
+                                        <p:cTn id="34" dur="450"/>
+                                        <p:tgtEl>
+                                          <p:spTgt spid="9"/>
+                                        </p:tgtEl>
+                                      </p:cBhvr>
+                                    </p:animEffect>
+                                  </p:childTnLst>
+                                </p:cTn>
+                              </p:par>
+                            </p:childTnLst>
+                          </p:cTn>
+                        </p:par>
+                      </p:childTnLst>
+                    </p:cTn>
+                  </p:par>
+                  <p:par>
+                    <p:cTn id="40" fill="hold">
+                      <p:stCondLst>
+                        <p:cond delay="indefinite"/>
+                      </p:stCondLst>
+                      <p:childTnLst>
+                        <p:par>
+                          <p:cTn id="41" fill="hold">
+                            <p:stCondLst>
+                              <p:cond delay="0"/>
+                            </p:stCondLst>
+                            <p:childTnLst>
+                              <p:par>
+                                <p:cTn id="42" presetID="10" presetClass="entr" presetSubtype="0" fill="hold" grpId="0" nodeType="afterEffect">
+                                  <p:stCondLst>
+                                    <p:cond delay="0"/>
+                                  </p:stCondLst>
+                                  <p:childTnLst>
+                                    <p:set>
+                                      <p:cBhvr>
+                                        <p:cTn id="43" dur="1" fill="hold"/>
+                                        <p:tgtEl>
+                                          <p:spTgt spid="10"/>
+                                        </p:tgtEl>
+                                        <p:attrNameLst>
+                                          <p:attrName>style.visibility</p:attrName>
+                                        </p:attrNameLst>
+                                      </p:cBhvr>
+                                      <p:to>
+                                        <p:strVal val="visible"/>
+                                      </p:to>
+                                    </p:set>
+                                    <p:animEffect transition="in" filter="fade">
+                                      <p:cBhvr>
+                                        <p:cTn id="44" dur="450"/>
+                                        <p:tgtEl>
+                                          <p:spTgt spid="10"/>
+                                        </p:tgtEl>
+                                      </p:cBhvr>
+                                    </p:animEffect>
+                                  </p:childTnLst>
+                                </p:cTn>
+                              </p:par>
+                            </p:childTnLst>
+                          </p:cTn>
+                        </p:par>
+                      </p:childTnLst>
+                    </p:cTn>
+                  </p:par>
+                  <p:par>
+                    <p:cTn id="50" fill="hold">
+                      <p:stCondLst>
+                        <p:cond delay="indefinite"/>
+                      </p:stCondLst>
+                      <p:childTnLst>
+                        <p:par>
+                          <p:cTn id="51" fill="hold">
+                            <p:stCondLst>
+                              <p:cond delay="0"/>
+                            </p:stCondLst>
+                            <p:childTnLst>
+                              <p:par>
+                                <p:cTn id="52" presetID="10" presetClass="entr" presetSubtype="0" fill="hold" grpId="0" nodeType="afterEffect">
+                                  <p:stCondLst>
+                                    <p:cond delay="0"/>
+                                  </p:stCondLst>
+                                  <p:childTnLst>
+                                    <p:set>
+                                      <p:cBhvr>
+                                        <p:cTn id="53" dur="1" fill="hold"/>
+                                        <p:tgtEl>
+                                          <p:spTgt spid="12"/>
+                                        </p:tgtEl>
+                                        <p:attrNameLst>
+                                          <p:attrName>style.visibility</p:attrName>
+                                        </p:attrNameLst>
+                                      </p:cBhvr>
+                                      <p:to>
+                                        <p:strVal val="visible"/>
+                                      </p:to>
+                                    </p:set>
+                                    <p:animEffect transition="in" filter="fade">
+                                      <p:cBhvr>
+                                        <p:cTn id="54" dur="450"/>
+                                        <p:tgtEl>
+                                          <p:spTgt spid="12"/>
+                                        </p:tgtEl>
+                                      </p:cBhvr>
+                                    </p:animEffect>
+                                  </p:childTnLst>
+                                </p:cTn>
+                              </p:par>
+                            </p:childTnLst>
+                          </p:cTn>
+                        </p:par>
+                      </p:childTnLst>
+                    </p:cTn>
+                  </p:par>
+                  <p:par>
+                    <p:cTn id="60" fill="hold">
+                      <p:stCondLst>
+                        <p:cond delay="indefinite"/>
+                      </p:stCondLst>
+                      <p:childTnLst>
+                        <p:par>
+                          <p:cTn id="61" fill="hold">
+                            <p:stCondLst>
+                              <p:cond delay="0"/>
+                            </p:stCondLst>
+                            <p:childTnLst>
+                              <p:par>
+                                <p:cTn id="62" presetID="10" presetClass="entr" presetSubtype="0" fill="hold" grpId="0" nodeType="afterEffect">
+                                  <p:stCondLst>
+                                    <p:cond delay="0"/>
+                                  </p:stCondLst>
+                                  <p:childTnLst>
+                                    <p:set>
+                                      <p:cBhvr>
+                                        <p:cTn id="63" dur="1" fill="hold"/>
+                                        <p:tgtEl>
+                                          <p:spTgt spid="13"/>
+                                        </p:tgtEl>
+                                        <p:attrNameLst>
+                                          <p:attrName>style.visibility</p:attrName>
+                                        </p:attrNameLst>
+                                      </p:cBhvr>
+                                      <p:to>
+                                        <p:strVal val="visible"/>
+                                      </p:to>
+                                    </p:set>
+                                    <p:animEffect transition="in" filter="fade">
+                                      <p:cBhvr>
+                                        <p:cTn id="64" dur="450"/>
+                                        <p:tgtEl>
+                                          <p:spTgt spid="13"/>
+                                        </p:tgtEl>
+                                      </p:cBhvr>
+                                    </p:animEffect>
+                                  </p:childTnLst>
+                                </p:cTn>
+                              </p:par>
+                            </p:childTnLst>
+                          </p:cTn>
+                        </p:par>
+                      </p:childTnLst>
+                    </p:cTn>
+                  </p:par>
+                  <p:par>
+                    <p:cTn id="70" fill="hold">
+                      <p:stCondLst>
+                        <p:cond delay="indefinite"/>
+                      </p:stCondLst>
+                      <p:childTnLst>
+                        <p:par>
+                          <p:cTn id="71" fill="hold">
+                            <p:stCondLst>
+                              <p:cond delay="0"/>
+                            </p:stCondLst>
+                            <p:childTnLst>
+                              <p:par>
+                                <p:cTn id="72" presetID="10" presetClass="entr" presetSubtype="0" fill="hold" grpId="0" nodeType="afterEffect">
+                                  <p:stCondLst>
+                                    <p:cond delay="0"/>
+                                  </p:stCondLst>
+                                  <p:childTnLst>
+                                    <p:set>
+                                      <p:cBhvr>
+                                        <p:cTn id="73" dur="1" fill="hold"/>
+                                        <p:tgtEl>
+                                          <p:spTgt spid="15"/>
+                                        </p:tgtEl>
+                                        <p:attrNameLst>
+                                          <p:attrName>style.visibility</p:attrName>
+                                        </p:attrNameLst>
+                                      </p:cBhvr>
+                                      <p:to>
+                                        <p:strVal val="visible"/>
+                                      </p:to>
+                                    </p:set>
+                                    <p:animEffect transition="in" filter="fade">
+                                      <p:cBhvr>
+                                        <p:cTn id="74" dur="450"/>
+                                        <p:tgtEl>
+                                          <p:spTgt spid="15"/>
+                                        </p:tgtEl>
+                                      </p:cBhvr>
+                                    </p:animEffect>
+                                  </p:childTnLst>
+                                </p:cTn>
+                              </p:par>
+                            </p:childTnLst>
+                          </p:cTn>
+                        </p:par>
+                      </p:childTnLst>
+                    </p:cTn>
+                  </p:par>
+                  <p:par>
+                    <p:cTn id="80" fill="hold">
+                      <p:stCondLst>
+                        <p:cond delay="indefinite"/>
+                      </p:stCondLst>
+                      <p:childTnLst>
+                        <p:par>
+                          <p:cTn id="81" fill="hold">
+                            <p:stCondLst>
+                              <p:cond delay="0"/>
+                            </p:stCondLst>
+                            <p:childTnLst>
+                              <p:par>
+                                <p:cTn id="82" presetID="10" presetClass="entr" presetSubtype="0" fill="hold" grpId="0" nodeType="afterEffect">
+                                  <p:stCondLst>
+                                    <p:cond delay="0"/>
+                                  </p:stCondLst>
+                                  <p:childTnLst>
+                                    <p:set>
+                                      <p:cBhvr>
+                                        <p:cTn id="83" dur="1" fill="hold"/>
+                                        <p:tgtEl>
+                                          <p:spTgt spid="16"/>
+                                        </p:tgtEl>
+                                        <p:attrNameLst>
+                                          <p:attrName>style.visibility</p:attrName>
+                                        </p:attrNameLst>
+                                      </p:cBhvr>
+                                      <p:to>
+                                        <p:strVal val="visible"/>
+                                      </p:to>
+                                    </p:set>
+                                    <p:animEffect transition="in" filter="fade">
+                                      <p:cBhvr>
+                                        <p:cTn id="84" dur="450"/>
+                                        <p:tgtEl>
+                                          <p:spTgt spid="16"/>
+                                        </p:tgtEl>
+                                      </p:cBhvr>
+                                    </p:animEffect>
+                                  </p:childTnLst>
+                                </p:cTn>
+                              </p:par>
+                            </p:childTnLst>
+                          </p:cTn>
+                        </p:par>
+                      </p:childTnLst>
+                    </p:cTn>
+                  </p:par>
+                </p:childTnLst>
+              </p:cTn>
+              <p:prevCondLst>
+                <p:cond evt="onPrev" delay="0">
+                  <p:tgtEl>
+                    <p:sldTgt/>
+                  </p:tgtEl>
+                </p:cond>
+              </p:prevCondLst>
+              <p:nextCondLst>
+                <p:cond evt="onNext" delay="0">
+                  <p:tgtEl>
+                    <p:sldTgt/>
+                  </p:tgtEl>
+                </p:cond>
+              </p:nextCondLst>
+            </p:seq>
+          </p:childTnLst>
+        </p:cTn>
+      </p:par>
+    </p:tnLst>
+  </p:timing>
+</p:sld>
+</file>
+
+<file path=ppt/slides/slide17.xml><?xml version="1.0" encoding="utf-8"?>
+<p:sld xmlns:a="http://schemas.openxmlformats.org/drawingml/2006/main" xmlns:p="http://schemas.openxmlformats.org/presentationml/2006/main" xmlns:r="http://schemas.openxmlformats.org/officeDocument/2006/relationships">
+  <p:cSld>
+    <p:spTree>
+      <p:nvGrpSpPr>
+        <p:cNvPr id="1" name=""/>
+        <p:cNvGrpSpPr/>
+        <p:nvPr/>
+      </p:nvGrpSpPr>
+      <p:grpSpPr/>
+      <p:sp>
+        <p:nvSpPr>
+          <p:cNvPr id="2" name="Rectangle 1"/>
           <p:cNvSpPr/>
           <p:nvPr/>
         </p:nvSpPr>
         <p:spPr>
           <a:xfrm>
-            <a:off x="1005840" y="2834640"/>
-            <a:ext cx="2011680" cy="38100"/>
+            <a:off x="0" y="0"/>
+            <a:ext cx="12191695" cy="6858000"/>
           </a:xfrm>
           <a:prstGeom prst="rect">
             <a:avLst/>
           </a:prstGeom>
           <a:solidFill>
-            <a:srgbClr val="22D3EE"/>
+            <a:srgbClr val="070A10"/>
           </a:solidFill>
           <a:ln>
             <a:noFill/>
@@ -12319,25 +14008,23 @@
       </p:sp>
       <p:sp>
         <p:nvSpPr>
-          <p:cNvPr id="6" name="Oval 5"/>
+          <p:cNvPr id="3" name="Rectangle 2"/>
           <p:cNvSpPr/>
           <p:nvPr/>
         </p:nvSpPr>
         <p:spPr>
           <a:xfrm>
-            <a:off x="1510284" y="3383280"/>
-            <a:ext cx="118872" cy="118872"/>
-          </a:xfrm>
-          <a:prstGeom prst="ellipse">
+            <a:off x="0" y="0"/>
+            <a:ext cx="310896" cy="6858000"/>
+          </a:xfrm>
+          <a:prstGeom prst="rect">
             <a:avLst/>
           </a:prstGeom>
           <a:solidFill>
             <a:srgbClr val="22D3EE"/>
           </a:solidFill>
-          <a:ln w="25400">
-            <a:solidFill>
-              <a:srgbClr val="22D3EE"/>
-            </a:solidFill>
+          <a:ln>
+            <a:noFill/>
           </a:ln>
           <a:effectLst/>
         </p:spPr>
@@ -12365,14 +14052,53 @@
       </p:sp>
       <p:sp>
         <p:nvSpPr>
-          <p:cNvPr id="7" name="Rectangle 6"/>
+          <p:cNvPr id="4" name="TextBox 3"/>
+          <p:cNvSpPr txBox="1"/>
+          <p:nvPr/>
+        </p:nvSpPr>
+        <p:spPr>
+          <a:xfrm>
+            <a:off x="1005840" y="1828800"/>
+            <a:ext cx="10149840" cy="822960"/>
+          </a:xfrm>
+          <a:prstGeom prst="rect">
+            <a:avLst/>
+          </a:prstGeom>
+          <a:noFill/>
+        </p:spPr>
+        <p:txBody>
+          <a:bodyPr wrap="square">
+            <a:spAutoFit/>
+          </a:bodyPr>
+          <a:lstStyle/>
+          <a:p>
+            <a:pPr algn="l">
+              <a:lnSpc>
+                <a:spcPct val="120000"/>
+              </a:lnSpc>
+            </a:pPr>
+            <a:r>
+              <a:rPr sz="4400" b="1">
+                <a:solidFill>
+                  <a:srgbClr val="E8ECF3"/>
+                </a:solidFill>
+                <a:latin typeface="Helvetica Neue"/>
+              </a:rPr>
+              <a:t>The demonstration</a:t>
+            </a:r>
+          </a:p>
+        </p:txBody>
+      </p:sp>
+      <p:sp>
+        <p:nvSpPr>
+          <p:cNvPr id="5" name="deckkit-rule"/>
           <p:cNvSpPr/>
           <p:nvPr/>
         </p:nvSpPr>
         <p:spPr>
           <a:xfrm>
-            <a:off x="1629156" y="3433572"/>
-            <a:ext cx="1008888" cy="18288"/>
+            <a:off x="1005840" y="2834640"/>
+            <a:ext cx="2011680" cy="38100"/>
           </a:xfrm>
           <a:prstGeom prst="rect">
             <a:avLst/>
@@ -12409,59 +14135,20 @@
       </p:sp>
       <p:sp>
         <p:nvSpPr>
-          <p:cNvPr id="8" name="TextBox 7"/>
-          <p:cNvSpPr txBox="1"/>
-          <p:nvPr/>
-        </p:nvSpPr>
-        <p:spPr>
-          <a:xfrm>
-            <a:off x="1005840" y="3694176"/>
-            <a:ext cx="1127760" cy="274320"/>
-          </a:xfrm>
-          <a:prstGeom prst="rect">
-            <a:avLst/>
-          </a:prstGeom>
-          <a:noFill/>
-        </p:spPr>
-        <p:txBody>
-          <a:bodyPr wrap="square">
-            <a:spAutoFit/>
-          </a:bodyPr>
-          <a:lstStyle/>
-          <a:p>
-            <a:pPr algn="ctr">
-              <a:lnSpc>
-                <a:spcPct val="100000"/>
-              </a:lnSpc>
-            </a:pPr>
-            <a:r>
-              <a:rPr sz="1100" b="0">
-                <a:solidFill>
-                  <a:srgbClr val="E8ECF3"/>
-                </a:solidFill>
-                <a:latin typeface="Menlo"/>
-              </a:rPr>
-              <a:t>plan</a:t>
-            </a:r>
-          </a:p>
-        </p:txBody>
-      </p:sp>
-      <p:sp>
-        <p:nvSpPr>
-          <p:cNvPr id="9" name="Oval 8"/>
+          <p:cNvPr id="6" name="Oval 5"/>
           <p:cNvSpPr/>
           <p:nvPr/>
         </p:nvSpPr>
         <p:spPr>
           <a:xfrm>
-            <a:off x="2610612" y="3383280"/>
-            <a:ext cx="173736" cy="173736"/>
+            <a:off x="1510284" y="3383280"/>
+            <a:ext cx="118872" cy="118872"/>
           </a:xfrm>
           <a:prstGeom prst="ellipse">
             <a:avLst/>
           </a:prstGeom>
           <a:solidFill>
-            <a:srgbClr val="0B0F17"/>
+            <a:srgbClr val="22D3EE"/>
           </a:solidFill>
           <a:ln w="25400">
             <a:solidFill>
@@ -12494,14 +14181,14 @@
       </p:sp>
       <p:sp>
         <p:nvSpPr>
-          <p:cNvPr id="10" name="Rectangle 9"/>
+          <p:cNvPr id="7" name="Rectangle 6"/>
           <p:cNvSpPr/>
           <p:nvPr/>
         </p:nvSpPr>
         <p:spPr>
           <a:xfrm>
-            <a:off x="2784348" y="3461004"/>
-            <a:ext cx="954024" cy="18288"/>
+            <a:off x="1629156" y="3433572"/>
+            <a:ext cx="1008888" cy="18288"/>
           </a:xfrm>
           <a:prstGeom prst="rect">
             <a:avLst/>
@@ -12538,13 +14225,13 @@
       </p:sp>
       <p:sp>
         <p:nvSpPr>
-          <p:cNvPr id="11" name="TextBox 10"/>
+          <p:cNvPr id="8" name="TextBox 7"/>
           <p:cNvSpPr txBox="1"/>
           <p:nvPr/>
         </p:nvSpPr>
         <p:spPr>
           <a:xfrm>
-            <a:off x="2133600" y="3694176"/>
+            <a:off x="1005840" y="3694176"/>
             <a:ext cx="1127760" cy="274320"/>
           </a:xfrm>
           <a:prstGeom prst="rect">
@@ -12570,27 +14257,27 @@
                 </a:solidFill>
                 <a:latin typeface="Menlo"/>
               </a:rPr>
-              <a:t>gate1</a:t>
-            </a:r>
-          </a:p>
-        </p:txBody>
-      </p:sp>
-      <p:sp>
-        <p:nvSpPr>
-          <p:cNvPr id="12" name="Oval 11"/>
+              <a:t>plan</a:t>
+            </a:r>
+          </a:p>
+        </p:txBody>
+      </p:sp>
+      <p:sp>
+        <p:nvSpPr>
+          <p:cNvPr id="9" name="Oval 8"/>
           <p:cNvSpPr/>
           <p:nvPr/>
         </p:nvSpPr>
         <p:spPr>
           <a:xfrm>
-            <a:off x="3765804" y="3383280"/>
-            <a:ext cx="118872" cy="118872"/>
+            <a:off x="2610612" y="3383280"/>
+            <a:ext cx="173736" cy="173736"/>
           </a:xfrm>
           <a:prstGeom prst="ellipse">
             <a:avLst/>
           </a:prstGeom>
           <a:solidFill>
-            <a:srgbClr val="22D3EE"/>
+            <a:srgbClr val="0B0F17"/>
           </a:solidFill>
           <a:ln w="25400">
             <a:solidFill>
@@ -12623,14 +14310,14 @@
       </p:sp>
       <p:sp>
         <p:nvSpPr>
-          <p:cNvPr id="13" name="Rectangle 12"/>
+          <p:cNvPr id="10" name="Rectangle 9"/>
           <p:cNvSpPr/>
           <p:nvPr/>
         </p:nvSpPr>
         <p:spPr>
           <a:xfrm>
-            <a:off x="3884676" y="3433572"/>
-            <a:ext cx="1008888" cy="18288"/>
+            <a:off x="2784348" y="3461004"/>
+            <a:ext cx="954024" cy="18288"/>
           </a:xfrm>
           <a:prstGeom prst="rect">
             <a:avLst/>
@@ -12667,13 +14354,13 @@
       </p:sp>
       <p:sp>
         <p:nvSpPr>
-          <p:cNvPr id="14" name="TextBox 13"/>
+          <p:cNvPr id="11" name="TextBox 10"/>
           <p:cNvSpPr txBox="1"/>
           <p:nvPr/>
         </p:nvSpPr>
         <p:spPr>
           <a:xfrm>
-            <a:off x="3261360" y="3694176"/>
+            <a:off x="2133600" y="3694176"/>
             <a:ext cx="1127760" cy="274320"/>
           </a:xfrm>
           <a:prstGeom prst="rect">
@@ -12699,20 +14386,20 @@
                 </a:solidFill>
                 <a:latin typeface="Menlo"/>
               </a:rPr>
-              <a:t>develop</a:t>
-            </a:r>
-          </a:p>
-        </p:txBody>
-      </p:sp>
-      <p:sp>
-        <p:nvSpPr>
-          <p:cNvPr id="15" name="Oval 14"/>
+              <a:t>gate1</a:t>
+            </a:r>
+          </a:p>
+        </p:txBody>
+      </p:sp>
+      <p:sp>
+        <p:nvSpPr>
+          <p:cNvPr id="12" name="Oval 11"/>
           <p:cNvSpPr/>
           <p:nvPr/>
         </p:nvSpPr>
         <p:spPr>
           <a:xfrm>
-            <a:off x="4893564" y="3383280"/>
+            <a:off x="3765804" y="3383280"/>
             <a:ext cx="118872" cy="118872"/>
           </a:xfrm>
           <a:prstGeom prst="ellipse">
@@ -12752,13 +14439,13 @@
       </p:sp>
       <p:sp>
         <p:nvSpPr>
-          <p:cNvPr id="16" name="Rectangle 15"/>
+          <p:cNvPr id="13" name="Rectangle 12"/>
           <p:cNvSpPr/>
           <p:nvPr/>
         </p:nvSpPr>
         <p:spPr>
           <a:xfrm>
-            <a:off x="5012436" y="3433572"/>
+            <a:off x="3884676" y="3433572"/>
             <a:ext cx="1008888" cy="18288"/>
           </a:xfrm>
           <a:prstGeom prst="rect">
@@ -12796,13 +14483,13 @@
       </p:sp>
       <p:sp>
         <p:nvSpPr>
-          <p:cNvPr id="17" name="TextBox 16"/>
+          <p:cNvPr id="14" name="TextBox 13"/>
           <p:cNvSpPr txBox="1"/>
           <p:nvPr/>
         </p:nvSpPr>
         <p:spPr>
           <a:xfrm>
-            <a:off x="4389120" y="3694176"/>
+            <a:off x="3261360" y="3694176"/>
             <a:ext cx="1127760" cy="274320"/>
           </a:xfrm>
           <a:prstGeom prst="rect">
@@ -12828,31 +14515,31 @@
                 </a:solidFill>
                 <a:latin typeface="Menlo"/>
               </a:rPr>
-              <a:t>review</a:t>
-            </a:r>
-          </a:p>
-        </p:txBody>
-      </p:sp>
-      <p:sp>
-        <p:nvSpPr>
-          <p:cNvPr id="18" name="Oval 17"/>
+              <a:t>develop</a:t>
+            </a:r>
+          </a:p>
+        </p:txBody>
+      </p:sp>
+      <p:sp>
+        <p:nvSpPr>
+          <p:cNvPr id="15" name="Oval 14"/>
           <p:cNvSpPr/>
           <p:nvPr/>
         </p:nvSpPr>
         <p:spPr>
           <a:xfrm>
-            <a:off x="6021324" y="3383280"/>
+            <a:off x="4893564" y="3383280"/>
             <a:ext cx="118872" cy="118872"/>
           </a:xfrm>
           <a:prstGeom prst="ellipse">
             <a:avLst/>
           </a:prstGeom>
           <a:solidFill>
-            <a:srgbClr val="FB7185"/>
+            <a:srgbClr val="22D3EE"/>
           </a:solidFill>
           <a:ln w="25400">
             <a:solidFill>
-              <a:srgbClr val="FB7185"/>
+              <a:srgbClr val="22D3EE"/>
             </a:solidFill>
           </a:ln>
           <a:effectLst/>
@@ -12881,20 +14568,20 @@
       </p:sp>
       <p:sp>
         <p:nvSpPr>
-          <p:cNvPr id="19" name="Rectangle 18"/>
+          <p:cNvPr id="16" name="Rectangle 15"/>
           <p:cNvSpPr/>
           <p:nvPr/>
         </p:nvSpPr>
         <p:spPr>
           <a:xfrm>
-            <a:off x="6140196" y="3433572"/>
+            <a:off x="5012436" y="3433572"/>
             <a:ext cx="1008888" cy="18288"/>
           </a:xfrm>
           <a:prstGeom prst="rect">
             <a:avLst/>
           </a:prstGeom>
           <a:solidFill>
-            <a:srgbClr val="1F2937"/>
+            <a:srgbClr val="22D3EE"/>
           </a:solidFill>
           <a:ln>
             <a:noFill/>
@@ -12925,13 +14612,13 @@
       </p:sp>
       <p:sp>
         <p:nvSpPr>
-          <p:cNvPr id="20" name="TextBox 19"/>
+          <p:cNvPr id="17" name="TextBox 16"/>
           <p:cNvSpPr txBox="1"/>
           <p:nvPr/>
         </p:nvSpPr>
         <p:spPr>
           <a:xfrm>
-            <a:off x="5516880" y="3694176"/>
+            <a:off x="4389120" y="3694176"/>
             <a:ext cx="1127760" cy="274320"/>
           </a:xfrm>
           <a:prstGeom prst="rect">
@@ -12957,31 +14644,31 @@
                 </a:solidFill>
                 <a:latin typeface="Menlo"/>
               </a:rPr>
-              <a:t>security</a:t>
-            </a:r>
-          </a:p>
-        </p:txBody>
-      </p:sp>
-      <p:sp>
-        <p:nvSpPr>
-          <p:cNvPr id="21" name="Oval 20"/>
+              <a:t>review</a:t>
+            </a:r>
+          </a:p>
+        </p:txBody>
+      </p:sp>
+      <p:sp>
+        <p:nvSpPr>
+          <p:cNvPr id="18" name="Oval 17"/>
           <p:cNvSpPr/>
           <p:nvPr/>
         </p:nvSpPr>
         <p:spPr>
           <a:xfrm>
-            <a:off x="7121652" y="3383280"/>
-            <a:ext cx="173736" cy="173736"/>
+            <a:off x="6021324" y="3383280"/>
+            <a:ext cx="118872" cy="118872"/>
           </a:xfrm>
           <a:prstGeom prst="ellipse">
             <a:avLst/>
           </a:prstGeom>
           <a:solidFill>
-            <a:srgbClr val="0B0F17"/>
+            <a:srgbClr val="FB7185"/>
           </a:solidFill>
           <a:ln w="25400">
             <a:solidFill>
-              <a:srgbClr val="1F2937"/>
+              <a:srgbClr val="FB7185"/>
             </a:solidFill>
           </a:ln>
           <a:effectLst/>
@@ -13010,14 +14697,14 @@
       </p:sp>
       <p:sp>
         <p:nvSpPr>
-          <p:cNvPr id="22" name="Rectangle 21"/>
+          <p:cNvPr id="19" name="Rectangle 18"/>
           <p:cNvSpPr/>
           <p:nvPr/>
         </p:nvSpPr>
         <p:spPr>
           <a:xfrm>
-            <a:off x="7295388" y="3461004"/>
-            <a:ext cx="954024" cy="18288"/>
+            <a:off x="6140196" y="3433572"/>
+            <a:ext cx="1008888" cy="18288"/>
           </a:xfrm>
           <a:prstGeom prst="rect">
             <a:avLst/>
@@ -13054,13 +14741,13 @@
       </p:sp>
       <p:sp>
         <p:nvSpPr>
-          <p:cNvPr id="23" name="TextBox 22"/>
+          <p:cNvPr id="20" name="TextBox 19"/>
           <p:cNvSpPr txBox="1"/>
           <p:nvPr/>
         </p:nvSpPr>
         <p:spPr>
           <a:xfrm>
-            <a:off x="6644640" y="3694176"/>
+            <a:off x="5516880" y="3694176"/>
             <a:ext cx="1127760" cy="274320"/>
           </a:xfrm>
           <a:prstGeom prst="rect">
@@ -13082,31 +14769,31 @@
             <a:r>
               <a:rPr sz="1100" b="0">
                 <a:solidFill>
-                  <a:srgbClr val="8B97AB"/>
+                  <a:srgbClr val="E8ECF3"/>
                 </a:solidFill>
                 <a:latin typeface="Menlo"/>
               </a:rPr>
-              <a:t>gate2</a:t>
-            </a:r>
-          </a:p>
-        </p:txBody>
-      </p:sp>
-      <p:sp>
-        <p:nvSpPr>
-          <p:cNvPr id="24" name="Oval 23"/>
+              <a:t>security</a:t>
+            </a:r>
+          </a:p>
+        </p:txBody>
+      </p:sp>
+      <p:sp>
+        <p:nvSpPr>
+          <p:cNvPr id="21" name="Oval 20"/>
           <p:cNvSpPr/>
           <p:nvPr/>
         </p:nvSpPr>
         <p:spPr>
           <a:xfrm>
-            <a:off x="8276844" y="3383280"/>
-            <a:ext cx="118872" cy="118872"/>
+            <a:off x="7121652" y="3383280"/>
+            <a:ext cx="173736" cy="173736"/>
           </a:xfrm>
           <a:prstGeom prst="ellipse">
             <a:avLst/>
           </a:prstGeom>
           <a:solidFill>
-            <a:srgbClr val="1F2937"/>
+            <a:srgbClr val="0B0F17"/>
           </a:solidFill>
           <a:ln w="25400">
             <a:solidFill>
@@ -13139,14 +14826,14 @@
       </p:sp>
       <p:sp>
         <p:nvSpPr>
-          <p:cNvPr id="25" name="Rectangle 24"/>
+          <p:cNvPr id="22" name="Rectangle 21"/>
           <p:cNvSpPr/>
           <p:nvPr/>
         </p:nvSpPr>
         <p:spPr>
           <a:xfrm>
-            <a:off x="8395716" y="3433572"/>
-            <a:ext cx="1008888" cy="18288"/>
+            <a:off x="7295388" y="3461004"/>
+            <a:ext cx="954024" cy="18288"/>
           </a:xfrm>
           <a:prstGeom prst="rect">
             <a:avLst/>
@@ -13183,13 +14870,13 @@
       </p:sp>
       <p:sp>
         <p:nvSpPr>
-          <p:cNvPr id="26" name="TextBox 25"/>
+          <p:cNvPr id="23" name="TextBox 22"/>
           <p:cNvSpPr txBox="1"/>
           <p:nvPr/>
         </p:nvSpPr>
         <p:spPr>
           <a:xfrm>
-            <a:off x="7772400" y="3694176"/>
+            <a:off x="6644640" y="3694176"/>
             <a:ext cx="1127760" cy="274320"/>
           </a:xfrm>
           <a:prstGeom prst="rect">
@@ -13215,27 +14902,27 @@
                 </a:solidFill>
                 <a:latin typeface="Menlo"/>
               </a:rPr>
-              <a:t>sre</a:t>
-            </a:r>
-          </a:p>
-        </p:txBody>
-      </p:sp>
-      <p:sp>
-        <p:nvSpPr>
-          <p:cNvPr id="27" name="Oval 26"/>
+              <a:t>gate2</a:t>
+            </a:r>
+          </a:p>
+        </p:txBody>
+      </p:sp>
+      <p:sp>
+        <p:nvSpPr>
+          <p:cNvPr id="24" name="Oval 23"/>
           <p:cNvSpPr/>
           <p:nvPr/>
         </p:nvSpPr>
         <p:spPr>
           <a:xfrm>
-            <a:off x="9377172" y="3383280"/>
-            <a:ext cx="173736" cy="173736"/>
+            <a:off x="8276844" y="3383280"/>
+            <a:ext cx="118872" cy="118872"/>
           </a:xfrm>
           <a:prstGeom prst="ellipse">
             <a:avLst/>
           </a:prstGeom>
           <a:solidFill>
-            <a:srgbClr val="0B0F17"/>
+            <a:srgbClr val="1F2937"/>
           </a:solidFill>
           <a:ln w="25400">
             <a:solidFill>
@@ -13268,14 +14955,14 @@
       </p:sp>
       <p:sp>
         <p:nvSpPr>
-          <p:cNvPr id="28" name="Rectangle 27"/>
+          <p:cNvPr id="25" name="Rectangle 24"/>
           <p:cNvSpPr/>
           <p:nvPr/>
         </p:nvSpPr>
         <p:spPr>
           <a:xfrm>
-            <a:off x="9550908" y="3461004"/>
-            <a:ext cx="954024" cy="18288"/>
+            <a:off x="8395716" y="3433572"/>
+            <a:ext cx="1008888" cy="18288"/>
           </a:xfrm>
           <a:prstGeom prst="rect">
             <a:avLst/>
@@ -13312,13 +14999,13 @@
       </p:sp>
       <p:sp>
         <p:nvSpPr>
-          <p:cNvPr id="29" name="TextBox 28"/>
+          <p:cNvPr id="26" name="TextBox 25"/>
           <p:cNvSpPr txBox="1"/>
           <p:nvPr/>
         </p:nvSpPr>
         <p:spPr>
           <a:xfrm>
-            <a:off x="8900160" y="3694176"/>
+            <a:off x="7772400" y="3694176"/>
             <a:ext cx="1127760" cy="274320"/>
           </a:xfrm>
           <a:prstGeom prst="rect">
@@ -13344,27 +15031,27 @@
                 </a:solidFill>
                 <a:latin typeface="Menlo"/>
               </a:rPr>
-              <a:t>gate3</a:t>
-            </a:r>
-          </a:p>
-        </p:txBody>
-      </p:sp>
-      <p:sp>
-        <p:nvSpPr>
-          <p:cNvPr id="30" name="Oval 29"/>
+              <a:t>sre</a:t>
+            </a:r>
+          </a:p>
+        </p:txBody>
+      </p:sp>
+      <p:sp>
+        <p:nvSpPr>
+          <p:cNvPr id="27" name="Oval 26"/>
           <p:cNvSpPr/>
           <p:nvPr/>
         </p:nvSpPr>
         <p:spPr>
           <a:xfrm>
-            <a:off x="10532364" y="3383280"/>
-            <a:ext cx="118872" cy="118872"/>
+            <a:off x="9377172" y="3383280"/>
+            <a:ext cx="173736" cy="173736"/>
           </a:xfrm>
           <a:prstGeom prst="ellipse">
             <a:avLst/>
           </a:prstGeom>
           <a:solidFill>
-            <a:srgbClr val="1F2937"/>
+            <a:srgbClr val="0B0F17"/>
           </a:solidFill>
           <a:ln w="25400">
             <a:solidFill>
@@ -13397,13 +15084,57 @@
       </p:sp>
       <p:sp>
         <p:nvSpPr>
-          <p:cNvPr id="31" name="TextBox 30"/>
+          <p:cNvPr id="28" name="Rectangle 27"/>
+          <p:cNvSpPr/>
+          <p:nvPr/>
+        </p:nvSpPr>
+        <p:spPr>
+          <a:xfrm>
+            <a:off x="9550908" y="3461004"/>
+            <a:ext cx="954024" cy="18288"/>
+          </a:xfrm>
+          <a:prstGeom prst="rect">
+            <a:avLst/>
+          </a:prstGeom>
+          <a:solidFill>
+            <a:srgbClr val="1F2937"/>
+          </a:solidFill>
+          <a:ln>
+            <a:noFill/>
+          </a:ln>
+          <a:effectLst/>
+        </p:spPr>
+        <p:style>
+          <a:lnRef idx="1">
+            <a:schemeClr val="accent1"/>
+          </a:lnRef>
+          <a:fillRef idx="3">
+            <a:schemeClr val="accent1"/>
+          </a:fillRef>
+          <a:effectRef idx="2">
+            <a:schemeClr val="accent1"/>
+          </a:effectRef>
+          <a:fontRef idx="minor">
+            <a:schemeClr val="lt1"/>
+          </a:fontRef>
+        </p:style>
+        <p:txBody>
+          <a:bodyPr rtlCol="0" anchor="ctr"/>
+          <a:lstStyle/>
+          <a:p>
+            <a:pPr algn="ctr"/>
+          </a:p>
+        </p:txBody>
+      </p:sp>
+      <p:sp>
+        <p:nvSpPr>
+          <p:cNvPr id="29" name="TextBox 28"/>
           <p:cNvSpPr txBox="1"/>
           <p:nvPr/>
         </p:nvSpPr>
         <p:spPr>
           <a:xfrm>
-            <a:off x="10027920" y="3694176"/>
+            <a:off x="8900160" y="3694176"/>
             <a:ext cx="1127760" cy="274320"/>
           </a:xfrm>
           <a:prstGeom prst="rect">
@@ -13429,21 +15160,67 @@
                 </a:solidFill>
                 <a:latin typeface="Menlo"/>
               </a:rPr>
-              <a:t>promote</a:t>
-            </a:r>
-          </a:p>
-        </p:txBody>
-      </p:sp>
-      <p:sp>
-        <p:nvSpPr>
-          <p:cNvPr id="32" name="TextBox 31"/>
+              <a:t>gate3</a:t>
+            </a:r>
+          </a:p>
+        </p:txBody>
+      </p:sp>
+      <p:sp>
+        <p:nvSpPr>
+          <p:cNvPr id="30" name="Oval 29"/>
+          <p:cNvSpPr/>
+          <p:nvPr/>
+        </p:nvSpPr>
+        <p:spPr>
+          <a:xfrm>
+            <a:off x="10532364" y="3383280"/>
+            <a:ext cx="118872" cy="118872"/>
+          </a:xfrm>
+          <a:prstGeom prst="ellipse">
+            <a:avLst/>
+          </a:prstGeom>
+          <a:solidFill>
+            <a:srgbClr val="1F2937"/>
+          </a:solidFill>
+          <a:ln w="25400">
+            <a:solidFill>
+              <a:srgbClr val="1F2937"/>
+            </a:solidFill>
+          </a:ln>
+          <a:effectLst/>
+        </p:spPr>
+        <p:style>
+          <a:lnRef idx="1">
+            <a:schemeClr val="accent1"/>
+          </a:lnRef>
+          <a:fillRef idx="3">
+            <a:schemeClr val="accent1"/>
+          </a:fillRef>
+          <a:effectRef idx="2">
+            <a:schemeClr val="accent1"/>
+          </a:effectRef>
+          <a:fontRef idx="minor">
+            <a:schemeClr val="lt1"/>
+          </a:fontRef>
+        </p:style>
+        <p:txBody>
+          <a:bodyPr rtlCol="0" anchor="ctr"/>
+          <a:lstStyle/>
+          <a:p>
+            <a:pPr algn="ctr"/>
+          </a:p>
+        </p:txBody>
+      </p:sp>
+      <p:sp>
+        <p:nvSpPr>
+          <p:cNvPr id="31" name="TextBox 30"/>
           <p:cNvSpPr txBox="1"/>
           <p:nvPr/>
         </p:nvSpPr>
         <p:spPr>
           <a:xfrm>
-            <a:off x="1005840" y="4206240"/>
-            <a:ext cx="10058400" cy="731520"/>
+            <a:off x="10027920" y="3694176"/>
+            <a:ext cx="1127760" cy="274320"/>
           </a:xfrm>
           <a:prstGeom prst="rect">
             <a:avLst/>
@@ -13456,32 +15233,32 @@
           </a:bodyPr>
           <a:lstStyle/>
           <a:p>
-            <a:pPr algn="l">
-              <a:lnSpc>
-                <a:spcPct val="130000"/>
-              </a:lnSpc>
-            </a:pPr>
-            <a:r>
-              <a:rPr sz="1700" b="0">
+            <a:pPr algn="ctr">
+              <a:lnSpc>
+                <a:spcPct val="100000"/>
+              </a:lnSpc>
+            </a:pPr>
+            <a:r>
+              <a:rPr sz="1100" b="0">
                 <a:solidFill>
                   <a:srgbClr val="8B97AB"/>
                 </a:solidFill>
-                <a:latin typeface="Helvetica Neue"/>
-              </a:rPr>
-              <a:t>A real ticket: pin an old version of a library for a legacy system. Nothing is planted and no demo flag is set. Trivy finds a known vulnerability, the run stops at the security stage, and nothing after it runs.</a:t>
-            </a:r>
-          </a:p>
-        </p:txBody>
-      </p:sp>
-      <p:sp>
-        <p:nvSpPr>
-          <p:cNvPr id="33" name="TextBox 32"/>
+                <a:latin typeface="Menlo"/>
+              </a:rPr>
+              <a:t>promote</a:t>
+            </a:r>
+          </a:p>
+        </p:txBody>
+      </p:sp>
+      <p:sp>
+        <p:nvSpPr>
+          <p:cNvPr id="32" name="TextBox 31"/>
           <p:cNvSpPr txBox="1"/>
           <p:nvPr/>
         </p:nvSpPr>
         <p:spPr>
           <a:xfrm>
-            <a:off x="1005840" y="5120640"/>
+            <a:off x="1005840" y="4206240"/>
             <a:ext cx="10058400" cy="731520"/>
           </a:xfrm>
           <a:prstGeom prst="rect">
@@ -13501,27 +15278,27 @@
               </a:lnSpc>
             </a:pPr>
             <a:r>
-              <a:rPr sz="1500" b="0">
-                <a:solidFill>
-                  <a:srgbClr val="E8ECF3"/>
+              <a:rPr sz="1700" b="0">
+                <a:solidFill>
+                  <a:srgbClr val="8B97AB"/>
                 </a:solidFill>
                 <a:latin typeface="Helvetica Neue"/>
               </a:rPr>
-              <a:t>Watch the threshold: the high-severity finding stops the run, and the medium ones do not. The same comparison, per scanner, is on the screen.</a:t>
-            </a:r>
-          </a:p>
-        </p:txBody>
-      </p:sp>
-      <p:sp>
-        <p:nvSpPr>
-          <p:cNvPr id="185" name="TextBox 184"/>
+              <a:t>A real ticket: pin an old version of a library for a legacy system. Nothing is planted and no demo flag is set. Trivy finds a known vulnerability, the run stops at the security stage, and nothing after it runs.</a:t>
+            </a:r>
+          </a:p>
+        </p:txBody>
+      </p:sp>
+      <p:sp>
+        <p:nvSpPr>
+          <p:cNvPr id="33" name="TextBox 32"/>
           <p:cNvSpPr txBox="1"/>
           <p:nvPr/>
         </p:nvSpPr>
         <p:spPr>
           <a:xfrm>
-            <a:off x="11247120" y="6291072"/>
-            <a:ext cx="548640" cy="274320"/>
+            <a:off x="1005840" y="5120640"/>
+            <a:ext cx="10058400" cy="731520"/>
           </a:xfrm>
           <a:prstGeom prst="rect">
             <a:avLst/>
@@ -13534,6 +15311,45 @@
           </a:bodyPr>
           <a:lstStyle/>
           <a:p>
+            <a:pPr algn="l">
+              <a:lnSpc>
+                <a:spcPct val="130000"/>
+              </a:lnSpc>
+            </a:pPr>
+            <a:r>
+              <a:rPr sz="1500" b="0">
+                <a:solidFill>
+                  <a:srgbClr val="E8ECF3"/>
+                </a:solidFill>
+                <a:latin typeface="Helvetica Neue"/>
+              </a:rPr>
+              <a:t>Watch the threshold: the high-severity finding stops the run, and the medium ones do not. The same comparison, per scanner, is on the screen.</a:t>
+            </a:r>
+          </a:p>
+        </p:txBody>
+      </p:sp>
+      <p:sp>
+        <p:nvSpPr>
+          <p:cNvPr id="185" name="TextBox 184"/>
+          <p:cNvSpPr txBox="1"/>
+          <p:nvPr/>
+        </p:nvSpPr>
+        <p:spPr>
+          <a:xfrm>
+            <a:off x="11247120" y="6291072"/>
+            <a:ext cx="548640" cy="274320"/>
+          </a:xfrm>
+          <a:prstGeom prst="rect">
+            <a:avLst/>
+          </a:prstGeom>
+          <a:noFill/>
+        </p:spPr>
+        <p:txBody>
+          <a:bodyPr wrap="square">
+            <a:spAutoFit/>
+          </a:bodyPr>
+          <a:lstStyle/>
+          <a:p>
             <a:pPr algn="r">
               <a:lnSpc>
                 <a:spcPct val="120000"/>
@@ -13546,7 +15362,7 @@
                 </a:solidFill>
                 <a:latin typeface="Helvetica Neue"/>
               </a:rPr>
-              <a:t>16</a:t>
+              <a:t>17</a:t>
             </a:r>
           </a:p>
         </p:txBody>
@@ -14474,7 +16290,7 @@
 </p:sld>
 </file>
 
-<file path=ppt/slides/slide17.xml><?xml version="1.0" encoding="utf-8"?>
+<file path=ppt/slides/slide18.xml><?xml version="1.0" encoding="utf-8"?>
 <p:sld xmlns:a="http://schemas.openxmlformats.org/drawingml/2006/main" xmlns:p="http://schemas.openxmlformats.org/presentationml/2006/main" xmlns:r="http://schemas.openxmlformats.org/officeDocument/2006/relationships">
   <p:cSld>
     <p:spTree>
@@ -14783,7 +16599,7 @@
                 </a:solidFill>
                 <a:latin typeface="Helvetica Neue"/>
               </a:rPr>
-              <a:t>17</a:t>
+              <a:t>18</a:t>
             </a:r>
           </a:p>
         </p:txBody>
@@ -15137,6 +16953,22 @@
             <a:spAutoFit/>
           </a:bodyPr>
           <a:lstStyle/>
+          <a:p>
+            <a:pPr algn="ctr">
+              <a:lnSpc>
+                <a:spcPct val="115000"/>
+              </a:lnSpc>
+            </a:pPr>
+            <a:r>
+              <a:rPr sz="1100" b="0">
+                <a:solidFill>
+                  <a:srgbClr val="8B97AB"/>
+                </a:solidFill>
+                <a:latin typeface="Helvetica Neue"/>
+              </a:rPr>
+              <a:t>AWS Community Builder</a:t>
+            </a:r>
+          </a:p>
           <a:p>
             <a:pPr algn="ctr">
               <a:lnSpc>
@@ -17004,7 +18836,7 @@
                 </a:solidFill>
                 <a:latin typeface="Helvetica Neue"/>
               </a:rPr>
-              <a:t>what is built, your ten notes, and what it does not do</a:t>
+              <a:t>what is built, the knowledge base, your ten notes, the limits</a:t>
             </a:r>
           </a:p>
         </p:txBody>
@@ -17043,7 +18875,7 @@
                 </a:solidFill>
                 <a:latin typeface="Menlo"/>
               </a:rPr>
-              <a:t>2 min</a:t>
+              <a:t>3 min</a:t>
             </a:r>
           </a:p>
         </p:txBody>
@@ -17511,7 +19343,7 @@
                 </a:solidFill>
                 <a:latin typeface="Menlo"/>
               </a:rPr>
-              <a:t>5 min</a:t>
+              <a:t>4 min</a:t>
             </a:r>
           </a:p>
         </p:txBody>

--- a/talks/devops-hackathon-final/pitch/TheAgentOrg-Final.pptx
+++ b/talks/devops-hackathon-final/pitch/TheAgentOrg-Final.pptx
@@ -589,25 +589,19 @@
           <a:lstStyle/>
           <a:p>
             <a:r>
-              <a:t>SAY None of this is our wording. GitHub Copilot's review leaves, by default, "a Comment review, not a Request changes review", so it never blocks. Anthropic's code review "always completes with a neutral conclusion so it never blocks merging". OpenAI's Codex guidance says it doesn't "replace tests, branch protections, or required approvals". Cursor's findings "default to neutral". And Snyk's own page puts our thesis in six words: the generator cannot be the validator.</a:t>
+              <a:t>SAY A change costs between one point three and one point seven cents of model time, measured over three clean runs and priced from the AWS Pricing API. The model is 99.9 percent of that. Lambda, EventBridge and DynamoDB together came to twelve millionths of a dollar, which is why the only cost work worth doing is prompt caching. The median time from ticket to merge is just under eight minutes, and none of the twelve merged changes carried a credential.</a:t>
             </a:r>
           </a:p>
           <a:p/>
           <a:p>
             <a:r>
-              <a:t>IF ASKED — "can't Copilot approve pull requests now?" Yes, if a team turns that on. That lets the model pass a change; it still cannot block one. It makes our point sharper, not weaker.</a:t>
+              <a:t>SAY THE CAVEAT — do not wait to be asked. Twelve of fifty-seven runs merged, so the median covers the runs that finished, and a person clicked every gate in it. And the zero is a real result: the same scan finds three credentials in an unmerged pull request, so it is not a scan that finds nothing.</a:t>
             </a:r>
           </a:p>
           <a:p/>
           <a:p>
             <a:r>
-              <a:t>SAY — and concede, because it is stronger We are not the only ones with rules outside the model. Claude Code's permission rules and Factory's commit blocks are enforced outside the model too. The difference is where the check sits: theirs guard one agent's actions; ours guards the hand-off between agents, with a named person approving each stage.</a:t>
-            </a:r>
-          </a:p>
-          <a:p/>
-          <a:p>
-            <a:r>
-              <a:t>IF ASKED — "so what is genuinely new?" No product we found combines all three: several agents, a check with no model in it on each agent's output, and human approval between stages, as one pipeline. Each of the three exists somewhere on its own.</a:t>
+              <a:t>IF ASKED — "so it is cheaper than a human reviewer?" I would not make that comparison. The pipeline does not replace the reviewer, it decides what reaches them. The honest measure is minutes of human attention per change, and we have not measured that at scale.</a:t>
             </a:r>
           </a:p>
         </p:txBody>
@@ -677,7 +671,25 @@
           <a:lstStyle/>
           <a:p>
             <a:r>
-              <a:t>SAY This is the argument for the whole design. With Cursor's hooks, if the hook itself fails, the action goes ahead; their documentation calls it fail-open by default. With Claude Code's hooks, only one specific failure blocks; any other lets the action through, and in their words, "a mistyped path in settings.json leaves the gate silently disabled". And by default, if Semgrep crashes, it still reports success. A check that did not run, reading as a check that passed. That is exactly what we refuse: in our pipeline, a missing or crashed scanner blocks the change.</a:t>
+              <a:t>SAY None of this is our wording. GitHub Copilot's review leaves, by default, "a Comment review, not a Request changes review", so it never blocks. Anthropic's code review "always completes with a neutral conclusion so it never blocks merging". OpenAI's Codex guidance says it doesn't "replace tests, branch protections, or required approvals". Cursor's findings "default to neutral". And Snyk's own page puts our thesis in six words: the generator cannot be the validator.</a:t>
+            </a:r>
+          </a:p>
+          <a:p/>
+          <a:p>
+            <a:r>
+              <a:t>IF ASKED — "can't Copilot approve pull requests now?" Yes, if a team turns that on. That lets the model pass a change; it still cannot block one. It makes our point sharper, not weaker.</a:t>
+            </a:r>
+          </a:p>
+          <a:p/>
+          <a:p>
+            <a:r>
+              <a:t>SAY — and concede, because it is stronger We are not the only ones with rules outside the model. Claude Code's permission rules and Factory's commit blocks are enforced outside the model too. The difference is where the check sits: theirs guard one agent's actions; ours guards the hand-off between agents, with a named person approving each stage.</a:t>
+            </a:r>
+          </a:p>
+          <a:p/>
+          <a:p>
+            <a:r>
+              <a:t>IF ASKED — "so what is genuinely new?" No product we found combines all three: several agents, a check with no model in it on each agent's output, and human approval between stages, as one pipeline. Each of the three exists somewhere on its own.</a:t>
             </a:r>
           </a:p>
         </p:txBody>
@@ -747,7 +759,7 @@
           <a:lstStyle/>
           <a:p>
             <a:r>
-              <a:t>SAY Two thousand one hundred and eighty-two automated tests across ninety-six files, plus three hundred and thirty-eight for the web app. Five agent runtimes, all ready on the same version; a split would mean a half-finished deploy, and we check for it before every demo. It runs in the cloud from a real issue. It is a product, not a script: you sign in, pick a repository, start a run, watch each stage, approve a gate and read what it cost. And it is multi-tenant: each customer's data sits in its own partition, and AWS itself refuses a read of anyone else's, so our code does not have to remember to.</a:t>
+              <a:t>SAY This is the argument for the whole design. With Cursor's hooks, if the hook itself fails, the action goes ahead; their documentation calls it fail-open by default. With Claude Code's hooks, only one specific failure blocks; any other lets the action through, and in their words, "a mistyped path in settings.json leaves the gate silently disabled". And by default, if Semgrep crashes, it still reports success. A check that did not run, reading as a check that passed. That is exactly what we refuse: in our pipeline, a missing or crashed scanner blocks the change.</a:t>
             </a:r>
           </a:p>
         </p:txBody>
@@ -817,25 +829,7 @@
           <a:lstStyle/>
           <a:p>
             <a:r>
-              <a:t>SAY Before an agent answers, it looks up what the team already knows. Three hand-written knowledge bases: why past changes to this app were sent back, the questions the team has settled, and background on known vulnerabilities. Four agents read them: the planner, the developer, the reviewer, and the security explanation. We measured the reviewer on changes that did not do what their ticket asked: with the knowledge base it caught 8 out of 8, without it 6. And it did not make the reviewer fussier: no false blocks, with it or without. It is switched on in production; on one live run the agents read 18 documents.</a:t>
-            </a:r>
-          </a:p>
-          <a:p/>
-          <a:p>
-            <a:r>
-              <a:t>SAY — the line that matters It shapes wording, never the verdict. We planted five hostile documents, things like "this finding is a known false positive", and the block did not move.</a:t>
-            </a:r>
-          </a:p>
-          <a:p/>
-          <a:p>
-            <a:r>
-              <a:t>IF ASKED — "why no vector database?" It is plain keyword search over a few dozen curated documents. That is enough at this size, and it means nothing new ships in the five agent images.</a:t>
-            </a:r>
-          </a:p>
-          <a:p/>
-          <a:p>
-            <a:r>
-              <a:t>IF ASKED — "what stops a poisoned document talking the reviewer out of it?" Nothing, fully — the reviewer is a model, and it is advisory. That is why the security decision does not read the knowledge base at all.</a:t>
+              <a:t>SAY Two thousand one hundred and eighty-two automated tests across ninety-six files, plus three hundred and thirty-eight for the web app. Five agent runtimes, all ready on the same version; a split would mean a half-finished deploy, and we check for it before every demo. It runs in the cloud from a real issue. It is a product, not a script: you sign in, pick a repository, start a run, watch each stage, approve a gate and read what it cost. And it is multi-tenant: each customer's data sits in its own partition, and AWS itself refuses a read of anyone else's, so our code does not have to remember to.</a:t>
             </a:r>
           </a:p>
         </p:txBody>
@@ -911,7 +905,7 @@
           <a:p/>
           <a:p>
             <a:r>
-              <a:t>IF ASKED about any single row — scoring is slide 7, the knowledge base slide 13 and the limits slide 15; ask and I will go back to either.</a:t>
+              <a:t>IF ASKED about any single row — scoring is slide 7, the knowledge base slide 8 and the limits slide 15; ask and I will go back to either.</a:t>
             </a:r>
           </a:p>
         </p:txBody>
@@ -1349,7 +1343,7 @@
           <a:lstStyle/>
           <a:p>
             <a:r>
-              <a:t>SAY Here is the twenty minutes. Three on the overview, then the architecture, the business impact, and how this differs from what vendors ship. Then what is built, the knowledge base the agents read, your ten notes from the pre-final, and what it does not do. What is next, five minutes live, and the rest of the slot is yours.</a:t>
+              <a:t>SAY Here is the twenty minutes. Four on the overview, ending with what the agents read. Then the architecture, the business impact, and how this differs from what vendors ship. Then what is built, your ten notes from the pre-final, and what it does not do. What is next, five minutes live, and the rest of the slot is yours.</a:t>
             </a:r>
           </a:p>
         </p:txBody>
@@ -1735,31 +1729,25 @@
           <a:lstStyle/>
           <a:p>
             <a:r>
-              <a:t>SAY Follow the numbers. One: an engineer opens an issue, or starts a run from our app. Two: GitHub sends a signed webhook to a Lambda function, which checks the signature before anything else happens and hands the event to EventBridge. Three: a rule matches new issues and starts the pipeline; if that fails, the event waits in an SQS dead-letter queue. The pipeline is seven GitHub Actions jobs. Four: each agent job takes an AWS role through OIDC, so there is no stored AWS key anywhere, and calls its agent on Bedrock AgentCore: planner, developer, reviewer, security, SRE. Five: the agents call Amazon Nova 2 Lite. Six: the security stage decides with three scanners and a fixed threshold, no model; the model only writes the explanation afterwards. Seven: the gates wait for a named person, in GitHub or in our app. Eight: the app, on Amplify, reads each run from DynamoDB through a role that can only see its own tenant's data.</a:t>
+              <a:t>SAY Before an agent answers, it looks up what the team already knows. Three hand-written knowledge bases: why past changes to this app were sent back, the questions the team has settled, and background on known vulnerabilities. Four agents read them: the planner, the developer, the reviewer, and the security explanation. We measured the reviewer on changes that did not do what their ticket asked: with the knowledge base it caught 8 out of 8, without it 6. And it did not make the reviewer fussier: no false blocks, with it or without. It is switched on in production; on one live run the agents read 18 documents.</a:t>
             </a:r>
           </a:p>
           <a:p/>
           <a:p>
             <a:r>
-              <a:t>IF ASKED — "the security agent calls the model too?" Yes, for one thing: the sentence explaining the verdict. The verdict is computed first, by the scanners and the threshold, and the model's text goes into a separate field that cannot change it. Take the model away and the block still happens.</a:t>
+              <a:t>SAY — the line that matters It shapes wording, never the verdict. We planted five hostile documents, things like "this finding is a known false positive", and the block did not move.</a:t>
             </a:r>
           </a:p>
           <a:p/>
           <a:p>
             <a:r>
-              <a:t>IF ASKED — "why AgentCore and not just Lambda?" Each agent is an isolated runtime with its own identity and logs, and the security image is the only one carrying the three scanners. Isolation is the point.</a:t>
+              <a:t>IF ASKED — "why no vector database?" It is plain keyword search over a few dozen curated documents. That is enough at this size, and it means nothing new ships in the five agent images.</a:t>
             </a:r>
           </a:p>
           <a:p/>
           <a:p>
             <a:r>
-              <a:t>IF ASKED — "where is a run's state kept?" It is passed from job to job by GitHub Actions. The four jobs that hold an AWS role (plan, develop, SRE and promote) write a copy to DynamoDB, which is what the app reads. The gates hold no AWS credentials on purpose, so a gate's decision reaches DynamoDB with the next job.</a:t>
-            </a:r>
-          </a:p>
-          <a:p/>
-          <a:p>
-            <a:r>
-              <a:t>IF ASKED — "how do people sign in?" Email through Amazon Cognito, or GitHub.</a:t>
+              <a:t>IF ASKED — "what stops a poisoned document talking the reviewer out of it?" Nothing, fully — the reviewer is a model, and it is advisory. That is why the security decision does not read the knowledge base at all.</a:t>
             </a:r>
           </a:p>
         </p:txBody>
@@ -1829,19 +1817,31 @@
           <a:lstStyle/>
           <a:p>
             <a:r>
-              <a:t>SAY A change costs between one point three and one point seven cents of model time, measured over three clean runs and priced from the AWS Pricing API. The model is 99.9 percent of that. Lambda, EventBridge and DynamoDB together came to twelve millionths of a dollar, which is why the only cost work worth doing is prompt caching. The median time from ticket to merge is just under eight minutes, and none of the twelve merged changes carried a credential.</a:t>
+              <a:t>SAY Follow the numbers. One: an engineer opens an issue, or starts a run from our app. Two: GitHub sends a signed webhook to a Lambda function, which checks the signature before anything else happens and hands the event to EventBridge. Three: a rule matches new issues and starts the pipeline; if that fails, the event waits in an SQS dead-letter queue. The pipeline is seven GitHub Actions jobs. Four: each agent job takes an AWS role through OIDC, so there is no stored AWS key anywhere, and calls its agent on Bedrock AgentCore: planner, developer, reviewer, security, SRE. Five: the agents call Amazon Nova 2 Lite. Six: the security stage decides with three scanners and a fixed threshold, no model; the model only writes the explanation afterwards. Seven: the gates wait for a named person, in GitHub or in our app. Eight: the app, on Amplify, reads each run from DynamoDB through a role that can only see its own tenant's data.</a:t>
             </a:r>
           </a:p>
           <a:p/>
           <a:p>
             <a:r>
-              <a:t>SAY THE CAVEAT — do not wait to be asked. Twelve of fifty-seven runs merged, so the median covers the runs that finished, and a person clicked every gate in it. And the zero is a real result: the same scan finds three credentials in an unmerged pull request, so it is not a scan that finds nothing.</a:t>
+              <a:t>IF ASKED — "the security agent calls the model too?" Yes, for one thing: the sentence explaining the verdict. The verdict is computed first, by the scanners and the threshold, and the model's text goes into a separate field that cannot change it. Take the model away and the block still happens.</a:t>
             </a:r>
           </a:p>
           <a:p/>
           <a:p>
             <a:r>
-              <a:t>IF ASKED — "so it is cheaper than a human reviewer?" I would not make that comparison. The pipeline does not replace the reviewer, it decides what reaches them. The honest measure is minutes of human attention per change, and we have not measured that at scale.</a:t>
+              <a:t>IF ASKED — "why AgentCore and not just Lambda?" Each agent is an isolated runtime with its own identity and logs, and the security image is the only one carrying the three scanners. Isolation is the point.</a:t>
+            </a:r>
+          </a:p>
+          <a:p/>
+          <a:p>
+            <a:r>
+              <a:t>IF ASKED — "where is a run's state kept?" It is passed from job to job by GitHub Actions. The four jobs that hold an AWS role (plan, develop, SRE and promote) write a copy to DynamoDB, which is what the app reads. The gates hold no AWS credentials on purpose, so a gate's decision reaches DynamoDB with the next job.</a:t>
+            </a:r>
+          </a:p>
+          <a:p/>
+          <a:p>
+            <a:r>
+              <a:t>IF ASKED — "how do people sign in?" Email through Amazon Cognito, or GitHub.</a:t>
             </a:r>
           </a:p>
         </p:txBody>
@@ -5289,7 +5289,7 @@
                 </a:solidFill>
                 <a:latin typeface="Helvetica Neue"/>
               </a:rPr>
-              <a:t>DIFFERENTIATION</a:t>
+              <a:t>BUSINESS IMPACT</a:t>
             </a:r>
           </a:p>
         </p:txBody>
@@ -5322,13 +5322,13 @@
               </a:lnSpc>
             </a:pPr>
             <a:r>
-              <a:rPr sz="2800" b="1">
+              <a:rPr sz="3200" b="1">
                 <a:solidFill>
                   <a:srgbClr val="E8ECF3"/>
                 </a:solidFill>
                 <a:latin typeface="Helvetica Neue"/>
               </a:rPr>
-              <a:t>Every vendor's AI review is advisory. They say so.</a:t>
+              <a:t>What it costs, and what it buys</a:t>
             </a:r>
           </a:p>
         </p:txBody>
@@ -5386,7 +5386,7 @@
         <p:spPr>
           <a:xfrm>
             <a:off x="1005840" y="2148840"/>
-            <a:ext cx="3017520" cy="292608"/>
+            <a:ext cx="3108960" cy="841248"/>
           </a:xfrm>
           <a:prstGeom prst="rect">
             <a:avLst/>
@@ -5405,13 +5405,13 @@
               </a:lnSpc>
             </a:pPr>
             <a:r>
-              <a:rPr sz="1100" b="1">
+              <a:rPr sz="4000" b="1">
                 <a:solidFill>
                   <a:srgbClr val="22D3EE"/>
                 </a:solidFill>
                 <a:latin typeface="Helvetica Neue"/>
               </a:rPr>
-              <a:t>PRODUCT</a:t>
+              <a:t>1.3–1.7¢</a:t>
             </a:r>
           </a:p>
         </p:txBody>
@@ -5424,8 +5424,8 @@
         </p:nvSpPr>
         <p:spPr>
           <a:xfrm>
-            <a:off x="4023360" y="2148840"/>
-            <a:ext cx="7132320" cy="292608"/>
+            <a:off x="1005840" y="2935224"/>
+            <a:ext cx="3108960" cy="749808"/>
           </a:xfrm>
           <a:prstGeom prst="rect">
             <a:avLst/>
@@ -5440,37 +5440,889 @@
           <a:p>
             <a:pPr algn="l">
               <a:lnSpc>
+                <a:spcPct val="125000"/>
+              </a:lnSpc>
+            </a:pPr>
+            <a:r>
+              <a:rPr sz="1500" b="0">
+                <a:solidFill>
+                  <a:srgbClr val="8B97AB"/>
+                </a:solidFill>
+                <a:latin typeface="Helvetica Neue"/>
+              </a:rPr>
+              <a:t>model cost per change</a:t>
+            </a:r>
+          </a:p>
+          <a:p>
+            <a:pPr algn="l">
+              <a:lnSpc>
+                <a:spcPct val="125000"/>
+              </a:lnSpc>
+            </a:pPr>
+            <a:r>
+              <a:rPr sz="1500" b="0">
+                <a:solidFill>
+                  <a:srgbClr val="8B97AB"/>
+                </a:solidFill>
+                <a:latin typeface="Helvetica Neue"/>
+              </a:rPr>
+              <a:t>three measured runs</a:t>
+            </a:r>
+          </a:p>
+        </p:txBody>
+      </p:sp>
+      <p:sp>
+        <p:nvSpPr>
+          <p:cNvPr id="8" name="TextBox 7"/>
+          <p:cNvSpPr txBox="1"/>
+          <p:nvPr/>
+        </p:nvSpPr>
+        <p:spPr>
+          <a:xfrm>
+            <a:off x="4389120" y="2148840"/>
+            <a:ext cx="3108960" cy="841248"/>
+          </a:xfrm>
+          <a:prstGeom prst="rect">
+            <a:avLst/>
+          </a:prstGeom>
+          <a:noFill/>
+        </p:spPr>
+        <p:txBody>
+          <a:bodyPr wrap="square">
+            <a:spAutoFit/>
+          </a:bodyPr>
+          <a:lstStyle/>
+          <a:p>
+            <a:pPr algn="l">
+              <a:lnSpc>
                 <a:spcPct val="100000"/>
               </a:lnSpc>
             </a:pPr>
             <a:r>
-              <a:rPr sz="1100" b="1">
+              <a:rPr sz="4000" b="1">
                 <a:solidFill>
                   <a:srgbClr val="22D3EE"/>
                 </a:solidFill>
                 <a:latin typeface="Helvetica Neue"/>
               </a:rPr>
-              <a:t>FROM THEIR OWN DOCUMENTATION</a:t>
-            </a:r>
-          </a:p>
-        </p:txBody>
-      </p:sp>
-      <p:sp>
-        <p:nvSpPr>
-          <p:cNvPr id="8" name="Rectangle 7"/>
+              <a:t>7.88 min</a:t>
+            </a:r>
+          </a:p>
+        </p:txBody>
+      </p:sp>
+      <p:sp>
+        <p:nvSpPr>
+          <p:cNvPr id="9" name="TextBox 8"/>
+          <p:cNvSpPr txBox="1"/>
+          <p:nvPr/>
+        </p:nvSpPr>
+        <p:spPr>
+          <a:xfrm>
+            <a:off x="4389120" y="2935224"/>
+            <a:ext cx="3108960" cy="749808"/>
+          </a:xfrm>
+          <a:prstGeom prst="rect">
+            <a:avLst/>
+          </a:prstGeom>
+          <a:noFill/>
+        </p:spPr>
+        <p:txBody>
+          <a:bodyPr wrap="square">
+            <a:spAutoFit/>
+          </a:bodyPr>
+          <a:lstStyle/>
+          <a:p>
+            <a:pPr algn="l">
+              <a:lnSpc>
+                <a:spcPct val="125000"/>
+              </a:lnSpc>
+            </a:pPr>
+            <a:r>
+              <a:rPr sz="1500" b="0">
+                <a:solidFill>
+                  <a:srgbClr val="8B97AB"/>
+                </a:solidFill>
+                <a:latin typeface="Helvetica Neue"/>
+              </a:rPr>
+              <a:t>median ticket to merge</a:t>
+            </a:r>
+          </a:p>
+          <a:p>
+            <a:pPr algn="l">
+              <a:lnSpc>
+                <a:spcPct val="125000"/>
+              </a:lnSpc>
+            </a:pPr>
+            <a:r>
+              <a:rPr sz="1500" b="0">
+                <a:solidFill>
+                  <a:srgbClr val="8B97AB"/>
+                </a:solidFill>
+                <a:latin typeface="Helvetica Neue"/>
+              </a:rPr>
+              <a:t>12 merges</a:t>
+            </a:r>
+          </a:p>
+        </p:txBody>
+      </p:sp>
+      <p:sp>
+        <p:nvSpPr>
+          <p:cNvPr id="10" name="TextBox 9"/>
+          <p:cNvSpPr txBox="1"/>
+          <p:nvPr/>
+        </p:nvSpPr>
+        <p:spPr>
+          <a:xfrm>
+            <a:off x="7680960" y="2148840"/>
+            <a:ext cx="3108960" cy="841248"/>
+          </a:xfrm>
+          <a:prstGeom prst="rect">
+            <a:avLst/>
+          </a:prstGeom>
+          <a:noFill/>
+        </p:spPr>
+        <p:txBody>
+          <a:bodyPr wrap="square">
+            <a:spAutoFit/>
+          </a:bodyPr>
+          <a:lstStyle/>
+          <a:p>
+            <a:pPr algn="l">
+              <a:lnSpc>
+                <a:spcPct val="100000"/>
+              </a:lnSpc>
+            </a:pPr>
+            <a:r>
+              <a:rPr sz="4000" b="1">
+                <a:solidFill>
+                  <a:srgbClr val="22D3EE"/>
+                </a:solidFill>
+                <a:latin typeface="Helvetica Neue"/>
+              </a:rPr>
+              <a:t>0 of 12</a:t>
+            </a:r>
+          </a:p>
+        </p:txBody>
+      </p:sp>
+      <p:sp>
+        <p:nvSpPr>
+          <p:cNvPr id="11" name="TextBox 10"/>
+          <p:cNvSpPr txBox="1"/>
+          <p:nvPr/>
+        </p:nvSpPr>
+        <p:spPr>
+          <a:xfrm>
+            <a:off x="7680960" y="2935224"/>
+            <a:ext cx="3108960" cy="749808"/>
+          </a:xfrm>
+          <a:prstGeom prst="rect">
+            <a:avLst/>
+          </a:prstGeom>
+          <a:noFill/>
+        </p:spPr>
+        <p:txBody>
+          <a:bodyPr wrap="square">
+            <a:spAutoFit/>
+          </a:bodyPr>
+          <a:lstStyle/>
+          <a:p>
+            <a:pPr algn="l">
+              <a:lnSpc>
+                <a:spcPct val="125000"/>
+              </a:lnSpc>
+            </a:pPr>
+            <a:r>
+              <a:rPr sz="1500" b="0">
+                <a:solidFill>
+                  <a:srgbClr val="8B97AB"/>
+                </a:solidFill>
+                <a:latin typeface="Helvetica Neue"/>
+              </a:rPr>
+              <a:t>merged changes carrying</a:t>
+            </a:r>
+          </a:p>
+          <a:p>
+            <a:pPr algn="l">
+              <a:lnSpc>
+                <a:spcPct val="125000"/>
+              </a:lnSpc>
+            </a:pPr>
+            <a:r>
+              <a:rPr sz="1500" b="0">
+                <a:solidFill>
+                  <a:srgbClr val="8B97AB"/>
+                </a:solidFill>
+                <a:latin typeface="Helvetica Neue"/>
+              </a:rPr>
+              <a:t>a credential</a:t>
+            </a:r>
+          </a:p>
+        </p:txBody>
+      </p:sp>
+      <p:sp>
+        <p:nvSpPr>
+          <p:cNvPr id="12" name="TextBox 11"/>
+          <p:cNvSpPr txBox="1"/>
+          <p:nvPr/>
+        </p:nvSpPr>
+        <p:spPr>
+          <a:xfrm>
+            <a:off x="1005840" y="4069080"/>
+            <a:ext cx="10149840" cy="868680"/>
+          </a:xfrm>
+          <a:prstGeom prst="rect">
+            <a:avLst/>
+          </a:prstGeom>
+          <a:noFill/>
+        </p:spPr>
+        <p:txBody>
+          <a:bodyPr wrap="square">
+            <a:spAutoFit/>
+          </a:bodyPr>
+          <a:lstStyle/>
+          <a:p>
+            <a:pPr algn="l">
+              <a:lnSpc>
+                <a:spcPct val="120000"/>
+              </a:lnSpc>
+            </a:pPr>
+            <a:r>
+              <a:rPr sz="1600" b="0">
+                <a:solidFill>
+                  <a:srgbClr val="E8ECF3"/>
+                </a:solidFill>
+                <a:latin typeface="Helvetica Neue"/>
+              </a:rPr>
+              <a:t>The model is 99.9% of what a change costs. Lambda, EventBridge and DynamoDB together came to twelve millionths of a dollar. The only cost work worth doing is prompt caching.</a:t>
+            </a:r>
+          </a:p>
+        </p:txBody>
+      </p:sp>
+      <p:sp>
+        <p:nvSpPr>
+          <p:cNvPr id="13" name="TextBox 12"/>
+          <p:cNvSpPr txBox="1"/>
+          <p:nvPr/>
+        </p:nvSpPr>
+        <p:spPr>
+          <a:xfrm>
+            <a:off x="1005840" y="4937760"/>
+            <a:ext cx="10149840" cy="868680"/>
+          </a:xfrm>
+          <a:prstGeom prst="rect">
+            <a:avLst/>
+          </a:prstGeom>
+          <a:noFill/>
+        </p:spPr>
+        <p:txBody>
+          <a:bodyPr wrap="square">
+            <a:spAutoFit/>
+          </a:bodyPr>
+          <a:lstStyle/>
+          <a:p>
+            <a:pPr algn="l">
+              <a:lnSpc>
+                <a:spcPct val="120000"/>
+              </a:lnSpc>
+            </a:pPr>
+            <a:r>
+              <a:rPr sz="1600" b="0">
+                <a:solidFill>
+                  <a:srgbClr val="E8ECF3"/>
+                </a:solidFill>
+                <a:latin typeface="Helvetica Neue"/>
+              </a:rPr>
+              <a:t>The value is not the cents. A credential cannot reach the main branch by being approved quickly, and that refusal has no model in it.</a:t>
+            </a:r>
+          </a:p>
+        </p:txBody>
+      </p:sp>
+      <p:sp>
+        <p:nvSpPr>
+          <p:cNvPr id="14" name="TextBox 13"/>
+          <p:cNvSpPr txBox="1"/>
+          <p:nvPr/>
+        </p:nvSpPr>
+        <p:spPr>
+          <a:xfrm>
+            <a:off x="1005840" y="5806440"/>
+            <a:ext cx="10058400" cy="640080"/>
+          </a:xfrm>
+          <a:prstGeom prst="rect">
+            <a:avLst/>
+          </a:prstGeom>
+          <a:noFill/>
+        </p:spPr>
+        <p:txBody>
+          <a:bodyPr wrap="square">
+            <a:spAutoFit/>
+          </a:bodyPr>
+          <a:lstStyle/>
+          <a:p>
+            <a:pPr algn="l">
+              <a:lnSpc>
+                <a:spcPct val="125000"/>
+              </a:lnSpc>
+            </a:pPr>
+            <a:r>
+              <a:rPr sz="1300" b="0">
+                <a:solidFill>
+                  <a:srgbClr val="8B97AB"/>
+                </a:solidFill>
+                <a:latin typeface="Helvetica Neue"/>
+              </a:rPr>
+              <a:t>12 of 57 runs merged, so the median covers the runs that finished. The same scan finds 3 credentials in unmerged pull request #72, so the zero is a real result.</a:t>
+            </a:r>
+          </a:p>
+        </p:txBody>
+      </p:sp>
+      <p:sp>
+        <p:nvSpPr>
+          <p:cNvPr id="95" name="TextBox 94"/>
+          <p:cNvSpPr txBox="1"/>
+          <p:nvPr/>
+        </p:nvSpPr>
+        <p:spPr>
+          <a:xfrm>
+            <a:off x="11247120" y="6291072"/>
+            <a:ext cx="548640" cy="274320"/>
+          </a:xfrm>
+          <a:prstGeom prst="rect">
+            <a:avLst/>
+          </a:prstGeom>
+          <a:noFill/>
+        </p:spPr>
+        <p:txBody>
+          <a:bodyPr wrap="square">
+            <a:spAutoFit/>
+          </a:bodyPr>
+          <a:lstStyle/>
+          <a:p>
+            <a:pPr algn="r">
+              <a:lnSpc>
+                <a:spcPct val="120000"/>
+              </a:lnSpc>
+            </a:pPr>
+            <a:r>
+              <a:rPr sz="1100" b="0">
+                <a:solidFill>
+                  <a:srgbClr val="8B97AB"/>
+                </a:solidFill>
+                <a:latin typeface="Helvetica Neue"/>
+              </a:rPr>
+              <a:t>10</a:t>
+            </a:r>
+          </a:p>
+        </p:txBody>
+      </p:sp>
+    </p:spTree>
+  </p:cSld>
+  <p:clrMapOvr>
+    <a:masterClrMapping/>
+  </p:clrMapOvr>
+  <p:transition spd="med">
+    <p:wipe dir="l"/>
+  </p:transition>
+  <p:timing>
+    <p:tnLst>
+      <p:par>
+        <p:cTn id="1" dur="indefinite" restart="never" nodeType="tmRoot">
+          <p:childTnLst>
+            <p:seq concurrent="1" nextAc="seek">
+              <p:cTn id="2" dur="indefinite" nodeType="mainSeq">
+                <p:childTnLst>
+                  <p:par>
+                    <p:cTn id="10" fill="hold">
+                      <p:stCondLst>
+                        <p:cond delay="indefinite"/>
+                      </p:stCondLst>
+                      <p:childTnLst>
+                        <p:par>
+                          <p:cTn id="11" fill="hold">
+                            <p:stCondLst>
+                              <p:cond delay="0"/>
+                            </p:stCondLst>
+                            <p:childTnLst>
+                              <p:par>
+                                <p:cTn id="12" presetID="10" presetClass="entr" presetSubtype="0" fill="hold" grpId="0" nodeType="clickEffect">
+                                  <p:stCondLst>
+                                    <p:cond delay="0"/>
+                                  </p:stCondLst>
+                                  <p:childTnLst>
+                                    <p:set>
+                                      <p:cBhvr>
+                                        <p:cTn id="13" dur="1" fill="hold"/>
+                                        <p:tgtEl>
+                                          <p:spTgt spid="6"/>
+                                        </p:tgtEl>
+                                        <p:attrNameLst>
+                                          <p:attrName>style.visibility</p:attrName>
+                                        </p:attrNameLst>
+                                      </p:cBhvr>
+                                      <p:to>
+                                        <p:strVal val="visible"/>
+                                      </p:to>
+                                    </p:set>
+                                    <p:animEffect transition="in" filter="fade">
+                                      <p:cBhvr>
+                                        <p:cTn id="14" dur="450"/>
+                                        <p:tgtEl>
+                                          <p:spTgt spid="6"/>
+                                        </p:tgtEl>
+                                      </p:cBhvr>
+                                    </p:animEffect>
+                                  </p:childTnLst>
+                                </p:cTn>
+                              </p:par>
+                            </p:childTnLst>
+                          </p:cTn>
+                        </p:par>
+                      </p:childTnLst>
+                    </p:cTn>
+                  </p:par>
+                  <p:par>
+                    <p:cTn id="20" fill="hold">
+                      <p:stCondLst>
+                        <p:cond delay="indefinite"/>
+                      </p:stCondLst>
+                      <p:childTnLst>
+                        <p:par>
+                          <p:cTn id="21" fill="hold">
+                            <p:stCondLst>
+                              <p:cond delay="0"/>
+                            </p:stCondLst>
+                            <p:childTnLst>
+                              <p:par>
+                                <p:cTn id="22" presetID="10" presetClass="entr" presetSubtype="0" fill="hold" grpId="0" nodeType="afterEffect">
+                                  <p:stCondLst>
+                                    <p:cond delay="0"/>
+                                  </p:stCondLst>
+                                  <p:childTnLst>
+                                    <p:set>
+                                      <p:cBhvr>
+                                        <p:cTn id="23" dur="1" fill="hold"/>
+                                        <p:tgtEl>
+                                          <p:spTgt spid="7"/>
+                                        </p:tgtEl>
+                                        <p:attrNameLst>
+                                          <p:attrName>style.visibility</p:attrName>
+                                        </p:attrNameLst>
+                                      </p:cBhvr>
+                                      <p:to>
+                                        <p:strVal val="visible"/>
+                                      </p:to>
+                                    </p:set>
+                                    <p:animEffect transition="in" filter="fade">
+                                      <p:cBhvr>
+                                        <p:cTn id="24" dur="450"/>
+                                        <p:tgtEl>
+                                          <p:spTgt spid="7"/>
+                                        </p:tgtEl>
+                                      </p:cBhvr>
+                                    </p:animEffect>
+                                  </p:childTnLst>
+                                </p:cTn>
+                              </p:par>
+                            </p:childTnLst>
+                          </p:cTn>
+                        </p:par>
+                      </p:childTnLst>
+                    </p:cTn>
+                  </p:par>
+                  <p:par>
+                    <p:cTn id="30" fill="hold">
+                      <p:stCondLst>
+                        <p:cond delay="indefinite"/>
+                      </p:stCondLst>
+                      <p:childTnLst>
+                        <p:par>
+                          <p:cTn id="31" fill="hold">
+                            <p:stCondLst>
+                              <p:cond delay="0"/>
+                            </p:stCondLst>
+                            <p:childTnLst>
+                              <p:par>
+                                <p:cTn id="32" presetID="10" presetClass="entr" presetSubtype="0" fill="hold" grpId="0" nodeType="afterEffect">
+                                  <p:stCondLst>
+                                    <p:cond delay="0"/>
+                                  </p:stCondLst>
+                                  <p:childTnLst>
+                                    <p:set>
+                                      <p:cBhvr>
+                                        <p:cTn id="33" dur="1" fill="hold"/>
+                                        <p:tgtEl>
+                                          <p:spTgt spid="8"/>
+                                        </p:tgtEl>
+                                        <p:attrNameLst>
+                                          <p:attrName>style.visibility</p:attrName>
+                                        </p:attrNameLst>
+                                      </p:cBhvr>
+                                      <p:to>
+                                        <p:strVal val="visible"/>
+                                      </p:to>
+                                    </p:set>
+                                    <p:animEffect transition="in" filter="fade">
+                                      <p:cBhvr>
+                                        <p:cTn id="34" dur="450"/>
+                                        <p:tgtEl>
+                                          <p:spTgt spid="8"/>
+                                        </p:tgtEl>
+                                      </p:cBhvr>
+                                    </p:animEffect>
+                                  </p:childTnLst>
+                                </p:cTn>
+                              </p:par>
+                            </p:childTnLst>
+                          </p:cTn>
+                        </p:par>
+                      </p:childTnLst>
+                    </p:cTn>
+                  </p:par>
+                  <p:par>
+                    <p:cTn id="40" fill="hold">
+                      <p:stCondLst>
+                        <p:cond delay="indefinite"/>
+                      </p:stCondLst>
+                      <p:childTnLst>
+                        <p:par>
+                          <p:cTn id="41" fill="hold">
+                            <p:stCondLst>
+                              <p:cond delay="0"/>
+                            </p:stCondLst>
+                            <p:childTnLst>
+                              <p:par>
+                                <p:cTn id="42" presetID="10" presetClass="entr" presetSubtype="0" fill="hold" grpId="0" nodeType="afterEffect">
+                                  <p:stCondLst>
+                                    <p:cond delay="0"/>
+                                  </p:stCondLst>
+                                  <p:childTnLst>
+                                    <p:set>
+                                      <p:cBhvr>
+                                        <p:cTn id="43" dur="1" fill="hold"/>
+                                        <p:tgtEl>
+                                          <p:spTgt spid="9"/>
+                                        </p:tgtEl>
+                                        <p:attrNameLst>
+                                          <p:attrName>style.visibility</p:attrName>
+                                        </p:attrNameLst>
+                                      </p:cBhvr>
+                                      <p:to>
+                                        <p:strVal val="visible"/>
+                                      </p:to>
+                                    </p:set>
+                                    <p:animEffect transition="in" filter="fade">
+                                      <p:cBhvr>
+                                        <p:cTn id="44" dur="450"/>
+                                        <p:tgtEl>
+                                          <p:spTgt spid="9"/>
+                                        </p:tgtEl>
+                                      </p:cBhvr>
+                                    </p:animEffect>
+                                  </p:childTnLst>
+                                </p:cTn>
+                              </p:par>
+                            </p:childTnLst>
+                          </p:cTn>
+                        </p:par>
+                      </p:childTnLst>
+                    </p:cTn>
+                  </p:par>
+                  <p:par>
+                    <p:cTn id="50" fill="hold">
+                      <p:stCondLst>
+                        <p:cond delay="indefinite"/>
+                      </p:stCondLst>
+                      <p:childTnLst>
+                        <p:par>
+                          <p:cTn id="51" fill="hold">
+                            <p:stCondLst>
+                              <p:cond delay="0"/>
+                            </p:stCondLst>
+                            <p:childTnLst>
+                              <p:par>
+                                <p:cTn id="52" presetID="10" presetClass="entr" presetSubtype="0" fill="hold" grpId="0" nodeType="afterEffect">
+                                  <p:stCondLst>
+                                    <p:cond delay="0"/>
+                                  </p:stCondLst>
+                                  <p:childTnLst>
+                                    <p:set>
+                                      <p:cBhvr>
+                                        <p:cTn id="53" dur="1" fill="hold"/>
+                                        <p:tgtEl>
+                                          <p:spTgt spid="10"/>
+                                        </p:tgtEl>
+                                        <p:attrNameLst>
+                                          <p:attrName>style.visibility</p:attrName>
+                                        </p:attrNameLst>
+                                      </p:cBhvr>
+                                      <p:to>
+                                        <p:strVal val="visible"/>
+                                      </p:to>
+                                    </p:set>
+                                    <p:animEffect transition="in" filter="fade">
+                                      <p:cBhvr>
+                                        <p:cTn id="54" dur="450"/>
+                                        <p:tgtEl>
+                                          <p:spTgt spid="10"/>
+                                        </p:tgtEl>
+                                      </p:cBhvr>
+                                    </p:animEffect>
+                                  </p:childTnLst>
+                                </p:cTn>
+                              </p:par>
+                            </p:childTnLst>
+                          </p:cTn>
+                        </p:par>
+                      </p:childTnLst>
+                    </p:cTn>
+                  </p:par>
+                  <p:par>
+                    <p:cTn id="60" fill="hold">
+                      <p:stCondLst>
+                        <p:cond delay="indefinite"/>
+                      </p:stCondLst>
+                      <p:childTnLst>
+                        <p:par>
+                          <p:cTn id="61" fill="hold">
+                            <p:stCondLst>
+                              <p:cond delay="0"/>
+                            </p:stCondLst>
+                            <p:childTnLst>
+                              <p:par>
+                                <p:cTn id="62" presetID="10" presetClass="entr" presetSubtype="0" fill="hold" grpId="0" nodeType="afterEffect">
+                                  <p:stCondLst>
+                                    <p:cond delay="0"/>
+                                  </p:stCondLst>
+                                  <p:childTnLst>
+                                    <p:set>
+                                      <p:cBhvr>
+                                        <p:cTn id="63" dur="1" fill="hold"/>
+                                        <p:tgtEl>
+                                          <p:spTgt spid="11"/>
+                                        </p:tgtEl>
+                                        <p:attrNameLst>
+                                          <p:attrName>style.visibility</p:attrName>
+                                        </p:attrNameLst>
+                                      </p:cBhvr>
+                                      <p:to>
+                                        <p:strVal val="visible"/>
+                                      </p:to>
+                                    </p:set>
+                                    <p:animEffect transition="in" filter="fade">
+                                      <p:cBhvr>
+                                        <p:cTn id="64" dur="450"/>
+                                        <p:tgtEl>
+                                          <p:spTgt spid="11"/>
+                                        </p:tgtEl>
+                                      </p:cBhvr>
+                                    </p:animEffect>
+                                  </p:childTnLst>
+                                </p:cTn>
+                              </p:par>
+                            </p:childTnLst>
+                          </p:cTn>
+                        </p:par>
+                      </p:childTnLst>
+                    </p:cTn>
+                  </p:par>
+                  <p:par>
+                    <p:cTn id="70" fill="hold">
+                      <p:stCondLst>
+                        <p:cond delay="indefinite"/>
+                      </p:stCondLst>
+                      <p:childTnLst>
+                        <p:par>
+                          <p:cTn id="71" fill="hold">
+                            <p:stCondLst>
+                              <p:cond delay="0"/>
+                            </p:stCondLst>
+                            <p:childTnLst>
+                              <p:par>
+                                <p:cTn id="72" presetID="10" presetClass="entr" presetSubtype="0" fill="hold" grpId="0" nodeType="afterEffect">
+                                  <p:stCondLst>
+                                    <p:cond delay="0"/>
+                                  </p:stCondLst>
+                                  <p:childTnLst>
+                                    <p:set>
+                                      <p:cBhvr>
+                                        <p:cTn id="73" dur="1" fill="hold"/>
+                                        <p:tgtEl>
+                                          <p:spTgt spid="12"/>
+                                        </p:tgtEl>
+                                        <p:attrNameLst>
+                                          <p:attrName>style.visibility</p:attrName>
+                                        </p:attrNameLst>
+                                      </p:cBhvr>
+                                      <p:to>
+                                        <p:strVal val="visible"/>
+                                      </p:to>
+                                    </p:set>
+                                    <p:animEffect transition="in" filter="fade">
+                                      <p:cBhvr>
+                                        <p:cTn id="74" dur="450"/>
+                                        <p:tgtEl>
+                                          <p:spTgt spid="12"/>
+                                        </p:tgtEl>
+                                      </p:cBhvr>
+                                    </p:animEffect>
+                                  </p:childTnLst>
+                                </p:cTn>
+                              </p:par>
+                            </p:childTnLst>
+                          </p:cTn>
+                        </p:par>
+                      </p:childTnLst>
+                    </p:cTn>
+                  </p:par>
+                  <p:par>
+                    <p:cTn id="80" fill="hold">
+                      <p:stCondLst>
+                        <p:cond delay="indefinite"/>
+                      </p:stCondLst>
+                      <p:childTnLst>
+                        <p:par>
+                          <p:cTn id="81" fill="hold">
+                            <p:stCondLst>
+                              <p:cond delay="0"/>
+                            </p:stCondLst>
+                            <p:childTnLst>
+                              <p:par>
+                                <p:cTn id="82" presetID="10" presetClass="entr" presetSubtype="0" fill="hold" grpId="0" nodeType="afterEffect">
+                                  <p:stCondLst>
+                                    <p:cond delay="0"/>
+                                  </p:stCondLst>
+                                  <p:childTnLst>
+                                    <p:set>
+                                      <p:cBhvr>
+                                        <p:cTn id="83" dur="1" fill="hold"/>
+                                        <p:tgtEl>
+                                          <p:spTgt spid="13"/>
+                                        </p:tgtEl>
+                                        <p:attrNameLst>
+                                          <p:attrName>style.visibility</p:attrName>
+                                        </p:attrNameLst>
+                                      </p:cBhvr>
+                                      <p:to>
+                                        <p:strVal val="visible"/>
+                                      </p:to>
+                                    </p:set>
+                                    <p:animEffect transition="in" filter="fade">
+                                      <p:cBhvr>
+                                        <p:cTn id="84" dur="450"/>
+                                        <p:tgtEl>
+                                          <p:spTgt spid="13"/>
+                                        </p:tgtEl>
+                                      </p:cBhvr>
+                                    </p:animEffect>
+                                  </p:childTnLst>
+                                </p:cTn>
+                              </p:par>
+                            </p:childTnLst>
+                          </p:cTn>
+                        </p:par>
+                      </p:childTnLst>
+                    </p:cTn>
+                  </p:par>
+                  <p:par>
+                    <p:cTn id="90" fill="hold">
+                      <p:stCondLst>
+                        <p:cond delay="indefinite"/>
+                      </p:stCondLst>
+                      <p:childTnLst>
+                        <p:par>
+                          <p:cTn id="91" fill="hold">
+                            <p:stCondLst>
+                              <p:cond delay="0"/>
+                            </p:stCondLst>
+                            <p:childTnLst>
+                              <p:par>
+                                <p:cTn id="92" presetID="10" presetClass="entr" presetSubtype="0" fill="hold" grpId="0" nodeType="afterEffect">
+                                  <p:stCondLst>
+                                    <p:cond delay="0"/>
+                                  </p:stCondLst>
+                                  <p:childTnLst>
+                                    <p:set>
+                                      <p:cBhvr>
+                                        <p:cTn id="93" dur="1" fill="hold"/>
+                                        <p:tgtEl>
+                                          <p:spTgt spid="14"/>
+                                        </p:tgtEl>
+                                        <p:attrNameLst>
+                                          <p:attrName>style.visibility</p:attrName>
+                                        </p:attrNameLst>
+                                      </p:cBhvr>
+                                      <p:to>
+                                        <p:strVal val="visible"/>
+                                      </p:to>
+                                    </p:set>
+                                    <p:animEffect transition="in" filter="fade">
+                                      <p:cBhvr>
+                                        <p:cTn id="94" dur="450"/>
+                                        <p:tgtEl>
+                                          <p:spTgt spid="14"/>
+                                        </p:tgtEl>
+                                      </p:cBhvr>
+                                    </p:animEffect>
+                                  </p:childTnLst>
+                                </p:cTn>
+                              </p:par>
+                            </p:childTnLst>
+                          </p:cTn>
+                        </p:par>
+                      </p:childTnLst>
+                    </p:cTn>
+                  </p:par>
+                </p:childTnLst>
+              </p:cTn>
+              <p:prevCondLst>
+                <p:cond evt="onPrev" delay="0">
+                  <p:tgtEl>
+                    <p:sldTgt/>
+                  </p:tgtEl>
+                </p:cond>
+              </p:prevCondLst>
+              <p:nextCondLst>
+                <p:cond evt="onNext" delay="0">
+                  <p:tgtEl>
+                    <p:sldTgt/>
+                  </p:tgtEl>
+                </p:cond>
+              </p:nextCondLst>
+            </p:seq>
+          </p:childTnLst>
+        </p:cTn>
+      </p:par>
+    </p:tnLst>
+  </p:timing>
+</p:sld>
+</file>
+
+<file path=ppt/slides/slide11.xml><?xml version="1.0" encoding="utf-8"?>
+<p:sld xmlns:a="http://schemas.openxmlformats.org/drawingml/2006/main" xmlns:p="http://schemas.openxmlformats.org/presentationml/2006/main" xmlns:r="http://schemas.openxmlformats.org/officeDocument/2006/relationships">
+  <p:cSld>
+    <p:spTree>
+      <p:nvGrpSpPr>
+        <p:cNvPr id="1" name=""/>
+        <p:cNvGrpSpPr/>
+        <p:nvPr/>
+      </p:nvGrpSpPr>
+      <p:grpSpPr/>
+      <p:sp>
+        <p:nvSpPr>
+          <p:cNvPr id="2" name="Rectangle 1"/>
           <p:cNvSpPr/>
           <p:nvPr/>
         </p:nvSpPr>
         <p:spPr>
           <a:xfrm>
-            <a:off x="1005840" y="2478024"/>
-            <a:ext cx="10149840" cy="12700"/>
+            <a:off x="0" y="0"/>
+            <a:ext cx="12191695" cy="6858000"/>
           </a:xfrm>
           <a:prstGeom prst="rect">
             <a:avLst/>
           </a:prstGeom>
           <a:solidFill>
-            <a:srgbClr val="1F2937"/>
+            <a:srgbClr val="0B0F17"/>
           </a:solidFill>
           <a:ln>
             <a:noFill/>
@@ -5501,14 +6353,14 @@
       </p:sp>
       <p:sp>
         <p:nvSpPr>
-          <p:cNvPr id="9" name="TextBox 8"/>
+          <p:cNvPr id="3" name="TextBox 2"/>
           <p:cNvSpPr txBox="1"/>
           <p:nvPr/>
         </p:nvSpPr>
         <p:spPr>
           <a:xfrm>
-            <a:off x="1005840" y="2606040"/>
-            <a:ext cx="3017520" cy="438912"/>
+            <a:off x="1005840" y="658368"/>
+            <a:ext cx="10149840" cy="292608"/>
           </a:xfrm>
           <a:prstGeom prst="rect">
             <a:avLst/>
@@ -5527,27 +6379,27 @@
               </a:lnSpc>
             </a:pPr>
             <a:r>
-              <a:rPr sz="1500" b="0">
-                <a:solidFill>
-                  <a:srgbClr val="E8ECF3"/>
+              <a:rPr sz="1200" b="1">
+                <a:solidFill>
+                  <a:srgbClr val="22D3EE"/>
                 </a:solidFill>
                 <a:latin typeface="Helvetica Neue"/>
               </a:rPr>
-              <a:t>GitHub Copilot review</a:t>
-            </a:r>
-          </a:p>
-        </p:txBody>
-      </p:sp>
-      <p:sp>
-        <p:nvSpPr>
-          <p:cNvPr id="10" name="TextBox 9"/>
+              <a:t>DIFFERENTIATION</a:t>
+            </a:r>
+          </a:p>
+        </p:txBody>
+      </p:sp>
+      <p:sp>
+        <p:nvSpPr>
+          <p:cNvPr id="4" name="TextBox 3"/>
           <p:cNvSpPr txBox="1"/>
           <p:nvPr/>
         </p:nvSpPr>
         <p:spPr>
           <a:xfrm>
-            <a:off x="4023360" y="2606040"/>
-            <a:ext cx="7132320" cy="438912"/>
+            <a:off x="1005840" y="1078992"/>
+            <a:ext cx="10149840" cy="914400"/>
           </a:xfrm>
           <a:prstGeom prst="rect">
             <a:avLst/>
@@ -5562,31 +6414,75 @@
           <a:p>
             <a:pPr algn="l">
               <a:lnSpc>
-                <a:spcPct val="100000"/>
-              </a:lnSpc>
-            </a:pPr>
-            <a:r>
-              <a:rPr sz="1500" b="0">
-                <a:solidFill>
-                  <a:srgbClr val="8B97AB"/>
+                <a:spcPct val="106000"/>
+              </a:lnSpc>
+            </a:pPr>
+            <a:r>
+              <a:rPr sz="2800" b="1">
+                <a:solidFill>
+                  <a:srgbClr val="E8ECF3"/>
                 </a:solidFill>
                 <a:latin typeface="Helvetica Neue"/>
               </a:rPr>
-              <a:t>by default “a ‘Comment’ review, not … a ‘Request changes’ review”</a:t>
-            </a:r>
-          </a:p>
-        </p:txBody>
-      </p:sp>
-      <p:sp>
-        <p:nvSpPr>
-          <p:cNvPr id="11" name="TextBox 10"/>
+              <a:t>Every vendor's AI review is advisory. They say so.</a:t>
+            </a:r>
+          </a:p>
+        </p:txBody>
+      </p:sp>
+      <p:sp>
+        <p:nvSpPr>
+          <p:cNvPr id="5" name="deckkit-rule"/>
+          <p:cNvSpPr/>
+          <p:nvPr/>
+        </p:nvSpPr>
+        <p:spPr>
+          <a:xfrm>
+            <a:off x="1005840" y="1883664"/>
+            <a:ext cx="1463040" cy="38100"/>
+          </a:xfrm>
+          <a:prstGeom prst="rect">
+            <a:avLst/>
+          </a:prstGeom>
+          <a:solidFill>
+            <a:srgbClr val="22D3EE"/>
+          </a:solidFill>
+          <a:ln>
+            <a:noFill/>
+          </a:ln>
+          <a:effectLst/>
+        </p:spPr>
+        <p:style>
+          <a:lnRef idx="1">
+            <a:schemeClr val="accent1"/>
+          </a:lnRef>
+          <a:fillRef idx="3">
+            <a:schemeClr val="accent1"/>
+          </a:fillRef>
+          <a:effectRef idx="2">
+            <a:schemeClr val="accent1"/>
+          </a:effectRef>
+          <a:fontRef idx="minor">
+            <a:schemeClr val="lt1"/>
+          </a:fontRef>
+        </p:style>
+        <p:txBody>
+          <a:bodyPr rtlCol="0" anchor="ctr"/>
+          <a:lstStyle/>
+          <a:p>
+            <a:pPr algn="ctr"/>
+          </a:p>
+        </p:txBody>
+      </p:sp>
+      <p:sp>
+        <p:nvSpPr>
+          <p:cNvPr id="6" name="TextBox 5"/>
           <p:cNvSpPr txBox="1"/>
           <p:nvPr/>
         </p:nvSpPr>
         <p:spPr>
           <a:xfrm>
-            <a:off x="1005840" y="3044952"/>
-            <a:ext cx="3017520" cy="438912"/>
+            <a:off x="1005840" y="2148840"/>
+            <a:ext cx="3017520" cy="292608"/>
           </a:xfrm>
           <a:prstGeom prst="rect">
             <a:avLst/>
@@ -5605,27 +6501,27 @@
               </a:lnSpc>
             </a:pPr>
             <a:r>
-              <a:rPr sz="1500" b="0">
-                <a:solidFill>
-                  <a:srgbClr val="E8ECF3"/>
+              <a:rPr sz="1100" b="1">
+                <a:solidFill>
+                  <a:srgbClr val="22D3EE"/>
                 </a:solidFill>
                 <a:latin typeface="Helvetica Neue"/>
               </a:rPr>
-              <a:t>Anthropic Code Review</a:t>
-            </a:r>
-          </a:p>
-        </p:txBody>
-      </p:sp>
-      <p:sp>
-        <p:nvSpPr>
-          <p:cNvPr id="12" name="TextBox 11"/>
+              <a:t>PRODUCT</a:t>
+            </a:r>
+          </a:p>
+        </p:txBody>
+      </p:sp>
+      <p:sp>
+        <p:nvSpPr>
+          <p:cNvPr id="7" name="TextBox 6"/>
           <p:cNvSpPr txBox="1"/>
           <p:nvPr/>
         </p:nvSpPr>
         <p:spPr>
           <a:xfrm>
-            <a:off x="4023360" y="3044952"/>
-            <a:ext cx="7132320" cy="438912"/>
+            <a:off x="4023360" y="2148840"/>
+            <a:ext cx="7132320" cy="292608"/>
           </a:xfrm>
           <a:prstGeom prst="rect">
             <a:avLst/>
@@ -5644,26 +6540,70 @@
               </a:lnSpc>
             </a:pPr>
             <a:r>
-              <a:rPr sz="1500" b="0">
-                <a:solidFill>
-                  <a:srgbClr val="8B97AB"/>
+              <a:rPr sz="1100" b="1">
+                <a:solidFill>
+                  <a:srgbClr val="22D3EE"/>
                 </a:solidFill>
                 <a:latin typeface="Helvetica Neue"/>
               </a:rPr>
-              <a:t>“always completes with a neutral conclusion so it never blocks merging”</a:t>
-            </a:r>
-          </a:p>
-        </p:txBody>
-      </p:sp>
-      <p:sp>
-        <p:nvSpPr>
-          <p:cNvPr id="13" name="TextBox 12"/>
+              <a:t>FROM THEIR OWN DOCUMENTATION</a:t>
+            </a:r>
+          </a:p>
+        </p:txBody>
+      </p:sp>
+      <p:sp>
+        <p:nvSpPr>
+          <p:cNvPr id="8" name="Rectangle 7"/>
+          <p:cNvSpPr/>
+          <p:nvPr/>
+        </p:nvSpPr>
+        <p:spPr>
+          <a:xfrm>
+            <a:off x="1005840" y="2478024"/>
+            <a:ext cx="10149840" cy="12700"/>
+          </a:xfrm>
+          <a:prstGeom prst="rect">
+            <a:avLst/>
+          </a:prstGeom>
+          <a:solidFill>
+            <a:srgbClr val="1F2937"/>
+          </a:solidFill>
+          <a:ln>
+            <a:noFill/>
+          </a:ln>
+          <a:effectLst/>
+        </p:spPr>
+        <p:style>
+          <a:lnRef idx="1">
+            <a:schemeClr val="accent1"/>
+          </a:lnRef>
+          <a:fillRef idx="3">
+            <a:schemeClr val="accent1"/>
+          </a:fillRef>
+          <a:effectRef idx="2">
+            <a:schemeClr val="accent1"/>
+          </a:effectRef>
+          <a:fontRef idx="minor">
+            <a:schemeClr val="lt1"/>
+          </a:fontRef>
+        </p:style>
+        <p:txBody>
+          <a:bodyPr rtlCol="0" anchor="ctr"/>
+          <a:lstStyle/>
+          <a:p>
+            <a:pPr algn="ctr"/>
+          </a:p>
+        </p:txBody>
+      </p:sp>
+      <p:sp>
+        <p:nvSpPr>
+          <p:cNvPr id="9" name="TextBox 8"/>
           <p:cNvSpPr txBox="1"/>
           <p:nvPr/>
         </p:nvSpPr>
         <p:spPr>
           <a:xfrm>
-            <a:off x="1005840" y="3483864"/>
+            <a:off x="1005840" y="2606040"/>
             <a:ext cx="3017520" cy="438912"/>
           </a:xfrm>
           <a:prstGeom prst="rect">
@@ -5689,20 +6629,20 @@
                 </a:solidFill>
                 <a:latin typeface="Helvetica Neue"/>
               </a:rPr>
-              <a:t>OpenAI Codex</a:t>
-            </a:r>
-          </a:p>
-        </p:txBody>
-      </p:sp>
-      <p:sp>
-        <p:nvSpPr>
-          <p:cNvPr id="14" name="TextBox 13"/>
+              <a:t>GitHub Copilot review</a:t>
+            </a:r>
+          </a:p>
+        </p:txBody>
+      </p:sp>
+      <p:sp>
+        <p:nvSpPr>
+          <p:cNvPr id="10" name="TextBox 9"/>
           <p:cNvSpPr txBox="1"/>
           <p:nvPr/>
         </p:nvSpPr>
         <p:spPr>
           <a:xfrm>
-            <a:off x="4023360" y="3483864"/>
+            <a:off x="4023360" y="2606040"/>
             <a:ext cx="7132320" cy="438912"/>
           </a:xfrm>
           <a:prstGeom prst="rect">
@@ -5728,20 +6668,20 @@
                 </a:solidFill>
                 <a:latin typeface="Helvetica Neue"/>
               </a:rPr>
-              <a:t>“don't replace tests, branch protections, or required approvals”</a:t>
-            </a:r>
-          </a:p>
-        </p:txBody>
-      </p:sp>
-      <p:sp>
-        <p:nvSpPr>
-          <p:cNvPr id="15" name="TextBox 14"/>
+              <a:t>by default “a ‘Comment’ review, not … a ‘Request changes’ review”</a:t>
+            </a:r>
+          </a:p>
+        </p:txBody>
+      </p:sp>
+      <p:sp>
+        <p:nvSpPr>
+          <p:cNvPr id="11" name="TextBox 10"/>
           <p:cNvSpPr txBox="1"/>
           <p:nvPr/>
         </p:nvSpPr>
         <p:spPr>
           <a:xfrm>
-            <a:off x="1005840" y="3922776"/>
+            <a:off x="1005840" y="3044952"/>
             <a:ext cx="3017520" cy="438912"/>
           </a:xfrm>
           <a:prstGeom prst="rect">
@@ -5767,20 +6707,20 @@
                 </a:solidFill>
                 <a:latin typeface="Helvetica Neue"/>
               </a:rPr>
-              <a:t>Cursor Bugbot</a:t>
-            </a:r>
-          </a:p>
-        </p:txBody>
-      </p:sp>
-      <p:sp>
-        <p:nvSpPr>
-          <p:cNvPr id="16" name="TextBox 15"/>
+              <a:t>Anthropic Code Review</a:t>
+            </a:r>
+          </a:p>
+        </p:txBody>
+      </p:sp>
+      <p:sp>
+        <p:nvSpPr>
+          <p:cNvPr id="12" name="TextBox 11"/>
           <p:cNvSpPr txBox="1"/>
           <p:nvPr/>
         </p:nvSpPr>
         <p:spPr>
           <a:xfrm>
-            <a:off x="4023360" y="3922776"/>
+            <a:off x="4023360" y="3044952"/>
             <a:ext cx="7132320" cy="438912"/>
           </a:xfrm>
           <a:prstGeom prst="rect">
@@ -5806,20 +6746,20 @@
                 </a:solidFill>
                 <a:latin typeface="Helvetica Neue"/>
               </a:rPr>
-              <a:t>findings “default to neutral”</a:t>
-            </a:r>
-          </a:p>
-        </p:txBody>
-      </p:sp>
-      <p:sp>
-        <p:nvSpPr>
-          <p:cNvPr id="17" name="TextBox 16"/>
+              <a:t>“always completes with a neutral conclusion so it never blocks merging”</a:t>
+            </a:r>
+          </a:p>
+        </p:txBody>
+      </p:sp>
+      <p:sp>
+        <p:nvSpPr>
+          <p:cNvPr id="13" name="TextBox 12"/>
           <p:cNvSpPr txBox="1"/>
           <p:nvPr/>
         </p:nvSpPr>
         <p:spPr>
           <a:xfrm>
-            <a:off x="1005840" y="4361688"/>
+            <a:off x="1005840" y="3483864"/>
             <a:ext cx="3017520" cy="438912"/>
           </a:xfrm>
           <a:prstGeom prst="rect">
@@ -5845,20 +6785,20 @@
                 </a:solidFill>
                 <a:latin typeface="Helvetica Neue"/>
               </a:rPr>
-              <a:t>Snyk</a:t>
-            </a:r>
-          </a:p>
-        </p:txBody>
-      </p:sp>
-      <p:sp>
-        <p:nvSpPr>
-          <p:cNvPr id="18" name="TextBox 17"/>
+              <a:t>OpenAI Codex</a:t>
+            </a:r>
+          </a:p>
+        </p:txBody>
+      </p:sp>
+      <p:sp>
+        <p:nvSpPr>
+          <p:cNvPr id="14" name="TextBox 13"/>
           <p:cNvSpPr txBox="1"/>
           <p:nvPr/>
         </p:nvSpPr>
         <p:spPr>
           <a:xfrm>
-            <a:off x="4023360" y="4361688"/>
+            <a:off x="4023360" y="3483864"/>
             <a:ext cx="7132320" cy="438912"/>
           </a:xfrm>
           <a:prstGeom prst="rect">
@@ -5884,21 +6824,21 @@
                 </a:solidFill>
                 <a:latin typeface="Helvetica Neue"/>
               </a:rPr>
-              <a:t>“The generator cannot be the validator.”</a:t>
-            </a:r>
-          </a:p>
-        </p:txBody>
-      </p:sp>
-      <p:sp>
-        <p:nvSpPr>
-          <p:cNvPr id="19" name="TextBox 18"/>
+              <a:t>“don't replace tests, branch protections, or required approvals”</a:t>
+            </a:r>
+          </a:p>
+        </p:txBody>
+      </p:sp>
+      <p:sp>
+        <p:nvSpPr>
+          <p:cNvPr id="15" name="TextBox 14"/>
           <p:cNvSpPr txBox="1"/>
           <p:nvPr/>
         </p:nvSpPr>
         <p:spPr>
           <a:xfrm>
-            <a:off x="1005840" y="4983480"/>
-            <a:ext cx="10058400" cy="1188720"/>
+            <a:off x="1005840" y="3922776"/>
+            <a:ext cx="3017520" cy="438912"/>
           </a:xfrm>
           <a:prstGeom prst="rect">
             <a:avLst/>
@@ -5913,31 +6853,31 @@
           <a:p>
             <a:pPr algn="l">
               <a:lnSpc>
-                <a:spcPct val="130000"/>
-              </a:lnSpc>
-            </a:pPr>
-            <a:r>
-              <a:rPr sz="1600" b="0">
+                <a:spcPct val="100000"/>
+              </a:lnSpc>
+            </a:pPr>
+            <a:r>
+              <a:rPr sz="1500" b="0">
                 <a:solidFill>
                   <a:srgbClr val="E8ECF3"/>
                 </a:solidFill>
                 <a:latin typeface="Helvetica Neue"/>
               </a:rPr>
-              <a:t>Some vendors do enforce rules outside the model: Claude Code's permission rules, Factory's commit blocks. The difference is where the check sits. Theirs guard one agent's actions; ours guards the hand-off between agents, with a named person approving each stage.</a:t>
-            </a:r>
-          </a:p>
-        </p:txBody>
-      </p:sp>
-      <p:sp>
-        <p:nvSpPr>
-          <p:cNvPr id="20" name="TextBox 19"/>
+              <a:t>Cursor Bugbot</a:t>
+            </a:r>
+          </a:p>
+        </p:txBody>
+      </p:sp>
+      <p:sp>
+        <p:nvSpPr>
+          <p:cNvPr id="16" name="TextBox 15"/>
           <p:cNvSpPr txBox="1"/>
           <p:nvPr/>
         </p:nvSpPr>
         <p:spPr>
           <a:xfrm>
-            <a:off x="11247120" y="6291072"/>
-            <a:ext cx="548640" cy="274320"/>
+            <a:off x="4023360" y="3922776"/>
+            <a:ext cx="7132320" cy="438912"/>
           </a:xfrm>
           <a:prstGeom prst="rect">
             <a:avLst/>
@@ -5950,6 +6890,162 @@
           </a:bodyPr>
           <a:lstStyle/>
           <a:p>
+            <a:pPr algn="l">
+              <a:lnSpc>
+                <a:spcPct val="100000"/>
+              </a:lnSpc>
+            </a:pPr>
+            <a:r>
+              <a:rPr sz="1500" b="0">
+                <a:solidFill>
+                  <a:srgbClr val="8B97AB"/>
+                </a:solidFill>
+                <a:latin typeface="Helvetica Neue"/>
+              </a:rPr>
+              <a:t>findings “default to neutral”</a:t>
+            </a:r>
+          </a:p>
+        </p:txBody>
+      </p:sp>
+      <p:sp>
+        <p:nvSpPr>
+          <p:cNvPr id="17" name="TextBox 16"/>
+          <p:cNvSpPr txBox="1"/>
+          <p:nvPr/>
+        </p:nvSpPr>
+        <p:spPr>
+          <a:xfrm>
+            <a:off x="1005840" y="4361688"/>
+            <a:ext cx="3017520" cy="438912"/>
+          </a:xfrm>
+          <a:prstGeom prst="rect">
+            <a:avLst/>
+          </a:prstGeom>
+          <a:noFill/>
+        </p:spPr>
+        <p:txBody>
+          <a:bodyPr wrap="square">
+            <a:spAutoFit/>
+          </a:bodyPr>
+          <a:lstStyle/>
+          <a:p>
+            <a:pPr algn="l">
+              <a:lnSpc>
+                <a:spcPct val="100000"/>
+              </a:lnSpc>
+            </a:pPr>
+            <a:r>
+              <a:rPr sz="1500" b="0">
+                <a:solidFill>
+                  <a:srgbClr val="E8ECF3"/>
+                </a:solidFill>
+                <a:latin typeface="Helvetica Neue"/>
+              </a:rPr>
+              <a:t>Snyk</a:t>
+            </a:r>
+          </a:p>
+        </p:txBody>
+      </p:sp>
+      <p:sp>
+        <p:nvSpPr>
+          <p:cNvPr id="18" name="TextBox 17"/>
+          <p:cNvSpPr txBox="1"/>
+          <p:nvPr/>
+        </p:nvSpPr>
+        <p:spPr>
+          <a:xfrm>
+            <a:off x="4023360" y="4361688"/>
+            <a:ext cx="7132320" cy="438912"/>
+          </a:xfrm>
+          <a:prstGeom prst="rect">
+            <a:avLst/>
+          </a:prstGeom>
+          <a:noFill/>
+        </p:spPr>
+        <p:txBody>
+          <a:bodyPr wrap="square">
+            <a:spAutoFit/>
+          </a:bodyPr>
+          <a:lstStyle/>
+          <a:p>
+            <a:pPr algn="l">
+              <a:lnSpc>
+                <a:spcPct val="100000"/>
+              </a:lnSpc>
+            </a:pPr>
+            <a:r>
+              <a:rPr sz="1500" b="0">
+                <a:solidFill>
+                  <a:srgbClr val="8B97AB"/>
+                </a:solidFill>
+                <a:latin typeface="Helvetica Neue"/>
+              </a:rPr>
+              <a:t>“The generator cannot be the validator.”</a:t>
+            </a:r>
+          </a:p>
+        </p:txBody>
+      </p:sp>
+      <p:sp>
+        <p:nvSpPr>
+          <p:cNvPr id="19" name="TextBox 18"/>
+          <p:cNvSpPr txBox="1"/>
+          <p:nvPr/>
+        </p:nvSpPr>
+        <p:spPr>
+          <a:xfrm>
+            <a:off x="1005840" y="4983480"/>
+            <a:ext cx="10058400" cy="1188720"/>
+          </a:xfrm>
+          <a:prstGeom prst="rect">
+            <a:avLst/>
+          </a:prstGeom>
+          <a:noFill/>
+        </p:spPr>
+        <p:txBody>
+          <a:bodyPr wrap="square">
+            <a:spAutoFit/>
+          </a:bodyPr>
+          <a:lstStyle/>
+          <a:p>
+            <a:pPr algn="l">
+              <a:lnSpc>
+                <a:spcPct val="130000"/>
+              </a:lnSpc>
+            </a:pPr>
+            <a:r>
+              <a:rPr sz="1600" b="0">
+                <a:solidFill>
+                  <a:srgbClr val="E8ECF3"/>
+                </a:solidFill>
+                <a:latin typeface="Helvetica Neue"/>
+              </a:rPr>
+              <a:t>Some vendors do enforce rules outside the model: Claude Code's permission rules, Factory's commit blocks. The difference is where the check sits. Theirs guard one agent's actions; ours guards the hand-off between agents, with a named person approving each stage.</a:t>
+            </a:r>
+          </a:p>
+        </p:txBody>
+      </p:sp>
+      <p:sp>
+        <p:nvSpPr>
+          <p:cNvPr id="20" name="TextBox 19"/>
+          <p:cNvSpPr txBox="1"/>
+          <p:nvPr/>
+        </p:nvSpPr>
+        <p:spPr>
+          <a:xfrm>
+            <a:off x="11247120" y="6291072"/>
+            <a:ext cx="548640" cy="274320"/>
+          </a:xfrm>
+          <a:prstGeom prst="rect">
+            <a:avLst/>
+          </a:prstGeom>
+          <a:noFill/>
+        </p:spPr>
+        <p:txBody>
+          <a:bodyPr wrap="square">
+            <a:spAutoFit/>
+          </a:bodyPr>
+          <a:lstStyle/>
+          <a:p>
             <a:pPr algn="r">
               <a:lnSpc>
                 <a:spcPct val="120000"/>
@@ -5962,7 +7058,7 @@
                 </a:solidFill>
                 <a:latin typeface="Helvetica Neue"/>
               </a:rPr>
-              <a:t>10</a:t>
+              <a:t>11</a:t>
             </a:r>
           </a:p>
         </p:txBody>
@@ -6057,7 +7153,7 @@
 </p:sld>
 </file>
 
-<file path=ppt/slides/slide11.xml><?xml version="1.0" encoding="utf-8"?>
+<file path=ppt/slides/slide12.xml><?xml version="1.0" encoding="utf-8"?>
 <p:sld xmlns:a="http://schemas.openxmlformats.org/drawingml/2006/main" xmlns:p="http://schemas.openxmlformats.org/presentationml/2006/main" xmlns:r="http://schemas.openxmlformats.org/officeDocument/2006/relationships">
   <p:cSld>
     <p:spTree>
@@ -6678,7 +7774,7 @@
                 </a:solidFill>
                 <a:latin typeface="Helvetica Neue"/>
               </a:rPr>
-              <a:t>11</a:t>
+              <a:t>12</a:t>
             </a:r>
           </a:p>
         </p:txBody>
@@ -7214,7 +8310,7 @@
 </p:sld>
 </file>
 
-<file path=ppt/slides/slide12.xml><?xml version="1.0" encoding="utf-8"?>
+<file path=ppt/slides/slide13.xml><?xml version="1.0" encoding="utf-8"?>
 <p:sld xmlns:a="http://schemas.openxmlformats.org/drawingml/2006/main" xmlns:p="http://schemas.openxmlformats.org/presentationml/2006/main" xmlns:r="http://schemas.openxmlformats.org/officeDocument/2006/relationships">
   <p:cSld>
     <p:spTree>
@@ -8078,7 +9174,7 @@
                 </a:solidFill>
                 <a:latin typeface="Helvetica Neue"/>
               </a:rPr>
-              <a:t>12</a:t>
+              <a:t>13</a:t>
             </a:r>
           </a:p>
         </p:txBody>
@@ -8822,1739 +9918,6 @@
                                         <p:cTn id="154" dur="450"/>
                                         <p:tgtEl>
                                           <p:spTgt spid="20"/>
-                                        </p:tgtEl>
-                                      </p:cBhvr>
-                                    </p:animEffect>
-                                  </p:childTnLst>
-                                </p:cTn>
-                              </p:par>
-                            </p:childTnLst>
-                          </p:cTn>
-                        </p:par>
-                      </p:childTnLst>
-                    </p:cTn>
-                  </p:par>
-                </p:childTnLst>
-              </p:cTn>
-              <p:prevCondLst>
-                <p:cond evt="onPrev" delay="0">
-                  <p:tgtEl>
-                    <p:sldTgt/>
-                  </p:tgtEl>
-                </p:cond>
-              </p:prevCondLst>
-              <p:nextCondLst>
-                <p:cond evt="onNext" delay="0">
-                  <p:tgtEl>
-                    <p:sldTgt/>
-                  </p:tgtEl>
-                </p:cond>
-              </p:nextCondLst>
-            </p:seq>
-          </p:childTnLst>
-        </p:cTn>
-      </p:par>
-    </p:tnLst>
-  </p:timing>
-</p:sld>
-</file>
-
-<file path=ppt/slides/slide13.xml><?xml version="1.0" encoding="utf-8"?>
-<p:sld xmlns:a="http://schemas.openxmlformats.org/drawingml/2006/main" xmlns:p="http://schemas.openxmlformats.org/presentationml/2006/main" xmlns:r="http://schemas.openxmlformats.org/officeDocument/2006/relationships">
-  <p:cSld>
-    <p:spTree>
-      <p:nvGrpSpPr>
-        <p:cNvPr id="1" name=""/>
-        <p:cNvGrpSpPr/>
-        <p:nvPr/>
-      </p:nvGrpSpPr>
-      <p:grpSpPr/>
-      <p:sp>
-        <p:nvSpPr>
-          <p:cNvPr id="2" name="Rectangle 1"/>
-          <p:cNvSpPr/>
-          <p:nvPr/>
-        </p:nvSpPr>
-        <p:spPr>
-          <a:xfrm>
-            <a:off x="0" y="0"/>
-            <a:ext cx="12191695" cy="6858000"/>
-          </a:xfrm>
-          <a:prstGeom prst="rect">
-            <a:avLst/>
-          </a:prstGeom>
-          <a:solidFill>
-            <a:srgbClr val="0B0F17"/>
-          </a:solidFill>
-          <a:ln>
-            <a:noFill/>
-          </a:ln>
-          <a:effectLst/>
-        </p:spPr>
-        <p:style>
-          <a:lnRef idx="1">
-            <a:schemeClr val="accent1"/>
-          </a:lnRef>
-          <a:fillRef idx="3">
-            <a:schemeClr val="accent1"/>
-          </a:fillRef>
-          <a:effectRef idx="2">
-            <a:schemeClr val="accent1"/>
-          </a:effectRef>
-          <a:fontRef idx="minor">
-            <a:schemeClr val="lt1"/>
-          </a:fontRef>
-        </p:style>
-        <p:txBody>
-          <a:bodyPr rtlCol="0" anchor="ctr"/>
-          <a:lstStyle/>
-          <a:p>
-            <a:pPr algn="ctr"/>
-          </a:p>
-        </p:txBody>
-      </p:sp>
-      <p:sp>
-        <p:nvSpPr>
-          <p:cNvPr id="3" name="TextBox 2"/>
-          <p:cNvSpPr txBox="1"/>
-          <p:nvPr/>
-        </p:nvSpPr>
-        <p:spPr>
-          <a:xfrm>
-            <a:off x="1005840" y="658368"/>
-            <a:ext cx="10149840" cy="292608"/>
-          </a:xfrm>
-          <a:prstGeom prst="rect">
-            <a:avLst/>
-          </a:prstGeom>
-          <a:noFill/>
-        </p:spPr>
-        <p:txBody>
-          <a:bodyPr wrap="square">
-            <a:spAutoFit/>
-          </a:bodyPr>
-          <a:lstStyle/>
-          <a:p>
-            <a:pPr algn="l">
-              <a:lnSpc>
-                <a:spcPct val="100000"/>
-              </a:lnSpc>
-            </a:pPr>
-            <a:r>
-              <a:rPr sz="1200" b="1">
-                <a:solidFill>
-                  <a:srgbClr val="22D3EE"/>
-                </a:solidFill>
-                <a:latin typeface="Helvetica Neue"/>
-              </a:rPr>
-              <a:t>PROGRESS · KNOWLEDGE BASE</a:t>
-            </a:r>
-          </a:p>
-        </p:txBody>
-      </p:sp>
-      <p:sp>
-        <p:nvSpPr>
-          <p:cNvPr id="4" name="TextBox 3"/>
-          <p:cNvSpPr txBox="1"/>
-          <p:nvPr/>
-        </p:nvSpPr>
-        <p:spPr>
-          <a:xfrm>
-            <a:off x="1005840" y="1078992"/>
-            <a:ext cx="10149840" cy="914400"/>
-          </a:xfrm>
-          <a:prstGeom prst="rect">
-            <a:avLst/>
-          </a:prstGeom>
-          <a:noFill/>
-        </p:spPr>
-        <p:txBody>
-          <a:bodyPr wrap="square">
-            <a:spAutoFit/>
-          </a:bodyPr>
-          <a:lstStyle/>
-          <a:p>
-            <a:pPr algn="l">
-              <a:lnSpc>
-                <a:spcPct val="106000"/>
-              </a:lnSpc>
-            </a:pPr>
-            <a:r>
-              <a:rPr sz="3000" b="1">
-                <a:solidFill>
-                  <a:srgbClr val="E8ECF3"/>
-                </a:solidFill>
-                <a:latin typeface="Helvetica Neue"/>
-              </a:rPr>
-              <a:t>What the agents read before they answer</a:t>
-            </a:r>
-          </a:p>
-        </p:txBody>
-      </p:sp>
-      <p:sp>
-        <p:nvSpPr>
-          <p:cNvPr id="5" name="deckkit-rule"/>
-          <p:cNvSpPr/>
-          <p:nvPr/>
-        </p:nvSpPr>
-        <p:spPr>
-          <a:xfrm>
-            <a:off x="1005840" y="1883664"/>
-            <a:ext cx="1463040" cy="38100"/>
-          </a:xfrm>
-          <a:prstGeom prst="rect">
-            <a:avLst/>
-          </a:prstGeom>
-          <a:solidFill>
-            <a:srgbClr val="22D3EE"/>
-          </a:solidFill>
-          <a:ln>
-            <a:noFill/>
-          </a:ln>
-          <a:effectLst/>
-        </p:spPr>
-        <p:style>
-          <a:lnRef idx="1">
-            <a:schemeClr val="accent1"/>
-          </a:lnRef>
-          <a:fillRef idx="3">
-            <a:schemeClr val="accent1"/>
-          </a:fillRef>
-          <a:effectRef idx="2">
-            <a:schemeClr val="accent1"/>
-          </a:effectRef>
-          <a:fontRef idx="minor">
-            <a:schemeClr val="lt1"/>
-          </a:fontRef>
-        </p:style>
-        <p:txBody>
-          <a:bodyPr rtlCol="0" anchor="ctr"/>
-          <a:lstStyle/>
-          <a:p>
-            <a:pPr algn="ctr"/>
-          </a:p>
-        </p:txBody>
-      </p:sp>
-      <p:sp>
-        <p:nvSpPr>
-          <p:cNvPr id="6" name="TextBox 5"/>
-          <p:cNvSpPr txBox="1"/>
-          <p:nvPr/>
-        </p:nvSpPr>
-        <p:spPr>
-          <a:xfrm>
-            <a:off x="1005840" y="2148840"/>
-            <a:ext cx="3108960" cy="841248"/>
-          </a:xfrm>
-          <a:prstGeom prst="rect">
-            <a:avLst/>
-          </a:prstGeom>
-          <a:noFill/>
-        </p:spPr>
-        <p:txBody>
-          <a:bodyPr wrap="square">
-            <a:spAutoFit/>
-          </a:bodyPr>
-          <a:lstStyle/>
-          <a:p>
-            <a:pPr algn="l">
-              <a:lnSpc>
-                <a:spcPct val="100000"/>
-              </a:lnSpc>
-            </a:pPr>
-            <a:r>
-              <a:rPr sz="4000" b="1">
-                <a:solidFill>
-                  <a:srgbClr val="22D3EE"/>
-                </a:solidFill>
-                <a:latin typeface="Helvetica Neue"/>
-              </a:rPr>
-              <a:t>8/8</a:t>
-            </a:r>
-          </a:p>
-        </p:txBody>
-      </p:sp>
-      <p:sp>
-        <p:nvSpPr>
-          <p:cNvPr id="7" name="TextBox 6"/>
-          <p:cNvSpPr txBox="1"/>
-          <p:nvPr/>
-        </p:nvSpPr>
-        <p:spPr>
-          <a:xfrm>
-            <a:off x="1005840" y="2935224"/>
-            <a:ext cx="3108960" cy="749808"/>
-          </a:xfrm>
-          <a:prstGeom prst="rect">
-            <a:avLst/>
-          </a:prstGeom>
-          <a:noFill/>
-        </p:spPr>
-        <p:txBody>
-          <a:bodyPr wrap="square">
-            <a:spAutoFit/>
-          </a:bodyPr>
-          <a:lstStyle/>
-          <a:p>
-            <a:pPr algn="l">
-              <a:lnSpc>
-                <a:spcPct val="125000"/>
-              </a:lnSpc>
-            </a:pPr>
-            <a:r>
-              <a:rPr sz="1500" b="0">
-                <a:solidFill>
-                  <a:srgbClr val="8B97AB"/>
-                </a:solidFill>
-                <a:latin typeface="Helvetica Neue"/>
-              </a:rPr>
-              <a:t>plan mismatches caught</a:t>
-            </a:r>
-          </a:p>
-          <a:p>
-            <a:pPr algn="l">
-              <a:lnSpc>
-                <a:spcPct val="125000"/>
-              </a:lnSpc>
-            </a:pPr>
-            <a:r>
-              <a:rPr sz="1500" b="0">
-                <a:solidFill>
-                  <a:srgbClr val="8B97AB"/>
-                </a:solidFill>
-                <a:latin typeface="Helvetica Neue"/>
-              </a:rPr>
-              <a:t>with it — 6/8 without</a:t>
-            </a:r>
-          </a:p>
-        </p:txBody>
-      </p:sp>
-      <p:sp>
-        <p:nvSpPr>
-          <p:cNvPr id="8" name="TextBox 7"/>
-          <p:cNvSpPr txBox="1"/>
-          <p:nvPr/>
-        </p:nvSpPr>
-        <p:spPr>
-          <a:xfrm>
-            <a:off x="4389120" y="2148840"/>
-            <a:ext cx="3108960" cy="841248"/>
-          </a:xfrm>
-          <a:prstGeom prst="rect">
-            <a:avLst/>
-          </a:prstGeom>
-          <a:noFill/>
-        </p:spPr>
-        <p:txBody>
-          <a:bodyPr wrap="square">
-            <a:spAutoFit/>
-          </a:bodyPr>
-          <a:lstStyle/>
-          <a:p>
-            <a:pPr algn="l">
-              <a:lnSpc>
-                <a:spcPct val="100000"/>
-              </a:lnSpc>
-            </a:pPr>
-            <a:r>
-              <a:rPr sz="4000" b="1">
-                <a:solidFill>
-                  <a:srgbClr val="22D3EE"/>
-                </a:solidFill>
-                <a:latin typeface="Helvetica Neue"/>
-              </a:rPr>
-              <a:t>0/40</a:t>
-            </a:r>
-          </a:p>
-        </p:txBody>
-      </p:sp>
-      <p:sp>
-        <p:nvSpPr>
-          <p:cNvPr id="9" name="TextBox 8"/>
-          <p:cNvSpPr txBox="1"/>
-          <p:nvPr/>
-        </p:nvSpPr>
-        <p:spPr>
-          <a:xfrm>
-            <a:off x="4389120" y="2935224"/>
-            <a:ext cx="3108960" cy="749808"/>
-          </a:xfrm>
-          <a:prstGeom prst="rect">
-            <a:avLst/>
-          </a:prstGeom>
-          <a:noFill/>
-        </p:spPr>
-        <p:txBody>
-          <a:bodyPr wrap="square">
-            <a:spAutoFit/>
-          </a:bodyPr>
-          <a:lstStyle/>
-          <a:p>
-            <a:pPr algn="l">
-              <a:lnSpc>
-                <a:spcPct val="125000"/>
-              </a:lnSpc>
-            </a:pPr>
-            <a:r>
-              <a:rPr sz="1500" b="0">
-                <a:solidFill>
-                  <a:srgbClr val="8B97AB"/>
-                </a:solidFill>
-                <a:latin typeface="Helvetica Neue"/>
-              </a:rPr>
-              <a:t>false blocks, with it</a:t>
-            </a:r>
-          </a:p>
-          <a:p>
-            <a:pPr algn="l">
-              <a:lnSpc>
-                <a:spcPct val="125000"/>
-              </a:lnSpc>
-            </a:pPr>
-            <a:r>
-              <a:rPr sz="1500" b="0">
-                <a:solidFill>
-                  <a:srgbClr val="8B97AB"/>
-                </a:solidFill>
-                <a:latin typeface="Helvetica Neue"/>
-              </a:rPr>
-              <a:t>or without it</a:t>
-            </a:r>
-          </a:p>
-        </p:txBody>
-      </p:sp>
-      <p:sp>
-        <p:nvSpPr>
-          <p:cNvPr id="10" name="TextBox 9"/>
-          <p:cNvSpPr txBox="1"/>
-          <p:nvPr/>
-        </p:nvSpPr>
-        <p:spPr>
-          <a:xfrm>
-            <a:off x="7680960" y="2148840"/>
-            <a:ext cx="3108960" cy="841248"/>
-          </a:xfrm>
-          <a:prstGeom prst="rect">
-            <a:avLst/>
-          </a:prstGeom>
-          <a:noFill/>
-        </p:spPr>
-        <p:txBody>
-          <a:bodyPr wrap="square">
-            <a:spAutoFit/>
-          </a:bodyPr>
-          <a:lstStyle/>
-          <a:p>
-            <a:pPr algn="l">
-              <a:lnSpc>
-                <a:spcPct val="100000"/>
-              </a:lnSpc>
-            </a:pPr>
-            <a:r>
-              <a:rPr sz="4000" b="1">
-                <a:solidFill>
-                  <a:srgbClr val="22D3EE"/>
-                </a:solidFill>
-                <a:latin typeface="Helvetica Neue"/>
-              </a:rPr>
-              <a:t>18</a:t>
-            </a:r>
-          </a:p>
-        </p:txBody>
-      </p:sp>
-      <p:sp>
-        <p:nvSpPr>
-          <p:cNvPr id="11" name="TextBox 10"/>
-          <p:cNvSpPr txBox="1"/>
-          <p:nvPr/>
-        </p:nvSpPr>
-        <p:spPr>
-          <a:xfrm>
-            <a:off x="7680960" y="2935224"/>
-            <a:ext cx="3108960" cy="749808"/>
-          </a:xfrm>
-          <a:prstGeom prst="rect">
-            <a:avLst/>
-          </a:prstGeom>
-          <a:noFill/>
-        </p:spPr>
-        <p:txBody>
-          <a:bodyPr wrap="square">
-            <a:spAutoFit/>
-          </a:bodyPr>
-          <a:lstStyle/>
-          <a:p>
-            <a:pPr algn="l">
-              <a:lnSpc>
-                <a:spcPct val="125000"/>
-              </a:lnSpc>
-            </a:pPr>
-            <a:r>
-              <a:rPr sz="1500" b="0">
-                <a:solidFill>
-                  <a:srgbClr val="8B97AB"/>
-                </a:solidFill>
-                <a:latin typeface="Helvetica Neue"/>
-              </a:rPr>
-              <a:t>documents read on one</a:t>
-            </a:r>
-          </a:p>
-          <a:p>
-            <a:pPr algn="l">
-              <a:lnSpc>
-                <a:spcPct val="125000"/>
-              </a:lnSpc>
-            </a:pPr>
-            <a:r>
-              <a:rPr sz="1500" b="0">
-                <a:solidFill>
-                  <a:srgbClr val="8B97AB"/>
-                </a:solidFill>
-                <a:latin typeface="Helvetica Neue"/>
-              </a:rPr>
-              <a:t>live run, in production</a:t>
-            </a:r>
-          </a:p>
-        </p:txBody>
-      </p:sp>
-      <p:sp>
-        <p:nvSpPr>
-          <p:cNvPr id="12" name="Rectangle 11"/>
-          <p:cNvSpPr/>
-          <p:nvPr/>
-        </p:nvSpPr>
-        <p:spPr>
-          <a:xfrm>
-            <a:off x="1005840" y="3977639"/>
-            <a:ext cx="3224784" cy="1645920"/>
-          </a:xfrm>
-          <a:prstGeom prst="rect">
-            <a:avLst/>
-          </a:prstGeom>
-          <a:solidFill>
-            <a:srgbClr val="131A25"/>
-          </a:solidFill>
-          <a:ln w="12700">
-            <a:solidFill>
-              <a:srgbClr val="1F2937"/>
-            </a:solidFill>
-          </a:ln>
-          <a:effectLst/>
-        </p:spPr>
-        <p:style>
-          <a:lnRef idx="1">
-            <a:schemeClr val="accent1"/>
-          </a:lnRef>
-          <a:fillRef idx="3">
-            <a:schemeClr val="accent1"/>
-          </a:fillRef>
-          <a:effectRef idx="2">
-            <a:schemeClr val="accent1"/>
-          </a:effectRef>
-          <a:fontRef idx="minor">
-            <a:schemeClr val="lt1"/>
-          </a:fontRef>
-        </p:style>
-        <p:txBody>
-          <a:bodyPr rtlCol="0" anchor="ctr"/>
-          <a:lstStyle/>
-          <a:p>
-            <a:pPr algn="ctr"/>
-          </a:p>
-        </p:txBody>
-      </p:sp>
-      <p:sp>
-        <p:nvSpPr>
-          <p:cNvPr id="13" name="TextBox 12"/>
-          <p:cNvSpPr txBox="1"/>
-          <p:nvPr/>
-        </p:nvSpPr>
-        <p:spPr>
-          <a:xfrm>
-            <a:off x="1188720" y="4123943"/>
-            <a:ext cx="2859024" cy="512064"/>
-          </a:xfrm>
-          <a:prstGeom prst="rect">
-            <a:avLst/>
-          </a:prstGeom>
-          <a:noFill/>
-        </p:spPr>
-        <p:txBody>
-          <a:bodyPr wrap="square">
-            <a:spAutoFit/>
-          </a:bodyPr>
-          <a:lstStyle/>
-          <a:p>
-            <a:pPr algn="l">
-              <a:lnSpc>
-                <a:spcPct val="110000"/>
-              </a:lnSpc>
-            </a:pPr>
-            <a:r>
-              <a:rPr sz="1400" b="1">
-                <a:solidFill>
-                  <a:srgbClr val="22D3EE"/>
-                </a:solidFill>
-                <a:latin typeface="Helvetica Neue"/>
-              </a:rPr>
-              <a:t>Past rejections</a:t>
-            </a:r>
-          </a:p>
-        </p:txBody>
-      </p:sp>
-      <p:sp>
-        <p:nvSpPr>
-          <p:cNvPr id="14" name="TextBox 13"/>
-          <p:cNvSpPr txBox="1"/>
-          <p:nvPr/>
-        </p:nvSpPr>
-        <p:spPr>
-          <a:xfrm>
-            <a:off x="1188720" y="4654295"/>
-            <a:ext cx="2859024" cy="822960"/>
-          </a:xfrm>
-          <a:prstGeom prst="rect">
-            <a:avLst/>
-          </a:prstGeom>
-          <a:noFill/>
-        </p:spPr>
-        <p:txBody>
-          <a:bodyPr wrap="square">
-            <a:spAutoFit/>
-          </a:bodyPr>
-          <a:lstStyle/>
-          <a:p>
-            <a:pPr algn="l">
-              <a:lnSpc>
-                <a:spcPct val="130000"/>
-              </a:lnSpc>
-            </a:pPr>
-            <a:r>
-              <a:rPr sz="1300" b="0">
-                <a:solidFill>
-                  <a:srgbClr val="8B97AB"/>
-                </a:solidFill>
-                <a:latin typeface="Helvetica Neue"/>
-              </a:rPr>
-              <a:t>Why earlier changes to this app were sent back, so the developer does not repeat a mistake.</a:t>
-            </a:r>
-          </a:p>
-        </p:txBody>
-      </p:sp>
-      <p:sp>
-        <p:nvSpPr>
-          <p:cNvPr id="15" name="Rectangle 14"/>
-          <p:cNvSpPr/>
-          <p:nvPr/>
-        </p:nvSpPr>
-        <p:spPr>
-          <a:xfrm>
-            <a:off x="4468368" y="3977639"/>
-            <a:ext cx="3224784" cy="1645920"/>
-          </a:xfrm>
-          <a:prstGeom prst="rect">
-            <a:avLst/>
-          </a:prstGeom>
-          <a:solidFill>
-            <a:srgbClr val="131A25"/>
-          </a:solidFill>
-          <a:ln w="12700">
-            <a:solidFill>
-              <a:srgbClr val="1F2937"/>
-            </a:solidFill>
-          </a:ln>
-          <a:effectLst/>
-        </p:spPr>
-        <p:style>
-          <a:lnRef idx="1">
-            <a:schemeClr val="accent1"/>
-          </a:lnRef>
-          <a:fillRef idx="3">
-            <a:schemeClr val="accent1"/>
-          </a:fillRef>
-          <a:effectRef idx="2">
-            <a:schemeClr val="accent1"/>
-          </a:effectRef>
-          <a:fontRef idx="minor">
-            <a:schemeClr val="lt1"/>
-          </a:fontRef>
-        </p:style>
-        <p:txBody>
-          <a:bodyPr rtlCol="0" anchor="ctr"/>
-          <a:lstStyle/>
-          <a:p>
-            <a:pPr algn="ctr"/>
-          </a:p>
-        </p:txBody>
-      </p:sp>
-      <p:sp>
-        <p:nvSpPr>
-          <p:cNvPr id="16" name="TextBox 15"/>
-          <p:cNvSpPr txBox="1"/>
-          <p:nvPr/>
-        </p:nvSpPr>
-        <p:spPr>
-          <a:xfrm>
-            <a:off x="4651248" y="4123943"/>
-            <a:ext cx="2859024" cy="512064"/>
-          </a:xfrm>
-          <a:prstGeom prst="rect">
-            <a:avLst/>
-          </a:prstGeom>
-          <a:noFill/>
-        </p:spPr>
-        <p:txBody>
-          <a:bodyPr wrap="square">
-            <a:spAutoFit/>
-          </a:bodyPr>
-          <a:lstStyle/>
-          <a:p>
-            <a:pPr algn="l">
-              <a:lnSpc>
-                <a:spcPct val="110000"/>
-              </a:lnSpc>
-            </a:pPr>
-            <a:r>
-              <a:rPr sz="1400" b="1">
-                <a:solidFill>
-                  <a:srgbClr val="22D3EE"/>
-                </a:solidFill>
-                <a:latin typeface="Helvetica Neue"/>
-              </a:rPr>
-              <a:t>Team conventions</a:t>
-            </a:r>
-          </a:p>
-        </p:txBody>
-      </p:sp>
-      <p:sp>
-        <p:nvSpPr>
-          <p:cNvPr id="17" name="TextBox 16"/>
-          <p:cNvSpPr txBox="1"/>
-          <p:nvPr/>
-        </p:nvSpPr>
-        <p:spPr>
-          <a:xfrm>
-            <a:off x="4651248" y="4654295"/>
-            <a:ext cx="2859024" cy="822960"/>
-          </a:xfrm>
-          <a:prstGeom prst="rect">
-            <a:avLst/>
-          </a:prstGeom>
-          <a:noFill/>
-        </p:spPr>
-        <p:txBody>
-          <a:bodyPr wrap="square">
-            <a:spAutoFit/>
-          </a:bodyPr>
-          <a:lstStyle/>
-          <a:p>
-            <a:pPr algn="l">
-              <a:lnSpc>
-                <a:spcPct val="130000"/>
-              </a:lnSpc>
-            </a:pPr>
-            <a:r>
-              <a:rPr sz="1300" b="0">
-                <a:solidFill>
-                  <a:srgbClr val="8B97AB"/>
-                </a:solidFill>
-                <a:latin typeface="Helvetica Neue"/>
-              </a:rPr>
-              <a:t>Questions the team has already settled, so the reviewer stops arguing them again.</a:t>
-            </a:r>
-          </a:p>
-        </p:txBody>
-      </p:sp>
-      <p:sp>
-        <p:nvSpPr>
-          <p:cNvPr id="18" name="Rectangle 17"/>
-          <p:cNvSpPr/>
-          <p:nvPr/>
-        </p:nvSpPr>
-        <p:spPr>
-          <a:xfrm>
-            <a:off x="7930896" y="3977639"/>
-            <a:ext cx="3224784" cy="1645920"/>
-          </a:xfrm>
-          <a:prstGeom prst="rect">
-            <a:avLst/>
-          </a:prstGeom>
-          <a:solidFill>
-            <a:srgbClr val="131A25"/>
-          </a:solidFill>
-          <a:ln w="12700">
-            <a:solidFill>
-              <a:srgbClr val="1F2937"/>
-            </a:solidFill>
-          </a:ln>
-          <a:effectLst/>
-        </p:spPr>
-        <p:style>
-          <a:lnRef idx="1">
-            <a:schemeClr val="accent1"/>
-          </a:lnRef>
-          <a:fillRef idx="3">
-            <a:schemeClr val="accent1"/>
-          </a:fillRef>
-          <a:effectRef idx="2">
-            <a:schemeClr val="accent1"/>
-          </a:effectRef>
-          <a:fontRef idx="minor">
-            <a:schemeClr val="lt1"/>
-          </a:fontRef>
-        </p:style>
-        <p:txBody>
-          <a:bodyPr rtlCol="0" anchor="ctr"/>
-          <a:lstStyle/>
-          <a:p>
-            <a:pPr algn="ctr"/>
-          </a:p>
-        </p:txBody>
-      </p:sp>
-      <p:sp>
-        <p:nvSpPr>
-          <p:cNvPr id="19" name="TextBox 18"/>
-          <p:cNvSpPr txBox="1"/>
-          <p:nvPr/>
-        </p:nvSpPr>
-        <p:spPr>
-          <a:xfrm>
-            <a:off x="8113776" y="4123943"/>
-            <a:ext cx="2859024" cy="512064"/>
-          </a:xfrm>
-          <a:prstGeom prst="rect">
-            <a:avLst/>
-          </a:prstGeom>
-          <a:noFill/>
-        </p:spPr>
-        <p:txBody>
-          <a:bodyPr wrap="square">
-            <a:spAutoFit/>
-          </a:bodyPr>
-          <a:lstStyle/>
-          <a:p>
-            <a:pPr algn="l">
-              <a:lnSpc>
-                <a:spcPct val="110000"/>
-              </a:lnSpc>
-            </a:pPr>
-            <a:r>
-              <a:rPr sz="1400" b="1">
-                <a:solidFill>
-                  <a:srgbClr val="22D3EE"/>
-                </a:solidFill>
-                <a:latin typeface="Helvetica Neue"/>
-              </a:rPr>
-              <a:t>Security advisories</a:t>
-            </a:r>
-          </a:p>
-        </p:txBody>
-      </p:sp>
-      <p:sp>
-        <p:nvSpPr>
-          <p:cNvPr id="20" name="TextBox 19"/>
-          <p:cNvSpPr txBox="1"/>
-          <p:nvPr/>
-        </p:nvSpPr>
-        <p:spPr>
-          <a:xfrm>
-            <a:off x="8113776" y="4654295"/>
-            <a:ext cx="2859024" cy="822960"/>
-          </a:xfrm>
-          <a:prstGeom prst="rect">
-            <a:avLst/>
-          </a:prstGeom>
-          <a:noFill/>
-        </p:spPr>
-        <p:txBody>
-          <a:bodyPr wrap="square">
-            <a:spAutoFit/>
-          </a:bodyPr>
-          <a:lstStyle/>
-          <a:p>
-            <a:pPr algn="l">
-              <a:lnSpc>
-                <a:spcPct val="130000"/>
-              </a:lnSpc>
-            </a:pPr>
-            <a:r>
-              <a:rPr sz="1300" b="0">
-                <a:solidFill>
-                  <a:srgbClr val="8B97AB"/>
-                </a:solidFill>
-                <a:latin typeface="Helvetica Neue"/>
-              </a:rPr>
-              <a:t>Background on known vulnerabilities, so the security explanation is specific.</a:t>
-            </a:r>
-          </a:p>
-        </p:txBody>
-      </p:sp>
-      <p:sp>
-        <p:nvSpPr>
-          <p:cNvPr id="21" name="TextBox 20"/>
-          <p:cNvSpPr txBox="1"/>
-          <p:nvPr/>
-        </p:nvSpPr>
-        <p:spPr>
-          <a:xfrm>
-            <a:off x="1005840" y="5760720"/>
-            <a:ext cx="10058400" cy="685800"/>
-          </a:xfrm>
-          <a:prstGeom prst="rect">
-            <a:avLst/>
-          </a:prstGeom>
-          <a:noFill/>
-        </p:spPr>
-        <p:txBody>
-          <a:bodyPr wrap="square">
-            <a:spAutoFit/>
-          </a:bodyPr>
-          <a:lstStyle/>
-          <a:p>
-            <a:pPr algn="l">
-              <a:lnSpc>
-                <a:spcPct val="125000"/>
-              </a:lnSpc>
-            </a:pPr>
-            <a:r>
-              <a:rPr sz="1300" b="0">
-                <a:solidFill>
-                  <a:srgbClr val="8B97AB"/>
-                </a:solidFill>
-                <a:latin typeface="Helvetica Neue"/>
-              </a:rPr>
-              <a:t>Four agents read it: planner, developer, reviewer and the security explanation. Keyword search, no vector database. It shapes wording, never the verdict: five hostile documents were planted, and the block did not move.</a:t>
-            </a:r>
-          </a:p>
-        </p:txBody>
-      </p:sp>
-      <p:sp>
-        <p:nvSpPr>
-          <p:cNvPr id="165" name="TextBox 164"/>
-          <p:cNvSpPr txBox="1"/>
-          <p:nvPr/>
-        </p:nvSpPr>
-        <p:spPr>
-          <a:xfrm>
-            <a:off x="11247120" y="6291072"/>
-            <a:ext cx="548640" cy="274320"/>
-          </a:xfrm>
-          <a:prstGeom prst="rect">
-            <a:avLst/>
-          </a:prstGeom>
-          <a:noFill/>
-        </p:spPr>
-        <p:txBody>
-          <a:bodyPr wrap="square">
-            <a:spAutoFit/>
-          </a:bodyPr>
-          <a:lstStyle/>
-          <a:p>
-            <a:pPr algn="r">
-              <a:lnSpc>
-                <a:spcPct val="120000"/>
-              </a:lnSpc>
-            </a:pPr>
-            <a:r>
-              <a:rPr sz="1100" b="0">
-                <a:solidFill>
-                  <a:srgbClr val="8B97AB"/>
-                </a:solidFill>
-                <a:latin typeface="Helvetica Neue"/>
-              </a:rPr>
-              <a:t>13</a:t>
-            </a:r>
-          </a:p>
-        </p:txBody>
-      </p:sp>
-    </p:spTree>
-  </p:cSld>
-  <p:clrMapOvr>
-    <a:masterClrMapping/>
-  </p:clrMapOvr>
-  <p:transition spd="med">
-    <p:wipe dir="l"/>
-  </p:transition>
-  <p:timing>
-    <p:tnLst>
-      <p:par>
-        <p:cTn id="1" dur="indefinite" restart="never" nodeType="tmRoot">
-          <p:childTnLst>
-            <p:seq concurrent="1" nextAc="seek">
-              <p:cTn id="2" dur="indefinite" nodeType="mainSeq">
-                <p:childTnLst>
-                  <p:par>
-                    <p:cTn id="10" fill="hold">
-                      <p:stCondLst>
-                        <p:cond delay="indefinite"/>
-                      </p:stCondLst>
-                      <p:childTnLst>
-                        <p:par>
-                          <p:cTn id="11" fill="hold">
-                            <p:stCondLst>
-                              <p:cond delay="0"/>
-                            </p:stCondLst>
-                            <p:childTnLst>
-                              <p:par>
-                                <p:cTn id="12" presetID="10" presetClass="entr" presetSubtype="0" fill="hold" grpId="0" nodeType="clickEffect">
-                                  <p:stCondLst>
-                                    <p:cond delay="0"/>
-                                  </p:stCondLst>
-                                  <p:childTnLst>
-                                    <p:set>
-                                      <p:cBhvr>
-                                        <p:cTn id="13" dur="1" fill="hold"/>
-                                        <p:tgtEl>
-                                          <p:spTgt spid="6"/>
-                                        </p:tgtEl>
-                                        <p:attrNameLst>
-                                          <p:attrName>style.visibility</p:attrName>
-                                        </p:attrNameLst>
-                                      </p:cBhvr>
-                                      <p:to>
-                                        <p:strVal val="visible"/>
-                                      </p:to>
-                                    </p:set>
-                                    <p:animEffect transition="in" filter="fade">
-                                      <p:cBhvr>
-                                        <p:cTn id="14" dur="450"/>
-                                        <p:tgtEl>
-                                          <p:spTgt spid="6"/>
-                                        </p:tgtEl>
-                                      </p:cBhvr>
-                                    </p:animEffect>
-                                  </p:childTnLst>
-                                </p:cTn>
-                              </p:par>
-                            </p:childTnLst>
-                          </p:cTn>
-                        </p:par>
-                      </p:childTnLst>
-                    </p:cTn>
-                  </p:par>
-                  <p:par>
-                    <p:cTn id="20" fill="hold">
-                      <p:stCondLst>
-                        <p:cond delay="indefinite"/>
-                      </p:stCondLst>
-                      <p:childTnLst>
-                        <p:par>
-                          <p:cTn id="21" fill="hold">
-                            <p:stCondLst>
-                              <p:cond delay="0"/>
-                            </p:stCondLst>
-                            <p:childTnLst>
-                              <p:par>
-                                <p:cTn id="22" presetID="10" presetClass="entr" presetSubtype="0" fill="hold" grpId="0" nodeType="afterEffect">
-                                  <p:stCondLst>
-                                    <p:cond delay="0"/>
-                                  </p:stCondLst>
-                                  <p:childTnLst>
-                                    <p:set>
-                                      <p:cBhvr>
-                                        <p:cTn id="23" dur="1" fill="hold"/>
-                                        <p:tgtEl>
-                                          <p:spTgt spid="7"/>
-                                        </p:tgtEl>
-                                        <p:attrNameLst>
-                                          <p:attrName>style.visibility</p:attrName>
-                                        </p:attrNameLst>
-                                      </p:cBhvr>
-                                      <p:to>
-                                        <p:strVal val="visible"/>
-                                      </p:to>
-                                    </p:set>
-                                    <p:animEffect transition="in" filter="fade">
-                                      <p:cBhvr>
-                                        <p:cTn id="24" dur="450"/>
-                                        <p:tgtEl>
-                                          <p:spTgt spid="7"/>
-                                        </p:tgtEl>
-                                      </p:cBhvr>
-                                    </p:animEffect>
-                                  </p:childTnLst>
-                                </p:cTn>
-                              </p:par>
-                            </p:childTnLst>
-                          </p:cTn>
-                        </p:par>
-                      </p:childTnLst>
-                    </p:cTn>
-                  </p:par>
-                  <p:par>
-                    <p:cTn id="30" fill="hold">
-                      <p:stCondLst>
-                        <p:cond delay="indefinite"/>
-                      </p:stCondLst>
-                      <p:childTnLst>
-                        <p:par>
-                          <p:cTn id="31" fill="hold">
-                            <p:stCondLst>
-                              <p:cond delay="0"/>
-                            </p:stCondLst>
-                            <p:childTnLst>
-                              <p:par>
-                                <p:cTn id="32" presetID="10" presetClass="entr" presetSubtype="0" fill="hold" grpId="0" nodeType="afterEffect">
-                                  <p:stCondLst>
-                                    <p:cond delay="0"/>
-                                  </p:stCondLst>
-                                  <p:childTnLst>
-                                    <p:set>
-                                      <p:cBhvr>
-                                        <p:cTn id="33" dur="1" fill="hold"/>
-                                        <p:tgtEl>
-                                          <p:spTgt spid="8"/>
-                                        </p:tgtEl>
-                                        <p:attrNameLst>
-                                          <p:attrName>style.visibility</p:attrName>
-                                        </p:attrNameLst>
-                                      </p:cBhvr>
-                                      <p:to>
-                                        <p:strVal val="visible"/>
-                                      </p:to>
-                                    </p:set>
-                                    <p:animEffect transition="in" filter="fade">
-                                      <p:cBhvr>
-                                        <p:cTn id="34" dur="450"/>
-                                        <p:tgtEl>
-                                          <p:spTgt spid="8"/>
-                                        </p:tgtEl>
-                                      </p:cBhvr>
-                                    </p:animEffect>
-                                  </p:childTnLst>
-                                </p:cTn>
-                              </p:par>
-                            </p:childTnLst>
-                          </p:cTn>
-                        </p:par>
-                      </p:childTnLst>
-                    </p:cTn>
-                  </p:par>
-                  <p:par>
-                    <p:cTn id="40" fill="hold">
-                      <p:stCondLst>
-                        <p:cond delay="indefinite"/>
-                      </p:stCondLst>
-                      <p:childTnLst>
-                        <p:par>
-                          <p:cTn id="41" fill="hold">
-                            <p:stCondLst>
-                              <p:cond delay="0"/>
-                            </p:stCondLst>
-                            <p:childTnLst>
-                              <p:par>
-                                <p:cTn id="42" presetID="10" presetClass="entr" presetSubtype="0" fill="hold" grpId="0" nodeType="afterEffect">
-                                  <p:stCondLst>
-                                    <p:cond delay="0"/>
-                                  </p:stCondLst>
-                                  <p:childTnLst>
-                                    <p:set>
-                                      <p:cBhvr>
-                                        <p:cTn id="43" dur="1" fill="hold"/>
-                                        <p:tgtEl>
-                                          <p:spTgt spid="9"/>
-                                        </p:tgtEl>
-                                        <p:attrNameLst>
-                                          <p:attrName>style.visibility</p:attrName>
-                                        </p:attrNameLst>
-                                      </p:cBhvr>
-                                      <p:to>
-                                        <p:strVal val="visible"/>
-                                      </p:to>
-                                    </p:set>
-                                    <p:animEffect transition="in" filter="fade">
-                                      <p:cBhvr>
-                                        <p:cTn id="44" dur="450"/>
-                                        <p:tgtEl>
-                                          <p:spTgt spid="9"/>
-                                        </p:tgtEl>
-                                      </p:cBhvr>
-                                    </p:animEffect>
-                                  </p:childTnLst>
-                                </p:cTn>
-                              </p:par>
-                            </p:childTnLst>
-                          </p:cTn>
-                        </p:par>
-                      </p:childTnLst>
-                    </p:cTn>
-                  </p:par>
-                  <p:par>
-                    <p:cTn id="50" fill="hold">
-                      <p:stCondLst>
-                        <p:cond delay="indefinite"/>
-                      </p:stCondLst>
-                      <p:childTnLst>
-                        <p:par>
-                          <p:cTn id="51" fill="hold">
-                            <p:stCondLst>
-                              <p:cond delay="0"/>
-                            </p:stCondLst>
-                            <p:childTnLst>
-                              <p:par>
-                                <p:cTn id="52" presetID="10" presetClass="entr" presetSubtype="0" fill="hold" grpId="0" nodeType="afterEffect">
-                                  <p:stCondLst>
-                                    <p:cond delay="0"/>
-                                  </p:stCondLst>
-                                  <p:childTnLst>
-                                    <p:set>
-                                      <p:cBhvr>
-                                        <p:cTn id="53" dur="1" fill="hold"/>
-                                        <p:tgtEl>
-                                          <p:spTgt spid="10"/>
-                                        </p:tgtEl>
-                                        <p:attrNameLst>
-                                          <p:attrName>style.visibility</p:attrName>
-                                        </p:attrNameLst>
-                                      </p:cBhvr>
-                                      <p:to>
-                                        <p:strVal val="visible"/>
-                                      </p:to>
-                                    </p:set>
-                                    <p:animEffect transition="in" filter="fade">
-                                      <p:cBhvr>
-                                        <p:cTn id="54" dur="450"/>
-                                        <p:tgtEl>
-                                          <p:spTgt spid="10"/>
-                                        </p:tgtEl>
-                                      </p:cBhvr>
-                                    </p:animEffect>
-                                  </p:childTnLst>
-                                </p:cTn>
-                              </p:par>
-                            </p:childTnLst>
-                          </p:cTn>
-                        </p:par>
-                      </p:childTnLst>
-                    </p:cTn>
-                  </p:par>
-                  <p:par>
-                    <p:cTn id="60" fill="hold">
-                      <p:stCondLst>
-                        <p:cond delay="indefinite"/>
-                      </p:stCondLst>
-                      <p:childTnLst>
-                        <p:par>
-                          <p:cTn id="61" fill="hold">
-                            <p:stCondLst>
-                              <p:cond delay="0"/>
-                            </p:stCondLst>
-                            <p:childTnLst>
-                              <p:par>
-                                <p:cTn id="62" presetID="10" presetClass="entr" presetSubtype="0" fill="hold" grpId="0" nodeType="afterEffect">
-                                  <p:stCondLst>
-                                    <p:cond delay="0"/>
-                                  </p:stCondLst>
-                                  <p:childTnLst>
-                                    <p:set>
-                                      <p:cBhvr>
-                                        <p:cTn id="63" dur="1" fill="hold"/>
-                                        <p:tgtEl>
-                                          <p:spTgt spid="11"/>
-                                        </p:tgtEl>
-                                        <p:attrNameLst>
-                                          <p:attrName>style.visibility</p:attrName>
-                                        </p:attrNameLst>
-                                      </p:cBhvr>
-                                      <p:to>
-                                        <p:strVal val="visible"/>
-                                      </p:to>
-                                    </p:set>
-                                    <p:animEffect transition="in" filter="fade">
-                                      <p:cBhvr>
-                                        <p:cTn id="64" dur="450"/>
-                                        <p:tgtEl>
-                                          <p:spTgt spid="11"/>
-                                        </p:tgtEl>
-                                      </p:cBhvr>
-                                    </p:animEffect>
-                                  </p:childTnLst>
-                                </p:cTn>
-                              </p:par>
-                            </p:childTnLst>
-                          </p:cTn>
-                        </p:par>
-                      </p:childTnLst>
-                    </p:cTn>
-                  </p:par>
-                  <p:par>
-                    <p:cTn id="70" fill="hold">
-                      <p:stCondLst>
-                        <p:cond delay="indefinite"/>
-                      </p:stCondLst>
-                      <p:childTnLst>
-                        <p:par>
-                          <p:cTn id="71" fill="hold">
-                            <p:stCondLst>
-                              <p:cond delay="0"/>
-                            </p:stCondLst>
-                            <p:childTnLst>
-                              <p:par>
-                                <p:cTn id="72" presetID="10" presetClass="entr" presetSubtype="0" fill="hold" grpId="0" nodeType="afterEffect">
-                                  <p:stCondLst>
-                                    <p:cond delay="0"/>
-                                  </p:stCondLst>
-                                  <p:childTnLst>
-                                    <p:set>
-                                      <p:cBhvr>
-                                        <p:cTn id="73" dur="1" fill="hold"/>
-                                        <p:tgtEl>
-                                          <p:spTgt spid="12"/>
-                                        </p:tgtEl>
-                                        <p:attrNameLst>
-                                          <p:attrName>style.visibility</p:attrName>
-                                        </p:attrNameLst>
-                                      </p:cBhvr>
-                                      <p:to>
-                                        <p:strVal val="visible"/>
-                                      </p:to>
-                                    </p:set>
-                                    <p:animEffect transition="in" filter="fade">
-                                      <p:cBhvr>
-                                        <p:cTn id="74" dur="450"/>
-                                        <p:tgtEl>
-                                          <p:spTgt spid="12"/>
-                                        </p:tgtEl>
-                                      </p:cBhvr>
-                                    </p:animEffect>
-                                  </p:childTnLst>
-                                </p:cTn>
-                              </p:par>
-                            </p:childTnLst>
-                          </p:cTn>
-                        </p:par>
-                      </p:childTnLst>
-                    </p:cTn>
-                  </p:par>
-                  <p:par>
-                    <p:cTn id="80" fill="hold">
-                      <p:stCondLst>
-                        <p:cond delay="indefinite"/>
-                      </p:stCondLst>
-                      <p:childTnLst>
-                        <p:par>
-                          <p:cTn id="81" fill="hold">
-                            <p:stCondLst>
-                              <p:cond delay="0"/>
-                            </p:stCondLst>
-                            <p:childTnLst>
-                              <p:par>
-                                <p:cTn id="82" presetID="10" presetClass="entr" presetSubtype="0" fill="hold" grpId="0" nodeType="afterEffect">
-                                  <p:stCondLst>
-                                    <p:cond delay="0"/>
-                                  </p:stCondLst>
-                                  <p:childTnLst>
-                                    <p:set>
-                                      <p:cBhvr>
-                                        <p:cTn id="83" dur="1" fill="hold"/>
-                                        <p:tgtEl>
-                                          <p:spTgt spid="13"/>
-                                        </p:tgtEl>
-                                        <p:attrNameLst>
-                                          <p:attrName>style.visibility</p:attrName>
-                                        </p:attrNameLst>
-                                      </p:cBhvr>
-                                      <p:to>
-                                        <p:strVal val="visible"/>
-                                      </p:to>
-                                    </p:set>
-                                    <p:animEffect transition="in" filter="fade">
-                                      <p:cBhvr>
-                                        <p:cTn id="84" dur="450"/>
-                                        <p:tgtEl>
-                                          <p:spTgt spid="13"/>
-                                        </p:tgtEl>
-                                      </p:cBhvr>
-                                    </p:animEffect>
-                                  </p:childTnLst>
-                                </p:cTn>
-                              </p:par>
-                            </p:childTnLst>
-                          </p:cTn>
-                        </p:par>
-                      </p:childTnLst>
-                    </p:cTn>
-                  </p:par>
-                  <p:par>
-                    <p:cTn id="90" fill="hold">
-                      <p:stCondLst>
-                        <p:cond delay="indefinite"/>
-                      </p:stCondLst>
-                      <p:childTnLst>
-                        <p:par>
-                          <p:cTn id="91" fill="hold">
-                            <p:stCondLst>
-                              <p:cond delay="0"/>
-                            </p:stCondLst>
-                            <p:childTnLst>
-                              <p:par>
-                                <p:cTn id="92" presetID="10" presetClass="entr" presetSubtype="0" fill="hold" grpId="0" nodeType="afterEffect">
-                                  <p:stCondLst>
-                                    <p:cond delay="0"/>
-                                  </p:stCondLst>
-                                  <p:childTnLst>
-                                    <p:set>
-                                      <p:cBhvr>
-                                        <p:cTn id="93" dur="1" fill="hold"/>
-                                        <p:tgtEl>
-                                          <p:spTgt spid="14"/>
-                                        </p:tgtEl>
-                                        <p:attrNameLst>
-                                          <p:attrName>style.visibility</p:attrName>
-                                        </p:attrNameLst>
-                                      </p:cBhvr>
-                                      <p:to>
-                                        <p:strVal val="visible"/>
-                                      </p:to>
-                                    </p:set>
-                                    <p:animEffect transition="in" filter="fade">
-                                      <p:cBhvr>
-                                        <p:cTn id="94" dur="450"/>
-                                        <p:tgtEl>
-                                          <p:spTgt spid="14"/>
-                                        </p:tgtEl>
-                                      </p:cBhvr>
-                                    </p:animEffect>
-                                  </p:childTnLst>
-                                </p:cTn>
-                              </p:par>
-                            </p:childTnLst>
-                          </p:cTn>
-                        </p:par>
-                      </p:childTnLst>
-                    </p:cTn>
-                  </p:par>
-                  <p:par>
-                    <p:cTn id="100" fill="hold">
-                      <p:stCondLst>
-                        <p:cond delay="indefinite"/>
-                      </p:stCondLst>
-                      <p:childTnLst>
-                        <p:par>
-                          <p:cTn id="101" fill="hold">
-                            <p:stCondLst>
-                              <p:cond delay="0"/>
-                            </p:stCondLst>
-                            <p:childTnLst>
-                              <p:par>
-                                <p:cTn id="102" presetID="10" presetClass="entr" presetSubtype="0" fill="hold" grpId="0" nodeType="afterEffect">
-                                  <p:stCondLst>
-                                    <p:cond delay="0"/>
-                                  </p:stCondLst>
-                                  <p:childTnLst>
-                                    <p:set>
-                                      <p:cBhvr>
-                                        <p:cTn id="103" dur="1" fill="hold"/>
-                                        <p:tgtEl>
-                                          <p:spTgt spid="15"/>
-                                        </p:tgtEl>
-                                        <p:attrNameLst>
-                                          <p:attrName>style.visibility</p:attrName>
-                                        </p:attrNameLst>
-                                      </p:cBhvr>
-                                      <p:to>
-                                        <p:strVal val="visible"/>
-                                      </p:to>
-                                    </p:set>
-                                    <p:animEffect transition="in" filter="fade">
-                                      <p:cBhvr>
-                                        <p:cTn id="104" dur="450"/>
-                                        <p:tgtEl>
-                                          <p:spTgt spid="15"/>
-                                        </p:tgtEl>
-                                      </p:cBhvr>
-                                    </p:animEffect>
-                                  </p:childTnLst>
-                                </p:cTn>
-                              </p:par>
-                            </p:childTnLst>
-                          </p:cTn>
-                        </p:par>
-                      </p:childTnLst>
-                    </p:cTn>
-                  </p:par>
-                  <p:par>
-                    <p:cTn id="110" fill="hold">
-                      <p:stCondLst>
-                        <p:cond delay="indefinite"/>
-                      </p:stCondLst>
-                      <p:childTnLst>
-                        <p:par>
-                          <p:cTn id="111" fill="hold">
-                            <p:stCondLst>
-                              <p:cond delay="0"/>
-                            </p:stCondLst>
-                            <p:childTnLst>
-                              <p:par>
-                                <p:cTn id="112" presetID="10" presetClass="entr" presetSubtype="0" fill="hold" grpId="0" nodeType="afterEffect">
-                                  <p:stCondLst>
-                                    <p:cond delay="0"/>
-                                  </p:stCondLst>
-                                  <p:childTnLst>
-                                    <p:set>
-                                      <p:cBhvr>
-                                        <p:cTn id="113" dur="1" fill="hold"/>
-                                        <p:tgtEl>
-                                          <p:spTgt spid="16"/>
-                                        </p:tgtEl>
-                                        <p:attrNameLst>
-                                          <p:attrName>style.visibility</p:attrName>
-                                        </p:attrNameLst>
-                                      </p:cBhvr>
-                                      <p:to>
-                                        <p:strVal val="visible"/>
-                                      </p:to>
-                                    </p:set>
-                                    <p:animEffect transition="in" filter="fade">
-                                      <p:cBhvr>
-                                        <p:cTn id="114" dur="450"/>
-                                        <p:tgtEl>
-                                          <p:spTgt spid="16"/>
-                                        </p:tgtEl>
-                                      </p:cBhvr>
-                                    </p:animEffect>
-                                  </p:childTnLst>
-                                </p:cTn>
-                              </p:par>
-                            </p:childTnLst>
-                          </p:cTn>
-                        </p:par>
-                      </p:childTnLst>
-                    </p:cTn>
-                  </p:par>
-                  <p:par>
-                    <p:cTn id="120" fill="hold">
-                      <p:stCondLst>
-                        <p:cond delay="indefinite"/>
-                      </p:stCondLst>
-                      <p:childTnLst>
-                        <p:par>
-                          <p:cTn id="121" fill="hold">
-                            <p:stCondLst>
-                              <p:cond delay="0"/>
-                            </p:stCondLst>
-                            <p:childTnLst>
-                              <p:par>
-                                <p:cTn id="122" presetID="10" presetClass="entr" presetSubtype="0" fill="hold" grpId="0" nodeType="afterEffect">
-                                  <p:stCondLst>
-                                    <p:cond delay="0"/>
-                                  </p:stCondLst>
-                                  <p:childTnLst>
-                                    <p:set>
-                                      <p:cBhvr>
-                                        <p:cTn id="123" dur="1" fill="hold"/>
-                                        <p:tgtEl>
-                                          <p:spTgt spid="17"/>
-                                        </p:tgtEl>
-                                        <p:attrNameLst>
-                                          <p:attrName>style.visibility</p:attrName>
-                                        </p:attrNameLst>
-                                      </p:cBhvr>
-                                      <p:to>
-                                        <p:strVal val="visible"/>
-                                      </p:to>
-                                    </p:set>
-                                    <p:animEffect transition="in" filter="fade">
-                                      <p:cBhvr>
-                                        <p:cTn id="124" dur="450"/>
-                                        <p:tgtEl>
-                                          <p:spTgt spid="17"/>
-                                        </p:tgtEl>
-                                      </p:cBhvr>
-                                    </p:animEffect>
-                                  </p:childTnLst>
-                                </p:cTn>
-                              </p:par>
-                            </p:childTnLst>
-                          </p:cTn>
-                        </p:par>
-                      </p:childTnLst>
-                    </p:cTn>
-                  </p:par>
-                  <p:par>
-                    <p:cTn id="130" fill="hold">
-                      <p:stCondLst>
-                        <p:cond delay="indefinite"/>
-                      </p:stCondLst>
-                      <p:childTnLst>
-                        <p:par>
-                          <p:cTn id="131" fill="hold">
-                            <p:stCondLst>
-                              <p:cond delay="0"/>
-                            </p:stCondLst>
-                            <p:childTnLst>
-                              <p:par>
-                                <p:cTn id="132" presetID="10" presetClass="entr" presetSubtype="0" fill="hold" grpId="0" nodeType="afterEffect">
-                                  <p:stCondLst>
-                                    <p:cond delay="0"/>
-                                  </p:stCondLst>
-                                  <p:childTnLst>
-                                    <p:set>
-                                      <p:cBhvr>
-                                        <p:cTn id="133" dur="1" fill="hold"/>
-                                        <p:tgtEl>
-                                          <p:spTgt spid="18"/>
-                                        </p:tgtEl>
-                                        <p:attrNameLst>
-                                          <p:attrName>style.visibility</p:attrName>
-                                        </p:attrNameLst>
-                                      </p:cBhvr>
-                                      <p:to>
-                                        <p:strVal val="visible"/>
-                                      </p:to>
-                                    </p:set>
-                                    <p:animEffect transition="in" filter="fade">
-                                      <p:cBhvr>
-                                        <p:cTn id="134" dur="450"/>
-                                        <p:tgtEl>
-                                          <p:spTgt spid="18"/>
-                                        </p:tgtEl>
-                                      </p:cBhvr>
-                                    </p:animEffect>
-                                  </p:childTnLst>
-                                </p:cTn>
-                              </p:par>
-                            </p:childTnLst>
-                          </p:cTn>
-                        </p:par>
-                      </p:childTnLst>
-                    </p:cTn>
-                  </p:par>
-                  <p:par>
-                    <p:cTn id="140" fill="hold">
-                      <p:stCondLst>
-                        <p:cond delay="indefinite"/>
-                      </p:stCondLst>
-                      <p:childTnLst>
-                        <p:par>
-                          <p:cTn id="141" fill="hold">
-                            <p:stCondLst>
-                              <p:cond delay="0"/>
-                            </p:stCondLst>
-                            <p:childTnLst>
-                              <p:par>
-                                <p:cTn id="142" presetID="10" presetClass="entr" presetSubtype="0" fill="hold" grpId="0" nodeType="afterEffect">
-                                  <p:stCondLst>
-                                    <p:cond delay="0"/>
-                                  </p:stCondLst>
-                                  <p:childTnLst>
-                                    <p:set>
-                                      <p:cBhvr>
-                                        <p:cTn id="143" dur="1" fill="hold"/>
-                                        <p:tgtEl>
-                                          <p:spTgt spid="19"/>
-                                        </p:tgtEl>
-                                        <p:attrNameLst>
-                                          <p:attrName>style.visibility</p:attrName>
-                                        </p:attrNameLst>
-                                      </p:cBhvr>
-                                      <p:to>
-                                        <p:strVal val="visible"/>
-                                      </p:to>
-                                    </p:set>
-                                    <p:animEffect transition="in" filter="fade">
-                                      <p:cBhvr>
-                                        <p:cTn id="144" dur="450"/>
-                                        <p:tgtEl>
-                                          <p:spTgt spid="19"/>
-                                        </p:tgtEl>
-                                      </p:cBhvr>
-                                    </p:animEffect>
-                                  </p:childTnLst>
-                                </p:cTn>
-                              </p:par>
-                            </p:childTnLst>
-                          </p:cTn>
-                        </p:par>
-                      </p:childTnLst>
-                    </p:cTn>
-                  </p:par>
-                  <p:par>
-                    <p:cTn id="150" fill="hold">
-                      <p:stCondLst>
-                        <p:cond delay="indefinite"/>
-                      </p:stCondLst>
-                      <p:childTnLst>
-                        <p:par>
-                          <p:cTn id="151" fill="hold">
-                            <p:stCondLst>
-                              <p:cond delay="0"/>
-                            </p:stCondLst>
-                            <p:childTnLst>
-                              <p:par>
-                                <p:cTn id="152" presetID="10" presetClass="entr" presetSubtype="0" fill="hold" grpId="0" nodeType="afterEffect">
-                                  <p:stCondLst>
-                                    <p:cond delay="0"/>
-                                  </p:stCondLst>
-                                  <p:childTnLst>
-                                    <p:set>
-                                      <p:cBhvr>
-                                        <p:cTn id="153" dur="1" fill="hold"/>
-                                        <p:tgtEl>
-                                          <p:spTgt spid="20"/>
-                                        </p:tgtEl>
-                                        <p:attrNameLst>
-                                          <p:attrName>style.visibility</p:attrName>
-                                        </p:attrNameLst>
-                                      </p:cBhvr>
-                                      <p:to>
-                                        <p:strVal val="visible"/>
-                                      </p:to>
-                                    </p:set>
-                                    <p:animEffect transition="in" filter="fade">
-                                      <p:cBhvr>
-                                        <p:cTn id="154" dur="450"/>
-                                        <p:tgtEl>
-                                          <p:spTgt spid="20"/>
-                                        </p:tgtEl>
-                                      </p:cBhvr>
-                                    </p:animEffect>
-                                  </p:childTnLst>
-                                </p:cTn>
-                              </p:par>
-                            </p:childTnLst>
-                          </p:cTn>
-                        </p:par>
-                      </p:childTnLst>
-                    </p:cTn>
-                  </p:par>
-                  <p:par>
-                    <p:cTn id="160" fill="hold">
-                      <p:stCondLst>
-                        <p:cond delay="indefinite"/>
-                      </p:stCondLst>
-                      <p:childTnLst>
-                        <p:par>
-                          <p:cTn id="161" fill="hold">
-                            <p:stCondLst>
-                              <p:cond delay="0"/>
-                            </p:stCondLst>
-                            <p:childTnLst>
-                              <p:par>
-                                <p:cTn id="162" presetID="10" presetClass="entr" presetSubtype="0" fill="hold" grpId="0" nodeType="afterEffect">
-                                  <p:stCondLst>
-                                    <p:cond delay="0"/>
-                                  </p:stCondLst>
-                                  <p:childTnLst>
-                                    <p:set>
-                                      <p:cBhvr>
-                                        <p:cTn id="163" dur="1" fill="hold"/>
-                                        <p:tgtEl>
-                                          <p:spTgt spid="21"/>
-                                        </p:tgtEl>
-                                        <p:attrNameLst>
-                                          <p:attrName>style.visibility</p:attrName>
-                                        </p:attrNameLst>
-                                      </p:cBhvr>
-                                      <p:to>
-                                        <p:strVal val="visible"/>
-                                      </p:to>
-                                    </p:set>
-                                    <p:animEffect transition="in" filter="fade">
-                                      <p:cBhvr>
-                                        <p:cTn id="164" dur="450"/>
-                                        <p:tgtEl>
-                                          <p:spTgt spid="21"/>
                                         </p:tgtEl>
                                       </p:cBhvr>
                                     </p:animEffect>
@@ -18212,7 +17575,7 @@
                 </a:solidFill>
                 <a:latin typeface="Helvetica Neue"/>
               </a:rPr>
-              <a:t>the problem, the pipeline, and why the gate is not a model</a:t>
+              <a:t>the problem, the pipeline, the gate, and what the agents read</a:t>
             </a:r>
           </a:p>
         </p:txBody>
@@ -18251,7 +17614,7 @@
                 </a:solidFill>
                 <a:latin typeface="Menlo"/>
               </a:rPr>
-              <a:t>3 min</a:t>
+              <a:t>4 min</a:t>
             </a:r>
           </a:p>
         </p:txBody>
@@ -18836,7 +18199,7 @@
                 </a:solidFill>
                 <a:latin typeface="Helvetica Neue"/>
               </a:rPr>
-              <a:t>what is built, the knowledge base, your ten notes, the limits</a:t>
+              <a:t>what is built, your ten notes, and what it does not do</a:t>
             </a:r>
           </a:p>
         </p:txBody>
@@ -18875,7 +18238,7 @@
                 </a:solidFill>
                 <a:latin typeface="Menlo"/>
               </a:rPr>
-              <a:t>3 min</a:t>
+              <a:t>2 min</a:t>
             </a:r>
           </a:p>
         </p:txBody>
@@ -25317,8 +24680,8 @@
         </p:nvSpPr>
         <p:spPr>
           <a:xfrm>
-            <a:off x="731520" y="274320"/>
-            <a:ext cx="3657600" cy="274320"/>
+            <a:off x="1005840" y="658368"/>
+            <a:ext cx="10149840" cy="292608"/>
           </a:xfrm>
           <a:prstGeom prst="rect">
             <a:avLst/>
@@ -25343,7 +24706,7 @@
                 </a:solidFill>
                 <a:latin typeface="Helvetica Neue"/>
               </a:rPr>
-              <a:t>ARCHITECTURE</a:t>
+              <a:t>OVERVIEW · KNOWLEDGE BASE</a:t>
             </a:r>
           </a:p>
         </p:txBody>
@@ -25356,8 +24719,8 @@
         </p:nvSpPr>
         <p:spPr>
           <a:xfrm>
-            <a:off x="731520" y="566928"/>
-            <a:ext cx="10698480" cy="548640"/>
+            <a:off x="1005840" y="1078992"/>
+            <a:ext cx="10149840" cy="914400"/>
           </a:xfrm>
           <a:prstGeom prst="rect">
             <a:avLst/>
@@ -25372,121 +24735,37 @@
           <a:p>
             <a:pPr algn="l">
               <a:lnSpc>
-                <a:spcPct val="100000"/>
-              </a:lnSpc>
-            </a:pPr>
-            <a:r>
-              <a:rPr sz="2600" b="1">
+                <a:spcPct val="106000"/>
+              </a:lnSpc>
+            </a:pPr>
+            <a:r>
+              <a:rPr sz="3000" b="1">
                 <a:solidFill>
                   <a:srgbClr val="E8ECF3"/>
                 </a:solidFill>
                 <a:latin typeface="Helvetica Neue"/>
               </a:rPr>
-              <a:t>What runs where — follow the numbers</a:t>
-            </a:r>
-          </a:p>
-        </p:txBody>
-      </p:sp>
-      <p:pic>
-        <p:nvPicPr>
-          <p:cNvPr id="5" name="Picture 4" descr="architecture.png"/>
-          <p:cNvPicPr>
-            <a:picLocks noChangeAspect="1"/>
-          </p:cNvPicPr>
-          <p:nvPr/>
-        </p:nvPicPr>
-        <p:blipFill>
-          <a:blip r:embed="rId2"/>
-          <a:stretch>
-            <a:fillRect/>
-          </a:stretch>
-        </p:blipFill>
-        <p:spPr>
-          <a:xfrm>
-            <a:off x="743431" y="1243584"/>
-            <a:ext cx="10704832" cy="5504688"/>
-          </a:xfrm>
-          <a:prstGeom prst="rect">
-            <a:avLst/>
-          </a:prstGeom>
-        </p:spPr>
-      </p:pic>
-      <p:sp>
-        <p:nvSpPr>
-          <p:cNvPr id="6" name="TextBox 5"/>
-          <p:cNvSpPr txBox="1"/>
-          <p:nvPr/>
-        </p:nvSpPr>
-        <p:spPr>
-          <a:xfrm>
-            <a:off x="11247120" y="6291072"/>
-            <a:ext cx="548640" cy="274320"/>
-          </a:xfrm>
-          <a:prstGeom prst="rect">
-            <a:avLst/>
-          </a:prstGeom>
-          <a:noFill/>
-        </p:spPr>
-        <p:txBody>
-          <a:bodyPr wrap="square">
-            <a:spAutoFit/>
-          </a:bodyPr>
-          <a:lstStyle/>
-          <a:p>
-            <a:pPr algn="r">
-              <a:lnSpc>
-                <a:spcPct val="120000"/>
-              </a:lnSpc>
-            </a:pPr>
-            <a:r>
-              <a:rPr sz="1100" b="0">
-                <a:solidFill>
-                  <a:srgbClr val="8B97AB"/>
-                </a:solidFill>
-                <a:latin typeface="Helvetica Neue"/>
-              </a:rPr>
-              <a:t>8</a:t>
-            </a:r>
-          </a:p>
-        </p:txBody>
-      </p:sp>
-    </p:spTree>
-  </p:cSld>
-  <p:clrMapOvr>
-    <a:masterClrMapping/>
-  </p:clrMapOvr>
-  <p:transition spd="med">
-    <p:wipe dir="l"/>
-  </p:transition>
-</p:sld>
-</file>
-
-<file path=ppt/slides/slide9.xml><?xml version="1.0" encoding="utf-8"?>
-<p:sld xmlns:a="http://schemas.openxmlformats.org/drawingml/2006/main" xmlns:p="http://schemas.openxmlformats.org/presentationml/2006/main" xmlns:r="http://schemas.openxmlformats.org/officeDocument/2006/relationships">
-  <p:cSld>
-    <p:spTree>
-      <p:nvGrpSpPr>
-        <p:cNvPr id="1" name=""/>
-        <p:cNvGrpSpPr/>
-        <p:nvPr/>
-      </p:nvGrpSpPr>
-      <p:grpSpPr/>
-      <p:sp>
-        <p:nvSpPr>
-          <p:cNvPr id="2" name="Rectangle 1"/>
+              <a:t>What the agents read before they answer</a:t>
+            </a:r>
+          </a:p>
+        </p:txBody>
+      </p:sp>
+      <p:sp>
+        <p:nvSpPr>
+          <p:cNvPr id="5" name="deckkit-rule"/>
           <p:cNvSpPr/>
           <p:nvPr/>
         </p:nvSpPr>
         <p:spPr>
           <a:xfrm>
-            <a:off x="0" y="0"/>
-            <a:ext cx="12191695" cy="6858000"/>
+            <a:off x="1005840" y="1883664"/>
+            <a:ext cx="1463040" cy="38100"/>
           </a:xfrm>
           <a:prstGeom prst="rect">
             <a:avLst/>
           </a:prstGeom>
           <a:solidFill>
-            <a:srgbClr val="0B0F17"/>
+            <a:srgbClr val="22D3EE"/>
           </a:solidFill>
           <a:ln>
             <a:noFill/>
@@ -25517,14 +24796,14 @@
       </p:sp>
       <p:sp>
         <p:nvSpPr>
-          <p:cNvPr id="3" name="TextBox 2"/>
+          <p:cNvPr id="6" name="TextBox 5"/>
           <p:cNvSpPr txBox="1"/>
           <p:nvPr/>
         </p:nvSpPr>
         <p:spPr>
           <a:xfrm>
-            <a:off x="1005840" y="658368"/>
-            <a:ext cx="10149840" cy="292608"/>
+            <a:off x="1005840" y="2148840"/>
+            <a:ext cx="3108960" cy="841248"/>
           </a:xfrm>
           <a:prstGeom prst="rect">
             <a:avLst/>
@@ -25543,27 +24822,27 @@
               </a:lnSpc>
             </a:pPr>
             <a:r>
-              <a:rPr sz="1200" b="1">
+              <a:rPr sz="4000" b="1">
                 <a:solidFill>
                   <a:srgbClr val="22D3EE"/>
                 </a:solidFill>
                 <a:latin typeface="Helvetica Neue"/>
               </a:rPr>
-              <a:t>BUSINESS IMPACT</a:t>
-            </a:r>
-          </a:p>
-        </p:txBody>
-      </p:sp>
-      <p:sp>
-        <p:nvSpPr>
-          <p:cNvPr id="4" name="TextBox 3"/>
+              <a:t>8/8</a:t>
+            </a:r>
+          </a:p>
+        </p:txBody>
+      </p:sp>
+      <p:sp>
+        <p:nvSpPr>
+          <p:cNvPr id="7" name="TextBox 6"/>
           <p:cNvSpPr txBox="1"/>
           <p:nvPr/>
         </p:nvSpPr>
         <p:spPr>
           <a:xfrm>
-            <a:off x="1005840" y="1078992"/>
-            <a:ext cx="10149840" cy="914400"/>
+            <a:off x="1005840" y="2935224"/>
+            <a:ext cx="3108960" cy="749808"/>
           </a:xfrm>
           <a:prstGeom prst="rect">
             <a:avLst/>
@@ -25578,40 +24857,246 @@
           <a:p>
             <a:pPr algn="l">
               <a:lnSpc>
-                <a:spcPct val="106000"/>
-              </a:lnSpc>
-            </a:pPr>
-            <a:r>
-              <a:rPr sz="3200" b="1">
-                <a:solidFill>
-                  <a:srgbClr val="E8ECF3"/>
+                <a:spcPct val="125000"/>
+              </a:lnSpc>
+            </a:pPr>
+            <a:r>
+              <a:rPr sz="1500" b="0">
+                <a:solidFill>
+                  <a:srgbClr val="8B97AB"/>
                 </a:solidFill>
                 <a:latin typeface="Helvetica Neue"/>
               </a:rPr>
-              <a:t>What it costs, and what it buys</a:t>
-            </a:r>
-          </a:p>
-        </p:txBody>
-      </p:sp>
-      <p:sp>
-        <p:nvSpPr>
-          <p:cNvPr id="5" name="deckkit-rule"/>
+              <a:t>plan mismatches caught</a:t>
+            </a:r>
+          </a:p>
+          <a:p>
+            <a:pPr algn="l">
+              <a:lnSpc>
+                <a:spcPct val="125000"/>
+              </a:lnSpc>
+            </a:pPr>
+            <a:r>
+              <a:rPr sz="1500" b="0">
+                <a:solidFill>
+                  <a:srgbClr val="8B97AB"/>
+                </a:solidFill>
+                <a:latin typeface="Helvetica Neue"/>
+              </a:rPr>
+              <a:t>with it — 6/8 without</a:t>
+            </a:r>
+          </a:p>
+        </p:txBody>
+      </p:sp>
+      <p:sp>
+        <p:nvSpPr>
+          <p:cNvPr id="8" name="TextBox 7"/>
+          <p:cNvSpPr txBox="1"/>
+          <p:nvPr/>
+        </p:nvSpPr>
+        <p:spPr>
+          <a:xfrm>
+            <a:off x="4389120" y="2148840"/>
+            <a:ext cx="3108960" cy="841248"/>
+          </a:xfrm>
+          <a:prstGeom prst="rect">
+            <a:avLst/>
+          </a:prstGeom>
+          <a:noFill/>
+        </p:spPr>
+        <p:txBody>
+          <a:bodyPr wrap="square">
+            <a:spAutoFit/>
+          </a:bodyPr>
+          <a:lstStyle/>
+          <a:p>
+            <a:pPr algn="l">
+              <a:lnSpc>
+                <a:spcPct val="100000"/>
+              </a:lnSpc>
+            </a:pPr>
+            <a:r>
+              <a:rPr sz="4000" b="1">
+                <a:solidFill>
+                  <a:srgbClr val="22D3EE"/>
+                </a:solidFill>
+                <a:latin typeface="Helvetica Neue"/>
+              </a:rPr>
+              <a:t>0/40</a:t>
+            </a:r>
+          </a:p>
+        </p:txBody>
+      </p:sp>
+      <p:sp>
+        <p:nvSpPr>
+          <p:cNvPr id="9" name="TextBox 8"/>
+          <p:cNvSpPr txBox="1"/>
+          <p:nvPr/>
+        </p:nvSpPr>
+        <p:spPr>
+          <a:xfrm>
+            <a:off x="4389120" y="2935224"/>
+            <a:ext cx="3108960" cy="749808"/>
+          </a:xfrm>
+          <a:prstGeom prst="rect">
+            <a:avLst/>
+          </a:prstGeom>
+          <a:noFill/>
+        </p:spPr>
+        <p:txBody>
+          <a:bodyPr wrap="square">
+            <a:spAutoFit/>
+          </a:bodyPr>
+          <a:lstStyle/>
+          <a:p>
+            <a:pPr algn="l">
+              <a:lnSpc>
+                <a:spcPct val="125000"/>
+              </a:lnSpc>
+            </a:pPr>
+            <a:r>
+              <a:rPr sz="1500" b="0">
+                <a:solidFill>
+                  <a:srgbClr val="8B97AB"/>
+                </a:solidFill>
+                <a:latin typeface="Helvetica Neue"/>
+              </a:rPr>
+              <a:t>false blocks, with it</a:t>
+            </a:r>
+          </a:p>
+          <a:p>
+            <a:pPr algn="l">
+              <a:lnSpc>
+                <a:spcPct val="125000"/>
+              </a:lnSpc>
+            </a:pPr>
+            <a:r>
+              <a:rPr sz="1500" b="0">
+                <a:solidFill>
+                  <a:srgbClr val="8B97AB"/>
+                </a:solidFill>
+                <a:latin typeface="Helvetica Neue"/>
+              </a:rPr>
+              <a:t>or without it</a:t>
+            </a:r>
+          </a:p>
+        </p:txBody>
+      </p:sp>
+      <p:sp>
+        <p:nvSpPr>
+          <p:cNvPr id="10" name="TextBox 9"/>
+          <p:cNvSpPr txBox="1"/>
+          <p:nvPr/>
+        </p:nvSpPr>
+        <p:spPr>
+          <a:xfrm>
+            <a:off x="7680960" y="2148840"/>
+            <a:ext cx="3108960" cy="841248"/>
+          </a:xfrm>
+          <a:prstGeom prst="rect">
+            <a:avLst/>
+          </a:prstGeom>
+          <a:noFill/>
+        </p:spPr>
+        <p:txBody>
+          <a:bodyPr wrap="square">
+            <a:spAutoFit/>
+          </a:bodyPr>
+          <a:lstStyle/>
+          <a:p>
+            <a:pPr algn="l">
+              <a:lnSpc>
+                <a:spcPct val="100000"/>
+              </a:lnSpc>
+            </a:pPr>
+            <a:r>
+              <a:rPr sz="4000" b="1">
+                <a:solidFill>
+                  <a:srgbClr val="22D3EE"/>
+                </a:solidFill>
+                <a:latin typeface="Helvetica Neue"/>
+              </a:rPr>
+              <a:t>18</a:t>
+            </a:r>
+          </a:p>
+        </p:txBody>
+      </p:sp>
+      <p:sp>
+        <p:nvSpPr>
+          <p:cNvPr id="11" name="TextBox 10"/>
+          <p:cNvSpPr txBox="1"/>
+          <p:nvPr/>
+        </p:nvSpPr>
+        <p:spPr>
+          <a:xfrm>
+            <a:off x="7680960" y="2935224"/>
+            <a:ext cx="3108960" cy="749808"/>
+          </a:xfrm>
+          <a:prstGeom prst="rect">
+            <a:avLst/>
+          </a:prstGeom>
+          <a:noFill/>
+        </p:spPr>
+        <p:txBody>
+          <a:bodyPr wrap="square">
+            <a:spAutoFit/>
+          </a:bodyPr>
+          <a:lstStyle/>
+          <a:p>
+            <a:pPr algn="l">
+              <a:lnSpc>
+                <a:spcPct val="125000"/>
+              </a:lnSpc>
+            </a:pPr>
+            <a:r>
+              <a:rPr sz="1500" b="0">
+                <a:solidFill>
+                  <a:srgbClr val="8B97AB"/>
+                </a:solidFill>
+                <a:latin typeface="Helvetica Neue"/>
+              </a:rPr>
+              <a:t>documents read on one</a:t>
+            </a:r>
+          </a:p>
+          <a:p>
+            <a:pPr algn="l">
+              <a:lnSpc>
+                <a:spcPct val="125000"/>
+              </a:lnSpc>
+            </a:pPr>
+            <a:r>
+              <a:rPr sz="1500" b="0">
+                <a:solidFill>
+                  <a:srgbClr val="8B97AB"/>
+                </a:solidFill>
+                <a:latin typeface="Helvetica Neue"/>
+              </a:rPr>
+              <a:t>live run, in production</a:t>
+            </a:r>
+          </a:p>
+        </p:txBody>
+      </p:sp>
+      <p:sp>
+        <p:nvSpPr>
+          <p:cNvPr id="12" name="Rectangle 11"/>
           <p:cNvSpPr/>
           <p:nvPr/>
         </p:nvSpPr>
         <p:spPr>
           <a:xfrm>
-            <a:off x="1005840" y="1883664"/>
-            <a:ext cx="1463040" cy="38100"/>
+            <a:off x="1005840" y="3977639"/>
+            <a:ext cx="3224784" cy="1645920"/>
           </a:xfrm>
           <a:prstGeom prst="rect">
             <a:avLst/>
           </a:prstGeom>
           <a:solidFill>
-            <a:srgbClr val="22D3EE"/>
+            <a:srgbClr val="131A25"/>
           </a:solidFill>
-          <a:ln>
-            <a:noFill/>
+          <a:ln w="12700">
+            <a:solidFill>
+              <a:srgbClr val="1F2937"/>
+            </a:solidFill>
           </a:ln>
           <a:effectLst/>
         </p:spPr>
@@ -25639,14 +25124,14 @@
       </p:sp>
       <p:sp>
         <p:nvSpPr>
-          <p:cNvPr id="6" name="TextBox 5"/>
+          <p:cNvPr id="13" name="TextBox 12"/>
           <p:cNvSpPr txBox="1"/>
           <p:nvPr/>
         </p:nvSpPr>
         <p:spPr>
           <a:xfrm>
-            <a:off x="1005840" y="2148840"/>
-            <a:ext cx="3108960" cy="841248"/>
+            <a:off x="1188720" y="4123943"/>
+            <a:ext cx="2859024" cy="512064"/>
           </a:xfrm>
           <a:prstGeom prst="rect">
             <a:avLst/>
@@ -25661,31 +25146,31 @@
           <a:p>
             <a:pPr algn="l">
               <a:lnSpc>
-                <a:spcPct val="100000"/>
-              </a:lnSpc>
-            </a:pPr>
-            <a:r>
-              <a:rPr sz="4000" b="1">
+                <a:spcPct val="110000"/>
+              </a:lnSpc>
+            </a:pPr>
+            <a:r>
+              <a:rPr sz="1400" b="1">
                 <a:solidFill>
                   <a:srgbClr val="22D3EE"/>
                 </a:solidFill>
                 <a:latin typeface="Helvetica Neue"/>
               </a:rPr>
-              <a:t>1.3–1.7¢</a:t>
-            </a:r>
-          </a:p>
-        </p:txBody>
-      </p:sp>
-      <p:sp>
-        <p:nvSpPr>
-          <p:cNvPr id="7" name="TextBox 6"/>
+              <a:t>Past rejections</a:t>
+            </a:r>
+          </a:p>
+        </p:txBody>
+      </p:sp>
+      <p:sp>
+        <p:nvSpPr>
+          <p:cNvPr id="14" name="TextBox 13"/>
           <p:cNvSpPr txBox="1"/>
           <p:nvPr/>
         </p:nvSpPr>
         <p:spPr>
           <a:xfrm>
-            <a:off x="1005840" y="2935224"/>
-            <a:ext cx="3108960" cy="749808"/>
+            <a:off x="1188720" y="4654295"/>
+            <a:ext cx="2859024" cy="822960"/>
           </a:xfrm>
           <a:prstGeom prst="rect">
             <a:avLst/>
@@ -25700,47 +25185,77 @@
           <a:p>
             <a:pPr algn="l">
               <a:lnSpc>
-                <a:spcPct val="125000"/>
-              </a:lnSpc>
-            </a:pPr>
-            <a:r>
-              <a:rPr sz="1500" b="0">
+                <a:spcPct val="130000"/>
+              </a:lnSpc>
+            </a:pPr>
+            <a:r>
+              <a:rPr sz="1300" b="0">
                 <a:solidFill>
                   <a:srgbClr val="8B97AB"/>
                 </a:solidFill>
                 <a:latin typeface="Helvetica Neue"/>
               </a:rPr>
-              <a:t>model cost per change</a:t>
-            </a:r>
-          </a:p>
-          <a:p>
-            <a:pPr algn="l">
-              <a:lnSpc>
-                <a:spcPct val="125000"/>
-              </a:lnSpc>
-            </a:pPr>
-            <a:r>
-              <a:rPr sz="1500" b="0">
-                <a:solidFill>
-                  <a:srgbClr val="8B97AB"/>
-                </a:solidFill>
-                <a:latin typeface="Helvetica Neue"/>
-              </a:rPr>
-              <a:t>three measured runs</a:t>
-            </a:r>
-          </a:p>
-        </p:txBody>
-      </p:sp>
-      <p:sp>
-        <p:nvSpPr>
-          <p:cNvPr id="8" name="TextBox 7"/>
+              <a:t>Why earlier changes to this app were sent back, so the developer does not repeat a mistake.</a:t>
+            </a:r>
+          </a:p>
+        </p:txBody>
+      </p:sp>
+      <p:sp>
+        <p:nvSpPr>
+          <p:cNvPr id="15" name="Rectangle 14"/>
+          <p:cNvSpPr/>
+          <p:nvPr/>
+        </p:nvSpPr>
+        <p:spPr>
+          <a:xfrm>
+            <a:off x="4468368" y="3977639"/>
+            <a:ext cx="3224784" cy="1645920"/>
+          </a:xfrm>
+          <a:prstGeom prst="rect">
+            <a:avLst/>
+          </a:prstGeom>
+          <a:solidFill>
+            <a:srgbClr val="131A25"/>
+          </a:solidFill>
+          <a:ln w="12700">
+            <a:solidFill>
+              <a:srgbClr val="1F2937"/>
+            </a:solidFill>
+          </a:ln>
+          <a:effectLst/>
+        </p:spPr>
+        <p:style>
+          <a:lnRef idx="1">
+            <a:schemeClr val="accent1"/>
+          </a:lnRef>
+          <a:fillRef idx="3">
+            <a:schemeClr val="accent1"/>
+          </a:fillRef>
+          <a:effectRef idx="2">
+            <a:schemeClr val="accent1"/>
+          </a:effectRef>
+          <a:fontRef idx="minor">
+            <a:schemeClr val="lt1"/>
+          </a:fontRef>
+        </p:style>
+        <p:txBody>
+          <a:bodyPr rtlCol="0" anchor="ctr"/>
+          <a:lstStyle/>
+          <a:p>
+            <a:pPr algn="ctr"/>
+          </a:p>
+        </p:txBody>
+      </p:sp>
+      <p:sp>
+        <p:nvSpPr>
+          <p:cNvPr id="16" name="TextBox 15"/>
           <p:cNvSpPr txBox="1"/>
           <p:nvPr/>
         </p:nvSpPr>
         <p:spPr>
           <a:xfrm>
-            <a:off x="4389120" y="2148840"/>
-            <a:ext cx="3108960" cy="841248"/>
+            <a:off x="4651248" y="4123943"/>
+            <a:ext cx="2859024" cy="512064"/>
           </a:xfrm>
           <a:prstGeom prst="rect">
             <a:avLst/>
@@ -25755,31 +25270,31 @@
           <a:p>
             <a:pPr algn="l">
               <a:lnSpc>
-                <a:spcPct val="100000"/>
-              </a:lnSpc>
-            </a:pPr>
-            <a:r>
-              <a:rPr sz="4000" b="1">
+                <a:spcPct val="110000"/>
+              </a:lnSpc>
+            </a:pPr>
+            <a:r>
+              <a:rPr sz="1400" b="1">
                 <a:solidFill>
                   <a:srgbClr val="22D3EE"/>
                 </a:solidFill>
                 <a:latin typeface="Helvetica Neue"/>
               </a:rPr>
-              <a:t>7.88 min</a:t>
-            </a:r>
-          </a:p>
-        </p:txBody>
-      </p:sp>
-      <p:sp>
-        <p:nvSpPr>
-          <p:cNvPr id="9" name="TextBox 8"/>
+              <a:t>Team conventions</a:t>
+            </a:r>
+          </a:p>
+        </p:txBody>
+      </p:sp>
+      <p:sp>
+        <p:nvSpPr>
+          <p:cNvPr id="17" name="TextBox 16"/>
           <p:cNvSpPr txBox="1"/>
           <p:nvPr/>
         </p:nvSpPr>
         <p:spPr>
           <a:xfrm>
-            <a:off x="4389120" y="2935224"/>
-            <a:ext cx="3108960" cy="749808"/>
+            <a:off x="4651248" y="4654295"/>
+            <a:ext cx="2859024" cy="822960"/>
           </a:xfrm>
           <a:prstGeom prst="rect">
             <a:avLst/>
@@ -25794,47 +25309,77 @@
           <a:p>
             <a:pPr algn="l">
               <a:lnSpc>
-                <a:spcPct val="125000"/>
-              </a:lnSpc>
-            </a:pPr>
-            <a:r>
-              <a:rPr sz="1500" b="0">
+                <a:spcPct val="130000"/>
+              </a:lnSpc>
+            </a:pPr>
+            <a:r>
+              <a:rPr sz="1300" b="0">
                 <a:solidFill>
                   <a:srgbClr val="8B97AB"/>
                 </a:solidFill>
                 <a:latin typeface="Helvetica Neue"/>
               </a:rPr>
-              <a:t>median ticket to merge</a:t>
-            </a:r>
-          </a:p>
-          <a:p>
-            <a:pPr algn="l">
-              <a:lnSpc>
-                <a:spcPct val="125000"/>
-              </a:lnSpc>
-            </a:pPr>
-            <a:r>
-              <a:rPr sz="1500" b="0">
-                <a:solidFill>
-                  <a:srgbClr val="8B97AB"/>
-                </a:solidFill>
-                <a:latin typeface="Helvetica Neue"/>
-              </a:rPr>
-              <a:t>12 merges</a:t>
-            </a:r>
-          </a:p>
-        </p:txBody>
-      </p:sp>
-      <p:sp>
-        <p:nvSpPr>
-          <p:cNvPr id="10" name="TextBox 9"/>
+              <a:t>Questions the team has already settled, so the reviewer stops arguing them again.</a:t>
+            </a:r>
+          </a:p>
+        </p:txBody>
+      </p:sp>
+      <p:sp>
+        <p:nvSpPr>
+          <p:cNvPr id="18" name="Rectangle 17"/>
+          <p:cNvSpPr/>
+          <p:nvPr/>
+        </p:nvSpPr>
+        <p:spPr>
+          <a:xfrm>
+            <a:off x="7930896" y="3977639"/>
+            <a:ext cx="3224784" cy="1645920"/>
+          </a:xfrm>
+          <a:prstGeom prst="rect">
+            <a:avLst/>
+          </a:prstGeom>
+          <a:solidFill>
+            <a:srgbClr val="131A25"/>
+          </a:solidFill>
+          <a:ln w="12700">
+            <a:solidFill>
+              <a:srgbClr val="1F2937"/>
+            </a:solidFill>
+          </a:ln>
+          <a:effectLst/>
+        </p:spPr>
+        <p:style>
+          <a:lnRef idx="1">
+            <a:schemeClr val="accent1"/>
+          </a:lnRef>
+          <a:fillRef idx="3">
+            <a:schemeClr val="accent1"/>
+          </a:fillRef>
+          <a:effectRef idx="2">
+            <a:schemeClr val="accent1"/>
+          </a:effectRef>
+          <a:fontRef idx="minor">
+            <a:schemeClr val="lt1"/>
+          </a:fontRef>
+        </p:style>
+        <p:txBody>
+          <a:bodyPr rtlCol="0" anchor="ctr"/>
+          <a:lstStyle/>
+          <a:p>
+            <a:pPr algn="ctr"/>
+          </a:p>
+        </p:txBody>
+      </p:sp>
+      <p:sp>
+        <p:nvSpPr>
+          <p:cNvPr id="19" name="TextBox 18"/>
           <p:cNvSpPr txBox="1"/>
           <p:nvPr/>
         </p:nvSpPr>
         <p:spPr>
           <a:xfrm>
-            <a:off x="7680960" y="2148840"/>
-            <a:ext cx="3108960" cy="841248"/>
+            <a:off x="8113776" y="4123943"/>
+            <a:ext cx="2859024" cy="512064"/>
           </a:xfrm>
           <a:prstGeom prst="rect">
             <a:avLst/>
@@ -25849,31 +25394,31 @@
           <a:p>
             <a:pPr algn="l">
               <a:lnSpc>
-                <a:spcPct val="100000"/>
-              </a:lnSpc>
-            </a:pPr>
-            <a:r>
-              <a:rPr sz="4000" b="1">
+                <a:spcPct val="110000"/>
+              </a:lnSpc>
+            </a:pPr>
+            <a:r>
+              <a:rPr sz="1400" b="1">
                 <a:solidFill>
                   <a:srgbClr val="22D3EE"/>
                 </a:solidFill>
                 <a:latin typeface="Helvetica Neue"/>
               </a:rPr>
-              <a:t>0 of 12</a:t>
-            </a:r>
-          </a:p>
-        </p:txBody>
-      </p:sp>
-      <p:sp>
-        <p:nvSpPr>
-          <p:cNvPr id="11" name="TextBox 10"/>
+              <a:t>Security advisories</a:t>
+            </a:r>
+          </a:p>
+        </p:txBody>
+      </p:sp>
+      <p:sp>
+        <p:nvSpPr>
+          <p:cNvPr id="20" name="TextBox 19"/>
           <p:cNvSpPr txBox="1"/>
           <p:nvPr/>
         </p:nvSpPr>
         <p:spPr>
           <a:xfrm>
-            <a:off x="7680960" y="2935224"/>
-            <a:ext cx="3108960" cy="749808"/>
+            <a:off x="8113776" y="4654295"/>
+            <a:ext cx="2859024" cy="822960"/>
           </a:xfrm>
           <a:prstGeom prst="rect">
             <a:avLst/>
@@ -25888,47 +25433,31 @@
           <a:p>
             <a:pPr algn="l">
               <a:lnSpc>
-                <a:spcPct val="125000"/>
-              </a:lnSpc>
-            </a:pPr>
-            <a:r>
-              <a:rPr sz="1500" b="0">
+                <a:spcPct val="130000"/>
+              </a:lnSpc>
+            </a:pPr>
+            <a:r>
+              <a:rPr sz="1300" b="0">
                 <a:solidFill>
                   <a:srgbClr val="8B97AB"/>
                 </a:solidFill>
                 <a:latin typeface="Helvetica Neue"/>
               </a:rPr>
-              <a:t>merged changes carrying</a:t>
-            </a:r>
-          </a:p>
-          <a:p>
-            <a:pPr algn="l">
-              <a:lnSpc>
-                <a:spcPct val="125000"/>
-              </a:lnSpc>
-            </a:pPr>
-            <a:r>
-              <a:rPr sz="1500" b="0">
-                <a:solidFill>
-                  <a:srgbClr val="8B97AB"/>
-                </a:solidFill>
-                <a:latin typeface="Helvetica Neue"/>
-              </a:rPr>
-              <a:t>a credential</a:t>
-            </a:r>
-          </a:p>
-        </p:txBody>
-      </p:sp>
-      <p:sp>
-        <p:nvSpPr>
-          <p:cNvPr id="12" name="TextBox 11"/>
+              <a:t>Background on known vulnerabilities, so the security explanation is specific.</a:t>
+            </a:r>
+          </a:p>
+        </p:txBody>
+      </p:sp>
+      <p:sp>
+        <p:nvSpPr>
+          <p:cNvPr id="21" name="TextBox 20"/>
           <p:cNvSpPr txBox="1"/>
           <p:nvPr/>
         </p:nvSpPr>
         <p:spPr>
           <a:xfrm>
-            <a:off x="1005840" y="4069080"/>
-            <a:ext cx="10149840" cy="868680"/>
+            <a:off x="1005840" y="5760720"/>
+            <a:ext cx="10058400" cy="685800"/>
           </a:xfrm>
           <a:prstGeom prst="rect">
             <a:avLst/>
@@ -25943,31 +25472,31 @@
           <a:p>
             <a:pPr algn="l">
               <a:lnSpc>
-                <a:spcPct val="120000"/>
-              </a:lnSpc>
-            </a:pPr>
-            <a:r>
-              <a:rPr sz="1600" b="0">
-                <a:solidFill>
-                  <a:srgbClr val="E8ECF3"/>
+                <a:spcPct val="125000"/>
+              </a:lnSpc>
+            </a:pPr>
+            <a:r>
+              <a:rPr sz="1300" b="0">
+                <a:solidFill>
+                  <a:srgbClr val="8B97AB"/>
                 </a:solidFill>
                 <a:latin typeface="Helvetica Neue"/>
               </a:rPr>
-              <a:t>The model is 99.9% of what a change costs. Lambda, EventBridge and DynamoDB together came to twelve millionths of a dollar. The only cost work worth doing is prompt caching.</a:t>
-            </a:r>
-          </a:p>
-        </p:txBody>
-      </p:sp>
-      <p:sp>
-        <p:nvSpPr>
-          <p:cNvPr id="13" name="TextBox 12"/>
+              <a:t>Four agents read it: planner, developer, reviewer and the security explanation. Keyword search, no vector database. It shapes wording, never the verdict: five hostile documents were planted, and the block did not move.</a:t>
+            </a:r>
+          </a:p>
+        </p:txBody>
+      </p:sp>
+      <p:sp>
+        <p:nvSpPr>
+          <p:cNvPr id="165" name="TextBox 164"/>
           <p:cNvSpPr txBox="1"/>
           <p:nvPr/>
         </p:nvSpPr>
         <p:spPr>
           <a:xfrm>
-            <a:off x="1005840" y="4937760"/>
-            <a:ext cx="10149840" cy="868680"/>
+            <a:off x="11247120" y="6291072"/>
+            <a:ext cx="548640" cy="274320"/>
           </a:xfrm>
           <a:prstGeom prst="rect">
             <a:avLst/>
@@ -25980,97 +25509,19 @@
           </a:bodyPr>
           <a:lstStyle/>
           <a:p>
-            <a:pPr algn="l">
+            <a:pPr algn="r">
               <a:lnSpc>
                 <a:spcPct val="120000"/>
               </a:lnSpc>
             </a:pPr>
             <a:r>
-              <a:rPr sz="1600" b="0">
-                <a:solidFill>
-                  <a:srgbClr val="E8ECF3"/>
+              <a:rPr sz="1100" b="0">
+                <a:solidFill>
+                  <a:srgbClr val="8B97AB"/>
                 </a:solidFill>
                 <a:latin typeface="Helvetica Neue"/>
               </a:rPr>
-              <a:t>The value is not the cents. A credential cannot reach the main branch by being approved quickly, and that refusal has no model in it.</a:t>
-            </a:r>
-          </a:p>
-        </p:txBody>
-      </p:sp>
-      <p:sp>
-        <p:nvSpPr>
-          <p:cNvPr id="14" name="TextBox 13"/>
-          <p:cNvSpPr txBox="1"/>
-          <p:nvPr/>
-        </p:nvSpPr>
-        <p:spPr>
-          <a:xfrm>
-            <a:off x="1005840" y="5806440"/>
-            <a:ext cx="10058400" cy="640080"/>
-          </a:xfrm>
-          <a:prstGeom prst="rect">
-            <a:avLst/>
-          </a:prstGeom>
-          <a:noFill/>
-        </p:spPr>
-        <p:txBody>
-          <a:bodyPr wrap="square">
-            <a:spAutoFit/>
-          </a:bodyPr>
-          <a:lstStyle/>
-          <a:p>
-            <a:pPr algn="l">
-              <a:lnSpc>
-                <a:spcPct val="125000"/>
-              </a:lnSpc>
-            </a:pPr>
-            <a:r>
-              <a:rPr sz="1300" b="0">
-                <a:solidFill>
-                  <a:srgbClr val="8B97AB"/>
-                </a:solidFill>
-                <a:latin typeface="Helvetica Neue"/>
-              </a:rPr>
-              <a:t>12 of 57 runs merged, so the median covers the runs that finished. The same scan finds 3 credentials in unmerged pull request #72, so the zero is a real result.</a:t>
-            </a:r>
-          </a:p>
-        </p:txBody>
-      </p:sp>
-      <p:sp>
-        <p:nvSpPr>
-          <p:cNvPr id="95" name="TextBox 94"/>
-          <p:cNvSpPr txBox="1"/>
-          <p:nvPr/>
-        </p:nvSpPr>
-        <p:spPr>
-          <a:xfrm>
-            <a:off x="11247120" y="6291072"/>
-            <a:ext cx="548640" cy="274320"/>
-          </a:xfrm>
-          <a:prstGeom prst="rect">
-            <a:avLst/>
-          </a:prstGeom>
-          <a:noFill/>
-        </p:spPr>
-        <p:txBody>
-          <a:bodyPr wrap="square">
-            <a:spAutoFit/>
-          </a:bodyPr>
-          <a:lstStyle/>
-          <a:p>
-            <a:pPr algn="r">
-              <a:lnSpc>
-                <a:spcPct val="120000"/>
-              </a:lnSpc>
-            </a:pPr>
-            <a:r>
-              <a:rPr sz="1100" b="0">
-                <a:solidFill>
-                  <a:srgbClr val="8B97AB"/>
-                </a:solidFill>
-                <a:latin typeface="Helvetica Neue"/>
-              </a:rPr>
-              <a:t>9</a:t>
+              <a:t>8</a:t>
             </a:r>
           </a:p>
         </p:txBody>
@@ -26532,6 +25983,349 @@
                       </p:childTnLst>
                     </p:cTn>
                   </p:par>
+                  <p:par>
+                    <p:cTn id="100" fill="hold">
+                      <p:stCondLst>
+                        <p:cond delay="indefinite"/>
+                      </p:stCondLst>
+                      <p:childTnLst>
+                        <p:par>
+                          <p:cTn id="101" fill="hold">
+                            <p:stCondLst>
+                              <p:cond delay="0"/>
+                            </p:stCondLst>
+                            <p:childTnLst>
+                              <p:par>
+                                <p:cTn id="102" presetID="10" presetClass="entr" presetSubtype="0" fill="hold" grpId="0" nodeType="afterEffect">
+                                  <p:stCondLst>
+                                    <p:cond delay="0"/>
+                                  </p:stCondLst>
+                                  <p:childTnLst>
+                                    <p:set>
+                                      <p:cBhvr>
+                                        <p:cTn id="103" dur="1" fill="hold"/>
+                                        <p:tgtEl>
+                                          <p:spTgt spid="15"/>
+                                        </p:tgtEl>
+                                        <p:attrNameLst>
+                                          <p:attrName>style.visibility</p:attrName>
+                                        </p:attrNameLst>
+                                      </p:cBhvr>
+                                      <p:to>
+                                        <p:strVal val="visible"/>
+                                      </p:to>
+                                    </p:set>
+                                    <p:animEffect transition="in" filter="fade">
+                                      <p:cBhvr>
+                                        <p:cTn id="104" dur="450"/>
+                                        <p:tgtEl>
+                                          <p:spTgt spid="15"/>
+                                        </p:tgtEl>
+                                      </p:cBhvr>
+                                    </p:animEffect>
+                                  </p:childTnLst>
+                                </p:cTn>
+                              </p:par>
+                            </p:childTnLst>
+                          </p:cTn>
+                        </p:par>
+                      </p:childTnLst>
+                    </p:cTn>
+                  </p:par>
+                  <p:par>
+                    <p:cTn id="110" fill="hold">
+                      <p:stCondLst>
+                        <p:cond delay="indefinite"/>
+                      </p:stCondLst>
+                      <p:childTnLst>
+                        <p:par>
+                          <p:cTn id="111" fill="hold">
+                            <p:stCondLst>
+                              <p:cond delay="0"/>
+                            </p:stCondLst>
+                            <p:childTnLst>
+                              <p:par>
+                                <p:cTn id="112" presetID="10" presetClass="entr" presetSubtype="0" fill="hold" grpId="0" nodeType="afterEffect">
+                                  <p:stCondLst>
+                                    <p:cond delay="0"/>
+                                  </p:stCondLst>
+                                  <p:childTnLst>
+                                    <p:set>
+                                      <p:cBhvr>
+                                        <p:cTn id="113" dur="1" fill="hold"/>
+                                        <p:tgtEl>
+                                          <p:spTgt spid="16"/>
+                                        </p:tgtEl>
+                                        <p:attrNameLst>
+                                          <p:attrName>style.visibility</p:attrName>
+                                        </p:attrNameLst>
+                                      </p:cBhvr>
+                                      <p:to>
+                                        <p:strVal val="visible"/>
+                                      </p:to>
+                                    </p:set>
+                                    <p:animEffect transition="in" filter="fade">
+                                      <p:cBhvr>
+                                        <p:cTn id="114" dur="450"/>
+                                        <p:tgtEl>
+                                          <p:spTgt spid="16"/>
+                                        </p:tgtEl>
+                                      </p:cBhvr>
+                                    </p:animEffect>
+                                  </p:childTnLst>
+                                </p:cTn>
+                              </p:par>
+                            </p:childTnLst>
+                          </p:cTn>
+                        </p:par>
+                      </p:childTnLst>
+                    </p:cTn>
+                  </p:par>
+                  <p:par>
+                    <p:cTn id="120" fill="hold">
+                      <p:stCondLst>
+                        <p:cond delay="indefinite"/>
+                      </p:stCondLst>
+                      <p:childTnLst>
+                        <p:par>
+                          <p:cTn id="121" fill="hold">
+                            <p:stCondLst>
+                              <p:cond delay="0"/>
+                            </p:stCondLst>
+                            <p:childTnLst>
+                              <p:par>
+                                <p:cTn id="122" presetID="10" presetClass="entr" presetSubtype="0" fill="hold" grpId="0" nodeType="afterEffect">
+                                  <p:stCondLst>
+                                    <p:cond delay="0"/>
+                                  </p:stCondLst>
+                                  <p:childTnLst>
+                                    <p:set>
+                                      <p:cBhvr>
+                                        <p:cTn id="123" dur="1" fill="hold"/>
+                                        <p:tgtEl>
+                                          <p:spTgt spid="17"/>
+                                        </p:tgtEl>
+                                        <p:attrNameLst>
+                                          <p:attrName>style.visibility</p:attrName>
+                                        </p:attrNameLst>
+                                      </p:cBhvr>
+                                      <p:to>
+                                        <p:strVal val="visible"/>
+                                      </p:to>
+                                    </p:set>
+                                    <p:animEffect transition="in" filter="fade">
+                                      <p:cBhvr>
+                                        <p:cTn id="124" dur="450"/>
+                                        <p:tgtEl>
+                                          <p:spTgt spid="17"/>
+                                        </p:tgtEl>
+                                      </p:cBhvr>
+                                    </p:animEffect>
+                                  </p:childTnLst>
+                                </p:cTn>
+                              </p:par>
+                            </p:childTnLst>
+                          </p:cTn>
+                        </p:par>
+                      </p:childTnLst>
+                    </p:cTn>
+                  </p:par>
+                  <p:par>
+                    <p:cTn id="130" fill="hold">
+                      <p:stCondLst>
+                        <p:cond delay="indefinite"/>
+                      </p:stCondLst>
+                      <p:childTnLst>
+                        <p:par>
+                          <p:cTn id="131" fill="hold">
+                            <p:stCondLst>
+                              <p:cond delay="0"/>
+                            </p:stCondLst>
+                            <p:childTnLst>
+                              <p:par>
+                                <p:cTn id="132" presetID="10" presetClass="entr" presetSubtype="0" fill="hold" grpId="0" nodeType="afterEffect">
+                                  <p:stCondLst>
+                                    <p:cond delay="0"/>
+                                  </p:stCondLst>
+                                  <p:childTnLst>
+                                    <p:set>
+                                      <p:cBhvr>
+                                        <p:cTn id="133" dur="1" fill="hold"/>
+                                        <p:tgtEl>
+                                          <p:spTgt spid="18"/>
+                                        </p:tgtEl>
+                                        <p:attrNameLst>
+                                          <p:attrName>style.visibility</p:attrName>
+                                        </p:attrNameLst>
+                                      </p:cBhvr>
+                                      <p:to>
+                                        <p:strVal val="visible"/>
+                                      </p:to>
+                                    </p:set>
+                                    <p:animEffect transition="in" filter="fade">
+                                      <p:cBhvr>
+                                        <p:cTn id="134" dur="450"/>
+                                        <p:tgtEl>
+                                          <p:spTgt spid="18"/>
+                                        </p:tgtEl>
+                                      </p:cBhvr>
+                                    </p:animEffect>
+                                  </p:childTnLst>
+                                </p:cTn>
+                              </p:par>
+                            </p:childTnLst>
+                          </p:cTn>
+                        </p:par>
+                      </p:childTnLst>
+                    </p:cTn>
+                  </p:par>
+                  <p:par>
+                    <p:cTn id="140" fill="hold">
+                      <p:stCondLst>
+                        <p:cond delay="indefinite"/>
+                      </p:stCondLst>
+                      <p:childTnLst>
+                        <p:par>
+                          <p:cTn id="141" fill="hold">
+                            <p:stCondLst>
+                              <p:cond delay="0"/>
+                            </p:stCondLst>
+                            <p:childTnLst>
+                              <p:par>
+                                <p:cTn id="142" presetID="10" presetClass="entr" presetSubtype="0" fill="hold" grpId="0" nodeType="afterEffect">
+                                  <p:stCondLst>
+                                    <p:cond delay="0"/>
+                                  </p:stCondLst>
+                                  <p:childTnLst>
+                                    <p:set>
+                                      <p:cBhvr>
+                                        <p:cTn id="143" dur="1" fill="hold"/>
+                                        <p:tgtEl>
+                                          <p:spTgt spid="19"/>
+                                        </p:tgtEl>
+                                        <p:attrNameLst>
+                                          <p:attrName>style.visibility</p:attrName>
+                                        </p:attrNameLst>
+                                      </p:cBhvr>
+                                      <p:to>
+                                        <p:strVal val="visible"/>
+                                      </p:to>
+                                    </p:set>
+                                    <p:animEffect transition="in" filter="fade">
+                                      <p:cBhvr>
+                                        <p:cTn id="144" dur="450"/>
+                                        <p:tgtEl>
+                                          <p:spTgt spid="19"/>
+                                        </p:tgtEl>
+                                      </p:cBhvr>
+                                    </p:animEffect>
+                                  </p:childTnLst>
+                                </p:cTn>
+                              </p:par>
+                            </p:childTnLst>
+                          </p:cTn>
+                        </p:par>
+                      </p:childTnLst>
+                    </p:cTn>
+                  </p:par>
+                  <p:par>
+                    <p:cTn id="150" fill="hold">
+                      <p:stCondLst>
+                        <p:cond delay="indefinite"/>
+                      </p:stCondLst>
+                      <p:childTnLst>
+                        <p:par>
+                          <p:cTn id="151" fill="hold">
+                            <p:stCondLst>
+                              <p:cond delay="0"/>
+                            </p:stCondLst>
+                            <p:childTnLst>
+                              <p:par>
+                                <p:cTn id="152" presetID="10" presetClass="entr" presetSubtype="0" fill="hold" grpId="0" nodeType="afterEffect">
+                                  <p:stCondLst>
+                                    <p:cond delay="0"/>
+                                  </p:stCondLst>
+                                  <p:childTnLst>
+                                    <p:set>
+                                      <p:cBhvr>
+                                        <p:cTn id="153" dur="1" fill="hold"/>
+                                        <p:tgtEl>
+                                          <p:spTgt spid="20"/>
+                                        </p:tgtEl>
+                                        <p:attrNameLst>
+                                          <p:attrName>style.visibility</p:attrName>
+                                        </p:attrNameLst>
+                                      </p:cBhvr>
+                                      <p:to>
+                                        <p:strVal val="visible"/>
+                                      </p:to>
+                                    </p:set>
+                                    <p:animEffect transition="in" filter="fade">
+                                      <p:cBhvr>
+                                        <p:cTn id="154" dur="450"/>
+                                        <p:tgtEl>
+                                          <p:spTgt spid="20"/>
+                                        </p:tgtEl>
+                                      </p:cBhvr>
+                                    </p:animEffect>
+                                  </p:childTnLst>
+                                </p:cTn>
+                              </p:par>
+                            </p:childTnLst>
+                          </p:cTn>
+                        </p:par>
+                      </p:childTnLst>
+                    </p:cTn>
+                  </p:par>
+                  <p:par>
+                    <p:cTn id="160" fill="hold">
+                      <p:stCondLst>
+                        <p:cond delay="indefinite"/>
+                      </p:stCondLst>
+                      <p:childTnLst>
+                        <p:par>
+                          <p:cTn id="161" fill="hold">
+                            <p:stCondLst>
+                              <p:cond delay="0"/>
+                            </p:stCondLst>
+                            <p:childTnLst>
+                              <p:par>
+                                <p:cTn id="162" presetID="10" presetClass="entr" presetSubtype="0" fill="hold" grpId="0" nodeType="afterEffect">
+                                  <p:stCondLst>
+                                    <p:cond delay="0"/>
+                                  </p:stCondLst>
+                                  <p:childTnLst>
+                                    <p:set>
+                                      <p:cBhvr>
+                                        <p:cTn id="163" dur="1" fill="hold"/>
+                                        <p:tgtEl>
+                                          <p:spTgt spid="21"/>
+                                        </p:tgtEl>
+                                        <p:attrNameLst>
+                                          <p:attrName>style.visibility</p:attrName>
+                                        </p:attrNameLst>
+                                      </p:cBhvr>
+                                      <p:to>
+                                        <p:strVal val="visible"/>
+                                      </p:to>
+                                    </p:set>
+                                    <p:animEffect transition="in" filter="fade">
+                                      <p:cBhvr>
+                                        <p:cTn id="164" dur="450"/>
+                                        <p:tgtEl>
+                                          <p:spTgt spid="21"/>
+                                        </p:tgtEl>
+                                      </p:cBhvr>
+                                    </p:animEffect>
+                                  </p:childTnLst>
+                                </p:cTn>
+                              </p:par>
+                            </p:childTnLst>
+                          </p:cTn>
+                        </p:par>
+                      </p:childTnLst>
+                    </p:cTn>
+                  </p:par>
                 </p:childTnLst>
               </p:cTn>
               <p:prevCondLst>
@@ -26554,6 +26348,212 @@
       </p:par>
     </p:tnLst>
   </p:timing>
+</p:sld>
+</file>
+
+<file path=ppt/slides/slide9.xml><?xml version="1.0" encoding="utf-8"?>
+<p:sld xmlns:a="http://schemas.openxmlformats.org/drawingml/2006/main" xmlns:p="http://schemas.openxmlformats.org/presentationml/2006/main" xmlns:r="http://schemas.openxmlformats.org/officeDocument/2006/relationships">
+  <p:cSld>
+    <p:spTree>
+      <p:nvGrpSpPr>
+        <p:cNvPr id="1" name=""/>
+        <p:cNvGrpSpPr/>
+        <p:nvPr/>
+      </p:nvGrpSpPr>
+      <p:grpSpPr/>
+      <p:sp>
+        <p:nvSpPr>
+          <p:cNvPr id="2" name="Rectangle 1"/>
+          <p:cNvSpPr/>
+          <p:nvPr/>
+        </p:nvSpPr>
+        <p:spPr>
+          <a:xfrm>
+            <a:off x="0" y="0"/>
+            <a:ext cx="12191695" cy="6858000"/>
+          </a:xfrm>
+          <a:prstGeom prst="rect">
+            <a:avLst/>
+          </a:prstGeom>
+          <a:solidFill>
+            <a:srgbClr val="0B0F17"/>
+          </a:solidFill>
+          <a:ln>
+            <a:noFill/>
+          </a:ln>
+          <a:effectLst/>
+        </p:spPr>
+        <p:style>
+          <a:lnRef idx="1">
+            <a:schemeClr val="accent1"/>
+          </a:lnRef>
+          <a:fillRef idx="3">
+            <a:schemeClr val="accent1"/>
+          </a:fillRef>
+          <a:effectRef idx="2">
+            <a:schemeClr val="accent1"/>
+          </a:effectRef>
+          <a:fontRef idx="minor">
+            <a:schemeClr val="lt1"/>
+          </a:fontRef>
+        </p:style>
+        <p:txBody>
+          <a:bodyPr rtlCol="0" anchor="ctr"/>
+          <a:lstStyle/>
+          <a:p>
+            <a:pPr algn="ctr"/>
+          </a:p>
+        </p:txBody>
+      </p:sp>
+      <p:sp>
+        <p:nvSpPr>
+          <p:cNvPr id="3" name="TextBox 2"/>
+          <p:cNvSpPr txBox="1"/>
+          <p:nvPr/>
+        </p:nvSpPr>
+        <p:spPr>
+          <a:xfrm>
+            <a:off x="731520" y="274320"/>
+            <a:ext cx="3657600" cy="274320"/>
+          </a:xfrm>
+          <a:prstGeom prst="rect">
+            <a:avLst/>
+          </a:prstGeom>
+          <a:noFill/>
+        </p:spPr>
+        <p:txBody>
+          <a:bodyPr wrap="square">
+            <a:spAutoFit/>
+          </a:bodyPr>
+          <a:lstStyle/>
+          <a:p>
+            <a:pPr algn="l">
+              <a:lnSpc>
+                <a:spcPct val="100000"/>
+              </a:lnSpc>
+            </a:pPr>
+            <a:r>
+              <a:rPr sz="1200" b="1">
+                <a:solidFill>
+                  <a:srgbClr val="22D3EE"/>
+                </a:solidFill>
+                <a:latin typeface="Helvetica Neue"/>
+              </a:rPr>
+              <a:t>ARCHITECTURE</a:t>
+            </a:r>
+          </a:p>
+        </p:txBody>
+      </p:sp>
+      <p:sp>
+        <p:nvSpPr>
+          <p:cNvPr id="4" name="TextBox 3"/>
+          <p:cNvSpPr txBox="1"/>
+          <p:nvPr/>
+        </p:nvSpPr>
+        <p:spPr>
+          <a:xfrm>
+            <a:off x="731520" y="566928"/>
+            <a:ext cx="10698480" cy="548640"/>
+          </a:xfrm>
+          <a:prstGeom prst="rect">
+            <a:avLst/>
+          </a:prstGeom>
+          <a:noFill/>
+        </p:spPr>
+        <p:txBody>
+          <a:bodyPr wrap="square">
+            <a:spAutoFit/>
+          </a:bodyPr>
+          <a:lstStyle/>
+          <a:p>
+            <a:pPr algn="l">
+              <a:lnSpc>
+                <a:spcPct val="100000"/>
+              </a:lnSpc>
+            </a:pPr>
+            <a:r>
+              <a:rPr sz="2600" b="1">
+                <a:solidFill>
+                  <a:srgbClr val="E8ECF3"/>
+                </a:solidFill>
+                <a:latin typeface="Helvetica Neue"/>
+              </a:rPr>
+              <a:t>What runs where — follow the numbers</a:t>
+            </a:r>
+          </a:p>
+        </p:txBody>
+      </p:sp>
+      <p:pic>
+        <p:nvPicPr>
+          <p:cNvPr id="5" name="Picture 4" descr="architecture.png"/>
+          <p:cNvPicPr>
+            <a:picLocks noChangeAspect="1"/>
+          </p:cNvPicPr>
+          <p:nvPr/>
+        </p:nvPicPr>
+        <p:blipFill>
+          <a:blip r:embed="rId2"/>
+          <a:stretch>
+            <a:fillRect/>
+          </a:stretch>
+        </p:blipFill>
+        <p:spPr>
+          <a:xfrm>
+            <a:off x="743431" y="1243584"/>
+            <a:ext cx="10704832" cy="5504688"/>
+          </a:xfrm>
+          <a:prstGeom prst="rect">
+            <a:avLst/>
+          </a:prstGeom>
+        </p:spPr>
+      </p:pic>
+      <p:sp>
+        <p:nvSpPr>
+          <p:cNvPr id="6" name="TextBox 5"/>
+          <p:cNvSpPr txBox="1"/>
+          <p:nvPr/>
+        </p:nvSpPr>
+        <p:spPr>
+          <a:xfrm>
+            <a:off x="11247120" y="6291072"/>
+            <a:ext cx="548640" cy="274320"/>
+          </a:xfrm>
+          <a:prstGeom prst="rect">
+            <a:avLst/>
+          </a:prstGeom>
+          <a:noFill/>
+        </p:spPr>
+        <p:txBody>
+          <a:bodyPr wrap="square">
+            <a:spAutoFit/>
+          </a:bodyPr>
+          <a:lstStyle/>
+          <a:p>
+            <a:pPr algn="r">
+              <a:lnSpc>
+                <a:spcPct val="120000"/>
+              </a:lnSpc>
+            </a:pPr>
+            <a:r>
+              <a:rPr sz="1100" b="0">
+                <a:solidFill>
+                  <a:srgbClr val="8B97AB"/>
+                </a:solidFill>
+                <a:latin typeface="Helvetica Neue"/>
+              </a:rPr>
+              <a:t>9</a:t>
+            </a:r>
+          </a:p>
+        </p:txBody>
+      </p:sp>
+    </p:spTree>
+  </p:cSld>
+  <p:clrMapOvr>
+    <a:masterClrMapping/>
+  </p:clrMapOvr>
+  <p:transition spd="med">
+    <p:wipe dir="l"/>
+  </p:transition>
 </p:sld>
 </file>
 
